--- a/docs/plans/endless-phase-0-v3.pptx
+++ b/docs/plans/endless-phase-0-v3.pptx
@@ -40,6 +40,12 @@
     <p:sldId id="285" r:id="rId36"/>
     <p:sldId id="291" r:id="rId42"/>
     <p:sldId id="286" r:id="rId37"/>
+    <p:sldId id="292" r:id="rId43"/>
+    <p:sldId id="293" r:id="rId44"/>
+    <p:sldId id="294" r:id="rId45"/>
+    <p:sldId id="295" r:id="rId46"/>
+    <p:sldId id="296" r:id="rId47"/>
+    <p:sldId id="297" r:id="rId48"/>
     <p:sldId id="287" r:id="rId38"/>
   </p:sldIdLst>
   <p:sldSz cx="12191695" cy="6858000" type="screen4x3"/>
@@ -5339,7 +5345,7 @@
                 </a:solidFill>
                 <a:latin typeface="Segoe UI"/>
               </a:rPr>
-              <a:t>vector snapshots, warm start</a:t>
+              <a:t>REMOVED — see Part five</a:t>
             </a:r>
           </a:p>
         </p:txBody>
@@ -9038,7 +9044,7 @@
                 </a:solidFill>
                 <a:latin typeface="Consolas"/>
               </a:rPr>
-              <a:t>  infra/         CDK app</a:t>
+              <a:t>  infra/         Terraform root</a:t>
             </a:r>
           </a:p>
           <a:p>
@@ -9306,7 +9312,7 @@
                 </a:solidFill>
                 <a:latin typeface="Segoe UI"/>
               </a:rPr>
-              <a:t>The CDK stack</a:t>
+              <a:t>The Terraform stack</a:t>
             </a:r>
           </a:p>
         </p:txBody>
@@ -9512,7 +9518,7 @@
                 </a:solidFill>
                 <a:latin typeface="Consolas"/>
               </a:rPr>
-              <a:t>$ npm i -g aws-cdk</a:t>
+              <a:t>$ # terraform 1.15 — the binary is the only install</a:t>
             </a:r>
           </a:p>
           <a:p>
@@ -9531,7 +9537,7 @@
                 </a:solidFill>
                 <a:latin typeface="Consolas"/>
               </a:rPr>
-              <a:t>$ cd infra &amp;&amp; cdk init app --language typescript</a:t>
+              <a:t>$ cd infra</a:t>
             </a:r>
           </a:p>
           <a:p>
@@ -9550,7 +9556,7 @@
                 </a:solidFill>
                 <a:latin typeface="Consolas"/>
               </a:rPr>
-              <a:t>$ cdk bootstrap aws://&lt;account-id&gt;/us-east-1</a:t>
+              <a:t>$ terraform init    # S3 backend, use_lockfile</a:t>
             </a:r>
           </a:p>
           <a:p>
@@ -9569,7 +9575,7 @@
                 </a:solidFill>
                 <a:latin typeface="Consolas"/>
               </a:rPr>
-              <a:t>$ cdk deploy</a:t>
+              <a:t>$ terraform apply</a:t>
             </a:r>
           </a:p>
         </p:txBody>
@@ -9639,7 +9645,7 @@
                 </a:solidFill>
                 <a:latin typeface="Segoe UI"/>
               </a:rPr>
-              <a:t>Why everything lives in CDK.</a:t>
+              <a:t>Why everything lives in Terraform.</a:t>
             </a:r>
             <a:r>
               <a:rPr sz="1400">
@@ -12718,7 +12724,7 @@
                           </a:solidFill>
                           <a:latin typeface="Segoe UI"/>
                         </a:rPr>
-                        <a:t>cdk deploy</a:t>
+                        <a:t>terraform apply</a:t>
                       </a:r>
                     </a:p>
                   </a:txBody>
@@ -13428,7 +13434,7 @@
                 </a:solidFill>
                 <a:latin typeface="Segoe UI"/>
               </a:rPr>
-              <a:t>One correction worth knowing before you write the CDK.</a:t>
+              <a:t>One correction worth knowing before you write the Terraform.</a:t>
             </a:r>
           </a:p>
         </p:txBody>
@@ -13867,7 +13873,7 @@
                           </a:solidFill>
                           <a:latin typeface="Segoe UI"/>
                         </a:rPr>
-                        <a:t>a few MB of snapshots</a:t>
+                        <a:t>removed, unused</a:t>
                       </a:r>
                     </a:p>
                   </a:txBody>
@@ -14826,7 +14832,7 @@
                           </a:solidFill>
                           <a:latin typeface="Segoe UI"/>
                         </a:rPr>
-                        <a:t>CDK stack: tables, IAM, billing alarm</a:t>
+                        <a:t>Terraform: tables, IAM, billing alarm</a:t>
                       </a:r>
                     </a:p>
                   </a:txBody>
@@ -16168,7 +16174,7 @@
                 </a:solidFill>
                 <a:latin typeface="Segoe UI"/>
               </a:rPr>
-              <a:t>#3 CDK</a:t>
+              <a:t>#3 Terraform</a:t>
             </a:r>
           </a:p>
         </p:txBody>
@@ -16756,7 +16762,7 @@
                 </a:solidFill>
                 <a:latin typeface="Segoe UI"/>
               </a:rPr>
-              <a:t>THE GATE</a:t>
+              <a:t>THE INSTRUMENT</a:t>
             </a:r>
           </a:p>
         </p:txBody>
@@ -16795,7 +16801,7 @@
                 </a:solidFill>
                 <a:latin typeface="Segoe UI"/>
               </a:rPr>
-              <a:t>Two floors, four numbers, one gate</a:t>
+              <a:t>Writing the eval set without contaminating it</a:t>
             </a:r>
           </a:p>
         </p:txBody>
@@ -16853,7 +16859,7 @@
         <p:spPr>
           <a:xfrm>
             <a:off x="777240" y="1783080"/>
-            <a:ext cx="10515600" cy="2560320"/>
+            <a:ext cx="10515600" cy="4023360"/>
           </a:xfrm>
           <a:prstGeom prst="rect">
             <a:avLst/>
@@ -16871,26 +16877,26 @@
                 <a:spcPct val="115000"/>
               </a:lnSpc>
               <a:spcAft>
-                <a:spcPts val="1000"/>
+                <a:spcPts val="1100"/>
               </a:spcAft>
             </a:pPr>
             <a:r>
-              <a:rPr sz="1500" b="1">
+              <a:rPr sz="1400" b="1">
                 <a:solidFill>
                   <a:srgbClr val="0F172A"/>
                 </a:solidFill>
                 <a:latin typeface="Segoe UI"/>
               </a:rPr>
-              <a:t>50+ queries, written blind.</a:t>
-            </a:r>
-            <a:r>
-              <a:rPr sz="1500">
+              <a:t>The trap is ordering.</a:t>
+            </a:r>
+            <a:r>
+              <a:rPr sz="1400">
                 <a:solidFill>
                   <a:srgbClr val="475569"/>
                 </a:solidFill>
                 <a:latin typeface="Segoe UI"/>
               </a:rPr>
-              <a:t>  Authored before seeding and frozen, then labelled with the tool that should win.</a:t>
+              <a:t>  Write twenty descriptions, then write queries to test them, and the queries come out phrased the way the descriptions were phrased. Recall looks excellent and has measured your own vocabulary.</a:t>
             </a:r>
           </a:p>
           <a:p>
@@ -16899,26 +16905,26 @@
                 <a:spcPct val="115000"/>
               </a:lnSpc>
               <a:spcAft>
-                <a:spcPts val="1000"/>
+                <a:spcPts val="1100"/>
               </a:spcAft>
             </a:pPr>
             <a:r>
-              <a:rPr sz="1500" b="1">
+              <a:rPr sz="1400" b="1">
                 <a:solidFill>
                   <a:srgbClr val="0F172A"/>
                 </a:solidFill>
                 <a:latin typeface="Segoe UI"/>
               </a:rPr>
-              <a:t>About 15 with no correct answer.</a:t>
-            </a:r>
-            <a:r>
-              <a:rPr sz="1500">
+              <a:t>So write the queries first.</a:t>
+            </a:r>
+            <a:r>
+              <a:rPr sz="1400">
                 <a:solidFill>
                   <a:srgbClr val="475569"/>
                 </a:solidFill>
                 <a:latin typeface="Segoe UI"/>
               </a:rPr>
-              <a:t>  Genuine gaps, known in advance. Without them the harness cannot measure whether real gaps are detected at all.</a:t>
+              <a:t>  All 50+ authored before a single tool is seeded, from the task side — what an agent needs mid-task, not what a tool is called.</a:t>
             </a:r>
           </a:p>
           <a:p>
@@ -16927,26 +16933,26 @@
                 <a:spcPct val="115000"/>
               </a:lnSpc>
               <a:spcAft>
-                <a:spcPts val="1000"/>
+                <a:spcPts val="1100"/>
               </a:spcAft>
             </a:pPr>
             <a:r>
-              <a:rPr sz="1500" b="1">
+              <a:rPr sz="1400" b="1">
                 <a:solidFill>
                   <a:srgbClr val="0F172A"/>
                 </a:solidFill>
                 <a:latin typeface="Segoe UI"/>
               </a:rPr>
-              <a:t>Four numbers reported.</a:t>
-            </a:r>
-            <a:r>
-              <a:rPr sz="1500">
+              <a:t>Draft them with a different model.</a:t>
+            </a:r>
+            <a:r>
+              <a:rPr sz="1400">
                 <a:solidFill>
                   <a:srgbClr val="475569"/>
                 </a:solidFill>
                 <a:latin typeface="Segoe UI"/>
               </a:rPr>
-              <a:t>  recall@1 and recall@3; the false-gap rate — gaps logged where a correct tool existed; and the gap-detection rate — how many of the known-unanswerable queries actually logged as gaps.</a:t>
+              <a:t>  Generating candidates with a non-Amazon model keeps the query vocabulary independent of the model that will embed both sides.</a:t>
             </a:r>
           </a:p>
           <a:p>
@@ -16955,109 +16961,54 @@
                 <a:spcPct val="115000"/>
               </a:lnSpc>
               <a:spcAft>
-                <a:spcPts val="1000"/>
+                <a:spcPts val="1100"/>
               </a:spcAft>
             </a:pPr>
             <a:r>
-              <a:rPr sz="1500" b="1">
+              <a:rPr sz="1400" b="1">
                 <a:solidFill>
                   <a:srgbClr val="0F172A"/>
                 </a:solidFill>
                 <a:latin typeface="Segoe UI"/>
               </a:rPr>
-              <a:t>The gate.</a:t>
-            </a:r>
-            <a:r>
-              <a:rPr sz="1500">
+              <a:t>Freeze the set before seeding.</a:t>
+            </a:r>
+            <a:r>
+              <a:rPr sz="1400">
                 <a:solidFill>
                   <a:srgbClr val="475569"/>
                 </a:solidFill>
                 <a:latin typeface="Segoe UI"/>
               </a:rPr>
-              <a:t>  recall@3 of 0.9 and gap detection of 0.8. Below either, no gap is treated as evidence. All four numbers go in the findings regardless.</a:t>
-            </a:r>
-          </a:p>
-        </p:txBody>
-      </p:sp>
-      <p:sp>
-        <p:nvSpPr>
-          <p:cNvPr id="6" name="Rounded Rectangle 5"/>
-          <p:cNvSpPr/>
-          <p:nvPr/>
-        </p:nvSpPr>
-        <p:spPr>
-          <a:xfrm>
-            <a:off x="777240" y="5029200"/>
-            <a:ext cx="10515600" cy="1051560"/>
-          </a:xfrm>
-          <a:prstGeom prst="roundRect">
-            <a:avLst/>
-          </a:prstGeom>
-          <a:solidFill>
-            <a:srgbClr val="FEF2F2"/>
-          </a:solidFill>
-          <a:ln w="15875">
-            <a:solidFill>
-              <a:srgbClr val="DD344C"/>
-            </a:solidFill>
-          </a:ln>
-          <a:effectLst/>
-        </p:spPr>
-        <p:style>
-          <a:lnRef idx="1">
-            <a:schemeClr val="accent1"/>
-          </a:lnRef>
-          <a:fillRef idx="3">
-            <a:schemeClr val="accent1"/>
-          </a:fillRef>
-          <a:effectRef idx="2">
-            <a:schemeClr val="accent1"/>
-          </a:effectRef>
-          <a:fontRef idx="minor">
-            <a:schemeClr val="lt1"/>
-          </a:fontRef>
-        </p:style>
-        <p:txBody>
-          <a:bodyPr rtlCol="0" anchor="ctr"/>
-          <a:lstStyle/>
-          <a:p/>
-        </p:txBody>
-      </p:sp>
-      <p:sp>
-        <p:nvSpPr>
-          <p:cNvPr id="7" name="TextBox 6"/>
-          <p:cNvSpPr txBox="1"/>
-          <p:nvPr/>
-        </p:nvSpPr>
-        <p:spPr>
-          <a:xfrm>
-            <a:off x="1051560" y="5212080"/>
-            <a:ext cx="9966960" cy="777239"/>
-          </a:xfrm>
-          <a:prstGeom prst="rect">
-            <a:avLst/>
-          </a:prstGeom>
-          <a:noFill/>
-        </p:spPr>
-        <p:txBody>
-          <a:bodyPr wrap="square" lIns="0" rIns="0" tIns="0" bIns="0">
-            <a:spAutoFit/>
-          </a:bodyPr>
-          <a:lstStyle/>
-          <a:p>
-            <a:pPr algn="l">
+              <a:t>  Once tools exist the set is closed. Editing a query after watching it fail turns the harness into a mirror.</a:t>
+            </a:r>
+          </a:p>
+          <a:p>
+            <a:pPr>
               <a:lnSpc>
                 <a:spcPct val="115000"/>
               </a:lnSpc>
+              <a:spcAft>
+                <a:spcPts val="1100"/>
+              </a:spcAft>
             </a:pPr>
             <a:r>
               <a:rPr sz="1400" b="1">
                 <a:solidFill>
-                  <a:srgbClr val="991B1B"/>
-                </a:solidFill>
-                <a:latin typeface="Segoe UI"/>
-              </a:rPr>
-              <a:t>Recall@3 over twenty tools is a low bar — the top three are fifteen percent of the corpus. It is a floor for proceeding, never a claim of quality, and nothing here tests whether detection survives density.</a:t>
+                  <a:srgbClr val="0F172A"/>
+                </a:solidFill>
+                <a:latin typeface="Segoe UI"/>
+              </a:rPr>
+              <a:t>Label after freezing, not during.</a:t>
+            </a:r>
+            <a:r>
+              <a:rPr sz="1400">
+                <a:solidFill>
+                  <a:srgbClr val="475569"/>
+                </a:solidFill>
+                <a:latin typeface="Segoe UI"/>
+              </a:rPr>
+              <a:t>  Deciding which tool should win happens once the seeded set exists — the queries themselves never change at that point.</a:t>
             </a:r>
           </a:p>
         </p:txBody>
@@ -17458,7 +17409,7 @@
                 </a:solidFill>
                 <a:latin typeface="Segoe UI"/>
               </a:rPr>
-              <a:t>RISKS</a:t>
+              <a:t>THE GATE</a:t>
             </a:r>
           </a:p>
         </p:txBody>
@@ -17497,7 +17448,7 @@
                 </a:solidFill>
                 <a:latin typeface="Segoe UI"/>
               </a:rPr>
-              <a:t>What could make this phase produce noise</a:t>
+              <a:t>Two floors, four numbers, one gate</a:t>
             </a:r>
           </a:p>
         </p:txBody>
@@ -17555,7 +17506,7 @@
         <p:spPr>
           <a:xfrm>
             <a:off x="777240" y="1783080"/>
-            <a:ext cx="10515600" cy="4023360"/>
+            <a:ext cx="10515600" cy="2560320"/>
           </a:xfrm>
           <a:prstGeom prst="rect">
             <a:avLst/>
@@ -17573,26 +17524,26 @@
                 <a:spcPct val="115000"/>
               </a:lnSpc>
               <a:spcAft>
-                <a:spcPts val="900"/>
+                <a:spcPts val="1000"/>
               </a:spcAft>
             </a:pPr>
             <a:r>
-              <a:rPr sz="1300" b="1">
+              <a:rPr sz="1500" b="1">
                 <a:solidFill>
                   <a:srgbClr val="0F172A"/>
                 </a:solidFill>
                 <a:latin typeface="Segoe UI"/>
               </a:rPr>
-              <a:t>The eval set can end up measuring you.</a:t>
-            </a:r>
-            <a:r>
-              <a:rPr sz="1300">
+              <a:t>50+ queries, written blind.</a:t>
+            </a:r>
+            <a:r>
+              <a:rPr sz="1500">
                 <a:solidFill>
                   <a:srgbClr val="475569"/>
                 </a:solidFill>
                 <a:latin typeface="Segoe UI"/>
               </a:rPr>
-              <a:t>  Queries written after the descriptions inherit their vocabulary. Writing blind and freezing the set is the mitigation, and it is the cheapest correction in the phase.</a:t>
+              <a:t>  Authored before seeding and frozen, then labelled with the tool that should win.</a:t>
             </a:r>
           </a:p>
           <a:p>
@@ -17601,26 +17552,26 @@
                 <a:spcPct val="115000"/>
               </a:lnSpc>
               <a:spcAft>
-                <a:spcPts val="900"/>
+                <a:spcPts val="1000"/>
               </a:spcAft>
             </a:pPr>
             <a:r>
-              <a:rPr sz="1300" b="1">
+              <a:rPr sz="1500" b="1">
                 <a:solidFill>
                   <a:srgbClr val="0F172A"/>
                 </a:solidFill>
                 <a:latin typeface="Segoe UI"/>
               </a:rPr>
-              <a:t>Tool descriptions set the ceiling.</a:t>
-            </a:r>
-            <a:r>
-              <a:rPr sz="1300">
+              <a:t>About 15 with no correct answer.</a:t>
+            </a:r>
+            <a:r>
+              <a:rPr sz="1500">
                 <a:solidFill>
                   <a:srgbClr val="475569"/>
                 </a:solidFill>
                 <a:latin typeface="Segoe UI"/>
               </a:rPr>
-              <a:t>  Twenty carelessly written descriptions produce bad recall and a gap log full of false gaps.</a:t>
+              <a:t>  Genuine gaps, known in advance. Without them the harness cannot measure whether real gaps are detected at all.</a:t>
             </a:r>
           </a:p>
           <a:p>
@@ -17629,26 +17580,26 @@
                 <a:spcPct val="115000"/>
               </a:lnSpc>
               <a:spcAft>
-                <a:spcPts val="900"/>
+                <a:spcPts val="1000"/>
               </a:spcAft>
             </a:pPr>
             <a:r>
-              <a:rPr sz="1300" b="1">
+              <a:rPr sz="1500" b="1">
                 <a:solidFill>
                   <a:srgbClr val="0F172A"/>
                 </a:solidFill>
                 <a:latin typeface="Segoe UI"/>
               </a:rPr>
-              <a:t>Twenty tools cannot test density.</a:t>
-            </a:r>
-            <a:r>
-              <a:rPr sz="1300">
+              <a:t>Four numbers reported.</a:t>
+            </a:r>
+            <a:r>
+              <a:rPr sz="1500">
                 <a:solidFill>
                   <a:srgbClr val="475569"/>
                 </a:solidFill>
                 <a:latin typeface="Segoe UI"/>
               </a:rPr>
-              <a:t>  Whatever the gate says, it says nothing about whether detection still works at two thousand tools. That risk carries forward into Phase 1 unmeasured.</a:t>
+              <a:t>  recall@1 and recall@3; the false-gap rate — gaps logged where a correct tool existed; and the gap-detection rate — how many of the known-unanswerable queries actually logged as gaps.</a:t>
             </a:r>
           </a:p>
           <a:p>
@@ -17657,82 +17608,109 @@
                 <a:spcPct val="115000"/>
               </a:lnSpc>
               <a:spcAft>
-                <a:spcPts val="900"/>
+                <a:spcPts val="1000"/>
               </a:spcAft>
             </a:pPr>
             <a:r>
-              <a:rPr sz="1300" b="1">
+              <a:rPr sz="1500" b="1">
                 <a:solidFill>
                   <a:srgbClr val="0F172A"/>
                 </a:solidFill>
                 <a:latin typeface="Segoe UI"/>
               </a:rPr>
-              <a:t>Region drift.</a:t>
-            </a:r>
-            <a:r>
-              <a:rPr sz="1300">
+              <a:t>The gate.</a:t>
+            </a:r>
+            <a:r>
+              <a:rPr sz="1500">
                 <a:solidFill>
                   <a:srgbClr val="475569"/>
                 </a:solidFill>
                 <a:latin typeface="Segoe UI"/>
               </a:rPr>
-              <a:t>  Bedrock in one region and tables in another is the most common way a weekend disappears.</a:t>
-            </a:r>
-          </a:p>
-          <a:p>
-            <a:pPr>
+              <a:t>  recall@3 of 0.9 and gap detection of 0.8. Below either, no gap is treated as evidence. All four numbers go in the findings regardless.</a:t>
+            </a:r>
+          </a:p>
+        </p:txBody>
+      </p:sp>
+      <p:sp>
+        <p:nvSpPr>
+          <p:cNvPr id="6" name="Rounded Rectangle 5"/>
+          <p:cNvSpPr/>
+          <p:nvPr/>
+        </p:nvSpPr>
+        <p:spPr>
+          <a:xfrm>
+            <a:off x="777240" y="5029200"/>
+            <a:ext cx="10515600" cy="1051560"/>
+          </a:xfrm>
+          <a:prstGeom prst="roundRect">
+            <a:avLst/>
+          </a:prstGeom>
+          <a:solidFill>
+            <a:srgbClr val="FEF2F2"/>
+          </a:solidFill>
+          <a:ln w="15875">
+            <a:solidFill>
+              <a:srgbClr val="DD344C"/>
+            </a:solidFill>
+          </a:ln>
+          <a:effectLst/>
+        </p:spPr>
+        <p:style>
+          <a:lnRef idx="1">
+            <a:schemeClr val="accent1"/>
+          </a:lnRef>
+          <a:fillRef idx="3">
+            <a:schemeClr val="accent1"/>
+          </a:fillRef>
+          <a:effectRef idx="2">
+            <a:schemeClr val="accent1"/>
+          </a:effectRef>
+          <a:fontRef idx="minor">
+            <a:schemeClr val="lt1"/>
+          </a:fontRef>
+        </p:style>
+        <p:txBody>
+          <a:bodyPr rtlCol="0" anchor="ctr"/>
+          <a:lstStyle/>
+          <a:p/>
+        </p:txBody>
+      </p:sp>
+      <p:sp>
+        <p:nvSpPr>
+          <p:cNvPr id="7" name="TextBox 6"/>
+          <p:cNvSpPr txBox="1"/>
+          <p:nvPr/>
+        </p:nvSpPr>
+        <p:spPr>
+          <a:xfrm>
+            <a:off x="1051560" y="5212080"/>
+            <a:ext cx="9966960" cy="777239"/>
+          </a:xfrm>
+          <a:prstGeom prst="rect">
+            <a:avLst/>
+          </a:prstGeom>
+          <a:noFill/>
+        </p:spPr>
+        <p:txBody>
+          <a:bodyPr wrap="square" lIns="0" rIns="0" tIns="0" bIns="0">
+            <a:spAutoFit/>
+          </a:bodyPr>
+          <a:lstStyle/>
+          <a:p>
+            <a:pPr algn="l">
               <a:lnSpc>
                 <a:spcPct val="115000"/>
               </a:lnSpc>
-              <a:spcAft>
-                <a:spcPts val="900"/>
-              </a:spcAft>
-            </a:pPr>
-            <a:r>
-              <a:rPr sz="1300" b="1">
-                <a:solidFill>
-                  <a:srgbClr val="0F172A"/>
-                </a:solidFill>
-                <a:latin typeface="Segoe UI"/>
-              </a:rPr>
-              <a:t>Cold start is not a technical problem.</a:t>
-            </a:r>
-            <a:r>
-              <a:rPr sz="1300">
-                <a:solidFill>
-                  <a:srgbClr val="475569"/>
-                </a:solidFill>
-                <a:latin typeface="Segoe UI"/>
-              </a:rPr>
-              <a:t>  No agents without tools, no tools without agent traffic. Seeding is the mitigation; the gaps board is a product on its own.</a:t>
-            </a:r>
-          </a:p>
-          <a:p>
-            <a:pPr>
-              <a:lnSpc>
-                <a:spcPct val="115000"/>
-              </a:lnSpc>
-              <a:spcAft>
-                <a:spcPts val="900"/>
-              </a:spcAft>
-            </a:pPr>
-            <a:r>
-              <a:rPr sz="1300" b="1">
-                <a:solidFill>
-                  <a:srgbClr val="0F172A"/>
-                </a:solidFill>
-                <a:latin typeface="Segoe UI"/>
-              </a:rPr>
-              <a:t>The account clock.</a:t>
-            </a:r>
-            <a:r>
-              <a:rPr sz="1300">
-                <a:solidFill>
-                  <a:srgbClr val="475569"/>
-                </a:solidFill>
-                <a:latin typeface="Segoe UI"/>
-              </a:rPr>
-              <a:t>  Free Plan credits run out and the plan lapses. Everything lives in CDK so a rebuild is one command.</a:t>
+            </a:pPr>
+            <a:r>
+              <a:rPr sz="1400" b="1">
+                <a:solidFill>
+                  <a:srgbClr val="991B1B"/>
+                </a:solidFill>
+                <a:latin typeface="Segoe UI"/>
+              </a:rPr>
+              <a:t>Recall@3 over twenty tools is a low bar — the top three are fifteen percent of the corpus. It is a floor for proceeding, never a claim of quality, and nothing here tests whether detection survives density.</a:t>
             </a:r>
           </a:p>
         </p:txBody>
@@ -17797,7 +17775,7 @@
                 </a:solidFill>
                 <a:latin typeface="Segoe UI"/>
               </a:rPr>
-              <a:t>OPEN</a:t>
+              <a:t>THRESHOLD T</a:t>
             </a:r>
           </a:p>
         </p:txBody>
@@ -17836,7 +17814,7 @@
                 </a:solidFill>
                 <a:latin typeface="Segoe UI"/>
               </a:rPr>
-              <a:t>Nine assumptions to confirm or overrule</a:t>
+              <a:t>T is an output of Phase 0, not an input</a:t>
             </a:r>
           </a:p>
         </p:txBody>
@@ -17894,7 +17872,7 @@
         <p:spPr>
           <a:xfrm>
             <a:off x="777240" y="1783080"/>
-            <a:ext cx="10424160" cy="457200"/>
+            <a:ext cx="10515600" cy="4023360"/>
           </a:xfrm>
           <a:prstGeom prst="rect">
             <a:avLst/>
@@ -17907,730 +17885,147 @@
           </a:bodyPr>
           <a:lstStyle/>
           <a:p>
-            <a:pPr algn="l">
-              <a:lnSpc>
-                <a:spcPct val="100000"/>
-              </a:lnSpc>
-            </a:pPr>
-            <a:r>
-              <a:rPr sz="1500" b="0">
+            <a:pPr>
+              <a:lnSpc>
+                <a:spcPct val="115000"/>
+              </a:lnSpc>
+              <a:spcAft>
+                <a:spcPts val="1100"/>
+              </a:spcAft>
+            </a:pPr>
+            <a:r>
+              <a:rPr sz="1400" b="1">
+                <a:solidFill>
+                  <a:srgbClr val="0F172A"/>
+                </a:solidFill>
+                <a:latin typeface="Segoe UI"/>
+              </a:rPr>
+              <a:t>Right now T is a guess.</a:t>
+            </a:r>
+            <a:r>
+              <a:rPr sz="1400">
                 <a:solidFill>
                   <a:srgbClr val="475569"/>
                 </a:solidFill>
                 <a:latin typeface="Segoe UI"/>
               </a:rPr>
-              <a:t>None of these were specified in PROJECT.md or CLAUDE.md.</a:t>
-            </a:r>
-          </a:p>
-        </p:txBody>
-      </p:sp>
-      <p:graphicFrame>
-        <p:nvGraphicFramePr>
-          <p:cNvPr id="6" name="Table 5"/>
-          <p:cNvGraphicFramePr>
-            <a:graphicFrameLocks noGrp="1"/>
-          </p:cNvGraphicFramePr>
-          <p:nvPr/>
-        </p:nvGraphicFramePr>
-        <p:xfrm>
-          <a:off x="777240" y="2350008"/>
-          <a:ext cx="10515600" cy="2651760"/>
-        </p:xfrm>
-        <a:graphic>
-          <a:graphicData uri="http://schemas.openxmlformats.org/drawingml/2006/table">
-            <a:tbl>
-              <a:tblPr firstRow="1" bandRow="1">
-                <a:tableStyleId>{5C22544A-7EE6-4342-B048-85BDC9FD1C3A}</a:tableStyleId>
-              </a:tblPr>
-              <a:tblGrid>
-                <a:gridCol w="2011680"/>
-                <a:gridCol w="3200400"/>
-                <a:gridCol w="5303520"/>
-              </a:tblGrid>
-              <a:tr h="294640">
-                <a:tc>
-                  <a:txBody>
-                    <a:bodyPr/>
-                    <a:lstStyle/>
-                    <a:p>
-                      <a:r>
-                        <a:rPr sz="1100" b="1">
-                          <a:solidFill>
-                            <a:srgbClr val="FFFFFF"/>
-                          </a:solidFill>
-                          <a:latin typeface="Segoe UI"/>
-                        </a:rPr>
-                        <a:t>Decision</a:t>
-                      </a:r>
-                    </a:p>
-                  </a:txBody>
-                  <a:tcPr>
-                    <a:solidFill>
-                      <a:srgbClr val="0F172A"/>
-                    </a:solidFill>
-                  </a:tcPr>
-                </a:tc>
-                <a:tc>
-                  <a:txBody>
-                    <a:bodyPr/>
-                    <a:lstStyle/>
-                    <a:p>
-                      <a:r>
-                        <a:rPr sz="1100" b="1">
-                          <a:solidFill>
-                            <a:srgbClr val="FFFFFF"/>
-                          </a:solidFill>
-                          <a:latin typeface="Segoe UI"/>
-                        </a:rPr>
-                        <a:t>Assumed</a:t>
-                      </a:r>
-                    </a:p>
-                  </a:txBody>
-                  <a:tcPr>
-                    <a:solidFill>
-                      <a:srgbClr val="0F172A"/>
-                    </a:solidFill>
-                  </a:tcPr>
-                </a:tc>
-                <a:tc>
-                  <a:txBody>
-                    <a:bodyPr/>
-                    <a:lstStyle/>
-                    <a:p>
-                      <a:r>
-                        <a:rPr sz="1100" b="1">
-                          <a:solidFill>
-                            <a:srgbClr val="FFFFFF"/>
-                          </a:solidFill>
-                          <a:latin typeface="Segoe UI"/>
-                        </a:rPr>
-                        <a:t>Why</a:t>
-                      </a:r>
-                    </a:p>
-                  </a:txBody>
-                  <a:tcPr>
-                    <a:solidFill>
-                      <a:srgbClr val="0F172A"/>
-                    </a:solidFill>
-                  </a:tcPr>
-                </a:tc>
-              </a:tr>
-              <a:tr h="294640">
-                <a:tc>
-                  <a:txBody>
-                    <a:bodyPr/>
-                    <a:lstStyle/>
-                    <a:p>
-                      <a:r>
-                        <a:rPr sz="1100">
-                          <a:solidFill>
-                            <a:srgbClr val="475569"/>
-                          </a:solidFill>
-                          <a:latin typeface="Segoe UI"/>
-                        </a:rPr>
-                        <a:t>Language</a:t>
-                      </a:r>
-                    </a:p>
-                  </a:txBody>
-                  <a:tcPr>
-                    <a:solidFill>
-                      <a:srgbClr val="FFFFFF"/>
-                    </a:solidFill>
-                  </a:tcPr>
-                </a:tc>
-                <a:tc>
-                  <a:txBody>
-                    <a:bodyPr/>
-                    <a:lstStyle/>
-                    <a:p>
-                      <a:r>
-                        <a:rPr sz="1100">
-                          <a:solidFill>
-                            <a:srgbClr val="475569"/>
-                          </a:solidFill>
-                          <a:latin typeface="Segoe UI"/>
-                        </a:rPr>
-                        <a:t>TypeScript / Node 20</a:t>
-                      </a:r>
-                    </a:p>
-                  </a:txBody>
-                  <a:tcPr>
-                    <a:solidFill>
-                      <a:srgbClr val="FFFFFF"/>
-                    </a:solidFill>
-                  </a:tcPr>
-                </a:tc>
-                <a:tc>
-                  <a:txBody>
-                    <a:bodyPr/>
-                    <a:lstStyle/>
-                    <a:p>
-                      <a:r>
-                        <a:rPr sz="1100">
-                          <a:solidFill>
-                            <a:srgbClr val="475569"/>
-                          </a:solidFill>
-                          <a:latin typeface="Segoe UI"/>
-                        </a:rPr>
-                        <a:t>CLAUDE.md defines a tool as an MCP server</a:t>
-                      </a:r>
-                    </a:p>
-                  </a:txBody>
-                  <a:tcPr>
-                    <a:solidFill>
-                      <a:srgbClr val="FFFFFF"/>
-                    </a:solidFill>
-                  </a:tcPr>
-                </a:tc>
-              </a:tr>
-              <a:tr h="294640">
-                <a:tc>
-                  <a:txBody>
-                    <a:bodyPr/>
-                    <a:lstStyle/>
-                    <a:p>
-                      <a:r>
-                        <a:rPr sz="1100">
-                          <a:solidFill>
-                            <a:srgbClr val="475569"/>
-                          </a:solidFill>
-                          <a:latin typeface="Segoe UI"/>
-                        </a:rPr>
-                        <a:t>Compute</a:t>
-                      </a:r>
-                    </a:p>
-                  </a:txBody>
-                  <a:tcPr>
-                    <a:solidFill>
-                      <a:srgbClr val="F8FAFC"/>
-                    </a:solidFill>
-                  </a:tcPr>
-                </a:tc>
-                <a:tc>
-                  <a:txBody>
-                    <a:bodyPr/>
-                    <a:lstStyle/>
-                    <a:p>
-                      <a:r>
-                        <a:rPr sz="1100">
-                          <a:solidFill>
-                            <a:srgbClr val="475569"/>
-                          </a:solidFill>
-                          <a:latin typeface="Segoe UI"/>
-                        </a:rPr>
-                        <a:t>Lambda + Function URLs</a:t>
-                      </a:r>
-                    </a:p>
-                  </a:txBody>
-                  <a:tcPr>
-                    <a:solidFill>
-                      <a:srgbClr val="F8FAFC"/>
-                    </a:solidFill>
-                  </a:tcPr>
-                </a:tc>
-                <a:tc>
-                  <a:txBody>
-                    <a:bodyPr/>
-                    <a:lstStyle/>
-                    <a:p>
-                      <a:r>
-                        <a:rPr sz="1100">
-                          <a:solidFill>
-                            <a:srgbClr val="475569"/>
-                          </a:solidFill>
-                          <a:latin typeface="Segoe UI"/>
-                        </a:rPr>
-                        <a:t>Always free; skips API Gateway</a:t>
-                      </a:r>
-                    </a:p>
-                  </a:txBody>
-                  <a:tcPr>
-                    <a:solidFill>
-                      <a:srgbClr val="F8FAFC"/>
-                    </a:solidFill>
-                  </a:tcPr>
-                </a:tc>
-              </a:tr>
-              <a:tr h="294640">
-                <a:tc>
-                  <a:txBody>
-                    <a:bodyPr/>
-                    <a:lstStyle/>
-                    <a:p>
-                      <a:r>
-                        <a:rPr sz="1100">
-                          <a:solidFill>
-                            <a:srgbClr val="475569"/>
-                          </a:solidFill>
-                          <a:latin typeface="Segoe UI"/>
-                        </a:rPr>
-                        <a:t>Store</a:t>
-                      </a:r>
-                    </a:p>
-                  </a:txBody>
-                  <a:tcPr>
-                    <a:solidFill>
-                      <a:srgbClr val="FFFFFF"/>
-                    </a:solidFill>
-                  </a:tcPr>
-                </a:tc>
-                <a:tc>
-                  <a:txBody>
-                    <a:bodyPr/>
-                    <a:lstStyle/>
-                    <a:p>
-                      <a:r>
-                        <a:rPr sz="1100">
-                          <a:solidFill>
-                            <a:srgbClr val="475569"/>
-                          </a:solidFill>
-                          <a:latin typeface="Segoe UI"/>
-                        </a:rPr>
-                        <a:t>DynamoDB, provisioned</a:t>
-                      </a:r>
-                    </a:p>
-                  </a:txBody>
-                  <a:tcPr>
-                    <a:solidFill>
-                      <a:srgbClr val="FFFFFF"/>
-                    </a:solidFill>
-                  </a:tcPr>
-                </a:tc>
-                <a:tc>
-                  <a:txBody>
-                    <a:bodyPr/>
-                    <a:lstStyle/>
-                    <a:p>
-                      <a:r>
-                        <a:rPr sz="1100">
-                          <a:solidFill>
-                            <a:srgbClr val="475569"/>
-                          </a:solidFill>
-                          <a:latin typeface="Segoe UI"/>
-                        </a:rPr>
-                        <a:t>Always free at 25 GB and 25/25</a:t>
-                      </a:r>
-                    </a:p>
-                  </a:txBody>
-                  <a:tcPr>
-                    <a:solidFill>
-                      <a:srgbClr val="FFFFFF"/>
-                    </a:solidFill>
-                  </a:tcPr>
-                </a:tc>
-              </a:tr>
-              <a:tr h="294640">
-                <a:tc>
-                  <a:txBody>
-                    <a:bodyPr/>
-                    <a:lstStyle/>
-                    <a:p>
-                      <a:r>
-                        <a:rPr sz="1100">
-                          <a:solidFill>
-                            <a:srgbClr val="475569"/>
-                          </a:solidFill>
-                          <a:latin typeface="Segoe UI"/>
-                        </a:rPr>
-                        <a:t>Vector search</a:t>
-                      </a:r>
-                    </a:p>
-                  </a:txBody>
-                  <a:tcPr>
-                    <a:solidFill>
-                      <a:srgbClr val="F8FAFC"/>
-                    </a:solidFill>
-                  </a:tcPr>
-                </a:tc>
-                <a:tc>
-                  <a:txBody>
-                    <a:bodyPr/>
-                    <a:lstStyle/>
-                    <a:p>
-                      <a:r>
-                        <a:rPr sz="1100">
-                          <a:solidFill>
-                            <a:srgbClr val="475569"/>
-                          </a:solidFill>
-                          <a:latin typeface="Segoe UI"/>
-                        </a:rPr>
-                        <a:t>Brute-force cosine</a:t>
-                      </a:r>
-                    </a:p>
-                  </a:txBody>
-                  <a:tcPr>
-                    <a:solidFill>
-                      <a:srgbClr val="F8FAFC"/>
-                    </a:solidFill>
-                  </a:tcPr>
-                </a:tc>
-                <a:tc>
-                  <a:txBody>
-                    <a:bodyPr/>
-                    <a:lstStyle/>
-                    <a:p>
-                      <a:r>
-                        <a:rPr sz="1100">
-                          <a:solidFill>
-                            <a:srgbClr val="475569"/>
-                          </a:solidFill>
-                          <a:latin typeface="Segoe UI"/>
-                        </a:rPr>
-                        <a:t>20 tools needs no database</a:t>
-                      </a:r>
-                    </a:p>
-                  </a:txBody>
-                  <a:tcPr>
-                    <a:solidFill>
-                      <a:srgbClr val="F8FAFC"/>
-                    </a:solidFill>
-                  </a:tcPr>
-                </a:tc>
-              </a:tr>
-              <a:tr h="294640">
-                <a:tc>
-                  <a:txBody>
-                    <a:bodyPr/>
-                    <a:lstStyle/>
-                    <a:p>
-                      <a:r>
-                        <a:rPr sz="1100">
-                          <a:solidFill>
-                            <a:srgbClr val="475569"/>
-                          </a:solidFill>
-                          <a:latin typeface="Segoe UI"/>
-                        </a:rPr>
-                        <a:t>Embeddings</a:t>
-                      </a:r>
-                    </a:p>
-                  </a:txBody>
-                  <a:tcPr>
-                    <a:solidFill>
-                      <a:srgbClr val="FFFFFF"/>
-                    </a:solidFill>
-                  </a:tcPr>
-                </a:tc>
-                <a:tc>
-                  <a:txBody>
-                    <a:bodyPr/>
-                    <a:lstStyle/>
-                    <a:p>
-                      <a:r>
-                        <a:rPr sz="1100">
-                          <a:solidFill>
-                            <a:srgbClr val="475569"/>
-                          </a:solidFill>
-                          <a:latin typeface="Segoe UI"/>
-                        </a:rPr>
-                        <a:t>Bedrock Titan V2</a:t>
-                      </a:r>
-                    </a:p>
-                  </a:txBody>
-                  <a:tcPr>
-                    <a:solidFill>
-                      <a:srgbClr val="FFFFFF"/>
-                    </a:solidFill>
-                  </a:tcPr>
-                </a:tc>
-                <a:tc>
-                  <a:txBody>
-                    <a:bodyPr/>
-                    <a:lstStyle/>
-                    <a:p>
-                      <a:r>
-                        <a:rPr sz="1100">
-                          <a:solidFill>
-                            <a:srgbClr val="475569"/>
-                          </a:solidFill>
-                          <a:latin typeface="Segoe UI"/>
-                        </a:rPr>
-                        <a:t>Native to AWS, costs cents</a:t>
-                      </a:r>
-                    </a:p>
-                  </a:txBody>
-                  <a:tcPr>
-                    <a:solidFill>
-                      <a:srgbClr val="FFFFFF"/>
-                    </a:solidFill>
-                  </a:tcPr>
-                </a:tc>
-              </a:tr>
-              <a:tr h="294640">
-                <a:tc>
-                  <a:txBody>
-                    <a:bodyPr/>
-                    <a:lstStyle/>
-                    <a:p>
-                      <a:r>
-                        <a:rPr sz="1100">
-                          <a:solidFill>
-                            <a:srgbClr val="475569"/>
-                          </a:solidFill>
-                          <a:latin typeface="Segoe UI"/>
-                        </a:rPr>
-                        <a:t>IaC</a:t>
-                      </a:r>
-                    </a:p>
-                  </a:txBody>
-                  <a:tcPr>
-                    <a:solidFill>
-                      <a:srgbClr val="F8FAFC"/>
-                    </a:solidFill>
-                  </a:tcPr>
-                </a:tc>
-                <a:tc>
-                  <a:txBody>
-                    <a:bodyPr/>
-                    <a:lstStyle/>
-                    <a:p>
-                      <a:r>
-                        <a:rPr sz="1100">
-                          <a:solidFill>
-                            <a:srgbClr val="475569"/>
-                          </a:solidFill>
-                          <a:latin typeface="Segoe UI"/>
-                        </a:rPr>
-                        <a:t>AWS CDK (TypeScript)</a:t>
-                      </a:r>
-                    </a:p>
-                  </a:txBody>
-                  <a:tcPr>
-                    <a:solidFill>
-                      <a:srgbClr val="F8FAFC"/>
-                    </a:solidFill>
-                  </a:tcPr>
-                </a:tc>
-                <a:tc>
-                  <a:txBody>
-                    <a:bodyPr/>
-                    <a:lstStyle/>
-                    <a:p>
-                      <a:r>
-                        <a:rPr sz="1100">
-                          <a:solidFill>
-                            <a:srgbClr val="475569"/>
-                          </a:solidFill>
-                          <a:latin typeface="Segoe UI"/>
-                        </a:rPr>
-                        <a:t>Same language as the services</a:t>
-                      </a:r>
-                    </a:p>
-                  </a:txBody>
-                  <a:tcPr>
-                    <a:solidFill>
-                      <a:srgbClr val="F8FAFC"/>
-                    </a:solidFill>
-                  </a:tcPr>
-                </a:tc>
-              </a:tr>
-              <a:tr h="294640">
-                <a:tc>
-                  <a:txBody>
-                    <a:bodyPr/>
-                    <a:lstStyle/>
-                    <a:p>
-                      <a:r>
-                        <a:rPr sz="1100">
-                          <a:solidFill>
-                            <a:srgbClr val="475569"/>
-                          </a:solidFill>
-                          <a:latin typeface="Segoe UI"/>
-                        </a:rPr>
-                        <a:t>Surface</a:t>
-                      </a:r>
-                    </a:p>
-                  </a:txBody>
-                  <a:tcPr>
-                    <a:solidFill>
-                      <a:srgbClr val="FFFFFF"/>
-                    </a:solidFill>
-                  </a:tcPr>
-                </a:tc>
-                <a:tc>
-                  <a:txBody>
-                    <a:bodyPr/>
-                    <a:lstStyle/>
-                    <a:p>
-                      <a:r>
-                        <a:rPr sz="1100">
-                          <a:solidFill>
-                            <a:srgbClr val="475569"/>
-                          </a:solidFill>
-                          <a:latin typeface="Segoe UI"/>
-                        </a:rPr>
-                        <a:t>HTTP API + CLI only</a:t>
-                      </a:r>
-                    </a:p>
-                  </a:txBody>
-                  <a:tcPr>
-                    <a:solidFill>
-                      <a:srgbClr val="FFFFFF"/>
-                    </a:solidFill>
-                  </a:tcPr>
-                </a:tc>
-                <a:tc>
-                  <a:txBody>
-                    <a:bodyPr/>
-                    <a:lstStyle/>
-                    <a:p>
-                      <a:r>
-                        <a:rPr sz="1100">
-                          <a:solidFill>
-                            <a:srgbClr val="475569"/>
-                          </a:solidFill>
-                          <a:latin typeface="Segoe UI"/>
-                        </a:rPr>
-                        <a:t>Roadmap says read the log by hand</a:t>
-                      </a:r>
-                    </a:p>
-                  </a:txBody>
-                  <a:tcPr>
-                    <a:solidFill>
-                      <a:srgbClr val="FFFFFF"/>
-                    </a:solidFill>
-                  </a:tcPr>
-                </a:tc>
-              </a:tr>
-              <a:tr h="294640">
-                <a:tc>
-                  <a:txBody>
-                    <a:bodyPr/>
-                    <a:lstStyle/>
-                    <a:p>
-                      <a:r>
-                        <a:rPr sz="1100">
-                          <a:solidFill>
-                            <a:srgbClr val="475569"/>
-                          </a:solidFill>
-                          <a:latin typeface="Segoe UI"/>
-                        </a:rPr>
-                        <a:t>Execution</a:t>
-                      </a:r>
-                    </a:p>
-                  </a:txBody>
-                  <a:tcPr>
-                    <a:solidFill>
-                      <a:srgbClr val="F8FAFC"/>
-                    </a:solidFill>
-                  </a:tcPr>
-                </a:tc>
-                <a:tc>
-                  <a:txBody>
-                    <a:bodyPr/>
-                    <a:lstStyle/>
-                    <a:p>
-                      <a:r>
-                        <a:rPr sz="1100">
-                          <a:solidFill>
-                            <a:srgbClr val="475569"/>
-                          </a:solidFill>
-                          <a:latin typeface="Segoe UI"/>
-                        </a:rPr>
-                        <a:t>Out of scope</a:t>
-                      </a:r>
-                    </a:p>
-                  </a:txBody>
-                  <a:tcPr>
-                    <a:solidFill>
-                      <a:srgbClr val="F8FAFC"/>
-                    </a:solidFill>
-                  </a:tcPr>
-                </a:tc>
-                <a:tc>
-                  <a:txBody>
-                    <a:bodyPr/>
-                    <a:lstStyle/>
-                    <a:p>
-                      <a:r>
-                        <a:rPr sz="1100">
-                          <a:solidFill>
-                            <a:srgbClr val="475569"/>
-                          </a:solidFill>
-                          <a:latin typeface="Segoe UI"/>
-                        </a:rPr>
-                        <a:t>Keeps the sandbox invariant untriggered</a:t>
-                      </a:r>
-                    </a:p>
-                  </a:txBody>
-                  <a:tcPr>
-                    <a:solidFill>
-                      <a:srgbClr val="F8FAFC"/>
-                    </a:solidFill>
-                  </a:tcPr>
-                </a:tc>
-              </a:tr>
-              <a:tr h="294023">
-                <a:tc>
-                  <a:txBody>
-                    <a:bodyPr/>
-                    <a:lstStyle/>
-                    <a:p>
-                      <a:r>
-                        <a:rPr sz="1100">
-                          <a:solidFill>
-                            <a:srgbClr val="475569"/>
-                          </a:solidFill>
-                          <a:latin typeface="Segoe UI"/>
-                        </a:rPr>
-                        <a:t>Eval queries</a:t>
-                      </a:r>
-                    </a:p>
-                  </a:txBody>
-                  <a:tcPr>
-                    <a:solidFill>
-                      <a:srgbClr val="F8FAFC"/>
-                    </a:solidFill>
-                  </a:tcPr>
-                </a:tc>
-                <a:tc>
-                  <a:txBody>
-                    <a:bodyPr/>
-                    <a:lstStyle/>
-                    <a:p>
-                      <a:r>
-                        <a:rPr sz="1100">
-                          <a:solidFill>
-                            <a:srgbClr val="475569"/>
-                          </a:solidFill>
-                          <a:latin typeface="Segoe UI"/>
-                        </a:rPr>
-                        <a:t>Written blind, non-Amazon model</a:t>
-                      </a:r>
-                    </a:p>
-                  </a:txBody>
-                  <a:tcPr>
-                    <a:solidFill>
-                      <a:srgbClr val="F8FAFC"/>
-                    </a:solidFill>
-                  </a:tcPr>
-                </a:tc>
-                <a:tc>
-                  <a:txBody>
-                    <a:bodyPr/>
-                    <a:lstStyle/>
-                    <a:p>
-                      <a:r>
-                        <a:rPr sz="1100">
-                          <a:solidFill>
-                            <a:srgbClr val="475569"/>
-                          </a:solidFill>
-                          <a:latin typeface="Segoe UI"/>
-                        </a:rPr>
-                        <a:t>Keeps query vocabulary independent of Titan</a:t>
-                      </a:r>
-                    </a:p>
-                  </a:txBody>
-                  <a:tcPr>
-                    <a:solidFill>
-                      <a:srgbClr val="F8FAFC"/>
-                    </a:solidFill>
-                  </a:tcPr>
-                </a:tc>
-              </a:tr>
-            </a:tbl>
-          </a:graphicData>
-        </a:graphic>
-      </p:graphicFrame>
+              <a:t>  Too low and nothing logs; too high and everything does. A guessed value silently decides how many gaps the phase appears to find.</a:t>
+            </a:r>
+          </a:p>
+          <a:p>
+            <a:pPr>
+              <a:lnSpc>
+                <a:spcPct val="115000"/>
+              </a:lnSpc>
+              <a:spcAft>
+                <a:spcPts val="1100"/>
+              </a:spcAft>
+            </a:pPr>
+            <a:r>
+              <a:rPr sz="1400" b="1">
+                <a:solidFill>
+                  <a:srgbClr val="0F172A"/>
+                </a:solidFill>
+                <a:latin typeface="Segoe UI"/>
+              </a:rPr>
+              <a:t>The eval run produces the data to choose it.</a:t>
+            </a:r>
+            <a:r>
+              <a:rPr sz="1400">
+                <a:solidFill>
+                  <a:srgbClr val="475569"/>
+                </a:solidFill>
+                <a:latin typeface="Segoe UI"/>
+              </a:rPr>
+              <a:t>  Answerable queries yield one distribution of top scores. The known-unanswerable ones yield another.</a:t>
+            </a:r>
+          </a:p>
+          <a:p>
+            <a:pPr>
+              <a:lnSpc>
+                <a:spcPct val="115000"/>
+              </a:lnSpc>
+              <a:spcAft>
+                <a:spcPts val="1100"/>
+              </a:spcAft>
+            </a:pPr>
+            <a:r>
+              <a:rPr sz="1400" b="1">
+                <a:solidFill>
+                  <a:srgbClr val="0F172A"/>
+                </a:solidFill>
+                <a:latin typeface="Segoe UI"/>
+              </a:rPr>
+              <a:t>Pick T where the two separate best.</a:t>
+            </a:r>
+            <a:r>
+              <a:rPr sz="1400">
+                <a:solidFill>
+                  <a:srgbClr val="475569"/>
+                </a:solidFill>
+                <a:latin typeface="Segoe UI"/>
+              </a:rPr>
+              <a:t>  Then report the overlap between them, not just the chosen value — the overlap is what says how reliable any threshold can be.</a:t>
+            </a:r>
+          </a:p>
+          <a:p>
+            <a:pPr>
+              <a:lnSpc>
+                <a:spcPct val="115000"/>
+              </a:lnSpc>
+              <a:spcAft>
+                <a:spcPts val="1100"/>
+              </a:spcAft>
+            </a:pPr>
+            <a:r>
+              <a:rPr sz="1400" b="1">
+                <a:solidFill>
+                  <a:srgbClr val="0F172A"/>
+                </a:solidFill>
+                <a:latin typeface="Segoe UI"/>
+              </a:rPr>
+              <a:t>Heavy overlap is the real finding.</a:t>
+            </a:r>
+            <a:r>
+              <a:rPr sz="1400">
+                <a:solidFill>
+                  <a:srgbClr val="475569"/>
+                </a:solidFill>
+                <a:latin typeface="Segoe UI"/>
+              </a:rPr>
+              <a:t>  If no value of T cleanly separates the two, semantic distance alone cannot tell a gap from a miss. That is an answer, and it is worth six weeks to have it.</a:t>
+            </a:r>
+          </a:p>
+          <a:p>
+            <a:pPr>
+              <a:lnSpc>
+                <a:spcPct val="115000"/>
+              </a:lnSpc>
+              <a:spcAft>
+                <a:spcPts val="1100"/>
+              </a:spcAft>
+            </a:pPr>
+            <a:r>
+              <a:rPr sz="1400" b="1">
+                <a:solidFill>
+                  <a:srgbClr val="0F172A"/>
+                </a:solidFill>
+                <a:latin typeface="Segoe UI"/>
+              </a:rPr>
+              <a:t>Keep stamping T on every gap row.</a:t>
+            </a:r>
+            <a:r>
+              <a:rPr sz="1400">
+                <a:solidFill>
+                  <a:srgbClr val="475569"/>
+                </a:solidFill>
+                <a:latin typeface="Segoe UI"/>
+              </a:rPr>
+              <a:t>  Already in the plan, and it stays right either way — old records remain interpretable after the value moves.</a:t>
+            </a:r>
+          </a:p>
+        </p:txBody>
+      </p:sp>
     </p:spTree>
   </p:cSld>
   <p:clrMapOvr>
@@ -18645,7 +18040,7 @@
     <p:bg>
       <p:bgPr>
         <a:solidFill>
-          <a:srgbClr val="0F172A"/>
+          <a:srgbClr val="FFFFFF"/>
         </a:solidFill>
         <a:effectLst/>
       </p:bgPr>
@@ -18659,14 +18054,92 @@
       <p:grpSpPr/>
       <p:sp>
         <p:nvSpPr>
-          <p:cNvPr id="2" name="Rectangle 1"/>
+          <p:cNvPr id="2" name="TextBox 1"/>
+          <p:cNvSpPr txBox="1"/>
+          <p:nvPr/>
+        </p:nvSpPr>
+        <p:spPr>
+          <a:xfrm>
+            <a:off x="777240" y="502920"/>
+            <a:ext cx="10607040" cy="274320"/>
+          </a:xfrm>
+          <a:prstGeom prst="rect">
+            <a:avLst/>
+          </a:prstGeom>
+          <a:noFill/>
+        </p:spPr>
+        <p:txBody>
+          <a:bodyPr wrap="square" lIns="0" rIns="0" tIns="0" bIns="0">
+            <a:spAutoFit/>
+          </a:bodyPr>
+          <a:lstStyle/>
+          <a:p>
+            <a:pPr algn="l">
+              <a:lnSpc>
+                <a:spcPct val="100000"/>
+              </a:lnSpc>
+            </a:pPr>
+            <a:r>
+              <a:rPr sz="1100" b="1">
+                <a:solidFill>
+                  <a:srgbClr val="94A3B8"/>
+                </a:solidFill>
+                <a:latin typeface="Segoe UI"/>
+              </a:rPr>
+              <a:t>THE FAIL PATH</a:t>
+            </a:r>
+          </a:p>
+        </p:txBody>
+      </p:sp>
+      <p:sp>
+        <p:nvSpPr>
+          <p:cNvPr id="3" name="TextBox 2"/>
+          <p:cNvSpPr txBox="1"/>
+          <p:nvPr/>
+        </p:nvSpPr>
+        <p:spPr>
+          <a:xfrm>
+            <a:off x="777240" y="841248"/>
+            <a:ext cx="10607040" cy="640080"/>
+          </a:xfrm>
+          <a:prstGeom prst="rect">
+            <a:avLst/>
+          </a:prstGeom>
+          <a:noFill/>
+        </p:spPr>
+        <p:txBody>
+          <a:bodyPr wrap="square" lIns="0" rIns="0" tIns="0" bIns="0">
+            <a:spAutoFit/>
+          </a:bodyPr>
+          <a:lstStyle/>
+          <a:p>
+            <a:pPr algn="l">
+              <a:lnSpc>
+                <a:spcPct val="100000"/>
+              </a:lnSpc>
+            </a:pPr>
+            <a:r>
+              <a:rPr sz="3100" b="1">
+                <a:solidFill>
+                  <a:srgbClr val="0F172A"/>
+                </a:solidFill>
+                <a:latin typeface="Segoe UI"/>
+              </a:rPr>
+              <a:t>What happens if the gate does not clear</a:t>
+            </a:r>
+          </a:p>
+        </p:txBody>
+      </p:sp>
+      <p:sp>
+        <p:nvSpPr>
+          <p:cNvPr id="4" name="Rectangle 3"/>
           <p:cNvSpPr/>
           <p:nvPr/>
         </p:nvSpPr>
         <p:spPr>
           <a:xfrm>
-            <a:off x="0" y="0"/>
-            <a:ext cx="256032" cy="6858000"/>
+            <a:off x="777240" y="1572768"/>
+            <a:ext cx="1005840" cy="41148"/>
           </a:xfrm>
           <a:prstGeom prst="rect">
             <a:avLst/>
@@ -18703,14 +18176,14 @@
       </p:sp>
       <p:sp>
         <p:nvSpPr>
-          <p:cNvPr id="3" name="TextBox 2"/>
+          <p:cNvPr id="5" name="TextBox 4"/>
           <p:cNvSpPr txBox="1"/>
           <p:nvPr/>
         </p:nvSpPr>
         <p:spPr>
           <a:xfrm>
-            <a:off x="1005840" y="1280160"/>
-            <a:ext cx="10058400" cy="320040"/>
+            <a:off x="777240" y="1783080"/>
+            <a:ext cx="10515600" cy="4023360"/>
           </a:xfrm>
           <a:prstGeom prst="rect">
             <a:avLst/>
@@ -18723,557 +18196,115 @@
           </a:bodyPr>
           <a:lstStyle/>
           <a:p>
-            <a:pPr algn="l">
-              <a:lnSpc>
-                <a:spcPct val="100000"/>
-              </a:lnSpc>
-            </a:pPr>
-            <a:r>
-              <a:rPr sz="1300" b="1">
-                <a:solidFill>
-                  <a:srgbClr val="ED7100"/>
-                </a:solidFill>
-                <a:latin typeface="Segoe UI"/>
-              </a:rPr>
-              <a:t>NEXT</a:t>
-            </a:r>
-          </a:p>
-        </p:txBody>
-      </p:sp>
-      <p:sp>
-        <p:nvSpPr>
-          <p:cNvPr id="4" name="TextBox 3"/>
-          <p:cNvSpPr txBox="1"/>
-          <p:nvPr/>
-        </p:nvSpPr>
-        <p:spPr>
-          <a:xfrm>
-            <a:off x="1005840" y="1691640"/>
-            <a:ext cx="10241280" cy="731520"/>
-          </a:xfrm>
-          <a:prstGeom prst="rect">
-            <a:avLst/>
-          </a:prstGeom>
-          <a:noFill/>
-        </p:spPr>
-        <p:txBody>
-          <a:bodyPr wrap="square" lIns="0" rIns="0" tIns="0" bIns="0">
-            <a:spAutoFit/>
-          </a:bodyPr>
-          <a:lstStyle/>
-          <a:p>
-            <a:pPr algn="l">
-              <a:lnSpc>
-                <a:spcPct val="100000"/>
-              </a:lnSpc>
-            </a:pPr>
-            <a:r>
-              <a:rPr sz="3800" b="1">
-                <a:solidFill>
-                  <a:srgbClr val="FFFFFF"/>
-                </a:solidFill>
-                <a:latin typeface="Segoe UI"/>
-              </a:rPr>
-              <a:t>Where this goes from here</a:t>
-            </a:r>
-          </a:p>
-        </p:txBody>
-      </p:sp>
-      <p:sp>
-        <p:nvSpPr>
-          <p:cNvPr id="5" name="Oval 4"/>
-          <p:cNvSpPr/>
-          <p:nvPr/>
-        </p:nvSpPr>
-        <p:spPr>
-          <a:xfrm>
-            <a:off x="1005840" y="2852928"/>
-            <a:ext cx="329184" cy="329184"/>
-          </a:xfrm>
-          <a:prstGeom prst="ellipse">
-            <a:avLst/>
-          </a:prstGeom>
-          <a:solidFill>
-            <a:srgbClr val="ED7100"/>
-          </a:solidFill>
-          <a:ln>
-            <a:noFill/>
-          </a:ln>
-          <a:effectLst/>
-        </p:spPr>
-        <p:style>
-          <a:lnRef idx="1">
-            <a:schemeClr val="accent1"/>
-          </a:lnRef>
-          <a:fillRef idx="3">
-            <a:schemeClr val="accent1"/>
-          </a:fillRef>
-          <a:effectRef idx="2">
-            <a:schemeClr val="accent1"/>
-          </a:effectRef>
-          <a:fontRef idx="minor">
-            <a:schemeClr val="lt1"/>
-          </a:fontRef>
-        </p:style>
-        <p:txBody>
-          <a:bodyPr rtlCol="0" anchor="ctr"/>
-          <a:lstStyle/>
-          <a:p>
-            <a:pPr algn="ctr"/>
-            <a:r>
-              <a:rPr sz="1200" b="1">
-                <a:solidFill>
-                  <a:srgbClr val="FFFFFF"/>
-                </a:solidFill>
-                <a:latin typeface="Segoe UI"/>
-              </a:rPr>
-              <a:t>1</a:t>
-            </a:r>
-          </a:p>
-        </p:txBody>
-      </p:sp>
-      <p:sp>
-        <p:nvSpPr>
-          <p:cNvPr id="6" name="TextBox 5"/>
-          <p:cNvSpPr txBox="1"/>
-          <p:nvPr/>
-        </p:nvSpPr>
-        <p:spPr>
-          <a:xfrm>
-            <a:off x="1536192" y="2898648"/>
-            <a:ext cx="9509760" cy="365760"/>
-          </a:xfrm>
-          <a:prstGeom prst="rect">
-            <a:avLst/>
-          </a:prstGeom>
-          <a:noFill/>
-        </p:spPr>
-        <p:txBody>
-          <a:bodyPr wrap="square" lIns="0" rIns="0" tIns="0" bIns="0">
-            <a:spAutoFit/>
-          </a:bodyPr>
-          <a:lstStyle/>
-          <a:p>
-            <a:pPr algn="l">
-              <a:lnSpc>
-                <a:spcPct val="100000"/>
-              </a:lnSpc>
-            </a:pPr>
-            <a:r>
-              <a:rPr sz="1600" b="0">
-                <a:solidFill>
-                  <a:srgbClr val="FFFFFF"/>
-                </a:solidFill>
-                <a:latin typeface="Segoe UI"/>
-              </a:rPr>
-              <a:t>Confirm or overrule the nine assumptions</a:t>
-            </a:r>
-          </a:p>
-        </p:txBody>
-      </p:sp>
-      <p:sp>
-        <p:nvSpPr>
-          <p:cNvPr id="7" name="Oval 6"/>
-          <p:cNvSpPr/>
-          <p:nvPr/>
-        </p:nvSpPr>
-        <p:spPr>
-          <a:xfrm>
-            <a:off x="1005840" y="3419856"/>
-            <a:ext cx="329184" cy="329184"/>
-          </a:xfrm>
-          <a:prstGeom prst="ellipse">
-            <a:avLst/>
-          </a:prstGeom>
-          <a:solidFill>
-            <a:srgbClr val="ED7100"/>
-          </a:solidFill>
-          <a:ln>
-            <a:noFill/>
-          </a:ln>
-          <a:effectLst/>
-        </p:spPr>
-        <p:style>
-          <a:lnRef idx="1">
-            <a:schemeClr val="accent1"/>
-          </a:lnRef>
-          <a:fillRef idx="3">
-            <a:schemeClr val="accent1"/>
-          </a:fillRef>
-          <a:effectRef idx="2">
-            <a:schemeClr val="accent1"/>
-          </a:effectRef>
-          <a:fontRef idx="minor">
-            <a:schemeClr val="lt1"/>
-          </a:fontRef>
-        </p:style>
-        <p:txBody>
-          <a:bodyPr rtlCol="0" anchor="ctr"/>
-          <a:lstStyle/>
-          <a:p>
-            <a:pPr algn="ctr"/>
-            <a:r>
-              <a:rPr sz="1200" b="1">
-                <a:solidFill>
-                  <a:srgbClr val="FFFFFF"/>
-                </a:solidFill>
-                <a:latin typeface="Segoe UI"/>
-              </a:rPr>
-              <a:t>2</a:t>
-            </a:r>
-          </a:p>
-        </p:txBody>
-      </p:sp>
-      <p:sp>
-        <p:nvSpPr>
-          <p:cNvPr id="8" name="TextBox 7"/>
-          <p:cNvSpPr txBox="1"/>
-          <p:nvPr/>
-        </p:nvSpPr>
-        <p:spPr>
-          <a:xfrm>
-            <a:off x="1536192" y="3465576"/>
-            <a:ext cx="9509760" cy="365760"/>
-          </a:xfrm>
-          <a:prstGeom prst="rect">
-            <a:avLst/>
-          </a:prstGeom>
-          <a:noFill/>
-        </p:spPr>
-        <p:txBody>
-          <a:bodyPr wrap="square" lIns="0" rIns="0" tIns="0" bIns="0">
-            <a:spAutoFit/>
-          </a:bodyPr>
-          <a:lstStyle/>
-          <a:p>
-            <a:pPr algn="l">
-              <a:lnSpc>
-                <a:spcPct val="100000"/>
-              </a:lnSpc>
-            </a:pPr>
-            <a:r>
-              <a:rPr sz="1600" b="0">
-                <a:solidFill>
-                  <a:srgbClr val="FFFFFF"/>
-                </a:solidFill>
-                <a:latin typeface="Segoe UI"/>
-              </a:rPr>
-              <a:t>Confirm the account type, and check the credit expiry in billing</a:t>
-            </a:r>
-          </a:p>
-        </p:txBody>
-      </p:sp>
-      <p:sp>
-        <p:nvSpPr>
-          <p:cNvPr id="9" name="Oval 8"/>
-          <p:cNvSpPr/>
-          <p:nvPr/>
-        </p:nvSpPr>
-        <p:spPr>
-          <a:xfrm>
-            <a:off x="1005840" y="3986783"/>
-            <a:ext cx="329184" cy="329184"/>
-          </a:xfrm>
-          <a:prstGeom prst="ellipse">
-            <a:avLst/>
-          </a:prstGeom>
-          <a:solidFill>
-            <a:srgbClr val="ED7100"/>
-          </a:solidFill>
-          <a:ln>
-            <a:noFill/>
-          </a:ln>
-          <a:effectLst/>
-        </p:spPr>
-        <p:style>
-          <a:lnRef idx="1">
-            <a:schemeClr val="accent1"/>
-          </a:lnRef>
-          <a:fillRef idx="3">
-            <a:schemeClr val="accent1"/>
-          </a:fillRef>
-          <a:effectRef idx="2">
-            <a:schemeClr val="accent1"/>
-          </a:effectRef>
-          <a:fontRef idx="minor">
-            <a:schemeClr val="lt1"/>
-          </a:fontRef>
-        </p:style>
-        <p:txBody>
-          <a:bodyPr rtlCol="0" anchor="ctr"/>
-          <a:lstStyle/>
-          <a:p>
-            <a:pPr algn="ctr"/>
-            <a:r>
-              <a:rPr sz="1200" b="1">
-                <a:solidFill>
-                  <a:srgbClr val="FFFFFF"/>
-                </a:solidFill>
-                <a:latin typeface="Segoe UI"/>
-              </a:rPr>
-              <a:t>3</a:t>
-            </a:r>
-          </a:p>
-        </p:txBody>
-      </p:sp>
-      <p:sp>
-        <p:nvSpPr>
-          <p:cNvPr id="10" name="TextBox 9"/>
-          <p:cNvSpPr txBox="1"/>
-          <p:nvPr/>
-        </p:nvSpPr>
-        <p:spPr>
-          <a:xfrm>
-            <a:off x="1536192" y="4032503"/>
-            <a:ext cx="9509760" cy="365760"/>
-          </a:xfrm>
-          <a:prstGeom prst="rect">
-            <a:avLst/>
-          </a:prstGeom>
-          <a:noFill/>
-        </p:spPr>
-        <p:txBody>
-          <a:bodyPr wrap="square" lIns="0" rIns="0" tIns="0" bIns="0">
-            <a:spAutoFit/>
-          </a:bodyPr>
-          <a:lstStyle/>
-          <a:p>
-            <a:pPr algn="l">
-              <a:lnSpc>
-                <a:spcPct val="100000"/>
-              </a:lnSpc>
-            </a:pPr>
-            <a:r>
-              <a:rPr sz="1600" b="0">
-                <a:solidFill>
-                  <a:srgbClr val="FFFFFF"/>
-                </a:solidFill>
-                <a:latin typeface="Segoe UI"/>
-              </a:rPr>
-              <a:t>Pick the region and enable Bedrock Titan V2 model access there</a:t>
-            </a:r>
-          </a:p>
-        </p:txBody>
-      </p:sp>
-      <p:sp>
-        <p:nvSpPr>
-          <p:cNvPr id="11" name="Oval 10"/>
-          <p:cNvSpPr/>
-          <p:nvPr/>
-        </p:nvSpPr>
-        <p:spPr>
-          <a:xfrm>
-            <a:off x="1005840" y="4553712"/>
-            <a:ext cx="329184" cy="329184"/>
-          </a:xfrm>
-          <a:prstGeom prst="ellipse">
-            <a:avLst/>
-          </a:prstGeom>
-          <a:solidFill>
-            <a:srgbClr val="ED7100"/>
-          </a:solidFill>
-          <a:ln>
-            <a:noFill/>
-          </a:ln>
-          <a:effectLst/>
-        </p:spPr>
-        <p:style>
-          <a:lnRef idx="1">
-            <a:schemeClr val="accent1"/>
-          </a:lnRef>
-          <a:fillRef idx="3">
-            <a:schemeClr val="accent1"/>
-          </a:fillRef>
-          <a:effectRef idx="2">
-            <a:schemeClr val="accent1"/>
-          </a:effectRef>
-          <a:fontRef idx="minor">
-            <a:schemeClr val="lt1"/>
-          </a:fontRef>
-        </p:style>
-        <p:txBody>
-          <a:bodyPr rtlCol="0" anchor="ctr"/>
-          <a:lstStyle/>
-          <a:p>
-            <a:pPr algn="ctr"/>
-            <a:r>
-              <a:rPr sz="1200" b="1">
-                <a:solidFill>
-                  <a:srgbClr val="FFFFFF"/>
-                </a:solidFill>
-                <a:latin typeface="Segoe UI"/>
-              </a:rPr>
-              <a:t>4</a:t>
-            </a:r>
-          </a:p>
-        </p:txBody>
-      </p:sp>
-      <p:sp>
-        <p:nvSpPr>
-          <p:cNvPr id="12" name="TextBox 11"/>
-          <p:cNvSpPr txBox="1"/>
-          <p:nvPr/>
-        </p:nvSpPr>
-        <p:spPr>
-          <a:xfrm>
-            <a:off x="1536192" y="4599431"/>
-            <a:ext cx="9509760" cy="365760"/>
-          </a:xfrm>
-          <a:prstGeom prst="rect">
-            <a:avLst/>
-          </a:prstGeom>
-          <a:noFill/>
-        </p:spPr>
-        <p:txBody>
-          <a:bodyPr wrap="square" lIns="0" rIns="0" tIns="0" bIns="0">
-            <a:spAutoFit/>
-          </a:bodyPr>
-          <a:lstStyle/>
-          <a:p>
-            <a:pPr algn="l">
-              <a:lnSpc>
-                <a:spcPct val="100000"/>
-              </a:lnSpc>
-            </a:pPr>
-            <a:r>
-              <a:rPr sz="1600" b="0">
-                <a:solidFill>
-                  <a:srgbClr val="FFFFFF"/>
-                </a:solidFill>
-                <a:latin typeface="Segoe UI"/>
-              </a:rPr>
-              <a:t>Write the eval queries blind, before seeding anything</a:t>
-            </a:r>
-          </a:p>
-        </p:txBody>
-      </p:sp>
-      <p:sp>
-        <p:nvSpPr>
-          <p:cNvPr id="13" name="Oval 12"/>
-          <p:cNvSpPr/>
-          <p:nvPr/>
-        </p:nvSpPr>
-        <p:spPr>
-          <a:xfrm>
-            <a:off x="1005840" y="5120640"/>
-            <a:ext cx="329184" cy="329184"/>
-          </a:xfrm>
-          <a:prstGeom prst="ellipse">
-            <a:avLst/>
-          </a:prstGeom>
-          <a:solidFill>
-            <a:srgbClr val="ED7100"/>
-          </a:solidFill>
-          <a:ln>
-            <a:noFill/>
-          </a:ln>
-          <a:effectLst/>
-        </p:spPr>
-        <p:style>
-          <a:lnRef idx="1">
-            <a:schemeClr val="accent1"/>
-          </a:lnRef>
-          <a:fillRef idx="3">
-            <a:schemeClr val="accent1"/>
-          </a:fillRef>
-          <a:effectRef idx="2">
-            <a:schemeClr val="accent1"/>
-          </a:effectRef>
-          <a:fontRef idx="minor">
-            <a:schemeClr val="lt1"/>
-          </a:fontRef>
-        </p:style>
-        <p:txBody>
-          <a:bodyPr rtlCol="0" anchor="ctr"/>
-          <a:lstStyle/>
-          <a:p>
-            <a:pPr algn="ctr"/>
-            <a:r>
-              <a:rPr sz="1200" b="1">
-                <a:solidFill>
-                  <a:srgbClr val="FFFFFF"/>
-                </a:solidFill>
-                <a:latin typeface="Segoe UI"/>
-              </a:rPr>
-              <a:t>5</a:t>
-            </a:r>
-          </a:p>
-        </p:txBody>
-      </p:sp>
-      <p:sp>
-        <p:nvSpPr>
-          <p:cNvPr id="14" name="TextBox 13"/>
-          <p:cNvSpPr txBox="1"/>
-          <p:nvPr/>
-        </p:nvSpPr>
-        <p:spPr>
-          <a:xfrm>
-            <a:off x="1536192" y="5166359"/>
-            <a:ext cx="9509760" cy="365760"/>
-          </a:xfrm>
-          <a:prstGeom prst="rect">
-            <a:avLst/>
-          </a:prstGeom>
-          <a:noFill/>
-        </p:spPr>
-        <p:txBody>
-          <a:bodyPr wrap="square" lIns="0" rIns="0" tIns="0" bIns="0">
-            <a:spAutoFit/>
-          </a:bodyPr>
-          <a:lstStyle/>
-          <a:p>
-            <a:pPr algn="l">
-              <a:lnSpc>
-                <a:spcPct val="100000"/>
-              </a:lnSpc>
-            </a:pPr>
-            <a:r>
-              <a:rPr sz="1600" b="0">
-                <a:solidFill>
-                  <a:srgbClr val="FFFFFF"/>
-                </a:solidFill>
-                <a:latin typeface="Segoe UI"/>
-              </a:rPr>
-              <a:t>Create issues #1-#14, then start #1 and #3 in parallel</a:t>
-            </a:r>
-          </a:p>
-        </p:txBody>
-      </p:sp>
-      <p:sp>
-        <p:nvSpPr>
-          <p:cNvPr id="15" name="TextBox 14"/>
-          <p:cNvSpPr txBox="1"/>
-          <p:nvPr/>
-        </p:nvSpPr>
-        <p:spPr>
-          <a:xfrm>
-            <a:off x="1005840" y="5943600"/>
-            <a:ext cx="10515600" cy="274320"/>
-          </a:xfrm>
-          <a:prstGeom prst="rect">
-            <a:avLst/>
-          </a:prstGeom>
-          <a:noFill/>
-        </p:spPr>
-        <p:txBody>
-          <a:bodyPr wrap="square" lIns="0" rIns="0" tIns="0" bIns="0">
-            <a:spAutoFit/>
-          </a:bodyPr>
-          <a:lstStyle/>
-          <a:p>
-            <a:pPr algn="l">
-              <a:lnSpc>
-                <a:spcPct val="100000"/>
-              </a:lnSpc>
-            </a:pPr>
-            <a:r>
-              <a:rPr sz="1100" b="0">
-                <a:solidFill>
-                  <a:srgbClr val="64748B"/>
-                </a:solidFill>
-                <a:latin typeface="Segoe UI"/>
-              </a:rPr>
-              <a:t>Plan: docs/plans/phase-0-plan.md   ·   Board: miro.com/app/board/uXjVHpGFCos=</a:t>
+            <a:pPr>
+              <a:lnSpc>
+                <a:spcPct val="115000"/>
+              </a:lnSpc>
+              <a:spcAft>
+                <a:spcPts val="1100"/>
+              </a:spcAft>
+            </a:pPr>
+            <a:r>
+              <a:rPr sz="1400" b="1">
+                <a:solidFill>
+                  <a:srgbClr val="0F172A"/>
+                </a:solidFill>
+                <a:latin typeface="Segoe UI"/>
+              </a:rPr>
+              <a:t>First, rewrite the descriptions.</a:t>
+            </a:r>
+            <a:r>
+              <a:rPr sz="1400">
+                <a:solidFill>
+                  <a:srgbClr val="475569"/>
+                </a:solidFill>
+                <a:latin typeface="Segoe UI"/>
+              </a:rPr>
+              <a:t>  Cheapest and most often the cause. Descriptions set the recall ceiling, and twenty of them can be rewritten in a day.</a:t>
+            </a:r>
+          </a:p>
+          <a:p>
+            <a:pPr>
+              <a:lnSpc>
+                <a:spcPct val="115000"/>
+              </a:lnSpc>
+              <a:spcAft>
+                <a:spcPts val="1100"/>
+              </a:spcAft>
+            </a:pPr>
+            <a:r>
+              <a:rPr sz="1400" b="1">
+                <a:solidFill>
+                  <a:srgbClr val="0F172A"/>
+                </a:solidFill>
+                <a:latin typeface="Segoe UI"/>
+              </a:rPr>
+              <a:t>Second, add lexical retrieval alongside the vectors.</a:t>
+            </a:r>
+            <a:r>
+              <a:rPr sz="1400">
+                <a:solidFill>
+                  <a:srgbClr val="475569"/>
+                </a:solidFill>
+                <a:latin typeface="Segoe UI"/>
+              </a:rPr>
+              <a:t>  Hybrid BM25 plus cosine recovers exact-name and jargon matches that embeddings routinely lose. No new infrastructure at this size.</a:t>
+            </a:r>
+          </a:p>
+          <a:p>
+            <a:pPr>
+              <a:lnSpc>
+                <a:spcPct val="115000"/>
+              </a:lnSpc>
+              <a:spcAft>
+                <a:spcPts val="1100"/>
+              </a:spcAft>
+            </a:pPr>
+            <a:r>
+              <a:rPr sz="1400" b="1">
+                <a:solidFill>
+                  <a:srgbClr val="0F172A"/>
+                </a:solidFill>
+                <a:latin typeface="Segoe UI"/>
+              </a:rPr>
+              <a:t>Third, swap the embedding model.</a:t>
+            </a:r>
+            <a:r>
+              <a:rPr sz="1400">
+                <a:solidFill>
+                  <a:srgbClr val="475569"/>
+                </a:solidFill>
+                <a:latin typeface="Segoe UI"/>
+              </a:rPr>
+              <a:t>  Titan out, another in. One file if the interface from #5 held — which is the reason that issue exists.</a:t>
+            </a:r>
+          </a:p>
+          <a:p>
+            <a:pPr>
+              <a:lnSpc>
+                <a:spcPct val="115000"/>
+              </a:lnSpc>
+              <a:spcAft>
+                <a:spcPts val="1100"/>
+              </a:spcAft>
+            </a:pPr>
+            <a:r>
+              <a:rPr sz="1400" b="1">
+                <a:solidFill>
+                  <a:srgbClr val="0F172A"/>
+                </a:solidFill>
+                <a:latin typeface="Segoe UI"/>
+              </a:rPr>
+              <a:t>Not on the list: lowering the gate.</a:t>
+            </a:r>
+            <a:r>
+              <a:rPr sz="1400">
+                <a:solidFill>
+                  <a:srgbClr val="475569"/>
+                </a:solidFill>
+                <a:latin typeface="Segoe UI"/>
+              </a:rPr>
+              <a:t>  0.84 is not basically fine. Decide the response now, while the number is still hypothetical and six weeks of work are not yet sunk into wanting it to pass.</a:t>
             </a:r>
           </a:p>
         </p:txBody>
@@ -19338,7 +18369,7 @@
                 </a:solidFill>
                 <a:latin typeface="Segoe UI"/>
               </a:rPr>
-              <a:t>THE INSTRUMENT</a:t>
+              <a:t>RISKS</a:t>
             </a:r>
           </a:p>
         </p:txBody>
@@ -19377,7 +18408,7 @@
                 </a:solidFill>
                 <a:latin typeface="Segoe UI"/>
               </a:rPr>
-              <a:t>Writing the eval set without contaminating it</a:t>
+              <a:t>What could make this phase produce noise</a:t>
             </a:r>
           </a:p>
         </p:txBody>
@@ -19453,26 +18484,26 @@
                 <a:spcPct val="115000"/>
               </a:lnSpc>
               <a:spcAft>
-                <a:spcPts val="1100"/>
+                <a:spcPts val="900"/>
               </a:spcAft>
             </a:pPr>
             <a:r>
-              <a:rPr sz="1400" b="1">
+              <a:rPr sz="1300" b="1">
                 <a:solidFill>
                   <a:srgbClr val="0F172A"/>
                 </a:solidFill>
                 <a:latin typeface="Segoe UI"/>
               </a:rPr>
-              <a:t>The trap is ordering.</a:t>
-            </a:r>
-            <a:r>
-              <a:rPr sz="1400">
+              <a:t>The eval set can end up measuring you.</a:t>
+            </a:r>
+            <a:r>
+              <a:rPr sz="1300">
                 <a:solidFill>
                   <a:srgbClr val="475569"/>
                 </a:solidFill>
                 <a:latin typeface="Segoe UI"/>
               </a:rPr>
-              <a:t>  Write twenty descriptions, then write queries to test them, and the queries come out phrased the way the descriptions were phrased. Recall looks excellent and has measured your own vocabulary.</a:t>
+              <a:t>  Queries written after the descriptions inherit their vocabulary. Writing blind and freezing the set is the mitigation, and it is the cheapest correction in the phase.</a:t>
             </a:r>
           </a:p>
           <a:p>
@@ -19481,26 +18512,26 @@
                 <a:spcPct val="115000"/>
               </a:lnSpc>
               <a:spcAft>
-                <a:spcPts val="1100"/>
+                <a:spcPts val="900"/>
               </a:spcAft>
             </a:pPr>
             <a:r>
-              <a:rPr sz="1400" b="1">
+              <a:rPr sz="1300" b="1">
                 <a:solidFill>
                   <a:srgbClr val="0F172A"/>
                 </a:solidFill>
                 <a:latin typeface="Segoe UI"/>
               </a:rPr>
-              <a:t>So write the queries first.</a:t>
-            </a:r>
-            <a:r>
-              <a:rPr sz="1400">
+              <a:t>Tool descriptions set the ceiling.</a:t>
+            </a:r>
+            <a:r>
+              <a:rPr sz="1300">
                 <a:solidFill>
                   <a:srgbClr val="475569"/>
                 </a:solidFill>
                 <a:latin typeface="Segoe UI"/>
               </a:rPr>
-              <a:t>  All 50+ authored before a single tool is seeded, from the task side — what an agent needs mid-task, not what a tool is called.</a:t>
+              <a:t>  Twenty carelessly written descriptions produce bad recall and a gap log full of false gaps.</a:t>
             </a:r>
           </a:p>
           <a:p>
@@ -19509,26 +18540,26 @@
                 <a:spcPct val="115000"/>
               </a:lnSpc>
               <a:spcAft>
-                <a:spcPts val="1100"/>
+                <a:spcPts val="900"/>
               </a:spcAft>
             </a:pPr>
             <a:r>
-              <a:rPr sz="1400" b="1">
+              <a:rPr sz="1300" b="1">
                 <a:solidFill>
                   <a:srgbClr val="0F172A"/>
                 </a:solidFill>
                 <a:latin typeface="Segoe UI"/>
               </a:rPr>
-              <a:t>Draft them with a different model.</a:t>
-            </a:r>
-            <a:r>
-              <a:rPr sz="1400">
+              <a:t>Twenty tools cannot test density.</a:t>
+            </a:r>
+            <a:r>
+              <a:rPr sz="1300">
                 <a:solidFill>
                   <a:srgbClr val="475569"/>
                 </a:solidFill>
                 <a:latin typeface="Segoe UI"/>
               </a:rPr>
-              <a:t>  Generating candidates with a non-Amazon model keeps the query vocabulary independent of the model that will embed both sides.</a:t>
+              <a:t>  Whatever the gate says, it says nothing about whether detection still works at two thousand tools. That risk carries forward into Phase 1 unmeasured.</a:t>
             </a:r>
           </a:p>
           <a:p>
@@ -19537,26 +18568,26 @@
                 <a:spcPct val="115000"/>
               </a:lnSpc>
               <a:spcAft>
-                <a:spcPts val="1100"/>
+                <a:spcPts val="900"/>
               </a:spcAft>
             </a:pPr>
             <a:r>
-              <a:rPr sz="1400" b="1">
+              <a:rPr sz="1300" b="1">
                 <a:solidFill>
                   <a:srgbClr val="0F172A"/>
                 </a:solidFill>
                 <a:latin typeface="Segoe UI"/>
               </a:rPr>
-              <a:t>Freeze the set before seeding.</a:t>
-            </a:r>
-            <a:r>
-              <a:rPr sz="1400">
+              <a:t>Region drift.</a:t>
+            </a:r>
+            <a:r>
+              <a:rPr sz="1300">
                 <a:solidFill>
                   <a:srgbClr val="475569"/>
                 </a:solidFill>
                 <a:latin typeface="Segoe UI"/>
               </a:rPr>
-              <a:t>  Once tools exist the set is closed. Editing a query after watching it fail turns the harness into a mirror.</a:t>
+              <a:t>  Bedrock in one region and tables in another is the most common way a weekend disappears.</a:t>
             </a:r>
           </a:p>
           <a:p>
@@ -19565,26 +18596,54 @@
                 <a:spcPct val="115000"/>
               </a:lnSpc>
               <a:spcAft>
-                <a:spcPts val="1100"/>
+                <a:spcPts val="900"/>
               </a:spcAft>
             </a:pPr>
             <a:r>
-              <a:rPr sz="1400" b="1">
+              <a:rPr sz="1300" b="1">
                 <a:solidFill>
                   <a:srgbClr val="0F172A"/>
                 </a:solidFill>
                 <a:latin typeface="Segoe UI"/>
               </a:rPr>
-              <a:t>Label after freezing, not during.</a:t>
-            </a:r>
-            <a:r>
-              <a:rPr sz="1400">
+              <a:t>Cold start is not a technical problem.</a:t>
+            </a:r>
+            <a:r>
+              <a:rPr sz="1300">
                 <a:solidFill>
                   <a:srgbClr val="475569"/>
                 </a:solidFill>
                 <a:latin typeface="Segoe UI"/>
               </a:rPr>
-              <a:t>  Deciding which tool should win happens once the seeded set exists — the queries themselves never change at that point.</a:t>
+              <a:t>  No agents without tools, no tools without agent traffic. Seeding is the mitigation; the gaps board is a product on its own.</a:t>
+            </a:r>
+          </a:p>
+          <a:p>
+            <a:pPr>
+              <a:lnSpc>
+                <a:spcPct val="115000"/>
+              </a:lnSpc>
+              <a:spcAft>
+                <a:spcPts val="900"/>
+              </a:spcAft>
+            </a:pPr>
+            <a:r>
+              <a:rPr sz="1300" b="1">
+                <a:solidFill>
+                  <a:srgbClr val="0F172A"/>
+                </a:solidFill>
+                <a:latin typeface="Segoe UI"/>
+              </a:rPr>
+              <a:t>The account clock.</a:t>
+            </a:r>
+            <a:r>
+              <a:rPr sz="1300">
+                <a:solidFill>
+                  <a:srgbClr val="475569"/>
+                </a:solidFill>
+                <a:latin typeface="Segoe UI"/>
+              </a:rPr>
+              <a:t>  Free Plan credits run out and the plan lapses. Everything lives in Terraform so a rebuild is one command.</a:t>
             </a:r>
           </a:p>
         </p:txBody>
@@ -19649,7 +18708,7 @@
                 </a:solidFill>
                 <a:latin typeface="Segoe UI"/>
               </a:rPr>
-              <a:t>THRESHOLD T</a:t>
+              <a:t>BUILD DETAIL</a:t>
             </a:r>
           </a:p>
         </p:txBody>
@@ -19688,7 +18747,7 @@
                 </a:solidFill>
                 <a:latin typeface="Segoe UI"/>
               </a:rPr>
-              <a:t>T is an output of Phase 0, not an input</a:t>
+              <a:t>Four smaller corrections worth making now</a:t>
             </a:r>
           </a:p>
         </p:txBody>
@@ -19774,7 +18833,7 @@
                 </a:solidFill>
                 <a:latin typeface="Segoe UI"/>
               </a:rPr>
-              <a:t>Right now T is a guess.</a:t>
+              <a:t>One authority for vectors.</a:t>
             </a:r>
             <a:r>
               <a:rPr sz="1400">
@@ -19783,7 +18842,7 @@
                 </a:solidFill>
                 <a:latin typeface="Segoe UI"/>
               </a:rPr>
-              <a:t>  Too low and nothing logs; too high and everything does. A guessed value silently decides how many gaps the phase appears to find.</a:t>
+              <a:t>  The tool row and the S3 snapshot both hold them. Name the row as the source and the snapshot as a derived cache, with a rebuild command — or they drift and nobody notices.</a:t>
             </a:r>
           </a:p>
           <a:p>
@@ -19802,7 +18861,7 @@
                 </a:solidFill>
                 <a:latin typeface="Segoe UI"/>
               </a:rPr>
-              <a:t>The eval run produces the data to choose it.</a:t>
+              <a:t>One embedding function, one interface.</a:t>
             </a:r>
             <a:r>
               <a:rPr sz="1400">
@@ -19811,7 +18870,7 @@
                 </a:solidFill>
                 <a:latin typeface="Segoe UI"/>
               </a:rPr>
-              <a:t>  Answerable queries yield one distribution of top scores. The known-unanswerable ones yield another.</a:t>
+              <a:t>  Registry and search must embed through the same code path. Different preprocessing on the two sides is a silent and very common recall killer, and the swap in the fail path depends on it.</a:t>
             </a:r>
           </a:p>
           <a:p>
@@ -19830,7 +18889,7 @@
                 </a:solidFill>
                 <a:latin typeface="Segoe UI"/>
               </a:rPr>
-              <a:t>Pick T where the two separate best.</a:t>
+              <a:t>The seeds may not need working wrappers.</a:t>
             </a:r>
             <a:r>
               <a:rPr sz="1400">
@@ -19839,7 +18898,7 @@
                 </a:solidFill>
                 <a:latin typeface="Segoe UI"/>
               </a:rPr>
-              <a:t>  Then report the overlap between them, not just the chosen value — the overlap is what says how reliable any threshold can be.</a:t>
+              <a:t>  Phase 0 never executes anything and search only reads descriptions. Registering realistic metadata could cut the largest item — but Phase 1 needs real endpoints, so make it a choice.</a:t>
             </a:r>
           </a:p>
           <a:p>
@@ -19858,7 +18917,7 @@
                 </a:solidFill>
                 <a:latin typeface="Segoe UI"/>
               </a:rPr>
-              <a:t>Heavy overlap is the real finding.</a:t>
+              <a:t>Close the open Function URL before Phase 1.</a:t>
             </a:r>
             <a:r>
               <a:rPr sz="1400">
@@ -19867,35 +18926,7 @@
                 </a:solidFill>
                 <a:latin typeface="Segoe UI"/>
               </a:rPr>
-              <a:t>  If no value of T cleanly separates the two, semantic distance alone cannot tell a gap from a miss. That is an answer, and it is worth six weeks to have it.</a:t>
-            </a:r>
-          </a:p>
-          <a:p>
-            <a:pPr>
-              <a:lnSpc>
-                <a:spcPct val="115000"/>
-              </a:lnSpc>
-              <a:spcAft>
-                <a:spcPts val="1100"/>
-              </a:spcAft>
-            </a:pPr>
-            <a:r>
-              <a:rPr sz="1400" b="1">
-                <a:solidFill>
-                  <a:srgbClr val="0F172A"/>
-                </a:solidFill>
-                <a:latin typeface="Segoe UI"/>
-              </a:rPr>
-              <a:t>Keep stamping T on every gap row.</a:t>
-            </a:r>
-            <a:r>
-              <a:rPr sz="1400">
-                <a:solidFill>
-                  <a:srgbClr val="475569"/>
-                </a:solidFill>
-                <a:latin typeface="Segoe UI"/>
-              </a:rPr>
-              <a:t>  Already in the plan, and it stays right either way — old records remain interpretable after the value moves.</a:t>
+              <a:t>  An unauthenticated URL that calls Bedrock is an unbounded cost surface. The $5 alarm caps a dev phase; it is not a control.</a:t>
             </a:r>
           </a:p>
         </p:txBody>
@@ -19960,7 +18991,7 @@
                 </a:solidFill>
                 <a:latin typeface="Segoe UI"/>
               </a:rPr>
-              <a:t>THE FAIL PATH</a:t>
+              <a:t>OPEN</a:t>
             </a:r>
           </a:p>
         </p:txBody>
@@ -19999,7 +19030,7 @@
                 </a:solidFill>
                 <a:latin typeface="Segoe UI"/>
               </a:rPr>
-              <a:t>What happens if the gate does not clear</a:t>
+              <a:t>Nine assumptions to confirm or overrule</a:t>
             </a:r>
           </a:p>
         </p:txBody>
@@ -20057,7 +19088,7 @@
         <p:spPr>
           <a:xfrm>
             <a:off x="777240" y="1783080"/>
-            <a:ext cx="10515600" cy="4023360"/>
+            <a:ext cx="10424160" cy="457200"/>
           </a:xfrm>
           <a:prstGeom prst="rect">
             <a:avLst/>
@@ -20070,119 +19101,730 @@
           </a:bodyPr>
           <a:lstStyle/>
           <a:p>
-            <a:pPr>
-              <a:lnSpc>
-                <a:spcPct val="115000"/>
-              </a:lnSpc>
-              <a:spcAft>
-                <a:spcPts val="1100"/>
-              </a:spcAft>
-            </a:pPr>
-            <a:r>
-              <a:rPr sz="1400" b="1">
-                <a:solidFill>
-                  <a:srgbClr val="0F172A"/>
-                </a:solidFill>
-                <a:latin typeface="Segoe UI"/>
-              </a:rPr>
-              <a:t>First, rewrite the descriptions.</a:t>
-            </a:r>
-            <a:r>
-              <a:rPr sz="1400">
+            <a:pPr algn="l">
+              <a:lnSpc>
+                <a:spcPct val="100000"/>
+              </a:lnSpc>
+            </a:pPr>
+            <a:r>
+              <a:rPr sz="1500" b="0">
                 <a:solidFill>
                   <a:srgbClr val="475569"/>
                 </a:solidFill>
                 <a:latin typeface="Segoe UI"/>
               </a:rPr>
-              <a:t>  Cheapest and most often the cause. Descriptions set the recall ceiling, and twenty of them can be rewritten in a day.</a:t>
-            </a:r>
-          </a:p>
-          <a:p>
-            <a:pPr>
-              <a:lnSpc>
-                <a:spcPct val="115000"/>
-              </a:lnSpc>
-              <a:spcAft>
-                <a:spcPts val="1100"/>
-              </a:spcAft>
-            </a:pPr>
-            <a:r>
-              <a:rPr sz="1400" b="1">
-                <a:solidFill>
-                  <a:srgbClr val="0F172A"/>
-                </a:solidFill>
-                <a:latin typeface="Segoe UI"/>
-              </a:rPr>
-              <a:t>Second, add lexical retrieval alongside the vectors.</a:t>
-            </a:r>
-            <a:r>
-              <a:rPr sz="1400">
-                <a:solidFill>
-                  <a:srgbClr val="475569"/>
-                </a:solidFill>
-                <a:latin typeface="Segoe UI"/>
-              </a:rPr>
-              <a:t>  Hybrid BM25 plus cosine recovers exact-name and jargon matches that embeddings routinely lose. No new infrastructure at this size.</a:t>
-            </a:r>
-          </a:p>
-          <a:p>
-            <a:pPr>
-              <a:lnSpc>
-                <a:spcPct val="115000"/>
-              </a:lnSpc>
-              <a:spcAft>
-                <a:spcPts val="1100"/>
-              </a:spcAft>
-            </a:pPr>
-            <a:r>
-              <a:rPr sz="1400" b="1">
-                <a:solidFill>
-                  <a:srgbClr val="0F172A"/>
-                </a:solidFill>
-                <a:latin typeface="Segoe UI"/>
-              </a:rPr>
-              <a:t>Third, swap the embedding model.</a:t>
-            </a:r>
-            <a:r>
-              <a:rPr sz="1400">
-                <a:solidFill>
-                  <a:srgbClr val="475569"/>
-                </a:solidFill>
-                <a:latin typeface="Segoe UI"/>
-              </a:rPr>
-              <a:t>  Titan out, another in. One file if the interface from #5 held — which is the reason that issue exists.</a:t>
-            </a:r>
-          </a:p>
-          <a:p>
-            <a:pPr>
-              <a:lnSpc>
-                <a:spcPct val="115000"/>
-              </a:lnSpc>
-              <a:spcAft>
-                <a:spcPts val="1100"/>
-              </a:spcAft>
-            </a:pPr>
-            <a:r>
-              <a:rPr sz="1400" b="1">
-                <a:solidFill>
-                  <a:srgbClr val="0F172A"/>
-                </a:solidFill>
-                <a:latin typeface="Segoe UI"/>
-              </a:rPr>
-              <a:t>Not on the list: lowering the gate.</a:t>
-            </a:r>
-            <a:r>
-              <a:rPr sz="1400">
-                <a:solidFill>
-                  <a:srgbClr val="475569"/>
-                </a:solidFill>
-                <a:latin typeface="Segoe UI"/>
-              </a:rPr>
-              <a:t>  0.84 is not basically fine. Decide the response now, while the number is still hypothetical and six weeks of work are not yet sunk into wanting it to pass.</a:t>
-            </a:r>
-          </a:p>
-        </p:txBody>
-      </p:sp>
+              <a:t>None of these were specified in PROJECT.md or CLAUDE.md.</a:t>
+            </a:r>
+          </a:p>
+        </p:txBody>
+      </p:sp>
+      <p:graphicFrame>
+        <p:nvGraphicFramePr>
+          <p:cNvPr id="6" name="Table 5"/>
+          <p:cNvGraphicFramePr>
+            <a:graphicFrameLocks noGrp="1"/>
+          </p:cNvGraphicFramePr>
+          <p:nvPr/>
+        </p:nvGraphicFramePr>
+        <p:xfrm>
+          <a:off x="777240" y="2350008"/>
+          <a:ext cx="10515600" cy="2651760"/>
+        </p:xfrm>
+        <a:graphic>
+          <a:graphicData uri="http://schemas.openxmlformats.org/drawingml/2006/table">
+            <a:tbl>
+              <a:tblPr firstRow="1" bandRow="1">
+                <a:tableStyleId>{5C22544A-7EE6-4342-B048-85BDC9FD1C3A}</a:tableStyleId>
+              </a:tblPr>
+              <a:tblGrid>
+                <a:gridCol w="2011680"/>
+                <a:gridCol w="3200400"/>
+                <a:gridCol w="5303520"/>
+              </a:tblGrid>
+              <a:tr h="294640">
+                <a:tc>
+                  <a:txBody>
+                    <a:bodyPr/>
+                    <a:lstStyle/>
+                    <a:p>
+                      <a:r>
+                        <a:rPr sz="1100" b="1">
+                          <a:solidFill>
+                            <a:srgbClr val="FFFFFF"/>
+                          </a:solidFill>
+                          <a:latin typeface="Segoe UI"/>
+                        </a:rPr>
+                        <a:t>Decision</a:t>
+                      </a:r>
+                    </a:p>
+                  </a:txBody>
+                  <a:tcPr>
+                    <a:solidFill>
+                      <a:srgbClr val="0F172A"/>
+                    </a:solidFill>
+                  </a:tcPr>
+                </a:tc>
+                <a:tc>
+                  <a:txBody>
+                    <a:bodyPr/>
+                    <a:lstStyle/>
+                    <a:p>
+                      <a:r>
+                        <a:rPr sz="1100" b="1">
+                          <a:solidFill>
+                            <a:srgbClr val="FFFFFF"/>
+                          </a:solidFill>
+                          <a:latin typeface="Segoe UI"/>
+                        </a:rPr>
+                        <a:t>Assumed</a:t>
+                      </a:r>
+                    </a:p>
+                  </a:txBody>
+                  <a:tcPr>
+                    <a:solidFill>
+                      <a:srgbClr val="0F172A"/>
+                    </a:solidFill>
+                  </a:tcPr>
+                </a:tc>
+                <a:tc>
+                  <a:txBody>
+                    <a:bodyPr/>
+                    <a:lstStyle/>
+                    <a:p>
+                      <a:r>
+                        <a:rPr sz="1100" b="1">
+                          <a:solidFill>
+                            <a:srgbClr val="FFFFFF"/>
+                          </a:solidFill>
+                          <a:latin typeface="Segoe UI"/>
+                        </a:rPr>
+                        <a:t>Why</a:t>
+                      </a:r>
+                    </a:p>
+                  </a:txBody>
+                  <a:tcPr>
+                    <a:solidFill>
+                      <a:srgbClr val="0F172A"/>
+                    </a:solidFill>
+                  </a:tcPr>
+                </a:tc>
+              </a:tr>
+              <a:tr h="294640">
+                <a:tc>
+                  <a:txBody>
+                    <a:bodyPr/>
+                    <a:lstStyle/>
+                    <a:p>
+                      <a:r>
+                        <a:rPr sz="1100">
+                          <a:solidFill>
+                            <a:srgbClr val="475569"/>
+                          </a:solidFill>
+                          <a:latin typeface="Segoe UI"/>
+                        </a:rPr>
+                        <a:t>Language</a:t>
+                      </a:r>
+                    </a:p>
+                  </a:txBody>
+                  <a:tcPr>
+                    <a:solidFill>
+                      <a:srgbClr val="FFFFFF"/>
+                    </a:solidFill>
+                  </a:tcPr>
+                </a:tc>
+                <a:tc>
+                  <a:txBody>
+                    <a:bodyPr/>
+                    <a:lstStyle/>
+                    <a:p>
+                      <a:r>
+                        <a:rPr sz="1100">
+                          <a:solidFill>
+                            <a:srgbClr val="475569"/>
+                          </a:solidFill>
+                          <a:latin typeface="Segoe UI"/>
+                        </a:rPr>
+                        <a:t>TypeScript / Node 20</a:t>
+                      </a:r>
+                    </a:p>
+                  </a:txBody>
+                  <a:tcPr>
+                    <a:solidFill>
+                      <a:srgbClr val="FFFFFF"/>
+                    </a:solidFill>
+                  </a:tcPr>
+                </a:tc>
+                <a:tc>
+                  <a:txBody>
+                    <a:bodyPr/>
+                    <a:lstStyle/>
+                    <a:p>
+                      <a:r>
+                        <a:rPr sz="1100">
+                          <a:solidFill>
+                            <a:srgbClr val="475569"/>
+                          </a:solidFill>
+                          <a:latin typeface="Segoe UI"/>
+                        </a:rPr>
+                        <a:t>CLAUDE.md defines a tool as an MCP server</a:t>
+                      </a:r>
+                    </a:p>
+                  </a:txBody>
+                  <a:tcPr>
+                    <a:solidFill>
+                      <a:srgbClr val="FFFFFF"/>
+                    </a:solidFill>
+                  </a:tcPr>
+                </a:tc>
+              </a:tr>
+              <a:tr h="294640">
+                <a:tc>
+                  <a:txBody>
+                    <a:bodyPr/>
+                    <a:lstStyle/>
+                    <a:p>
+                      <a:r>
+                        <a:rPr sz="1100">
+                          <a:solidFill>
+                            <a:srgbClr val="475569"/>
+                          </a:solidFill>
+                          <a:latin typeface="Segoe UI"/>
+                        </a:rPr>
+                        <a:t>Compute</a:t>
+                      </a:r>
+                    </a:p>
+                  </a:txBody>
+                  <a:tcPr>
+                    <a:solidFill>
+                      <a:srgbClr val="F8FAFC"/>
+                    </a:solidFill>
+                  </a:tcPr>
+                </a:tc>
+                <a:tc>
+                  <a:txBody>
+                    <a:bodyPr/>
+                    <a:lstStyle/>
+                    <a:p>
+                      <a:r>
+                        <a:rPr sz="1100">
+                          <a:solidFill>
+                            <a:srgbClr val="475569"/>
+                          </a:solidFill>
+                          <a:latin typeface="Segoe UI"/>
+                        </a:rPr>
+                        <a:t>Lambda + Function URLs</a:t>
+                      </a:r>
+                    </a:p>
+                  </a:txBody>
+                  <a:tcPr>
+                    <a:solidFill>
+                      <a:srgbClr val="F8FAFC"/>
+                    </a:solidFill>
+                  </a:tcPr>
+                </a:tc>
+                <a:tc>
+                  <a:txBody>
+                    <a:bodyPr/>
+                    <a:lstStyle/>
+                    <a:p>
+                      <a:r>
+                        <a:rPr sz="1100">
+                          <a:solidFill>
+                            <a:srgbClr val="475569"/>
+                          </a:solidFill>
+                          <a:latin typeface="Segoe UI"/>
+                        </a:rPr>
+                        <a:t>Always free; skips API Gateway</a:t>
+                      </a:r>
+                    </a:p>
+                  </a:txBody>
+                  <a:tcPr>
+                    <a:solidFill>
+                      <a:srgbClr val="F8FAFC"/>
+                    </a:solidFill>
+                  </a:tcPr>
+                </a:tc>
+              </a:tr>
+              <a:tr h="294640">
+                <a:tc>
+                  <a:txBody>
+                    <a:bodyPr/>
+                    <a:lstStyle/>
+                    <a:p>
+                      <a:r>
+                        <a:rPr sz="1100">
+                          <a:solidFill>
+                            <a:srgbClr val="475569"/>
+                          </a:solidFill>
+                          <a:latin typeface="Segoe UI"/>
+                        </a:rPr>
+                        <a:t>Store</a:t>
+                      </a:r>
+                    </a:p>
+                  </a:txBody>
+                  <a:tcPr>
+                    <a:solidFill>
+                      <a:srgbClr val="FFFFFF"/>
+                    </a:solidFill>
+                  </a:tcPr>
+                </a:tc>
+                <a:tc>
+                  <a:txBody>
+                    <a:bodyPr/>
+                    <a:lstStyle/>
+                    <a:p>
+                      <a:r>
+                        <a:rPr sz="1100">
+                          <a:solidFill>
+                            <a:srgbClr val="475569"/>
+                          </a:solidFill>
+                          <a:latin typeface="Segoe UI"/>
+                        </a:rPr>
+                        <a:t>DynamoDB, provisioned</a:t>
+                      </a:r>
+                    </a:p>
+                  </a:txBody>
+                  <a:tcPr>
+                    <a:solidFill>
+                      <a:srgbClr val="FFFFFF"/>
+                    </a:solidFill>
+                  </a:tcPr>
+                </a:tc>
+                <a:tc>
+                  <a:txBody>
+                    <a:bodyPr/>
+                    <a:lstStyle/>
+                    <a:p>
+                      <a:r>
+                        <a:rPr sz="1100">
+                          <a:solidFill>
+                            <a:srgbClr val="475569"/>
+                          </a:solidFill>
+                          <a:latin typeface="Segoe UI"/>
+                        </a:rPr>
+                        <a:t>Always free at 25 GB and 25/25</a:t>
+                      </a:r>
+                    </a:p>
+                  </a:txBody>
+                  <a:tcPr>
+                    <a:solidFill>
+                      <a:srgbClr val="FFFFFF"/>
+                    </a:solidFill>
+                  </a:tcPr>
+                </a:tc>
+              </a:tr>
+              <a:tr h="294640">
+                <a:tc>
+                  <a:txBody>
+                    <a:bodyPr/>
+                    <a:lstStyle/>
+                    <a:p>
+                      <a:r>
+                        <a:rPr sz="1100">
+                          <a:solidFill>
+                            <a:srgbClr val="475569"/>
+                          </a:solidFill>
+                          <a:latin typeface="Segoe UI"/>
+                        </a:rPr>
+                        <a:t>Vector search</a:t>
+                      </a:r>
+                    </a:p>
+                  </a:txBody>
+                  <a:tcPr>
+                    <a:solidFill>
+                      <a:srgbClr val="F8FAFC"/>
+                    </a:solidFill>
+                  </a:tcPr>
+                </a:tc>
+                <a:tc>
+                  <a:txBody>
+                    <a:bodyPr/>
+                    <a:lstStyle/>
+                    <a:p>
+                      <a:r>
+                        <a:rPr sz="1100">
+                          <a:solidFill>
+                            <a:srgbClr val="475569"/>
+                          </a:solidFill>
+                          <a:latin typeface="Segoe UI"/>
+                        </a:rPr>
+                        <a:t>Brute-force cosine</a:t>
+                      </a:r>
+                    </a:p>
+                  </a:txBody>
+                  <a:tcPr>
+                    <a:solidFill>
+                      <a:srgbClr val="F8FAFC"/>
+                    </a:solidFill>
+                  </a:tcPr>
+                </a:tc>
+                <a:tc>
+                  <a:txBody>
+                    <a:bodyPr/>
+                    <a:lstStyle/>
+                    <a:p>
+                      <a:r>
+                        <a:rPr sz="1100">
+                          <a:solidFill>
+                            <a:srgbClr val="475569"/>
+                          </a:solidFill>
+                          <a:latin typeface="Segoe UI"/>
+                        </a:rPr>
+                        <a:t>20 tools needs no database</a:t>
+                      </a:r>
+                    </a:p>
+                  </a:txBody>
+                  <a:tcPr>
+                    <a:solidFill>
+                      <a:srgbClr val="F8FAFC"/>
+                    </a:solidFill>
+                  </a:tcPr>
+                </a:tc>
+              </a:tr>
+              <a:tr h="294640">
+                <a:tc>
+                  <a:txBody>
+                    <a:bodyPr/>
+                    <a:lstStyle/>
+                    <a:p>
+                      <a:r>
+                        <a:rPr sz="1100">
+                          <a:solidFill>
+                            <a:srgbClr val="475569"/>
+                          </a:solidFill>
+                          <a:latin typeface="Segoe UI"/>
+                        </a:rPr>
+                        <a:t>Embeddings</a:t>
+                      </a:r>
+                    </a:p>
+                  </a:txBody>
+                  <a:tcPr>
+                    <a:solidFill>
+                      <a:srgbClr val="FFFFFF"/>
+                    </a:solidFill>
+                  </a:tcPr>
+                </a:tc>
+                <a:tc>
+                  <a:txBody>
+                    <a:bodyPr/>
+                    <a:lstStyle/>
+                    <a:p>
+                      <a:r>
+                        <a:rPr sz="1100">
+                          <a:solidFill>
+                            <a:srgbClr val="475569"/>
+                          </a:solidFill>
+                          <a:latin typeface="Segoe UI"/>
+                        </a:rPr>
+                        <a:t>Bedrock Titan V2</a:t>
+                      </a:r>
+                    </a:p>
+                  </a:txBody>
+                  <a:tcPr>
+                    <a:solidFill>
+                      <a:srgbClr val="FFFFFF"/>
+                    </a:solidFill>
+                  </a:tcPr>
+                </a:tc>
+                <a:tc>
+                  <a:txBody>
+                    <a:bodyPr/>
+                    <a:lstStyle/>
+                    <a:p>
+                      <a:r>
+                        <a:rPr sz="1100">
+                          <a:solidFill>
+                            <a:srgbClr val="475569"/>
+                          </a:solidFill>
+                          <a:latin typeface="Segoe UI"/>
+                        </a:rPr>
+                        <a:t>Native to AWS, costs cents</a:t>
+                      </a:r>
+                    </a:p>
+                  </a:txBody>
+                  <a:tcPr>
+                    <a:solidFill>
+                      <a:srgbClr val="FFFFFF"/>
+                    </a:solidFill>
+                  </a:tcPr>
+                </a:tc>
+              </a:tr>
+              <a:tr h="294640">
+                <a:tc>
+                  <a:txBody>
+                    <a:bodyPr/>
+                    <a:lstStyle/>
+                    <a:p>
+                      <a:r>
+                        <a:rPr sz="1100">
+                          <a:solidFill>
+                            <a:srgbClr val="475569"/>
+                          </a:solidFill>
+                          <a:latin typeface="Segoe UI"/>
+                        </a:rPr>
+                        <a:t>IaC</a:t>
+                      </a:r>
+                    </a:p>
+                  </a:txBody>
+                  <a:tcPr>
+                    <a:solidFill>
+                      <a:srgbClr val="F8FAFC"/>
+                    </a:solidFill>
+                  </a:tcPr>
+                </a:tc>
+                <a:tc>
+                  <a:txBody>
+                    <a:bodyPr/>
+                    <a:lstStyle/>
+                    <a:p>
+                      <a:r>
+                        <a:rPr sz="1100">
+                          <a:solidFill>
+                            <a:srgbClr val="475569"/>
+                          </a:solidFill>
+                          <a:latin typeface="Segoe UI"/>
+                        </a:rPr>
+                        <a:t>Terraform 1.15, S3 backend</a:t>
+                      </a:r>
+                    </a:p>
+                  </a:txBody>
+                  <a:tcPr>
+                    <a:solidFill>
+                      <a:srgbClr val="F8FAFC"/>
+                    </a:solidFill>
+                  </a:tcPr>
+                </a:tc>
+                <a:tc>
+                  <a:txBody>
+                    <a:bodyPr/>
+                    <a:lstStyle/>
+                    <a:p>
+                      <a:r>
+                        <a:rPr sz="1100">
+                          <a:solidFill>
+                            <a:srgbClr val="475569"/>
+                          </a:solidFill>
+                          <a:latin typeface="Segoe UI"/>
+                        </a:rPr>
+                        <a:t>Same language as the services</a:t>
+                      </a:r>
+                    </a:p>
+                  </a:txBody>
+                  <a:tcPr>
+                    <a:solidFill>
+                      <a:srgbClr val="F8FAFC"/>
+                    </a:solidFill>
+                  </a:tcPr>
+                </a:tc>
+              </a:tr>
+              <a:tr h="294640">
+                <a:tc>
+                  <a:txBody>
+                    <a:bodyPr/>
+                    <a:lstStyle/>
+                    <a:p>
+                      <a:r>
+                        <a:rPr sz="1100">
+                          <a:solidFill>
+                            <a:srgbClr val="475569"/>
+                          </a:solidFill>
+                          <a:latin typeface="Segoe UI"/>
+                        </a:rPr>
+                        <a:t>Surface</a:t>
+                      </a:r>
+                    </a:p>
+                  </a:txBody>
+                  <a:tcPr>
+                    <a:solidFill>
+                      <a:srgbClr val="FFFFFF"/>
+                    </a:solidFill>
+                  </a:tcPr>
+                </a:tc>
+                <a:tc>
+                  <a:txBody>
+                    <a:bodyPr/>
+                    <a:lstStyle/>
+                    <a:p>
+                      <a:r>
+                        <a:rPr sz="1100">
+                          <a:solidFill>
+                            <a:srgbClr val="475569"/>
+                          </a:solidFill>
+                          <a:latin typeface="Segoe UI"/>
+                        </a:rPr>
+                        <a:t>HTTP API + CLI only</a:t>
+                      </a:r>
+                    </a:p>
+                  </a:txBody>
+                  <a:tcPr>
+                    <a:solidFill>
+                      <a:srgbClr val="FFFFFF"/>
+                    </a:solidFill>
+                  </a:tcPr>
+                </a:tc>
+                <a:tc>
+                  <a:txBody>
+                    <a:bodyPr/>
+                    <a:lstStyle/>
+                    <a:p>
+                      <a:r>
+                        <a:rPr sz="1100">
+                          <a:solidFill>
+                            <a:srgbClr val="475569"/>
+                          </a:solidFill>
+                          <a:latin typeface="Segoe UI"/>
+                        </a:rPr>
+                        <a:t>Roadmap says read the log by hand</a:t>
+                      </a:r>
+                    </a:p>
+                  </a:txBody>
+                  <a:tcPr>
+                    <a:solidFill>
+                      <a:srgbClr val="FFFFFF"/>
+                    </a:solidFill>
+                  </a:tcPr>
+                </a:tc>
+              </a:tr>
+              <a:tr h="294640">
+                <a:tc>
+                  <a:txBody>
+                    <a:bodyPr/>
+                    <a:lstStyle/>
+                    <a:p>
+                      <a:r>
+                        <a:rPr sz="1100">
+                          <a:solidFill>
+                            <a:srgbClr val="475569"/>
+                          </a:solidFill>
+                          <a:latin typeface="Segoe UI"/>
+                        </a:rPr>
+                        <a:t>Execution</a:t>
+                      </a:r>
+                    </a:p>
+                  </a:txBody>
+                  <a:tcPr>
+                    <a:solidFill>
+                      <a:srgbClr val="F8FAFC"/>
+                    </a:solidFill>
+                  </a:tcPr>
+                </a:tc>
+                <a:tc>
+                  <a:txBody>
+                    <a:bodyPr/>
+                    <a:lstStyle/>
+                    <a:p>
+                      <a:r>
+                        <a:rPr sz="1100">
+                          <a:solidFill>
+                            <a:srgbClr val="475569"/>
+                          </a:solidFill>
+                          <a:latin typeface="Segoe UI"/>
+                        </a:rPr>
+                        <a:t>Out of scope</a:t>
+                      </a:r>
+                    </a:p>
+                  </a:txBody>
+                  <a:tcPr>
+                    <a:solidFill>
+                      <a:srgbClr val="F8FAFC"/>
+                    </a:solidFill>
+                  </a:tcPr>
+                </a:tc>
+                <a:tc>
+                  <a:txBody>
+                    <a:bodyPr/>
+                    <a:lstStyle/>
+                    <a:p>
+                      <a:r>
+                        <a:rPr sz="1100">
+                          <a:solidFill>
+                            <a:srgbClr val="475569"/>
+                          </a:solidFill>
+                          <a:latin typeface="Segoe UI"/>
+                        </a:rPr>
+                        <a:t>Keeps the sandbox invariant untriggered</a:t>
+                      </a:r>
+                    </a:p>
+                  </a:txBody>
+                  <a:tcPr>
+                    <a:solidFill>
+                      <a:srgbClr val="F8FAFC"/>
+                    </a:solidFill>
+                  </a:tcPr>
+                </a:tc>
+              </a:tr>
+              <a:tr h="294023">
+                <a:tc>
+                  <a:txBody>
+                    <a:bodyPr/>
+                    <a:lstStyle/>
+                    <a:p>
+                      <a:r>
+                        <a:rPr sz="1100">
+                          <a:solidFill>
+                            <a:srgbClr val="475569"/>
+                          </a:solidFill>
+                          <a:latin typeface="Segoe UI"/>
+                        </a:rPr>
+                        <a:t>Eval queries</a:t>
+                      </a:r>
+                    </a:p>
+                  </a:txBody>
+                  <a:tcPr>
+                    <a:solidFill>
+                      <a:srgbClr val="F8FAFC"/>
+                    </a:solidFill>
+                  </a:tcPr>
+                </a:tc>
+                <a:tc>
+                  <a:txBody>
+                    <a:bodyPr/>
+                    <a:lstStyle/>
+                    <a:p>
+                      <a:r>
+                        <a:rPr sz="1100">
+                          <a:solidFill>
+                            <a:srgbClr val="475569"/>
+                          </a:solidFill>
+                          <a:latin typeface="Segoe UI"/>
+                        </a:rPr>
+                        <a:t>Written blind, non-Amazon model</a:t>
+                      </a:r>
+                    </a:p>
+                  </a:txBody>
+                  <a:tcPr>
+                    <a:solidFill>
+                      <a:srgbClr val="F8FAFC"/>
+                    </a:solidFill>
+                  </a:tcPr>
+                </a:tc>
+                <a:tc>
+                  <a:txBody>
+                    <a:bodyPr/>
+                    <a:lstStyle/>
+                    <a:p>
+                      <a:r>
+                        <a:rPr sz="1100">
+                          <a:solidFill>
+                            <a:srgbClr val="475569"/>
+                          </a:solidFill>
+                          <a:latin typeface="Segoe UI"/>
+                        </a:rPr>
+                        <a:t>Keeps query vocabulary independent of Titan</a:t>
+                      </a:r>
+                    </a:p>
+                  </a:txBody>
+                  <a:tcPr>
+                    <a:solidFill>
+                      <a:srgbClr val="F8FAFC"/>
+                    </a:solidFill>
+                  </a:tcPr>
+                </a:tc>
+              </a:tr>
+            </a:tbl>
+          </a:graphicData>
+        </a:graphic>
+      </p:graphicFrame>
     </p:spTree>
   </p:cSld>
   <p:clrMapOvr>
@@ -20192,6 +19834,840 @@
 </file>
 
 <file path=ppt/slides/slide36.xml><?xml version="1.0" encoding="utf-8"?>
+<p:sld xmlns:a="http://schemas.openxmlformats.org/drawingml/2006/main" xmlns:p="http://schemas.openxmlformats.org/presentationml/2006/main" xmlns:r="http://schemas.openxmlformats.org/officeDocument/2006/relationships">
+  <p:cSld>
+    <p:bg>
+      <p:bgPr>
+        <a:solidFill>
+          <a:srgbClr val="0F172A"/>
+        </a:solidFill>
+        <a:effectLst/>
+      </p:bgPr>
+    </p:bg>
+    <p:spTree>
+      <p:nvGrpSpPr>
+        <p:cNvPr id="1" name=""/>
+        <p:cNvGrpSpPr/>
+        <p:nvPr/>
+      </p:nvGrpSpPr>
+      <p:grpSpPr/>
+      <p:sp>
+        <p:nvSpPr>
+          <p:cNvPr id="2" name="Rectangle 1"/>
+          <p:cNvSpPr/>
+          <p:nvPr/>
+        </p:nvSpPr>
+        <p:spPr>
+          <a:xfrm>
+            <a:off x="0" y="0"/>
+            <a:ext cx="256032" cy="6858000"/>
+          </a:xfrm>
+          <a:prstGeom prst="rect">
+            <a:avLst/>
+          </a:prstGeom>
+          <a:solidFill>
+            <a:srgbClr val="ED7100"/>
+          </a:solidFill>
+          <a:ln>
+            <a:noFill/>
+          </a:ln>
+          <a:effectLst/>
+        </p:spPr>
+        <p:style>
+          <a:lnRef idx="1">
+            <a:schemeClr val="accent1"/>
+          </a:lnRef>
+          <a:fillRef idx="3">
+            <a:schemeClr val="accent1"/>
+          </a:fillRef>
+          <a:effectRef idx="2">
+            <a:schemeClr val="accent1"/>
+          </a:effectRef>
+          <a:fontRef idx="minor">
+            <a:schemeClr val="lt1"/>
+          </a:fontRef>
+        </p:style>
+        <p:txBody>
+          <a:bodyPr rtlCol="0" anchor="ctr"/>
+          <a:lstStyle/>
+          <a:p>
+            <a:pPr algn="ctr"/>
+          </a:p>
+        </p:txBody>
+      </p:sp>
+      <p:sp>
+        <p:nvSpPr>
+          <p:cNvPr id="3" name="TextBox 2"/>
+          <p:cNvSpPr txBox="1"/>
+          <p:nvPr/>
+        </p:nvSpPr>
+        <p:spPr>
+          <a:xfrm>
+            <a:off x="1005840" y="1280160"/>
+            <a:ext cx="10058400" cy="320040"/>
+          </a:xfrm>
+          <a:prstGeom prst="rect">
+            <a:avLst/>
+          </a:prstGeom>
+          <a:noFill/>
+        </p:spPr>
+        <p:txBody>
+          <a:bodyPr wrap="square" lIns="0" rIns="0" tIns="0" bIns="0">
+            <a:spAutoFit/>
+          </a:bodyPr>
+          <a:lstStyle/>
+          <a:p>
+            <a:pPr algn="l">
+              <a:lnSpc>
+                <a:spcPct val="100000"/>
+              </a:lnSpc>
+            </a:pPr>
+            <a:r>
+              <a:rPr sz="1300" b="1">
+                <a:solidFill>
+                  <a:srgbClr val="ED7100"/>
+                </a:solidFill>
+                <a:latin typeface="Segoe UI"/>
+              </a:rPr>
+              <a:t>NEXT</a:t>
+            </a:r>
+          </a:p>
+        </p:txBody>
+      </p:sp>
+      <p:sp>
+        <p:nvSpPr>
+          <p:cNvPr id="4" name="TextBox 3"/>
+          <p:cNvSpPr txBox="1"/>
+          <p:nvPr/>
+        </p:nvSpPr>
+        <p:spPr>
+          <a:xfrm>
+            <a:off x="1005840" y="1691640"/>
+            <a:ext cx="10241280" cy="731520"/>
+          </a:xfrm>
+          <a:prstGeom prst="rect">
+            <a:avLst/>
+          </a:prstGeom>
+          <a:noFill/>
+        </p:spPr>
+        <p:txBody>
+          <a:bodyPr wrap="square" lIns="0" rIns="0" tIns="0" bIns="0">
+            <a:spAutoFit/>
+          </a:bodyPr>
+          <a:lstStyle/>
+          <a:p>
+            <a:pPr algn="l">
+              <a:lnSpc>
+                <a:spcPct val="100000"/>
+              </a:lnSpc>
+            </a:pPr>
+            <a:r>
+              <a:rPr sz="3800" b="1">
+                <a:solidFill>
+                  <a:srgbClr val="FFFFFF"/>
+                </a:solidFill>
+                <a:latin typeface="Segoe UI"/>
+              </a:rPr>
+              <a:t>Where this goes from here</a:t>
+            </a:r>
+          </a:p>
+        </p:txBody>
+      </p:sp>
+      <p:sp>
+        <p:nvSpPr>
+          <p:cNvPr id="5" name="Oval 4"/>
+          <p:cNvSpPr/>
+          <p:nvPr/>
+        </p:nvSpPr>
+        <p:spPr>
+          <a:xfrm>
+            <a:off x="1005840" y="2852928"/>
+            <a:ext cx="329184" cy="329184"/>
+          </a:xfrm>
+          <a:prstGeom prst="ellipse">
+            <a:avLst/>
+          </a:prstGeom>
+          <a:solidFill>
+            <a:srgbClr val="ED7100"/>
+          </a:solidFill>
+          <a:ln>
+            <a:noFill/>
+          </a:ln>
+          <a:effectLst/>
+        </p:spPr>
+        <p:style>
+          <a:lnRef idx="1">
+            <a:schemeClr val="accent1"/>
+          </a:lnRef>
+          <a:fillRef idx="3">
+            <a:schemeClr val="accent1"/>
+          </a:fillRef>
+          <a:effectRef idx="2">
+            <a:schemeClr val="accent1"/>
+          </a:effectRef>
+          <a:fontRef idx="minor">
+            <a:schemeClr val="lt1"/>
+          </a:fontRef>
+        </p:style>
+        <p:txBody>
+          <a:bodyPr rtlCol="0" anchor="ctr"/>
+          <a:lstStyle/>
+          <a:p>
+            <a:pPr algn="ctr"/>
+            <a:r>
+              <a:rPr sz="1200" b="1">
+                <a:solidFill>
+                  <a:srgbClr val="FFFFFF"/>
+                </a:solidFill>
+                <a:latin typeface="Segoe UI"/>
+              </a:rPr>
+              <a:t>1</a:t>
+            </a:r>
+          </a:p>
+        </p:txBody>
+      </p:sp>
+      <p:sp>
+        <p:nvSpPr>
+          <p:cNvPr id="6" name="TextBox 5"/>
+          <p:cNvSpPr txBox="1"/>
+          <p:nvPr/>
+        </p:nvSpPr>
+        <p:spPr>
+          <a:xfrm>
+            <a:off x="1536192" y="2898648"/>
+            <a:ext cx="9509760" cy="365760"/>
+          </a:xfrm>
+          <a:prstGeom prst="rect">
+            <a:avLst/>
+          </a:prstGeom>
+          <a:noFill/>
+        </p:spPr>
+        <p:txBody>
+          <a:bodyPr wrap="square" lIns="0" rIns="0" tIns="0" bIns="0">
+            <a:spAutoFit/>
+          </a:bodyPr>
+          <a:lstStyle/>
+          <a:p>
+            <a:pPr algn="l">
+              <a:lnSpc>
+                <a:spcPct val="100000"/>
+              </a:lnSpc>
+            </a:pPr>
+            <a:r>
+              <a:rPr sz="1600" b="0">
+                <a:solidFill>
+                  <a:srgbClr val="FFFFFF"/>
+                </a:solidFill>
+                <a:latin typeface="Segoe UI"/>
+              </a:rPr>
+              <a:t>Confirm or overrule the nine assumptions</a:t>
+            </a:r>
+          </a:p>
+        </p:txBody>
+      </p:sp>
+      <p:sp>
+        <p:nvSpPr>
+          <p:cNvPr id="7" name="Oval 6"/>
+          <p:cNvSpPr/>
+          <p:nvPr/>
+        </p:nvSpPr>
+        <p:spPr>
+          <a:xfrm>
+            <a:off x="1005840" y="3419856"/>
+            <a:ext cx="329184" cy="329184"/>
+          </a:xfrm>
+          <a:prstGeom prst="ellipse">
+            <a:avLst/>
+          </a:prstGeom>
+          <a:solidFill>
+            <a:srgbClr val="ED7100"/>
+          </a:solidFill>
+          <a:ln>
+            <a:noFill/>
+          </a:ln>
+          <a:effectLst/>
+        </p:spPr>
+        <p:style>
+          <a:lnRef idx="1">
+            <a:schemeClr val="accent1"/>
+          </a:lnRef>
+          <a:fillRef idx="3">
+            <a:schemeClr val="accent1"/>
+          </a:fillRef>
+          <a:effectRef idx="2">
+            <a:schemeClr val="accent1"/>
+          </a:effectRef>
+          <a:fontRef idx="minor">
+            <a:schemeClr val="lt1"/>
+          </a:fontRef>
+        </p:style>
+        <p:txBody>
+          <a:bodyPr rtlCol="0" anchor="ctr"/>
+          <a:lstStyle/>
+          <a:p>
+            <a:pPr algn="ctr"/>
+            <a:r>
+              <a:rPr sz="1200" b="1">
+                <a:solidFill>
+                  <a:srgbClr val="FFFFFF"/>
+                </a:solidFill>
+                <a:latin typeface="Segoe UI"/>
+              </a:rPr>
+              <a:t>2</a:t>
+            </a:r>
+          </a:p>
+        </p:txBody>
+      </p:sp>
+      <p:sp>
+        <p:nvSpPr>
+          <p:cNvPr id="8" name="TextBox 7"/>
+          <p:cNvSpPr txBox="1"/>
+          <p:nvPr/>
+        </p:nvSpPr>
+        <p:spPr>
+          <a:xfrm>
+            <a:off x="1536192" y="3465576"/>
+            <a:ext cx="9509760" cy="365760"/>
+          </a:xfrm>
+          <a:prstGeom prst="rect">
+            <a:avLst/>
+          </a:prstGeom>
+          <a:noFill/>
+        </p:spPr>
+        <p:txBody>
+          <a:bodyPr wrap="square" lIns="0" rIns="0" tIns="0" bIns="0">
+            <a:spAutoFit/>
+          </a:bodyPr>
+          <a:lstStyle/>
+          <a:p>
+            <a:pPr algn="l">
+              <a:lnSpc>
+                <a:spcPct val="100000"/>
+              </a:lnSpc>
+            </a:pPr>
+            <a:r>
+              <a:rPr sz="1600" b="0">
+                <a:solidFill>
+                  <a:srgbClr val="FFFFFF"/>
+                </a:solidFill>
+                <a:latin typeface="Segoe UI"/>
+              </a:rPr>
+              <a:t>Confirm the account type, and check the credit expiry in billing</a:t>
+            </a:r>
+          </a:p>
+        </p:txBody>
+      </p:sp>
+      <p:sp>
+        <p:nvSpPr>
+          <p:cNvPr id="9" name="Oval 8"/>
+          <p:cNvSpPr/>
+          <p:nvPr/>
+        </p:nvSpPr>
+        <p:spPr>
+          <a:xfrm>
+            <a:off x="1005840" y="3986783"/>
+            <a:ext cx="329184" cy="329184"/>
+          </a:xfrm>
+          <a:prstGeom prst="ellipse">
+            <a:avLst/>
+          </a:prstGeom>
+          <a:solidFill>
+            <a:srgbClr val="ED7100"/>
+          </a:solidFill>
+          <a:ln>
+            <a:noFill/>
+          </a:ln>
+          <a:effectLst/>
+        </p:spPr>
+        <p:style>
+          <a:lnRef idx="1">
+            <a:schemeClr val="accent1"/>
+          </a:lnRef>
+          <a:fillRef idx="3">
+            <a:schemeClr val="accent1"/>
+          </a:fillRef>
+          <a:effectRef idx="2">
+            <a:schemeClr val="accent1"/>
+          </a:effectRef>
+          <a:fontRef idx="minor">
+            <a:schemeClr val="lt1"/>
+          </a:fontRef>
+        </p:style>
+        <p:txBody>
+          <a:bodyPr rtlCol="0" anchor="ctr"/>
+          <a:lstStyle/>
+          <a:p>
+            <a:pPr algn="ctr"/>
+            <a:r>
+              <a:rPr sz="1200" b="1">
+                <a:solidFill>
+                  <a:srgbClr val="FFFFFF"/>
+                </a:solidFill>
+                <a:latin typeface="Segoe UI"/>
+              </a:rPr>
+              <a:t>3</a:t>
+            </a:r>
+          </a:p>
+        </p:txBody>
+      </p:sp>
+      <p:sp>
+        <p:nvSpPr>
+          <p:cNvPr id="10" name="TextBox 9"/>
+          <p:cNvSpPr txBox="1"/>
+          <p:nvPr/>
+        </p:nvSpPr>
+        <p:spPr>
+          <a:xfrm>
+            <a:off x="1536192" y="4032503"/>
+            <a:ext cx="9509760" cy="365760"/>
+          </a:xfrm>
+          <a:prstGeom prst="rect">
+            <a:avLst/>
+          </a:prstGeom>
+          <a:noFill/>
+        </p:spPr>
+        <p:txBody>
+          <a:bodyPr wrap="square" lIns="0" rIns="0" tIns="0" bIns="0">
+            <a:spAutoFit/>
+          </a:bodyPr>
+          <a:lstStyle/>
+          <a:p>
+            <a:pPr algn="l">
+              <a:lnSpc>
+                <a:spcPct val="100000"/>
+              </a:lnSpc>
+            </a:pPr>
+            <a:r>
+              <a:rPr sz="1600" b="0">
+                <a:solidFill>
+                  <a:srgbClr val="FFFFFF"/>
+                </a:solidFill>
+                <a:latin typeface="Segoe UI"/>
+              </a:rPr>
+              <a:t>Pick the region and enable Bedrock Titan V2 model access there</a:t>
+            </a:r>
+          </a:p>
+        </p:txBody>
+      </p:sp>
+      <p:sp>
+        <p:nvSpPr>
+          <p:cNvPr id="11" name="Oval 10"/>
+          <p:cNvSpPr/>
+          <p:nvPr/>
+        </p:nvSpPr>
+        <p:spPr>
+          <a:xfrm>
+            <a:off x="1005840" y="4553712"/>
+            <a:ext cx="329184" cy="329184"/>
+          </a:xfrm>
+          <a:prstGeom prst="ellipse">
+            <a:avLst/>
+          </a:prstGeom>
+          <a:solidFill>
+            <a:srgbClr val="ED7100"/>
+          </a:solidFill>
+          <a:ln>
+            <a:noFill/>
+          </a:ln>
+          <a:effectLst/>
+        </p:spPr>
+        <p:style>
+          <a:lnRef idx="1">
+            <a:schemeClr val="accent1"/>
+          </a:lnRef>
+          <a:fillRef idx="3">
+            <a:schemeClr val="accent1"/>
+          </a:fillRef>
+          <a:effectRef idx="2">
+            <a:schemeClr val="accent1"/>
+          </a:effectRef>
+          <a:fontRef idx="minor">
+            <a:schemeClr val="lt1"/>
+          </a:fontRef>
+        </p:style>
+        <p:txBody>
+          <a:bodyPr rtlCol="0" anchor="ctr"/>
+          <a:lstStyle/>
+          <a:p>
+            <a:pPr algn="ctr"/>
+            <a:r>
+              <a:rPr sz="1200" b="1">
+                <a:solidFill>
+                  <a:srgbClr val="FFFFFF"/>
+                </a:solidFill>
+                <a:latin typeface="Segoe UI"/>
+              </a:rPr>
+              <a:t>4</a:t>
+            </a:r>
+          </a:p>
+        </p:txBody>
+      </p:sp>
+      <p:sp>
+        <p:nvSpPr>
+          <p:cNvPr id="12" name="TextBox 11"/>
+          <p:cNvSpPr txBox="1"/>
+          <p:nvPr/>
+        </p:nvSpPr>
+        <p:spPr>
+          <a:xfrm>
+            <a:off x="1536192" y="4599431"/>
+            <a:ext cx="9509760" cy="365760"/>
+          </a:xfrm>
+          <a:prstGeom prst="rect">
+            <a:avLst/>
+          </a:prstGeom>
+          <a:noFill/>
+        </p:spPr>
+        <p:txBody>
+          <a:bodyPr wrap="square" lIns="0" rIns="0" tIns="0" bIns="0">
+            <a:spAutoFit/>
+          </a:bodyPr>
+          <a:lstStyle/>
+          <a:p>
+            <a:pPr algn="l">
+              <a:lnSpc>
+                <a:spcPct val="100000"/>
+              </a:lnSpc>
+            </a:pPr>
+            <a:r>
+              <a:rPr sz="1600" b="0">
+                <a:solidFill>
+                  <a:srgbClr val="FFFFFF"/>
+                </a:solidFill>
+                <a:latin typeface="Segoe UI"/>
+              </a:rPr>
+              <a:t>Write the eval queries blind, before seeding anything</a:t>
+            </a:r>
+          </a:p>
+        </p:txBody>
+      </p:sp>
+      <p:sp>
+        <p:nvSpPr>
+          <p:cNvPr id="13" name="Oval 12"/>
+          <p:cNvSpPr/>
+          <p:nvPr/>
+        </p:nvSpPr>
+        <p:spPr>
+          <a:xfrm>
+            <a:off x="1005840" y="5120640"/>
+            <a:ext cx="329184" cy="329184"/>
+          </a:xfrm>
+          <a:prstGeom prst="ellipse">
+            <a:avLst/>
+          </a:prstGeom>
+          <a:solidFill>
+            <a:srgbClr val="ED7100"/>
+          </a:solidFill>
+          <a:ln>
+            <a:noFill/>
+          </a:ln>
+          <a:effectLst/>
+        </p:spPr>
+        <p:style>
+          <a:lnRef idx="1">
+            <a:schemeClr val="accent1"/>
+          </a:lnRef>
+          <a:fillRef idx="3">
+            <a:schemeClr val="accent1"/>
+          </a:fillRef>
+          <a:effectRef idx="2">
+            <a:schemeClr val="accent1"/>
+          </a:effectRef>
+          <a:fontRef idx="minor">
+            <a:schemeClr val="lt1"/>
+          </a:fontRef>
+        </p:style>
+        <p:txBody>
+          <a:bodyPr rtlCol="0" anchor="ctr"/>
+          <a:lstStyle/>
+          <a:p>
+            <a:pPr algn="ctr"/>
+            <a:r>
+              <a:rPr sz="1200" b="1">
+                <a:solidFill>
+                  <a:srgbClr val="FFFFFF"/>
+                </a:solidFill>
+                <a:latin typeface="Segoe UI"/>
+              </a:rPr>
+              <a:t>5</a:t>
+            </a:r>
+          </a:p>
+        </p:txBody>
+      </p:sp>
+      <p:sp>
+        <p:nvSpPr>
+          <p:cNvPr id="14" name="TextBox 13"/>
+          <p:cNvSpPr txBox="1"/>
+          <p:nvPr/>
+        </p:nvSpPr>
+        <p:spPr>
+          <a:xfrm>
+            <a:off x="1536192" y="5166359"/>
+            <a:ext cx="9509760" cy="365760"/>
+          </a:xfrm>
+          <a:prstGeom prst="rect">
+            <a:avLst/>
+          </a:prstGeom>
+          <a:noFill/>
+        </p:spPr>
+        <p:txBody>
+          <a:bodyPr wrap="square" lIns="0" rIns="0" tIns="0" bIns="0">
+            <a:spAutoFit/>
+          </a:bodyPr>
+          <a:lstStyle/>
+          <a:p>
+            <a:pPr algn="l">
+              <a:lnSpc>
+                <a:spcPct val="100000"/>
+              </a:lnSpc>
+            </a:pPr>
+            <a:r>
+              <a:rPr sz="1600" b="0">
+                <a:solidFill>
+                  <a:srgbClr val="FFFFFF"/>
+                </a:solidFill>
+                <a:latin typeface="Segoe UI"/>
+              </a:rPr>
+              <a:t>Create issues #1-#14, then start #1 and #3 in parallel</a:t>
+            </a:r>
+          </a:p>
+        </p:txBody>
+      </p:sp>
+      <p:sp>
+        <p:nvSpPr>
+          <p:cNvPr id="15" name="TextBox 14"/>
+          <p:cNvSpPr txBox="1"/>
+          <p:nvPr/>
+        </p:nvSpPr>
+        <p:spPr>
+          <a:xfrm>
+            <a:off x="1005840" y="5943600"/>
+            <a:ext cx="10515600" cy="274320"/>
+          </a:xfrm>
+          <a:prstGeom prst="rect">
+            <a:avLst/>
+          </a:prstGeom>
+          <a:noFill/>
+        </p:spPr>
+        <p:txBody>
+          <a:bodyPr wrap="square" lIns="0" rIns="0" tIns="0" bIns="0">
+            <a:spAutoFit/>
+          </a:bodyPr>
+          <a:lstStyle/>
+          <a:p>
+            <a:pPr algn="l">
+              <a:lnSpc>
+                <a:spcPct val="100000"/>
+              </a:lnSpc>
+            </a:pPr>
+            <a:r>
+              <a:rPr sz="1100" b="0">
+                <a:solidFill>
+                  <a:srgbClr val="64748B"/>
+                </a:solidFill>
+                <a:latin typeface="Segoe UI"/>
+              </a:rPr>
+              <a:t>Plan: docs/plans/phase-0-plan.md   ·   Board: miro.com/app/board/uXjVHpGFCos=</a:t>
+            </a:r>
+          </a:p>
+        </p:txBody>
+      </p:sp>
+    </p:spTree>
+  </p:cSld>
+  <p:clrMapOvr>
+    <a:masterClrMapping/>
+  </p:clrMapOvr>
+</p:sld>
+</file>
+
+<file path=ppt/slides/slide37.xml><?xml version="1.0" encoding="utf-8"?>
+<p:sld xmlns:a="http://schemas.openxmlformats.org/drawingml/2006/main" xmlns:p="http://schemas.openxmlformats.org/presentationml/2006/main" xmlns:r="http://schemas.openxmlformats.org/officeDocument/2006/relationships">
+  <p:cSld>
+    <p:bg>
+      <p:bgPr>
+        <a:solidFill>
+          <a:srgbClr val="0F172A"/>
+        </a:solidFill>
+        <a:effectLst/>
+      </p:bgPr>
+    </p:bg>
+    <p:spTree>
+      <p:nvGrpSpPr>
+        <p:cNvPr id="1" name=""/>
+        <p:cNvGrpSpPr/>
+        <p:nvPr/>
+      </p:nvGrpSpPr>
+      <p:grpSpPr/>
+      <p:sp>
+        <p:nvSpPr>
+          <p:cNvPr id="2" name="Rectangle 1"/>
+          <p:cNvSpPr/>
+          <p:nvPr/>
+        </p:nvSpPr>
+        <p:spPr>
+          <a:xfrm>
+            <a:off x="0" y="0"/>
+            <a:ext cx="256032" cy="6858000"/>
+          </a:xfrm>
+          <a:prstGeom prst="rect">
+            <a:avLst/>
+          </a:prstGeom>
+          <a:solidFill>
+            <a:srgbClr val="7B42D6"/>
+          </a:solidFill>
+          <a:ln>
+            <a:noFill/>
+          </a:ln>
+          <a:effectLst/>
+        </p:spPr>
+        <p:style>
+          <a:lnRef idx="1">
+            <a:schemeClr val="accent1"/>
+          </a:lnRef>
+          <a:fillRef idx="3">
+            <a:schemeClr val="accent1"/>
+          </a:fillRef>
+          <a:effectRef idx="2">
+            <a:schemeClr val="accent1"/>
+          </a:effectRef>
+          <a:fontRef idx="minor">
+            <a:schemeClr val="lt1"/>
+          </a:fontRef>
+        </p:style>
+        <p:txBody>
+          <a:bodyPr rtlCol="0" anchor="ctr"/>
+          <a:lstStyle/>
+          <a:p>
+            <a:pPr algn="ctr"/>
+          </a:p>
+        </p:txBody>
+      </p:sp>
+      <p:sp>
+        <p:nvSpPr>
+          <p:cNvPr id="3" name="TextBox 2"/>
+          <p:cNvSpPr txBox="1"/>
+          <p:nvPr/>
+        </p:nvSpPr>
+        <p:spPr>
+          <a:xfrm>
+            <a:off x="1005840" y="2468880"/>
+            <a:ext cx="10058400" cy="320040"/>
+          </a:xfrm>
+          <a:prstGeom prst="rect">
+            <a:avLst/>
+          </a:prstGeom>
+          <a:noFill/>
+        </p:spPr>
+        <p:txBody>
+          <a:bodyPr wrap="square" lIns="0" rIns="0" tIns="0" bIns="0">
+            <a:spAutoFit/>
+          </a:bodyPr>
+          <a:lstStyle/>
+          <a:p>
+            <a:pPr>
+              <a:lnSpc>
+                <a:spcPct val="100000"/>
+              </a:lnSpc>
+            </a:pPr>
+            <a:r>
+              <a:rPr sz="1300" b="1">
+                <a:solidFill>
+                  <a:srgbClr val="7B42D6"/>
+                </a:solidFill>
+                <a:latin typeface="Segoe UI"/>
+              </a:rPr>
+              <a:t>PART FIVE</a:t>
+            </a:r>
+          </a:p>
+        </p:txBody>
+      </p:sp>
+      <p:sp>
+        <p:nvSpPr>
+          <p:cNvPr id="4" name="TextBox 3"/>
+          <p:cNvSpPr txBox="1"/>
+          <p:nvPr/>
+        </p:nvSpPr>
+        <p:spPr>
+          <a:xfrm>
+            <a:off x="1005840" y="2880360"/>
+            <a:ext cx="10241280" cy="822960"/>
+          </a:xfrm>
+          <a:prstGeom prst="rect">
+            <a:avLst/>
+          </a:prstGeom>
+          <a:noFill/>
+        </p:spPr>
+        <p:txBody>
+          <a:bodyPr wrap="square" lIns="0" rIns="0" tIns="0" bIns="0">
+            <a:spAutoFit/>
+          </a:bodyPr>
+          <a:lstStyle/>
+          <a:p>
+            <a:pPr>
+              <a:lnSpc>
+                <a:spcPct val="100000"/>
+              </a:lnSpc>
+            </a:pPr>
+            <a:r>
+              <a:rPr sz="4000" b="1">
+                <a:solidFill>
+                  <a:srgbClr val="FFFFFF"/>
+                </a:solidFill>
+                <a:latin typeface="Segoe UI"/>
+              </a:rPr>
+              <a:t>What was actually built</a:t>
+            </a:r>
+          </a:p>
+        </p:txBody>
+      </p:sp>
+      <p:sp>
+        <p:nvSpPr>
+          <p:cNvPr id="5" name="TextBox 4"/>
+          <p:cNvSpPr txBox="1"/>
+          <p:nvPr/>
+        </p:nvSpPr>
+        <p:spPr>
+          <a:xfrm>
+            <a:off x="1005840" y="3931920"/>
+            <a:ext cx="8961120" cy="822960"/>
+          </a:xfrm>
+          <a:prstGeom prst="rect">
+            <a:avLst/>
+          </a:prstGeom>
+          <a:noFill/>
+        </p:spPr>
+        <p:txBody>
+          <a:bodyPr wrap="square" lIns="0" rIns="0" tIns="0" bIns="0">
+            <a:spAutoFit/>
+          </a:bodyPr>
+          <a:lstStyle/>
+          <a:p>
+            <a:pPr>
+              <a:lnSpc>
+                <a:spcPct val="120000"/>
+              </a:lnSpc>
+            </a:pPr>
+            <a:r>
+              <a:rPr sz="1600" b="0">
+                <a:solidFill>
+                  <a:srgbClr val="94A3B8"/>
+                </a:solidFill>
+                <a:latin typeface="Segoe UI"/>
+              </a:rPr>
+              <a:t>This section was added after the build. Where it disagrees with the plan above, the build is what happened.</a:t>
+            </a:r>
+          </a:p>
+        </p:txBody>
+      </p:sp>
+    </p:spTree>
+  </p:cSld>
+  <p:clrMapOvr>
+    <a:masterClrMapping/>
+  </p:clrMapOvr>
+</p:sld>
+</file>
+
+<file path=ppt/slides/slide38.xml><?xml version="1.0" encoding="utf-8"?>
 <p:sld xmlns:a="http://schemas.openxmlformats.org/drawingml/2006/main" xmlns:p="http://schemas.openxmlformats.org/presentationml/2006/main" xmlns:r="http://schemas.openxmlformats.org/officeDocument/2006/relationships">
   <p:cSld>
     <p:bg>
@@ -20231,7 +20707,7 @@
           </a:bodyPr>
           <a:lstStyle/>
           <a:p>
-            <a:pPr algn="l">
+            <a:pPr>
               <a:lnSpc>
                 <a:spcPct val="100000"/>
               </a:lnSpc>
@@ -20243,7 +20719,7 @@
                 </a:solidFill>
                 <a:latin typeface="Segoe UI"/>
               </a:rPr>
-              <a:t>BUILD DETAIL</a:t>
+              <a:t>BUILT</a:t>
             </a:r>
           </a:p>
         </p:txBody>
@@ -20270,7 +20746,7 @@
           </a:bodyPr>
           <a:lstStyle/>
           <a:p>
-            <a:pPr algn="l">
+            <a:pPr>
               <a:lnSpc>
                 <a:spcPct val="100000"/>
               </a:lnSpc>
@@ -20282,7 +20758,7 @@
                 </a:solidFill>
                 <a:latin typeface="Segoe UI"/>
               </a:rPr>
-              <a:t>Four smaller corrections worth making now</a:t>
+              <a:t>Terraform, not CDK</a:t>
             </a:r>
           </a:p>
         </p:txBody>
@@ -20340,7 +20816,7 @@
         <p:spPr>
           <a:xfrm>
             <a:off x="777240" y="1783080"/>
-            <a:ext cx="10515600" cy="4023360"/>
+            <a:ext cx="10424160" cy="457200"/>
           </a:xfrm>
           <a:prstGeom prst="rect">
             <a:avLst/>
@@ -20355,10 +20831,286 @@
           <a:p>
             <a:pPr>
               <a:lnSpc>
+                <a:spcPct val="100000"/>
+              </a:lnSpc>
+            </a:pPr>
+            <a:r>
+              <a:rPr sz="1500" b="0">
+                <a:solidFill>
+                  <a:srgbClr val="475569"/>
+                </a:solidFill>
+                <a:latin typeface="Segoe UI"/>
+              </a:rPr>
+              <a:t>Same architecture, different tool. The plan's build section has been updated to match.</a:t>
+            </a:r>
+          </a:p>
+        </p:txBody>
+      </p:sp>
+      <p:sp>
+        <p:nvSpPr>
+          <p:cNvPr id="6" name="Rounded Rectangle 5"/>
+          <p:cNvSpPr/>
+          <p:nvPr/>
+        </p:nvSpPr>
+        <p:spPr>
+          <a:xfrm>
+            <a:off x="777240" y="2350008"/>
+            <a:ext cx="10515600" cy="1924812"/>
+          </a:xfrm>
+          <a:prstGeom prst="roundRect">
+            <a:avLst/>
+          </a:prstGeom>
+          <a:solidFill>
+            <a:srgbClr val="1E293B"/>
+          </a:solidFill>
+          <a:ln>
+            <a:noFill/>
+          </a:ln>
+          <a:effectLst/>
+        </p:spPr>
+        <p:style>
+          <a:lnRef idx="1">
+            <a:schemeClr val="accent1"/>
+          </a:lnRef>
+          <a:fillRef idx="3">
+            <a:schemeClr val="accent1"/>
+          </a:fillRef>
+          <a:effectRef idx="2">
+            <a:schemeClr val="accent1"/>
+          </a:effectRef>
+          <a:fontRef idx="minor">
+            <a:schemeClr val="lt1"/>
+          </a:fontRef>
+        </p:style>
+        <p:txBody>
+          <a:bodyPr rtlCol="0" anchor="ctr"/>
+          <a:lstStyle/>
+          <a:p/>
+        </p:txBody>
+      </p:sp>
+      <p:sp>
+        <p:nvSpPr>
+          <p:cNvPr id="7" name="TextBox 6"/>
+          <p:cNvSpPr txBox="1"/>
+          <p:nvPr/>
+        </p:nvSpPr>
+        <p:spPr>
+          <a:xfrm>
+            <a:off x="978408" y="2487168"/>
+            <a:ext cx="10149840" cy="219456"/>
+          </a:xfrm>
+          <a:prstGeom prst="rect">
+            <a:avLst/>
+          </a:prstGeom>
+          <a:noFill/>
+        </p:spPr>
+        <p:txBody>
+          <a:bodyPr wrap="square" lIns="0" rIns="0" tIns="0" bIns="0">
+            <a:spAutoFit/>
+          </a:bodyPr>
+          <a:lstStyle/>
+          <a:p>
+            <a:pPr>
+              <a:lnSpc>
+                <a:spcPct val="100000"/>
+              </a:lnSpc>
+            </a:pPr>
+            <a:r>
+              <a:rPr sz="950" b="1">
+                <a:solidFill>
+                  <a:srgbClr val="94A3B8"/>
+                </a:solidFill>
+                <a:latin typeface="Segoe UI"/>
+              </a:rPr>
+              <a:t>STATE AND LOCKING</a:t>
+            </a:r>
+          </a:p>
+        </p:txBody>
+      </p:sp>
+      <p:sp>
+        <p:nvSpPr>
+          <p:cNvPr id="8" name="TextBox 7"/>
+          <p:cNvSpPr txBox="1"/>
+          <p:nvPr/>
+        </p:nvSpPr>
+        <p:spPr>
+          <a:xfrm>
+            <a:off x="978408" y="2761487"/>
+            <a:ext cx="10149840" cy="1650492"/>
+          </a:xfrm>
+          <a:prstGeom prst="rect">
+            <a:avLst/>
+          </a:prstGeom>
+          <a:noFill/>
+        </p:spPr>
+        <p:txBody>
+          <a:bodyPr wrap="square" lIns="0" rIns="0" tIns="0" bIns="0">
+            <a:spAutoFit/>
+          </a:bodyPr>
+          <a:lstStyle/>
+          <a:p>
+            <a:pPr>
+              <a:lnSpc>
+                <a:spcPct val="100000"/>
+              </a:lnSpc>
+              <a:spcAft>
+                <a:spcPts val="200"/>
+              </a:spcAft>
+            </a:pPr>
+            <a:r>
+              <a:rPr sz="1150">
+                <a:solidFill>
+                  <a:srgbClr val="E2E8F0"/>
+                </a:solidFill>
+                <a:latin typeface="Consolas"/>
+              </a:rPr>
+              <a:t>terraform {</a:t>
+            </a:r>
+          </a:p>
+          <a:p>
+            <a:pPr>
+              <a:lnSpc>
+                <a:spcPct val="100000"/>
+              </a:lnSpc>
+              <a:spcAft>
+                <a:spcPts val="200"/>
+              </a:spcAft>
+            </a:pPr>
+            <a:r>
+              <a:rPr sz="1150">
+                <a:solidFill>
+                  <a:srgbClr val="E2E8F0"/>
+                </a:solidFill>
+                <a:latin typeface="Consolas"/>
+              </a:rPr>
+              <a:t>  backend "s3" {</a:t>
+            </a:r>
+          </a:p>
+          <a:p>
+            <a:pPr>
+              <a:lnSpc>
+                <a:spcPct val="100000"/>
+              </a:lnSpc>
+              <a:spcAft>
+                <a:spcPts val="200"/>
+              </a:spcAft>
+            </a:pPr>
+            <a:r>
+              <a:rPr sz="1150">
+                <a:solidFill>
+                  <a:srgbClr val="E2E8F0"/>
+                </a:solidFill>
+                <a:latin typeface="Consolas"/>
+              </a:rPr>
+              <a:t>    bucket       = "local-shop-design-app-tfstate-258506450105"</a:t>
+            </a:r>
+          </a:p>
+          <a:p>
+            <a:pPr>
+              <a:lnSpc>
+                <a:spcPct val="100000"/>
+              </a:lnSpc>
+              <a:spcAft>
+                <a:spcPts val="200"/>
+              </a:spcAft>
+            </a:pPr>
+            <a:r>
+              <a:rPr sz="1150">
+                <a:solidFill>
+                  <a:srgbClr val="E2E8F0"/>
+                </a:solidFill>
+                <a:latin typeface="Consolas"/>
+              </a:rPr>
+              <a:t>    key          = "endless/phase-0/terraform.tfstate"</a:t>
+            </a:r>
+          </a:p>
+          <a:p>
+            <a:pPr>
+              <a:lnSpc>
+                <a:spcPct val="100000"/>
+              </a:lnSpc>
+              <a:spcAft>
+                <a:spcPts val="200"/>
+              </a:spcAft>
+            </a:pPr>
+            <a:r>
+              <a:rPr sz="1150">
+                <a:solidFill>
+                  <a:srgbClr val="E2E8F0"/>
+                </a:solidFill>
+                <a:latin typeface="Consolas"/>
+              </a:rPr>
+              <a:t>    use_lockfile = true      # S3-native locking, no DynamoDB lock table</a:t>
+            </a:r>
+          </a:p>
+          <a:p>
+            <a:pPr>
+              <a:lnSpc>
+                <a:spcPct val="100000"/>
+              </a:lnSpc>
+              <a:spcAft>
+                <a:spcPts val="200"/>
+              </a:spcAft>
+            </a:pPr>
+            <a:r>
+              <a:rPr sz="1150">
+                <a:solidFill>
+                  <a:srgbClr val="E2E8F0"/>
+                </a:solidFill>
+                <a:latin typeface="Consolas"/>
+              </a:rPr>
+              <a:t>  }</a:t>
+            </a:r>
+          </a:p>
+          <a:p>
+            <a:pPr>
+              <a:lnSpc>
+                <a:spcPct val="100000"/>
+              </a:lnSpc>
+              <a:spcAft>
+                <a:spcPts val="200"/>
+              </a:spcAft>
+            </a:pPr>
+            <a:r>
+              <a:rPr sz="1150">
+                <a:solidFill>
+                  <a:srgbClr val="E2E8F0"/>
+                </a:solidFill>
+                <a:latin typeface="Consolas"/>
+              </a:rPr>
+              <a:t>}</a:t>
+            </a:r>
+          </a:p>
+        </p:txBody>
+      </p:sp>
+      <p:sp>
+        <p:nvSpPr>
+          <p:cNvPr id="9" name="TextBox 8"/>
+          <p:cNvSpPr txBox="1"/>
+          <p:nvPr/>
+        </p:nvSpPr>
+        <p:spPr>
+          <a:xfrm>
+            <a:off x="777240" y="4133087"/>
+            <a:ext cx="10515600" cy="2377440"/>
+          </a:xfrm>
+          <a:prstGeom prst="rect">
+            <a:avLst/>
+          </a:prstGeom>
+          <a:noFill/>
+        </p:spPr>
+        <p:txBody>
+          <a:bodyPr wrap="square" lIns="0" rIns="0" tIns="0" bIns="0">
+            <a:spAutoFit/>
+          </a:bodyPr>
+          <a:lstStyle/>
+          <a:p>
+            <a:pPr>
+              <a:lnSpc>
                 <a:spcPct val="115000"/>
               </a:lnSpc>
               <a:spcAft>
-                <a:spcPts val="1100"/>
+                <a:spcPts val="1000"/>
               </a:spcAft>
             </a:pPr>
             <a:r>
@@ -20368,7 +21120,7 @@
                 </a:solidFill>
                 <a:latin typeface="Segoe UI"/>
               </a:rPr>
-              <a:t>One authority for vectors.</a:t>
+              <a:t>26 resources, applied and verified.</a:t>
             </a:r>
             <a:r>
               <a:rPr sz="1400">
@@ -20377,7 +21129,7 @@
                 </a:solidFill>
                 <a:latin typeface="Segoe UI"/>
               </a:rPr>
-              <a:t>  The tool row and the S3 snapshot both hold them. Name the row as the source and the snapshot as a derived cache, with a rebuild command — or they drift and nobody notices.</a:t>
+              <a:t>  Three DynamoDB tables, three Lambdas with Function URLs, per-function IAM roles, log groups, billing alarm.</a:t>
             </a:r>
           </a:p>
           <a:p>
@@ -20386,7 +21138,7 @@
                 <a:spcPct val="115000"/>
               </a:lnSpc>
               <a:spcAft>
-                <a:spcPts val="1100"/>
+                <a:spcPts val="1000"/>
               </a:spcAft>
             </a:pPr>
             <a:r>
@@ -20396,7 +21148,7 @@
                 </a:solidFill>
                 <a:latin typeface="Segoe UI"/>
               </a:rPr>
-              <a:t>One embedding function, one interface.</a:t>
+              <a:t>use_lockfile replaced the DynamoDB lock table.</a:t>
             </a:r>
             <a:r>
               <a:rPr sz="1400">
@@ -20405,7 +21157,7 @@
                 </a:solidFill>
                 <a:latin typeface="Segoe UI"/>
               </a:rPr>
-              <a:t>  Registry and search must embed through the same code path. Different preprocessing on the two sides is a silent and very common recall killer, and the swap in the fail path depends on it.</a:t>
+              <a:t>  Terraform 1.11 made S3-native locking through conditional writes the default approach. There is no lock table here, and there should not be.</a:t>
             </a:r>
           </a:p>
           <a:p>
@@ -20414,7 +21166,7 @@
                 <a:spcPct val="115000"/>
               </a:lnSpc>
               <a:spcAft>
-                <a:spcPts val="1100"/>
+                <a:spcPts val="1000"/>
               </a:spcAft>
             </a:pPr>
             <a:r>
@@ -20424,7 +21176,7 @@
                 </a:solidFill>
                 <a:latin typeface="Segoe UI"/>
               </a:rPr>
-              <a:t>The seeds may not need working wrappers.</a:t>
+              <a:t>The S3 vector cache was removed.</a:t>
             </a:r>
             <a:r>
               <a:rPr sz="1400">
@@ -20433,16 +21185,614 @@
                 </a:solidFill>
                 <a:latin typeface="Segoe UI"/>
               </a:rPr>
-              <a:t>  Phase 0 never executes anything and search only reads descriptions. Registering realistic metadata could cut the largest item — but Phase 1 needs real endpoints, so make it a choice.</a:t>
-            </a:r>
-          </a:p>
+              <a:t>  It was provisioned with IAM grants on both sides and a README describing a warm start, and no code ever touched it. The tool row is the only authority for a vector.</a:t>
+            </a:r>
+          </a:p>
+        </p:txBody>
+      </p:sp>
+    </p:spTree>
+  </p:cSld>
+  <p:clrMapOvr>
+    <a:masterClrMapping/>
+  </p:clrMapOvr>
+</p:sld>
+</file>
+
+<file path=ppt/slides/slide39.xml><?xml version="1.0" encoding="utf-8"?>
+<p:sld xmlns:a="http://schemas.openxmlformats.org/drawingml/2006/main" xmlns:p="http://schemas.openxmlformats.org/presentationml/2006/main" xmlns:r="http://schemas.openxmlformats.org/officeDocument/2006/relationships">
+  <p:cSld>
+    <p:bg>
+      <p:bgPr>
+        <a:solidFill>
+          <a:srgbClr val="FFFFFF"/>
+        </a:solidFill>
+        <a:effectLst/>
+      </p:bgPr>
+    </p:bg>
+    <p:spTree>
+      <p:nvGrpSpPr>
+        <p:cNvPr id="1" name=""/>
+        <p:cNvGrpSpPr/>
+        <p:nvPr/>
+      </p:nvGrpSpPr>
+      <p:grpSpPr/>
+      <p:sp>
+        <p:nvSpPr>
+          <p:cNvPr id="2" name="TextBox 1"/>
+          <p:cNvSpPr txBox="1"/>
+          <p:nvPr/>
+        </p:nvSpPr>
+        <p:spPr>
+          <a:xfrm>
+            <a:off x="777240" y="502920"/>
+            <a:ext cx="10607040" cy="274320"/>
+          </a:xfrm>
+          <a:prstGeom prst="rect">
+            <a:avLst/>
+          </a:prstGeom>
+          <a:noFill/>
+        </p:spPr>
+        <p:txBody>
+          <a:bodyPr wrap="square" lIns="0" rIns="0" tIns="0" bIns="0">
+            <a:spAutoFit/>
+          </a:bodyPr>
+          <a:lstStyle/>
           <a:p>
             <a:pPr>
               <a:lnSpc>
+                <a:spcPct val="100000"/>
+              </a:lnSpc>
+            </a:pPr>
+            <a:r>
+              <a:rPr sz="1100" b="1">
+                <a:solidFill>
+                  <a:srgbClr val="94A3B8"/>
+                </a:solidFill>
+                <a:latin typeface="Segoe UI"/>
+              </a:rPr>
+              <a:t>BUILT</a:t>
+            </a:r>
+          </a:p>
+        </p:txBody>
+      </p:sp>
+      <p:sp>
+        <p:nvSpPr>
+          <p:cNvPr id="3" name="TextBox 2"/>
+          <p:cNvSpPr txBox="1"/>
+          <p:nvPr/>
+        </p:nvSpPr>
+        <p:spPr>
+          <a:xfrm>
+            <a:off x="777240" y="841248"/>
+            <a:ext cx="10607040" cy="640080"/>
+          </a:xfrm>
+          <a:prstGeom prst="rect">
+            <a:avLst/>
+          </a:prstGeom>
+          <a:noFill/>
+        </p:spPr>
+        <p:txBody>
+          <a:bodyPr wrap="square" lIns="0" rIns="0" tIns="0" bIns="0">
+            <a:spAutoFit/>
+          </a:bodyPr>
+          <a:lstStyle/>
+          <a:p>
+            <a:pPr>
+              <a:lnSpc>
+                <a:spcPct val="100000"/>
+              </a:lnSpc>
+            </a:pPr>
+            <a:r>
+              <a:rPr sz="3100" b="1">
+                <a:solidFill>
+                  <a:srgbClr val="0F172A"/>
+                </a:solidFill>
+                <a:latin typeface="Segoe UI"/>
+              </a:rPr>
+              <a:t>The CI/CD pipeline</a:t>
+            </a:r>
+          </a:p>
+        </p:txBody>
+      </p:sp>
+      <p:sp>
+        <p:nvSpPr>
+          <p:cNvPr id="4" name="Rectangle 3"/>
+          <p:cNvSpPr/>
+          <p:nvPr/>
+        </p:nvSpPr>
+        <p:spPr>
+          <a:xfrm>
+            <a:off x="777240" y="1572768"/>
+            <a:ext cx="1005840" cy="41148"/>
+          </a:xfrm>
+          <a:prstGeom prst="rect">
+            <a:avLst/>
+          </a:prstGeom>
+          <a:solidFill>
+            <a:srgbClr val="ED7100"/>
+          </a:solidFill>
+          <a:ln>
+            <a:noFill/>
+          </a:ln>
+          <a:effectLst/>
+        </p:spPr>
+        <p:style>
+          <a:lnRef idx="1">
+            <a:schemeClr val="accent1"/>
+          </a:lnRef>
+          <a:fillRef idx="3">
+            <a:schemeClr val="accent1"/>
+          </a:fillRef>
+          <a:effectRef idx="2">
+            <a:schemeClr val="accent1"/>
+          </a:effectRef>
+          <a:fontRef idx="minor">
+            <a:schemeClr val="lt1"/>
+          </a:fontRef>
+        </p:style>
+        <p:txBody>
+          <a:bodyPr rtlCol="0" anchor="ctr"/>
+          <a:lstStyle/>
+          <a:p>
+            <a:pPr algn="ctr"/>
+          </a:p>
+        </p:txBody>
+      </p:sp>
+      <p:sp>
+        <p:nvSpPr>
+          <p:cNvPr id="5" name="TextBox 4"/>
+          <p:cNvSpPr txBox="1"/>
+          <p:nvPr/>
+        </p:nvSpPr>
+        <p:spPr>
+          <a:xfrm>
+            <a:off x="777240" y="1783080"/>
+            <a:ext cx="10424160" cy="457200"/>
+          </a:xfrm>
+          <a:prstGeom prst="rect">
+            <a:avLst/>
+          </a:prstGeom>
+          <a:noFill/>
+        </p:spPr>
+        <p:txBody>
+          <a:bodyPr wrap="square" lIns="0" rIns="0" tIns="0" bIns="0">
+            <a:spAutoFit/>
+          </a:bodyPr>
+          <a:lstStyle/>
+          <a:p>
+            <a:pPr>
+              <a:lnSpc>
+                <a:spcPct val="100000"/>
+              </a:lnSpc>
+            </a:pPr>
+            <a:r>
+              <a:rPr sz="1500" b="0">
+                <a:solidFill>
+                  <a:srgbClr val="475569"/>
+                </a:solidFill>
+                <a:latin typeface="Segoe UI"/>
+              </a:rPr>
+              <a:t>GitHub Actions to AWS over OIDC. No stored credentials anywhere.</a:t>
+            </a:r>
+          </a:p>
+        </p:txBody>
+      </p:sp>
+      <p:graphicFrame>
+        <p:nvGraphicFramePr>
+          <p:cNvPr id="6" name="Table 5"/>
+          <p:cNvGraphicFramePr>
+            <a:graphicFrameLocks noGrp="1"/>
+          </p:cNvGraphicFramePr>
+          <p:nvPr/>
+        </p:nvGraphicFramePr>
+        <p:xfrm>
+          <a:off x="777240" y="2350008"/>
+          <a:ext cx="10515600" cy="1188720"/>
+        </p:xfrm>
+        <a:graphic>
+          <a:graphicData uri="http://schemas.openxmlformats.org/drawingml/2006/table">
+            <a:tbl>
+              <a:tblPr firstRow="1" bandRow="1">
+                <a:tableStyleId>{5C22544A-7EE6-4342-B048-85BDC9FD1C3A}</a:tableStyleId>
+              </a:tblPr>
+              <a:tblGrid>
+                <a:gridCol w="2194560"/>
+                <a:gridCol w="2743200"/>
+                <a:gridCol w="2834640"/>
+                <a:gridCol w="2743200"/>
+              </a:tblGrid>
+              <a:tr h="297180">
+                <a:tc>
+                  <a:txBody>
+                    <a:bodyPr/>
+                    <a:lstStyle/>
+                    <a:p>
+                      <a:r>
+                        <a:rPr sz="1100" b="1">
+                          <a:solidFill>
+                            <a:srgbClr val="FFFFFF"/>
+                          </a:solidFill>
+                          <a:latin typeface="Segoe UI"/>
+                        </a:rPr>
+                        <a:t>Workflow</a:t>
+                      </a:r>
+                    </a:p>
+                  </a:txBody>
+                  <a:tcPr>
+                    <a:solidFill>
+                      <a:srgbClr val="0F172A"/>
+                    </a:solidFill>
+                  </a:tcPr>
+                </a:tc>
+                <a:tc>
+                  <a:txBody>
+                    <a:bodyPr/>
+                    <a:lstStyle/>
+                    <a:p>
+                      <a:r>
+                        <a:rPr sz="1100" b="1">
+                          <a:solidFill>
+                            <a:srgbClr val="FFFFFF"/>
+                          </a:solidFill>
+                          <a:latin typeface="Segoe UI"/>
+                        </a:rPr>
+                        <a:t>Trigger</a:t>
+                      </a:r>
+                    </a:p>
+                  </a:txBody>
+                  <a:tcPr>
+                    <a:solidFill>
+                      <a:srgbClr val="0F172A"/>
+                    </a:solidFill>
+                  </a:tcPr>
+                </a:tc>
+                <a:tc>
+                  <a:txBody>
+                    <a:bodyPr/>
+                    <a:lstStyle/>
+                    <a:p>
+                      <a:r>
+                        <a:rPr sz="1100" b="1">
+                          <a:solidFill>
+                            <a:srgbClr val="FFFFFF"/>
+                          </a:solidFill>
+                          <a:latin typeface="Segoe UI"/>
+                        </a:rPr>
+                        <a:t>Role</a:t>
+                      </a:r>
+                    </a:p>
+                  </a:txBody>
+                  <a:tcPr>
+                    <a:solidFill>
+                      <a:srgbClr val="0F172A"/>
+                    </a:solidFill>
+                  </a:tcPr>
+                </a:tc>
+                <a:tc>
+                  <a:txBody>
+                    <a:bodyPr/>
+                    <a:lstStyle/>
+                    <a:p>
+                      <a:r>
+                        <a:rPr sz="1100" b="1">
+                          <a:solidFill>
+                            <a:srgbClr val="FFFFFF"/>
+                          </a:solidFill>
+                          <a:latin typeface="Segoe UI"/>
+                        </a:rPr>
+                        <a:t>Can</a:t>
+                      </a:r>
+                    </a:p>
+                  </a:txBody>
+                  <a:tcPr>
+                    <a:solidFill>
+                      <a:srgbClr val="0F172A"/>
+                    </a:solidFill>
+                  </a:tcPr>
+                </a:tc>
+              </a:tr>
+              <a:tr h="297180">
+                <a:tc>
+                  <a:txBody>
+                    <a:bodyPr/>
+                    <a:lstStyle/>
+                    <a:p>
+                      <a:r>
+                        <a:rPr sz="1100">
+                          <a:solidFill>
+                            <a:srgbClr val="475569"/>
+                          </a:solidFill>
+                          <a:latin typeface="Segoe UI"/>
+                        </a:rPr>
+                        <a:t>terraform plan</a:t>
+                      </a:r>
+                    </a:p>
+                  </a:txBody>
+                  <a:tcPr>
+                    <a:solidFill>
+                      <a:srgbClr val="FFFFFF"/>
+                    </a:solidFill>
+                  </a:tcPr>
+                </a:tc>
+                <a:tc>
+                  <a:txBody>
+                    <a:bodyPr/>
+                    <a:lstStyle/>
+                    <a:p>
+                      <a:r>
+                        <a:rPr sz="1100">
+                          <a:solidFill>
+                            <a:srgbClr val="475569"/>
+                          </a:solidFill>
+                          <a:latin typeface="Segoe UI"/>
+                        </a:rPr>
+                        <a:t>PR, branch push</a:t>
+                      </a:r>
+                    </a:p>
+                  </a:txBody>
+                  <a:tcPr>
+                    <a:solidFill>
+                      <a:srgbClr val="FFFFFF"/>
+                    </a:solidFill>
+                  </a:tcPr>
+                </a:tc>
+                <a:tc>
+                  <a:txBody>
+                    <a:bodyPr/>
+                    <a:lstStyle/>
+                    <a:p>
+                      <a:r>
+                        <a:rPr sz="1100">
+                          <a:solidFill>
+                            <a:srgbClr val="475569"/>
+                          </a:solidFill>
+                          <a:latin typeface="Segoe UI"/>
+                        </a:rPr>
+                        <a:t>endless-gha-plan</a:t>
+                      </a:r>
+                    </a:p>
+                  </a:txBody>
+                  <a:tcPr>
+                    <a:solidFill>
+                      <a:srgbClr val="FFFFFF"/>
+                    </a:solidFill>
+                  </a:tcPr>
+                </a:tc>
+                <a:tc>
+                  <a:txBody>
+                    <a:bodyPr/>
+                    <a:lstStyle/>
+                    <a:p>
+                      <a:r>
+                        <a:rPr sz="1100">
+                          <a:solidFill>
+                            <a:srgbClr val="475569"/>
+                          </a:solidFill>
+                          <a:latin typeface="Segoe UI"/>
+                        </a:rPr>
+                        <a:t>read only, any ref</a:t>
+                      </a:r>
+                    </a:p>
+                  </a:txBody>
+                  <a:tcPr>
+                    <a:solidFill>
+                      <a:srgbClr val="FFFFFF"/>
+                    </a:solidFill>
+                  </a:tcPr>
+                </a:tc>
+              </a:tr>
+              <a:tr h="297180">
+                <a:tc>
+                  <a:txBody>
+                    <a:bodyPr/>
+                    <a:lstStyle/>
+                    <a:p>
+                      <a:r>
+                        <a:rPr sz="1100">
+                          <a:solidFill>
+                            <a:srgbClr val="475569"/>
+                          </a:solidFill>
+                          <a:latin typeface="Segoe UI"/>
+                        </a:rPr>
+                        <a:t>terraform apply</a:t>
+                      </a:r>
+                    </a:p>
+                  </a:txBody>
+                  <a:tcPr>
+                    <a:solidFill>
+                      <a:srgbClr val="F8FAFC"/>
+                    </a:solidFill>
+                  </a:tcPr>
+                </a:tc>
+                <a:tc>
+                  <a:txBody>
+                    <a:bodyPr/>
+                    <a:lstStyle/>
+                    <a:p>
+                      <a:r>
+                        <a:rPr sz="1100">
+                          <a:solidFill>
+                            <a:srgbClr val="475569"/>
+                          </a:solidFill>
+                          <a:latin typeface="Segoe UI"/>
+                        </a:rPr>
+                        <a:t>manual dispatch</a:t>
+                      </a:r>
+                    </a:p>
+                  </a:txBody>
+                  <a:tcPr>
+                    <a:solidFill>
+                      <a:srgbClr val="F8FAFC"/>
+                    </a:solidFill>
+                  </a:tcPr>
+                </a:tc>
+                <a:tc>
+                  <a:txBody>
+                    <a:bodyPr/>
+                    <a:lstStyle/>
+                    <a:p>
+                      <a:r>
+                        <a:rPr sz="1100">
+                          <a:solidFill>
+                            <a:srgbClr val="475569"/>
+                          </a:solidFill>
+                          <a:latin typeface="Segoe UI"/>
+                        </a:rPr>
+                        <a:t>endless-gha-apply</a:t>
+                      </a:r>
+                    </a:p>
+                  </a:txBody>
+                  <a:tcPr>
+                    <a:solidFill>
+                      <a:srgbClr val="F8FAFC"/>
+                    </a:solidFill>
+                  </a:tcPr>
+                </a:tc>
+                <a:tc>
+                  <a:txBody>
+                    <a:bodyPr/>
+                    <a:lstStyle/>
+                    <a:p>
+                      <a:r>
+                        <a:rPr sz="1100">
+                          <a:solidFill>
+                            <a:srgbClr val="475569"/>
+                          </a:solidFill>
+                          <a:latin typeface="Segoe UI"/>
+                        </a:rPr>
+                        <a:t>write, main only</a:t>
+                      </a:r>
+                    </a:p>
+                  </a:txBody>
+                  <a:tcPr>
+                    <a:solidFill>
+                      <a:srgbClr val="F8FAFC"/>
+                    </a:solidFill>
+                  </a:tcPr>
+                </a:tc>
+              </a:tr>
+              <a:tr h="297180">
+                <a:tc>
+                  <a:txBody>
+                    <a:bodyPr/>
+                    <a:lstStyle/>
+                    <a:p>
+                      <a:r>
+                        <a:rPr sz="1100">
+                          <a:solidFill>
+                            <a:srgbClr val="475569"/>
+                          </a:solidFill>
+                          <a:latin typeface="Segoe UI"/>
+                        </a:rPr>
+                        <a:t>lambda ci</a:t>
+                      </a:r>
+                    </a:p>
+                  </a:txBody>
+                  <a:tcPr>
+                    <a:solidFill>
+                      <a:srgbClr val="FFFFFF"/>
+                    </a:solidFill>
+                  </a:tcPr>
+                </a:tc>
+                <a:tc>
+                  <a:txBody>
+                    <a:bodyPr/>
+                    <a:lstStyle/>
+                    <a:p>
+                      <a:r>
+                        <a:rPr sz="1100">
+                          <a:solidFill>
+                            <a:srgbClr val="475569"/>
+                          </a:solidFill>
+                          <a:latin typeface="Segoe UI"/>
+                        </a:rPr>
+                        <a:t>lambda/ or tests/ change</a:t>
+                      </a:r>
+                    </a:p>
+                  </a:txBody>
+                  <a:tcPr>
+                    <a:solidFill>
+                      <a:srgbClr val="FFFFFF"/>
+                    </a:solidFill>
+                  </a:tcPr>
+                </a:tc>
+                <a:tc>
+                  <a:txBody>
+                    <a:bodyPr/>
+                    <a:lstStyle/>
+                    <a:p>
+                      <a:r>
+                        <a:rPr sz="1100">
+                          <a:solidFill>
+                            <a:srgbClr val="475569"/>
+                          </a:solidFill>
+                          <a:latin typeface="Segoe UI"/>
+                        </a:rPr>
+                        <a:t>none</a:t>
+                      </a:r>
+                    </a:p>
+                  </a:txBody>
+                  <a:tcPr>
+                    <a:solidFill>
+                      <a:srgbClr val="FFFFFF"/>
+                    </a:solidFill>
+                  </a:tcPr>
+                </a:tc>
+                <a:tc>
+                  <a:txBody>
+                    <a:bodyPr/>
+                    <a:lstStyle/>
+                    <a:p>
+                      <a:r>
+                        <a:rPr sz="1100">
+                          <a:solidFill>
+                            <a:srgbClr val="475569"/>
+                          </a:solidFill>
+                          <a:latin typeface="Segoe UI"/>
+                        </a:rPr>
+                        <a:t>no AWS access at all</a:t>
+                      </a:r>
+                    </a:p>
+                  </a:txBody>
+                  <a:tcPr>
+                    <a:solidFill>
+                      <a:srgbClr val="FFFFFF"/>
+                    </a:solidFill>
+                  </a:tcPr>
+                </a:tc>
+              </a:tr>
+            </a:tbl>
+          </a:graphicData>
+        </a:graphic>
+      </p:graphicFrame>
+      <p:sp>
+        <p:nvSpPr>
+          <p:cNvPr id="7" name="TextBox 6"/>
+          <p:cNvSpPr txBox="1"/>
+          <p:nvPr/>
+        </p:nvSpPr>
+        <p:spPr>
+          <a:xfrm>
+            <a:off x="777240" y="3721608"/>
+            <a:ext cx="10515600" cy="2743200"/>
+          </a:xfrm>
+          <a:prstGeom prst="rect">
+            <a:avLst/>
+          </a:prstGeom>
+          <a:noFill/>
+        </p:spPr>
+        <p:txBody>
+          <a:bodyPr wrap="square" lIns="0" rIns="0" tIns="0" bIns="0">
+            <a:spAutoFit/>
+          </a:bodyPr>
+          <a:lstStyle/>
+          <a:p>
+            <a:pPr>
+              <a:lnSpc>
                 <a:spcPct val="115000"/>
               </a:lnSpc>
               <a:spcAft>
-                <a:spcPts val="1100"/>
+                <a:spcPts val="1000"/>
               </a:spcAft>
             </a:pPr>
             <a:r>
@@ -20452,7 +21802,7 @@
                 </a:solidFill>
                 <a:latin typeface="Segoe UI"/>
               </a:rPr>
-              <a:t>Close the open Function URL before Phase 1.</a:t>
+              <a:t>A role ARN is not a secret.</a:t>
             </a:r>
             <a:r>
               <a:rPr sz="1400">
@@ -20461,7 +21811,91 @@
                 </a:solidFill>
                 <a:latin typeface="Segoe UI"/>
               </a:rPr>
-              <a:t>  An unauthenticated URL that calls Bedrock is an unbounded cost surface. The $5 alarm caps a dev phase; it is not a control.</a:t>
+              <a:t>  It sits in plain text in the workflow files and is useless to anyone whose OIDC token does not satisfy the trust policy.</a:t>
+            </a:r>
+          </a:p>
+          <a:p>
+            <a:pPr>
+              <a:lnSpc>
+                <a:spcPct val="115000"/>
+              </a:lnSpc>
+              <a:spcAft>
+                <a:spcPts val="1000"/>
+              </a:spcAft>
+            </a:pPr>
+            <a:r>
+              <a:rPr sz="1400" b="1">
+                <a:solidFill>
+                  <a:srgbClr val="0F172A"/>
+                </a:solidFill>
+                <a:latin typeface="Segoe UI"/>
+              </a:rPr>
+              <a:t>The branch restriction lives in the trust policy, not the workflow.</a:t>
+            </a:r>
+            <a:r>
+              <a:rPr sz="1400">
+                <a:solidFill>
+                  <a:srgbClr val="475569"/>
+                </a:solidFill>
+                <a:latin typeface="Segoe UI"/>
+              </a:rPr>
+              <a:t>  Editing a workflow file on a branch cannot grant apply rights, because AWS checks the branch claim in the token itself.</a:t>
+            </a:r>
+          </a:p>
+          <a:p>
+            <a:pPr>
+              <a:lnSpc>
+                <a:spcPct val="115000"/>
+              </a:lnSpc>
+              <a:spcAft>
+                <a:spcPts val="1000"/>
+              </a:spcAft>
+            </a:pPr>
+            <a:r>
+              <a:rPr sz="1400" b="1">
+                <a:solidFill>
+                  <a:srgbClr val="0F172A"/>
+                </a:solidFill>
+                <a:latin typeface="Segoe UI"/>
+              </a:rPr>
+              <a:t>Bootstrap is a separate state, applied by hand.</a:t>
+            </a:r>
+            <a:r>
+              <a:rPr sz="1400">
+                <a:solidFill>
+                  <a:srgbClr val="475569"/>
+                </a:solidFill>
+                <a:latin typeface="Segoe UI"/>
+              </a:rPr>
+              <a:t>  So a bad apply in CI cannot delete the role CI authenticates with.</a:t>
+            </a:r>
+          </a:p>
+          <a:p>
+            <a:pPr>
+              <a:lnSpc>
+                <a:spcPct val="115000"/>
+              </a:lnSpc>
+              <a:spcAft>
+                <a:spcPts val="1000"/>
+              </a:spcAft>
+            </a:pPr>
+            <a:r>
+              <a:rPr sz="1400" b="1">
+                <a:solidFill>
+                  <a:srgbClr val="0F172A"/>
+                </a:solidFill>
+                <a:latin typeface="Segoe UI"/>
+              </a:rPr>
+              <a:t>Apply is gated by a typed confirmation, not a reviewer.</a:t>
+            </a:r>
+            <a:r>
+              <a:rPr sz="1400">
+                <a:solidFill>
+                  <a:srgbClr val="475569"/>
+                </a:solidFill>
+                <a:latin typeface="Segoe UI"/>
+              </a:rPr>
+              <a:t>  GitHub Environments need repo admin, which this account does not have. Replace it with environment: production the moment admin is granted.</a:t>
             </a:r>
           </a:p>
         </p:txBody>
@@ -21001,6 +22435,2239 @@
           </a:p>
         </p:txBody>
       </p:sp>
+    </p:spTree>
+  </p:cSld>
+  <p:clrMapOvr>
+    <a:masterClrMapping/>
+  </p:clrMapOvr>
+</p:sld>
+</file>
+
+<file path=ppt/slides/slide40.xml><?xml version="1.0" encoding="utf-8"?>
+<p:sld xmlns:a="http://schemas.openxmlformats.org/drawingml/2006/main" xmlns:p="http://schemas.openxmlformats.org/presentationml/2006/main" xmlns:r="http://schemas.openxmlformats.org/officeDocument/2006/relationships">
+  <p:cSld>
+    <p:bg>
+      <p:bgPr>
+        <a:solidFill>
+          <a:srgbClr val="FFFFFF"/>
+        </a:solidFill>
+        <a:effectLst/>
+      </p:bgPr>
+    </p:bg>
+    <p:spTree>
+      <p:nvGrpSpPr>
+        <p:cNvPr id="1" name=""/>
+        <p:cNvGrpSpPr/>
+        <p:nvPr/>
+      </p:nvGrpSpPr>
+      <p:grpSpPr/>
+      <p:sp>
+        <p:nvSpPr>
+          <p:cNvPr id="2" name="TextBox 1"/>
+          <p:cNvSpPr txBox="1"/>
+          <p:nvPr/>
+        </p:nvSpPr>
+        <p:spPr>
+          <a:xfrm>
+            <a:off x="777240" y="502920"/>
+            <a:ext cx="10607040" cy="274320"/>
+          </a:xfrm>
+          <a:prstGeom prst="rect">
+            <a:avLst/>
+          </a:prstGeom>
+          <a:noFill/>
+        </p:spPr>
+        <p:txBody>
+          <a:bodyPr wrap="square" lIns="0" rIns="0" tIns="0" bIns="0">
+            <a:spAutoFit/>
+          </a:bodyPr>
+          <a:lstStyle/>
+          <a:p>
+            <a:pPr>
+              <a:lnSpc>
+                <a:spcPct val="100000"/>
+              </a:lnSpc>
+            </a:pPr>
+            <a:r>
+              <a:rPr sz="1100" b="1">
+                <a:solidFill>
+                  <a:srgbClr val="94A3B8"/>
+                </a:solidFill>
+                <a:latin typeface="Segoe UI"/>
+              </a:rPr>
+              <a:t>BUILT</a:t>
+            </a:r>
+          </a:p>
+        </p:txBody>
+      </p:sp>
+      <p:sp>
+        <p:nvSpPr>
+          <p:cNvPr id="3" name="TextBox 2"/>
+          <p:cNvSpPr txBox="1"/>
+          <p:nvPr/>
+        </p:nvSpPr>
+        <p:spPr>
+          <a:xfrm>
+            <a:off x="777240" y="841248"/>
+            <a:ext cx="10607040" cy="640080"/>
+          </a:xfrm>
+          <a:prstGeom prst="rect">
+            <a:avLst/>
+          </a:prstGeom>
+          <a:noFill/>
+        </p:spPr>
+        <p:txBody>
+          <a:bodyPr wrap="square" lIns="0" rIns="0" tIns="0" bIns="0">
+            <a:spAutoFit/>
+          </a:bodyPr>
+          <a:lstStyle/>
+          <a:p>
+            <a:pPr>
+              <a:lnSpc>
+                <a:spcPct val="100000"/>
+              </a:lnSpc>
+            </a:pPr>
+            <a:r>
+              <a:rPr sz="3100" b="1">
+                <a:solidFill>
+                  <a:srgbClr val="0F172A"/>
+                </a:solidFill>
+                <a:latin typeface="Segoe UI"/>
+              </a:rPr>
+              <a:t>Three failures only the pipeline could find</a:t>
+            </a:r>
+          </a:p>
+        </p:txBody>
+      </p:sp>
+      <p:sp>
+        <p:nvSpPr>
+          <p:cNvPr id="4" name="Rectangle 3"/>
+          <p:cNvSpPr/>
+          <p:nvPr/>
+        </p:nvSpPr>
+        <p:spPr>
+          <a:xfrm>
+            <a:off x="777240" y="1572768"/>
+            <a:ext cx="1005840" cy="41148"/>
+          </a:xfrm>
+          <a:prstGeom prst="rect">
+            <a:avLst/>
+          </a:prstGeom>
+          <a:solidFill>
+            <a:srgbClr val="ED7100"/>
+          </a:solidFill>
+          <a:ln>
+            <a:noFill/>
+          </a:ln>
+          <a:effectLst/>
+        </p:spPr>
+        <p:style>
+          <a:lnRef idx="1">
+            <a:schemeClr val="accent1"/>
+          </a:lnRef>
+          <a:fillRef idx="3">
+            <a:schemeClr val="accent1"/>
+          </a:fillRef>
+          <a:effectRef idx="2">
+            <a:schemeClr val="accent1"/>
+          </a:effectRef>
+          <a:fontRef idx="minor">
+            <a:schemeClr val="lt1"/>
+          </a:fontRef>
+        </p:style>
+        <p:txBody>
+          <a:bodyPr rtlCol="0" anchor="ctr"/>
+          <a:lstStyle/>
+          <a:p>
+            <a:pPr algn="ctr"/>
+          </a:p>
+        </p:txBody>
+      </p:sp>
+      <p:sp>
+        <p:nvSpPr>
+          <p:cNvPr id="5" name="TextBox 4"/>
+          <p:cNvSpPr txBox="1"/>
+          <p:nvPr/>
+        </p:nvSpPr>
+        <p:spPr>
+          <a:xfrm>
+            <a:off x="777240" y="1783080"/>
+            <a:ext cx="10424160" cy="457200"/>
+          </a:xfrm>
+          <a:prstGeom prst="rect">
+            <a:avLst/>
+          </a:prstGeom>
+          <a:noFill/>
+        </p:spPr>
+        <p:txBody>
+          <a:bodyPr wrap="square" lIns="0" rIns="0" tIns="0" bIns="0">
+            <a:spAutoFit/>
+          </a:bodyPr>
+          <a:lstStyle/>
+          <a:p>
+            <a:pPr>
+              <a:lnSpc>
+                <a:spcPct val="100000"/>
+              </a:lnSpc>
+            </a:pPr>
+            <a:r>
+              <a:rPr sz="1500" b="0">
+                <a:solidFill>
+                  <a:srgbClr val="475569"/>
+                </a:solidFill>
+                <a:latin typeface="Segoe UI"/>
+              </a:rPr>
+              <a:t>Each looked correct, validated clean, and was wrong.</a:t>
+            </a:r>
+          </a:p>
+        </p:txBody>
+      </p:sp>
+      <p:sp>
+        <p:nvSpPr>
+          <p:cNvPr id="6" name="TextBox 5"/>
+          <p:cNvSpPr txBox="1"/>
+          <p:nvPr/>
+        </p:nvSpPr>
+        <p:spPr>
+          <a:xfrm>
+            <a:off x="777240" y="2350008"/>
+            <a:ext cx="10515600" cy="3840480"/>
+          </a:xfrm>
+          <a:prstGeom prst="rect">
+            <a:avLst/>
+          </a:prstGeom>
+          <a:noFill/>
+        </p:spPr>
+        <p:txBody>
+          <a:bodyPr wrap="square" lIns="0" rIns="0" tIns="0" bIns="0">
+            <a:spAutoFit/>
+          </a:bodyPr>
+          <a:lstStyle/>
+          <a:p>
+            <a:pPr>
+              <a:lnSpc>
+                <a:spcPct val="115000"/>
+              </a:lnSpc>
+              <a:spcAft>
+                <a:spcPts val="1200"/>
+              </a:spcAft>
+            </a:pPr>
+            <a:r>
+              <a:rPr sz="1350" b="1">
+                <a:solidFill>
+                  <a:srgbClr val="0F172A"/>
+                </a:solidFill>
+                <a:latin typeface="Segoe UI"/>
+              </a:rPr>
+              <a:t>1. Immutable subject claims.</a:t>
+            </a:r>
+            <a:r>
+              <a:rPr sz="1350">
+                <a:solidFill>
+                  <a:srgbClr val="475569"/>
+                </a:solidFill>
+                <a:latin typeface="Segoe UI"/>
+              </a:rPr>
+              <a:t>  OIDC failed with "Not authorized to perform sts:AssumeRoleWithWebIdentity" against a trust policy whose provider, audience and repo casing were all correct. This repository mints repo:owner@326342684/name@1360952247, not repo:owner/name. Pinning to the numeric ids is better anyway — they survive a rename or transfer.</a:t>
+            </a:r>
+          </a:p>
+          <a:p>
+            <a:pPr>
+              <a:lnSpc>
+                <a:spcPct val="115000"/>
+              </a:lnSpc>
+              <a:spcAft>
+                <a:spcPts val="1200"/>
+              </a:spcAft>
+            </a:pPr>
+            <a:r>
+              <a:rPr sz="1350" b="1">
+                <a:solidFill>
+                  <a:srgbClr val="0F172A"/>
+                </a:solidFill>
+                <a:latin typeface="Segoe UI"/>
+              </a:rPr>
+              <a:t>2. logs:DescribeLogGroups cannot be resource-scoped.</a:t>
+            </a:r>
+            <a:r>
+              <a:rPr sz="1350">
+                <a:solidFill>
+                  <a:srgbClr val="475569"/>
+                </a:solidFill>
+                <a:latin typeface="Segoe UI"/>
+              </a:rPr>
+              <a:t>  AWS evaluates it against an empty log-group ARN, so a prefix-scoped grant never matches and every apply died reading its own log groups. It needs "*". The plan role was unaffected because its read statement already used it — which is why plan passed while apply failed.</a:t>
+            </a:r>
+          </a:p>
+          <a:p>
+            <a:pPr>
+              <a:lnSpc>
+                <a:spcPct val="115000"/>
+              </a:lnSpc>
+              <a:spcAft>
+                <a:spcPts val="1200"/>
+              </a:spcAft>
+            </a:pPr>
+            <a:r>
+              <a:rPr sz="1350" b="1">
+                <a:solidFill>
+                  <a:srgbClr val="0F172A"/>
+                </a:solidFill>
+                <a:latin typeface="Segoe UI"/>
+              </a:rPr>
+              <a:t>3. Lambda packaging was not deterministic.</a:t>
+            </a:r>
+            <a:r>
+              <a:rPr sz="1350">
+                <a:solidFill>
+                  <a:srgbClr val="475569"/>
+                </a:solidFill>
+                <a:latin typeface="Segoe UI"/>
+              </a:rPr>
+              <a:t>  The same three functions showed as changing forever: local plans saw drift after a CI apply and vice versa, with identical source. Cause was file modes stamped into the zip, plus CRLF against LF. Fixed with output_file_mode and .gitattributes.</a:t>
+            </a:r>
+          </a:p>
+        </p:txBody>
+      </p:sp>
+      <p:sp>
+        <p:nvSpPr>
+          <p:cNvPr id="7" name="Rounded Rectangle 6"/>
+          <p:cNvSpPr/>
+          <p:nvPr/>
+        </p:nvSpPr>
+        <p:spPr>
+          <a:xfrm>
+            <a:off x="777240" y="5715000"/>
+            <a:ext cx="10515600" cy="777240"/>
+          </a:xfrm>
+          <a:prstGeom prst="roundRect">
+            <a:avLst/>
+          </a:prstGeom>
+          <a:solidFill>
+            <a:srgbClr val="FFF7ED"/>
+          </a:solidFill>
+          <a:ln w="15875">
+            <a:solidFill>
+              <a:srgbClr val="ED7100"/>
+            </a:solidFill>
+          </a:ln>
+          <a:effectLst/>
+        </p:spPr>
+        <p:style>
+          <a:lnRef idx="1">
+            <a:schemeClr val="accent1"/>
+          </a:lnRef>
+          <a:fillRef idx="3">
+            <a:schemeClr val="accent1"/>
+          </a:fillRef>
+          <a:effectRef idx="2">
+            <a:schemeClr val="accent1"/>
+          </a:effectRef>
+          <a:fontRef idx="minor">
+            <a:schemeClr val="lt1"/>
+          </a:fontRef>
+        </p:style>
+        <p:txBody>
+          <a:bodyPr rtlCol="0" anchor="ctr"/>
+          <a:lstStyle/>
+          <a:p/>
+        </p:txBody>
+      </p:sp>
+      <p:sp>
+        <p:nvSpPr>
+          <p:cNvPr id="8" name="TextBox 7"/>
+          <p:cNvSpPr txBox="1"/>
+          <p:nvPr/>
+        </p:nvSpPr>
+        <p:spPr>
+          <a:xfrm>
+            <a:off x="1051560" y="5897880"/>
+            <a:ext cx="9966960" cy="502920"/>
+          </a:xfrm>
+          <a:prstGeom prst="rect">
+            <a:avLst/>
+          </a:prstGeom>
+          <a:noFill/>
+        </p:spPr>
+        <p:txBody>
+          <a:bodyPr wrap="square" lIns="0" rIns="0" tIns="0" bIns="0">
+            <a:spAutoFit/>
+          </a:bodyPr>
+          <a:lstStyle/>
+          <a:p>
+            <a:pPr>
+              <a:lnSpc>
+                <a:spcPct val="115000"/>
+              </a:lnSpc>
+            </a:pPr>
+            <a:r>
+              <a:rPr sz="1300" b="1">
+                <a:solidFill>
+                  <a:srgbClr val="7C2D12"/>
+                </a:solidFill>
+                <a:latin typeface="Segoe UI"/>
+              </a:rPr>
+              <a:t>The third matters most. A plan that always shows changes is a plan people stop reading, and the pipeline's whole value is that "No changes" means something.</a:t>
+            </a:r>
+          </a:p>
+        </p:txBody>
+      </p:sp>
+    </p:spTree>
+  </p:cSld>
+  <p:clrMapOvr>
+    <a:masterClrMapping/>
+  </p:clrMapOvr>
+</p:sld>
+</file>
+
+<file path=ppt/slides/slide41.xml><?xml version="1.0" encoding="utf-8"?>
+<p:sld xmlns:a="http://schemas.openxmlformats.org/drawingml/2006/main" xmlns:p="http://schemas.openxmlformats.org/presentationml/2006/main" xmlns:r="http://schemas.openxmlformats.org/officeDocument/2006/relationships">
+  <p:cSld>
+    <p:bg>
+      <p:bgPr>
+        <a:solidFill>
+          <a:srgbClr val="FFFFFF"/>
+        </a:solidFill>
+        <a:effectLst/>
+      </p:bgPr>
+    </p:bg>
+    <p:spTree>
+      <p:nvGrpSpPr>
+        <p:cNvPr id="1" name=""/>
+        <p:cNvGrpSpPr/>
+        <p:nvPr/>
+      </p:nvGrpSpPr>
+      <p:grpSpPr/>
+      <p:sp>
+        <p:nvSpPr>
+          <p:cNvPr id="2" name="TextBox 1"/>
+          <p:cNvSpPr txBox="1"/>
+          <p:nvPr/>
+        </p:nvSpPr>
+        <p:spPr>
+          <a:xfrm>
+            <a:off x="777240" y="502920"/>
+            <a:ext cx="10607040" cy="274320"/>
+          </a:xfrm>
+          <a:prstGeom prst="rect">
+            <a:avLst/>
+          </a:prstGeom>
+          <a:noFill/>
+        </p:spPr>
+        <p:txBody>
+          <a:bodyPr wrap="square" lIns="0" rIns="0" tIns="0" bIns="0">
+            <a:spAutoFit/>
+          </a:bodyPr>
+          <a:lstStyle/>
+          <a:p>
+            <a:pPr>
+              <a:lnSpc>
+                <a:spcPct val="100000"/>
+              </a:lnSpc>
+            </a:pPr>
+            <a:r>
+              <a:rPr sz="1100" b="1">
+                <a:solidFill>
+                  <a:srgbClr val="94A3B8"/>
+                </a:solidFill>
+                <a:latin typeface="Segoe UI"/>
+              </a:rPr>
+              <a:t>MEASURED</a:t>
+            </a:r>
+          </a:p>
+        </p:txBody>
+      </p:sp>
+      <p:sp>
+        <p:nvSpPr>
+          <p:cNvPr id="3" name="TextBox 2"/>
+          <p:cNvSpPr txBox="1"/>
+          <p:nvPr/>
+        </p:nvSpPr>
+        <p:spPr>
+          <a:xfrm>
+            <a:off x="777240" y="841248"/>
+            <a:ext cx="10607040" cy="640080"/>
+          </a:xfrm>
+          <a:prstGeom prst="rect">
+            <a:avLst/>
+          </a:prstGeom>
+          <a:noFill/>
+        </p:spPr>
+        <p:txBody>
+          <a:bodyPr wrap="square" lIns="0" rIns="0" tIns="0" bIns="0">
+            <a:spAutoFit/>
+          </a:bodyPr>
+          <a:lstStyle/>
+          <a:p>
+            <a:pPr>
+              <a:lnSpc>
+                <a:spcPct val="100000"/>
+              </a:lnSpc>
+            </a:pPr>
+            <a:r>
+              <a:rPr sz="3100" b="1">
+                <a:solidFill>
+                  <a:srgbClr val="0F172A"/>
+                </a:solidFill>
+                <a:latin typeface="Segoe UI"/>
+              </a:rPr>
+              <a:t>Titan's cosine scale sits near zero</a:t>
+            </a:r>
+          </a:p>
+        </p:txBody>
+      </p:sp>
+      <p:sp>
+        <p:nvSpPr>
+          <p:cNvPr id="4" name="Rectangle 3"/>
+          <p:cNvSpPr/>
+          <p:nvPr/>
+        </p:nvSpPr>
+        <p:spPr>
+          <a:xfrm>
+            <a:off x="777240" y="1572768"/>
+            <a:ext cx="1005840" cy="41148"/>
+          </a:xfrm>
+          <a:prstGeom prst="rect">
+            <a:avLst/>
+          </a:prstGeom>
+          <a:solidFill>
+            <a:srgbClr val="ED7100"/>
+          </a:solidFill>
+          <a:ln>
+            <a:noFill/>
+          </a:ln>
+          <a:effectLst/>
+        </p:spPr>
+        <p:style>
+          <a:lnRef idx="1">
+            <a:schemeClr val="accent1"/>
+          </a:lnRef>
+          <a:fillRef idx="3">
+            <a:schemeClr val="accent1"/>
+          </a:fillRef>
+          <a:effectRef idx="2">
+            <a:schemeClr val="accent1"/>
+          </a:effectRef>
+          <a:fontRef idx="minor">
+            <a:schemeClr val="lt1"/>
+          </a:fontRef>
+        </p:style>
+        <p:txBody>
+          <a:bodyPr rtlCol="0" anchor="ctr"/>
+          <a:lstStyle/>
+          <a:p>
+            <a:pPr algn="ctr"/>
+          </a:p>
+        </p:txBody>
+      </p:sp>
+      <p:sp>
+        <p:nvSpPr>
+          <p:cNvPr id="5" name="TextBox 4"/>
+          <p:cNvSpPr txBox="1"/>
+          <p:nvPr/>
+        </p:nvSpPr>
+        <p:spPr>
+          <a:xfrm>
+            <a:off x="777240" y="1783080"/>
+            <a:ext cx="10424160" cy="457200"/>
+          </a:xfrm>
+          <a:prstGeom prst="rect">
+            <a:avLst/>
+          </a:prstGeom>
+          <a:noFill/>
+        </p:spPr>
+        <p:txBody>
+          <a:bodyPr wrap="square" lIns="0" rIns="0" tIns="0" bIns="0">
+            <a:spAutoFit/>
+          </a:bodyPr>
+          <a:lstStyle/>
+          <a:p>
+            <a:pPr>
+              <a:lnSpc>
+                <a:spcPct val="100000"/>
+              </a:lnSpc>
+            </a:pPr>
+            <a:r>
+              <a:rPr sz="1500" b="0">
+                <a:solidFill>
+                  <a:srgbClr val="475569"/>
+                </a:solidFill>
+                <a:latin typeface="Segoe UI"/>
+              </a:rPr>
+              <a:t>Measured 2026-09-14 against amazon.titan-embed-text-v2:0, 1024 dims, normalize=true.</a:t>
+            </a:r>
+          </a:p>
+        </p:txBody>
+      </p:sp>
+      <p:graphicFrame>
+        <p:nvGraphicFramePr>
+          <p:cNvPr id="6" name="Table 5"/>
+          <p:cNvGraphicFramePr>
+            <a:graphicFrameLocks noGrp="1"/>
+          </p:cNvGraphicFramePr>
+          <p:nvPr/>
+        </p:nvGraphicFramePr>
+        <p:xfrm>
+          <a:off x="777240" y="2350008"/>
+          <a:ext cx="10515600" cy="1481328"/>
+        </p:xfrm>
+        <a:graphic>
+          <a:graphicData uri="http://schemas.openxmlformats.org/drawingml/2006/table">
+            <a:tbl>
+              <a:tblPr firstRow="1" bandRow="1">
+                <a:tableStyleId>{5C22544A-7EE6-4342-B048-85BDC9FD1C3A}</a:tableStyleId>
+              </a:tblPr>
+              <a:tblGrid>
+                <a:gridCol w="4572000"/>
+                <a:gridCol w="4023360"/>
+                <a:gridCol w="1920240"/>
+              </a:tblGrid>
+              <a:tr h="296265">
+                <a:tc>
+                  <a:txBody>
+                    <a:bodyPr/>
+                    <a:lstStyle/>
+                    <a:p>
+                      <a:r>
+                        <a:rPr sz="1150" b="1">
+                          <a:solidFill>
+                            <a:srgbClr val="FFFFFF"/>
+                          </a:solidFill>
+                          <a:latin typeface="Segoe UI"/>
+                        </a:rPr>
+                        <a:t>Query</a:t>
+                      </a:r>
+                    </a:p>
+                  </a:txBody>
+                  <a:tcPr>
+                    <a:solidFill>
+                      <a:srgbClr val="0F172A"/>
+                    </a:solidFill>
+                  </a:tcPr>
+                </a:tc>
+                <a:tc>
+                  <a:txBody>
+                    <a:bodyPr/>
+                    <a:lstStyle/>
+                    <a:p>
+                      <a:r>
+                        <a:rPr sz="1150" b="1">
+                          <a:solidFill>
+                            <a:srgbClr val="FFFFFF"/>
+                          </a:solidFill>
+                          <a:latin typeface="Segoe UI"/>
+                        </a:rPr>
+                        <a:t>Top result</a:t>
+                      </a:r>
+                    </a:p>
+                  </a:txBody>
+                  <a:tcPr>
+                    <a:solidFill>
+                      <a:srgbClr val="0F172A"/>
+                    </a:solidFill>
+                  </a:tcPr>
+                </a:tc>
+                <a:tc>
+                  <a:txBody>
+                    <a:bodyPr/>
+                    <a:lstStyle/>
+                    <a:p>
+                      <a:r>
+                        <a:rPr sz="1150" b="1">
+                          <a:solidFill>
+                            <a:srgbClr val="FFFFFF"/>
+                          </a:solidFill>
+                          <a:latin typeface="Segoe UI"/>
+                        </a:rPr>
+                        <a:t>Score</a:t>
+                      </a:r>
+                    </a:p>
+                  </a:txBody>
+                  <a:tcPr>
+                    <a:solidFill>
+                      <a:srgbClr val="0F172A"/>
+                    </a:solidFill>
+                  </a:tcPr>
+                </a:tc>
+              </a:tr>
+              <a:tr h="296265">
+                <a:tc>
+                  <a:txBody>
+                    <a:bodyPr/>
+                    <a:lstStyle/>
+                    <a:p>
+                      <a:r>
+                        <a:rPr sz="1150">
+                          <a:solidFill>
+                            <a:srgbClr val="475569"/>
+                          </a:solidFill>
+                          <a:latin typeface="Segoe UI"/>
+                        </a:rPr>
+                        <a:t>peer reviewed papers on RAG</a:t>
+                      </a:r>
+                    </a:p>
+                  </a:txBody>
+                  <a:tcPr>
+                    <a:solidFill>
+                      <a:srgbClr val="FFFFFF"/>
+                    </a:solidFill>
+                  </a:tcPr>
+                </a:tc>
+                <a:tc>
+                  <a:txBody>
+                    <a:bodyPr/>
+                    <a:lstStyle/>
+                    <a:p>
+                      <a:r>
+                        <a:rPr sz="1150">
+                          <a:solidFill>
+                            <a:srgbClr val="475569"/>
+                          </a:solidFill>
+                          <a:latin typeface="Segoe UI"/>
+                        </a:rPr>
+                        <a:t>crossref-paper-search</a:t>
+                      </a:r>
+                    </a:p>
+                  </a:txBody>
+                  <a:tcPr>
+                    <a:solidFill>
+                      <a:srgbClr val="FFFFFF"/>
+                    </a:solidFill>
+                  </a:tcPr>
+                </a:tc>
+                <a:tc>
+                  <a:txBody>
+                    <a:bodyPr/>
+                    <a:lstStyle/>
+                    <a:p>
+                      <a:r>
+                        <a:rPr sz="1150">
+                          <a:solidFill>
+                            <a:srgbClr val="475569"/>
+                          </a:solidFill>
+                          <a:latin typeface="Segoe UI"/>
+                        </a:rPr>
+                        <a:t>0.2647</a:t>
+                      </a:r>
+                    </a:p>
+                  </a:txBody>
+                  <a:tcPr>
+                    <a:solidFill>
+                      <a:srgbClr val="FFFFFF"/>
+                    </a:solidFill>
+                  </a:tcPr>
+                </a:tc>
+              </a:tr>
+              <a:tr h="296265">
+                <a:tc>
+                  <a:txBody>
+                    <a:bodyPr/>
+                    <a:lstStyle/>
+                    <a:p>
+                      <a:r>
+                        <a:rPr sz="1150">
+                          <a:solidFill>
+                            <a:srgbClr val="475569"/>
+                          </a:solidFill>
+                          <a:latin typeface="Segoe UI"/>
+                        </a:rPr>
+                        <a:t>licence of this open source package</a:t>
+                      </a:r>
+                    </a:p>
+                  </a:txBody>
+                  <a:tcPr>
+                    <a:solidFill>
+                      <a:srgbClr val="F8FAFC"/>
+                    </a:solidFill>
+                  </a:tcPr>
+                </a:tc>
+                <a:tc>
+                  <a:txBody>
+                    <a:bodyPr/>
+                    <a:lstStyle/>
+                    <a:p>
+                      <a:r>
+                        <a:rPr sz="1150">
+                          <a:solidFill>
+                            <a:srgbClr val="475569"/>
+                          </a:solidFill>
+                          <a:latin typeface="Segoe UI"/>
+                        </a:rPr>
+                        <a:t>github-repo-info</a:t>
+                      </a:r>
+                    </a:p>
+                  </a:txBody>
+                  <a:tcPr>
+                    <a:solidFill>
+                      <a:srgbClr val="F8FAFC"/>
+                    </a:solidFill>
+                  </a:tcPr>
+                </a:tc>
+                <a:tc>
+                  <a:txBody>
+                    <a:bodyPr/>
+                    <a:lstStyle/>
+                    <a:p>
+                      <a:r>
+                        <a:rPr sz="1150">
+                          <a:solidFill>
+                            <a:srgbClr val="475569"/>
+                          </a:solidFill>
+                          <a:latin typeface="Segoe UI"/>
+                        </a:rPr>
+                        <a:t>0.2656</a:t>
+                      </a:r>
+                    </a:p>
+                  </a:txBody>
+                  <a:tcPr>
+                    <a:solidFill>
+                      <a:srgbClr val="F8FAFC"/>
+                    </a:solidFill>
+                  </a:tcPr>
+                </a:tc>
+              </a:tr>
+              <a:tr h="296265">
+                <a:tc>
+                  <a:txBody>
+                    <a:bodyPr/>
+                    <a:lstStyle/>
+                    <a:p>
+                      <a:r>
+                        <a:rPr sz="1150">
+                          <a:solidFill>
+                            <a:srgbClr val="475569"/>
+                          </a:solidFill>
+                          <a:latin typeface="Segoe UI"/>
+                        </a:rPr>
+                        <a:t>temperature tomorrow afternoon</a:t>
+                      </a:r>
+                    </a:p>
+                  </a:txBody>
+                  <a:tcPr>
+                    <a:solidFill>
+                      <a:srgbClr val="FFFFFF"/>
+                    </a:solidFill>
+                  </a:tcPr>
+                </a:tc>
+                <a:tc>
+                  <a:txBody>
+                    <a:bodyPr/>
+                    <a:lstStyle/>
+                    <a:p>
+                      <a:r>
+                        <a:rPr sz="1150">
+                          <a:solidFill>
+                            <a:srgbClr val="475569"/>
+                          </a:solidFill>
+                          <a:latin typeface="Segoe UI"/>
+                        </a:rPr>
+                        <a:t>weather-forecast</a:t>
+                      </a:r>
+                    </a:p>
+                  </a:txBody>
+                  <a:tcPr>
+                    <a:solidFill>
+                      <a:srgbClr val="FFFFFF"/>
+                    </a:solidFill>
+                  </a:tcPr>
+                </a:tc>
+                <a:tc>
+                  <a:txBody>
+                    <a:bodyPr/>
+                    <a:lstStyle/>
+                    <a:p>
+                      <a:r>
+                        <a:rPr sz="1150">
+                          <a:solidFill>
+                            <a:srgbClr val="475569"/>
+                          </a:solidFill>
+                          <a:latin typeface="Segoe UI"/>
+                        </a:rPr>
+                        <a:t>0.0871</a:t>
+                      </a:r>
+                    </a:p>
+                  </a:txBody>
+                  <a:tcPr>
+                    <a:solidFill>
+                      <a:srgbClr val="FFFFFF"/>
+                    </a:solidFill>
+                  </a:tcPr>
+                </a:tc>
+              </a:tr>
+              <a:tr h="296268">
+                <a:tc>
+                  <a:txBody>
+                    <a:bodyPr/>
+                    <a:lstStyle/>
+                    <a:p>
+                      <a:r>
+                        <a:rPr sz="1150">
+                          <a:solidFill>
+                            <a:srgbClr val="475569"/>
+                          </a:solidFill>
+                          <a:latin typeface="Segoe UI"/>
+                        </a:rPr>
+                        <a:t>book me a haircut</a:t>
+                      </a:r>
+                    </a:p>
+                  </a:txBody>
+                  <a:tcPr>
+                    <a:solidFill>
+                      <a:srgbClr val="F8FAFC"/>
+                    </a:solidFill>
+                  </a:tcPr>
+                </a:tc>
+                <a:tc>
+                  <a:txBody>
+                    <a:bodyPr/>
+                    <a:lstStyle/>
+                    <a:p>
+                      <a:r>
+                        <a:rPr sz="1150">
+                          <a:solidFill>
+                            <a:srgbClr val="475569"/>
+                          </a:solidFill>
+                          <a:latin typeface="Segoe UI"/>
+                        </a:rPr>
+                        <a:t>current-time-in-zone  (nonsense)</a:t>
+                      </a:r>
+                    </a:p>
+                  </a:txBody>
+                  <a:tcPr>
+                    <a:solidFill>
+                      <a:srgbClr val="F8FAFC"/>
+                    </a:solidFill>
+                  </a:tcPr>
+                </a:tc>
+                <a:tc>
+                  <a:txBody>
+                    <a:bodyPr/>
+                    <a:lstStyle/>
+                    <a:p>
+                      <a:r>
+                        <a:rPr sz="1150">
+                          <a:solidFill>
+                            <a:srgbClr val="475569"/>
+                          </a:solidFill>
+                          <a:latin typeface="Segoe UI"/>
+                        </a:rPr>
+                        <a:t>0.0665</a:t>
+                      </a:r>
+                    </a:p>
+                  </a:txBody>
+                  <a:tcPr>
+                    <a:solidFill>
+                      <a:srgbClr val="F8FAFC"/>
+                    </a:solidFill>
+                  </a:tcPr>
+                </a:tc>
+              </a:tr>
+            </a:tbl>
+          </a:graphicData>
+        </a:graphic>
+      </p:graphicFrame>
+      <p:sp>
+        <p:nvSpPr>
+          <p:cNvPr id="7" name="TextBox 6"/>
+          <p:cNvSpPr txBox="1"/>
+          <p:nvPr/>
+        </p:nvSpPr>
+        <p:spPr>
+          <a:xfrm>
+            <a:off x="777240" y="4087368"/>
+            <a:ext cx="10515600" cy="2377440"/>
+          </a:xfrm>
+          <a:prstGeom prst="rect">
+            <a:avLst/>
+          </a:prstGeom>
+          <a:noFill/>
+        </p:spPr>
+        <p:txBody>
+          <a:bodyPr wrap="square" lIns="0" rIns="0" tIns="0" bIns="0">
+            <a:spAutoFit/>
+          </a:bodyPr>
+          <a:lstStyle/>
+          <a:p>
+            <a:pPr>
+              <a:lnSpc>
+                <a:spcPct val="115000"/>
+              </a:lnSpc>
+              <a:spcAft>
+                <a:spcPts val="1000"/>
+              </a:spcAft>
+            </a:pPr>
+            <a:r>
+              <a:rPr sz="1400" b="1">
+                <a:solidFill>
+                  <a:srgbClr val="0F172A"/>
+                </a:solidFill>
+                <a:latin typeface="Segoe UI"/>
+              </a:rPr>
+              <a:t>Not the 0.4-0.8 other embedding models produce.</a:t>
+            </a:r>
+            <a:r>
+              <a:rPr sz="1400">
+                <a:solidFill>
+                  <a:srgbClr val="475569"/>
+                </a:solidFill>
+                <a:latin typeface="Segoe UI"/>
+              </a:rPr>
+              <a:t>  Verified against a direct Bedrock call, so this is the model's real scale and not a pipeline bug.</a:t>
+            </a:r>
+          </a:p>
+          <a:p>
+            <a:pPr>
+              <a:lnSpc>
+                <a:spcPct val="115000"/>
+              </a:lnSpc>
+              <a:spcAft>
+                <a:spcPts val="1000"/>
+              </a:spcAft>
+            </a:pPr>
+            <a:r>
+              <a:rPr sz="1400" b="1">
+                <a:solidFill>
+                  <a:srgbClr val="0F172A"/>
+                </a:solidFill>
+                <a:latin typeface="Segoe UI"/>
+              </a:rPr>
+              <a:t>T = 0.5 logged a gap on every search, including correct hits.</a:t>
+            </a:r>
+            <a:r>
+              <a:rPr sz="1400">
+                <a:solidFill>
+                  <a:srgbClr val="475569"/>
+                </a:solidFill>
+                <a:latin typeface="Segoe UI"/>
+              </a:rPr>
+              <a:t>  It is now a labelled placeholder at 0.05 — an order-of-magnitude correction, not a derived value.</a:t>
+            </a:r>
+          </a:p>
+          <a:p>
+            <a:pPr>
+              <a:lnSpc>
+                <a:spcPct val="115000"/>
+              </a:lnSpc>
+              <a:spcAft>
+                <a:spcPts val="1000"/>
+              </a:spcAft>
+            </a:pPr>
+            <a:r>
+              <a:rPr sz="1400" b="1">
+                <a:solidFill>
+                  <a:srgbClr val="0F172A"/>
+                </a:solidFill>
+                <a:latin typeface="Segoe UI"/>
+              </a:rPr>
+              <a:t>Correct hits span 0.087 to 0.266.</a:t>
+            </a:r>
+            <a:r>
+              <a:rPr sz="1400">
+                <a:solidFill>
+                  <a:srgbClr val="475569"/>
+                </a:solidFill>
+                <a:latin typeface="Segoe UI"/>
+              </a:rPr>
+              <a:t>  One global threshold is doing very different work across that band, and the weakest correct hit sits close to the strongest spurious one. That overlap is what #12 has to resolve.</a:t>
+            </a:r>
+          </a:p>
+        </p:txBody>
+      </p:sp>
+    </p:spTree>
+  </p:cSld>
+  <p:clrMapOvr>
+    <a:masterClrMapping/>
+  </p:clrMapOvr>
+</p:sld>
+</file>
+
+<file path=ppt/slides/slide42.xml><?xml version="1.0" encoding="utf-8"?>
+<p:sld xmlns:a="http://schemas.openxmlformats.org/drawingml/2006/main" xmlns:p="http://schemas.openxmlformats.org/presentationml/2006/main" xmlns:r="http://schemas.openxmlformats.org/officeDocument/2006/relationships">
+  <p:cSld>
+    <p:bg>
+      <p:bgPr>
+        <a:solidFill>
+          <a:srgbClr val="FFFFFF"/>
+        </a:solidFill>
+        <a:effectLst/>
+      </p:bgPr>
+    </p:bg>
+    <p:spTree>
+      <p:nvGrpSpPr>
+        <p:cNvPr id="1" name=""/>
+        <p:cNvGrpSpPr/>
+        <p:nvPr/>
+      </p:nvGrpSpPr>
+      <p:grpSpPr/>
+      <p:sp>
+        <p:nvSpPr>
+          <p:cNvPr id="2" name="TextBox 1"/>
+          <p:cNvSpPr txBox="1"/>
+          <p:nvPr/>
+        </p:nvSpPr>
+        <p:spPr>
+          <a:xfrm>
+            <a:off x="777240" y="502920"/>
+            <a:ext cx="10607040" cy="274320"/>
+          </a:xfrm>
+          <a:prstGeom prst="rect">
+            <a:avLst/>
+          </a:prstGeom>
+          <a:noFill/>
+        </p:spPr>
+        <p:txBody>
+          <a:bodyPr wrap="square" lIns="0" rIns="0" tIns="0" bIns="0">
+            <a:spAutoFit/>
+          </a:bodyPr>
+          <a:lstStyle/>
+          <a:p>
+            <a:pPr>
+              <a:lnSpc>
+                <a:spcPct val="100000"/>
+              </a:lnSpc>
+            </a:pPr>
+            <a:r>
+              <a:rPr sz="1100" b="1">
+                <a:solidFill>
+                  <a:srgbClr val="94A3B8"/>
+                </a:solidFill>
+                <a:latin typeface="Segoe UI"/>
+              </a:rPr>
+              <a:t>STATUS</a:t>
+            </a:r>
+          </a:p>
+        </p:txBody>
+      </p:sp>
+      <p:sp>
+        <p:nvSpPr>
+          <p:cNvPr id="3" name="TextBox 2"/>
+          <p:cNvSpPr txBox="1"/>
+          <p:nvPr/>
+        </p:nvSpPr>
+        <p:spPr>
+          <a:xfrm>
+            <a:off x="777240" y="841248"/>
+            <a:ext cx="10607040" cy="640080"/>
+          </a:xfrm>
+          <a:prstGeom prst="rect">
+            <a:avLst/>
+          </a:prstGeom>
+          <a:noFill/>
+        </p:spPr>
+        <p:txBody>
+          <a:bodyPr wrap="square" lIns="0" rIns="0" tIns="0" bIns="0">
+            <a:spAutoFit/>
+          </a:bodyPr>
+          <a:lstStyle/>
+          <a:p>
+            <a:pPr>
+              <a:lnSpc>
+                <a:spcPct val="100000"/>
+              </a:lnSpc>
+            </a:pPr>
+            <a:r>
+              <a:rPr sz="3100" b="1">
+                <a:solidFill>
+                  <a:srgbClr val="0F172A"/>
+                </a:solidFill>
+                <a:latin typeface="Segoe UI"/>
+              </a:rPr>
+              <a:t>Where Phase 0 actually is</a:t>
+            </a:r>
+          </a:p>
+        </p:txBody>
+      </p:sp>
+      <p:sp>
+        <p:nvSpPr>
+          <p:cNvPr id="4" name="Rectangle 3"/>
+          <p:cNvSpPr/>
+          <p:nvPr/>
+        </p:nvSpPr>
+        <p:spPr>
+          <a:xfrm>
+            <a:off x="777240" y="1572768"/>
+            <a:ext cx="1005840" cy="41148"/>
+          </a:xfrm>
+          <a:prstGeom prst="rect">
+            <a:avLst/>
+          </a:prstGeom>
+          <a:solidFill>
+            <a:srgbClr val="ED7100"/>
+          </a:solidFill>
+          <a:ln>
+            <a:noFill/>
+          </a:ln>
+          <a:effectLst/>
+        </p:spPr>
+        <p:style>
+          <a:lnRef idx="1">
+            <a:schemeClr val="accent1"/>
+          </a:lnRef>
+          <a:fillRef idx="3">
+            <a:schemeClr val="accent1"/>
+          </a:fillRef>
+          <a:effectRef idx="2">
+            <a:schemeClr val="accent1"/>
+          </a:effectRef>
+          <a:fontRef idx="minor">
+            <a:schemeClr val="lt1"/>
+          </a:fontRef>
+        </p:style>
+        <p:txBody>
+          <a:bodyPr rtlCol="0" anchor="ctr"/>
+          <a:lstStyle/>
+          <a:p>
+            <a:pPr algn="ctr"/>
+          </a:p>
+        </p:txBody>
+      </p:sp>
+      <p:graphicFrame>
+        <p:nvGraphicFramePr>
+          <p:cNvPr id="5" name="Table 4"/>
+          <p:cNvGraphicFramePr>
+            <a:graphicFrameLocks noGrp="1"/>
+          </p:cNvGraphicFramePr>
+          <p:nvPr/>
+        </p:nvGraphicFramePr>
+        <p:xfrm>
+          <a:off x="777240" y="1737360"/>
+          <a:ext cx="10515600" cy="4407408"/>
+        </p:xfrm>
+        <a:graphic>
+          <a:graphicData uri="http://schemas.openxmlformats.org/drawingml/2006/table">
+            <a:tbl>
+              <a:tblPr firstRow="1" bandRow="1">
+                <a:tableStyleId>{5C22544A-7EE6-4342-B048-85BDC9FD1C3A}</a:tableStyleId>
+              </a:tblPr>
+              <a:tblGrid>
+                <a:gridCol w="548640"/>
+                <a:gridCol w="6675120"/>
+                <a:gridCol w="3291840"/>
+              </a:tblGrid>
+              <a:tr h="293827">
+                <a:tc>
+                  <a:txBody>
+                    <a:bodyPr/>
+                    <a:lstStyle/>
+                    <a:p>
+                      <a:r>
+                        <a:rPr sz="1050" b="1">
+                          <a:solidFill>
+                            <a:srgbClr val="FFFFFF"/>
+                          </a:solidFill>
+                          <a:latin typeface="Segoe UI"/>
+                        </a:rPr>
+                        <a:t>#</a:t>
+                      </a:r>
+                    </a:p>
+                  </a:txBody>
+                  <a:tcPr>
+                    <a:solidFill>
+                      <a:srgbClr val="0F172A"/>
+                    </a:solidFill>
+                  </a:tcPr>
+                </a:tc>
+                <a:tc>
+                  <a:txBody>
+                    <a:bodyPr/>
+                    <a:lstStyle/>
+                    <a:p>
+                      <a:r>
+                        <a:rPr sz="1050" b="1">
+                          <a:solidFill>
+                            <a:srgbClr val="FFFFFF"/>
+                          </a:solidFill>
+                          <a:latin typeface="Segoe UI"/>
+                        </a:rPr>
+                        <a:t>Issue</a:t>
+                      </a:r>
+                    </a:p>
+                  </a:txBody>
+                  <a:tcPr>
+                    <a:solidFill>
+                      <a:srgbClr val="0F172A"/>
+                    </a:solidFill>
+                  </a:tcPr>
+                </a:tc>
+                <a:tc>
+                  <a:txBody>
+                    <a:bodyPr/>
+                    <a:lstStyle/>
+                    <a:p>
+                      <a:r>
+                        <a:rPr sz="1050" b="1">
+                          <a:solidFill>
+                            <a:srgbClr val="FFFFFF"/>
+                          </a:solidFill>
+                          <a:latin typeface="Segoe UI"/>
+                        </a:rPr>
+                        <a:t>State</a:t>
+                      </a:r>
+                    </a:p>
+                  </a:txBody>
+                  <a:tcPr>
+                    <a:solidFill>
+                      <a:srgbClr val="0F172A"/>
+                    </a:solidFill>
+                  </a:tcPr>
+                </a:tc>
+              </a:tr>
+              <a:tr h="293827">
+                <a:tc>
+                  <a:txBody>
+                    <a:bodyPr/>
+                    <a:lstStyle/>
+                    <a:p>
+                      <a:r>
+                        <a:rPr sz="1050">
+                          <a:solidFill>
+                            <a:srgbClr val="475569"/>
+                          </a:solidFill>
+                          <a:latin typeface="Segoe UI"/>
+                        </a:rPr>
+                        <a:t>1</a:t>
+                      </a:r>
+                    </a:p>
+                  </a:txBody>
+                  <a:tcPr>
+                    <a:solidFill>
+                      <a:srgbClr val="FFFFFF"/>
+                    </a:solidFill>
+                  </a:tcPr>
+                </a:tc>
+                <a:tc>
+                  <a:txBody>
+                    <a:bodyPr/>
+                    <a:lstStyle/>
+                    <a:p>
+                      <a:r>
+                        <a:rPr sz="1050">
+                          <a:solidFill>
+                            <a:srgbClr val="475569"/>
+                          </a:solidFill>
+                          <a:latin typeface="Segoe UI"/>
+                        </a:rPr>
+                        <a:t>Scaffold repo, infrastructure, CI/CD</a:t>
+                      </a:r>
+                    </a:p>
+                  </a:txBody>
+                  <a:tcPr>
+                    <a:solidFill>
+                      <a:srgbClr val="FFFFFF"/>
+                    </a:solidFill>
+                  </a:tcPr>
+                </a:tc>
+                <a:tc>
+                  <a:txBody>
+                    <a:bodyPr/>
+                    <a:lstStyle/>
+                    <a:p>
+                      <a:r>
+                        <a:rPr sz="1050">
+                          <a:solidFill>
+                            <a:srgbClr val="475569"/>
+                          </a:solidFill>
+                          <a:latin typeface="Segoe UI"/>
+                        </a:rPr>
+                        <a:t>done</a:t>
+                      </a:r>
+                    </a:p>
+                  </a:txBody>
+                  <a:tcPr>
+                    <a:solidFill>
+                      <a:srgbClr val="FFFFFF"/>
+                    </a:solidFill>
+                  </a:tcPr>
+                </a:tc>
+              </a:tr>
+              <a:tr h="293827">
+                <a:tc>
+                  <a:txBody>
+                    <a:bodyPr/>
+                    <a:lstStyle/>
+                    <a:p>
+                      <a:r>
+                        <a:rPr sz="1050">
+                          <a:solidFill>
+                            <a:srgbClr val="475569"/>
+                          </a:solidFill>
+                          <a:latin typeface="Segoe UI"/>
+                        </a:rPr>
+                        <a:t>2</a:t>
+                      </a:r>
+                    </a:p>
+                  </a:txBody>
+                  <a:tcPr>
+                    <a:solidFill>
+                      <a:srgbClr val="F8FAFC"/>
+                    </a:solidFill>
+                  </a:tcPr>
+                </a:tc>
+                <a:tc>
+                  <a:txBody>
+                    <a:bodyPr/>
+                    <a:lstStyle/>
+                    <a:p>
+                      <a:r>
+                        <a:rPr sz="1050">
+                          <a:solidFill>
+                            <a:srgbClr val="475569"/>
+                          </a:solidFill>
+                          <a:latin typeface="Segoe UI"/>
+                        </a:rPr>
+                        <a:t>Shared schemas: tool, event, gap</a:t>
+                      </a:r>
+                    </a:p>
+                  </a:txBody>
+                  <a:tcPr>
+                    <a:solidFill>
+                      <a:srgbClr val="F8FAFC"/>
+                    </a:solidFill>
+                  </a:tcPr>
+                </a:tc>
+                <a:tc>
+                  <a:txBody>
+                    <a:bodyPr/>
+                    <a:lstStyle/>
+                    <a:p>
+                      <a:r>
+                        <a:rPr sz="1050">
+                          <a:solidFill>
+                            <a:srgbClr val="475569"/>
+                          </a:solidFill>
+                          <a:latin typeface="Segoe UI"/>
+                        </a:rPr>
+                        <a:t>done, in the handlers</a:t>
+                      </a:r>
+                    </a:p>
+                  </a:txBody>
+                  <a:tcPr>
+                    <a:solidFill>
+                      <a:srgbClr val="F8FAFC"/>
+                    </a:solidFill>
+                  </a:tcPr>
+                </a:tc>
+              </a:tr>
+              <a:tr h="293827">
+                <a:tc>
+                  <a:txBody>
+                    <a:bodyPr/>
+                    <a:lstStyle/>
+                    <a:p>
+                      <a:r>
+                        <a:rPr sz="1050">
+                          <a:solidFill>
+                            <a:srgbClr val="475569"/>
+                          </a:solidFill>
+                          <a:latin typeface="Segoe UI"/>
+                        </a:rPr>
+                        <a:t>3</a:t>
+                      </a:r>
+                    </a:p>
+                  </a:txBody>
+                  <a:tcPr>
+                    <a:solidFill>
+                      <a:srgbClr val="FFFFFF"/>
+                    </a:solidFill>
+                  </a:tcPr>
+                </a:tc>
+                <a:tc>
+                  <a:txBody>
+                    <a:bodyPr/>
+                    <a:lstStyle/>
+                    <a:p>
+                      <a:r>
+                        <a:rPr sz="1050">
+                          <a:solidFill>
+                            <a:srgbClr val="475569"/>
+                          </a:solidFill>
+                          <a:latin typeface="Segoe UI"/>
+                        </a:rPr>
+                        <a:t>Terraform stack: tables, IAM, alarm</a:t>
+                      </a:r>
+                    </a:p>
+                  </a:txBody>
+                  <a:tcPr>
+                    <a:solidFill>
+                      <a:srgbClr val="FFFFFF"/>
+                    </a:solidFill>
+                  </a:tcPr>
+                </a:tc>
+                <a:tc>
+                  <a:txBody>
+                    <a:bodyPr/>
+                    <a:lstStyle/>
+                    <a:p>
+                      <a:r>
+                        <a:rPr sz="1050">
+                          <a:solidFill>
+                            <a:srgbClr val="475569"/>
+                          </a:solidFill>
+                          <a:latin typeface="Segoe UI"/>
+                        </a:rPr>
+                        <a:t>done, applied via CI</a:t>
+                      </a:r>
+                    </a:p>
+                  </a:txBody>
+                  <a:tcPr>
+                    <a:solidFill>
+                      <a:srgbClr val="FFFFFF"/>
+                    </a:solidFill>
+                  </a:tcPr>
+                </a:tc>
+              </a:tr>
+              <a:tr h="293827">
+                <a:tc>
+                  <a:txBody>
+                    <a:bodyPr/>
+                    <a:lstStyle/>
+                    <a:p>
+                      <a:r>
+                        <a:rPr sz="1050">
+                          <a:solidFill>
+                            <a:srgbClr val="475569"/>
+                          </a:solidFill>
+                          <a:latin typeface="Segoe UI"/>
+                        </a:rPr>
+                        <a:t>4</a:t>
+                      </a:r>
+                    </a:p>
+                  </a:txBody>
+                  <a:tcPr>
+                    <a:solidFill>
+                      <a:srgbClr val="F8FAFC"/>
+                    </a:solidFill>
+                  </a:tcPr>
+                </a:tc>
+                <a:tc>
+                  <a:txBody>
+                    <a:bodyPr/>
+                    <a:lstStyle/>
+                    <a:p>
+                      <a:r>
+                        <a:rPr sz="1050">
+                          <a:solidFill>
+                            <a:srgbClr val="475569"/>
+                          </a:solidFill>
+                          <a:latin typeface="Segoe UI"/>
+                        </a:rPr>
+                        <a:t>Registry with immutable versioning</a:t>
+                      </a:r>
+                    </a:p>
+                  </a:txBody>
+                  <a:tcPr>
+                    <a:solidFill>
+                      <a:srgbClr val="F8FAFC"/>
+                    </a:solidFill>
+                  </a:tcPr>
+                </a:tc>
+                <a:tc>
+                  <a:txBody>
+                    <a:bodyPr/>
+                    <a:lstStyle/>
+                    <a:p>
+                      <a:r>
+                        <a:rPr sz="1050">
+                          <a:solidFill>
+                            <a:srgbClr val="475569"/>
+                          </a:solidFill>
+                          <a:latin typeface="Segoe UI"/>
+                        </a:rPr>
+                        <a:t>done, proven by test</a:t>
+                      </a:r>
+                    </a:p>
+                  </a:txBody>
+                  <a:tcPr>
+                    <a:solidFill>
+                      <a:srgbClr val="F8FAFC"/>
+                    </a:solidFill>
+                  </a:tcPr>
+                </a:tc>
+              </a:tr>
+              <a:tr h="293827">
+                <a:tc>
+                  <a:txBody>
+                    <a:bodyPr/>
+                    <a:lstStyle/>
+                    <a:p>
+                      <a:r>
+                        <a:rPr sz="1050">
+                          <a:solidFill>
+                            <a:srgbClr val="475569"/>
+                          </a:solidFill>
+                          <a:latin typeface="Segoe UI"/>
+                        </a:rPr>
+                        <a:t>5</a:t>
+                      </a:r>
+                    </a:p>
+                  </a:txBody>
+                  <a:tcPr>
+                    <a:solidFill>
+                      <a:srgbClr val="FFFFFF"/>
+                    </a:solidFill>
+                  </a:tcPr>
+                </a:tc>
+                <a:tc>
+                  <a:txBody>
+                    <a:bodyPr/>
+                    <a:lstStyle/>
+                    <a:p>
+                      <a:r>
+                        <a:rPr sz="1050">
+                          <a:solidFill>
+                            <a:srgbClr val="475569"/>
+                          </a:solidFill>
+                          <a:latin typeface="Segoe UI"/>
+                        </a:rPr>
+                        <a:t>Embedding call behind one interface</a:t>
+                      </a:r>
+                    </a:p>
+                  </a:txBody>
+                  <a:tcPr>
+                    <a:solidFill>
+                      <a:srgbClr val="FFFFFF"/>
+                    </a:solidFill>
+                  </a:tcPr>
+                </a:tc>
+                <a:tc>
+                  <a:txBody>
+                    <a:bodyPr/>
+                    <a:lstStyle/>
+                    <a:p>
+                      <a:r>
+                        <a:rPr sz="1050">
+                          <a:solidFill>
+                            <a:srgbClr val="475569"/>
+                          </a:solidFill>
+                          <a:latin typeface="Segoe UI"/>
+                        </a:rPr>
+                        <a:t>done</a:t>
+                      </a:r>
+                    </a:p>
+                  </a:txBody>
+                  <a:tcPr>
+                    <a:solidFill>
+                      <a:srgbClr val="FFFFFF"/>
+                    </a:solidFill>
+                  </a:tcPr>
+                </a:tc>
+              </a:tr>
+              <a:tr h="293827">
+                <a:tc>
+                  <a:txBody>
+                    <a:bodyPr/>
+                    <a:lstStyle/>
+                    <a:p>
+                      <a:r>
+                        <a:rPr sz="1050">
+                          <a:solidFill>
+                            <a:srgbClr val="475569"/>
+                          </a:solidFill>
+                          <a:latin typeface="Segoe UI"/>
+                        </a:rPr>
+                        <a:t>6</a:t>
+                      </a:r>
+                    </a:p>
+                  </a:txBody>
+                  <a:tcPr>
+                    <a:solidFill>
+                      <a:srgbClr val="F8FAFC"/>
+                    </a:solidFill>
+                  </a:tcPr>
+                </a:tc>
+                <a:tc>
+                  <a:txBody>
+                    <a:bodyPr/>
+                    <a:lstStyle/>
+                    <a:p>
+                      <a:r>
+                        <a:rPr sz="1050">
+                          <a:solidFill>
+                            <a:srgbClr val="475569"/>
+                          </a:solidFill>
+                          <a:latin typeface="Segoe UI"/>
+                        </a:rPr>
+                        <a:t>Semantic search endpoint</a:t>
+                      </a:r>
+                    </a:p>
+                  </a:txBody>
+                  <a:tcPr>
+                    <a:solidFill>
+                      <a:srgbClr val="F8FAFC"/>
+                    </a:solidFill>
+                  </a:tcPr>
+                </a:tc>
+                <a:tc>
+                  <a:txBody>
+                    <a:bodyPr/>
+                    <a:lstStyle/>
+                    <a:p>
+                      <a:r>
+                        <a:rPr sz="1050">
+                          <a:solidFill>
+                            <a:srgbClr val="475569"/>
+                          </a:solidFill>
+                          <a:latin typeface="Segoe UI"/>
+                        </a:rPr>
+                        <a:t>done</a:t>
+                      </a:r>
+                    </a:p>
+                  </a:txBody>
+                  <a:tcPr>
+                    <a:solidFill>
+                      <a:srgbClr val="F8FAFC"/>
+                    </a:solidFill>
+                  </a:tcPr>
+                </a:tc>
+              </a:tr>
+              <a:tr h="293827">
+                <a:tc>
+                  <a:txBody>
+                    <a:bodyPr/>
+                    <a:lstStyle/>
+                    <a:p>
+                      <a:r>
+                        <a:rPr sz="1050">
+                          <a:solidFill>
+                            <a:srgbClr val="475569"/>
+                          </a:solidFill>
+                          <a:latin typeface="Segoe UI"/>
+                        </a:rPr>
+                        <a:t>7</a:t>
+                      </a:r>
+                    </a:p>
+                  </a:txBody>
+                  <a:tcPr>
+                    <a:solidFill>
+                      <a:srgbClr val="FFFFFF"/>
+                    </a:solidFill>
+                  </a:tcPr>
+                </a:tc>
+                <a:tc>
+                  <a:txBody>
+                    <a:bodyPr/>
+                    <a:lstStyle/>
+                    <a:p>
+                      <a:r>
+                        <a:rPr sz="1050">
+                          <a:solidFill>
+                            <a:srgbClr val="475569"/>
+                          </a:solidFill>
+                          <a:latin typeface="Segoe UI"/>
+                        </a:rPr>
+                        <a:t>Append-only event log</a:t>
+                      </a:r>
+                    </a:p>
+                  </a:txBody>
+                  <a:tcPr>
+                    <a:solidFill>
+                      <a:srgbClr val="FFFFFF"/>
+                    </a:solidFill>
+                  </a:tcPr>
+                </a:tc>
+                <a:tc>
+                  <a:txBody>
+                    <a:bodyPr/>
+                    <a:lstStyle/>
+                    <a:p>
+                      <a:r>
+                        <a:rPr sz="1050">
+                          <a:solidFill>
+                            <a:srgbClr val="475569"/>
+                          </a:solidFill>
+                          <a:latin typeface="Segoe UI"/>
+                        </a:rPr>
+                        <a:t>done, IAM-enforced</a:t>
+                      </a:r>
+                    </a:p>
+                  </a:txBody>
+                  <a:tcPr>
+                    <a:solidFill>
+                      <a:srgbClr val="FFFFFF"/>
+                    </a:solidFill>
+                  </a:tcPr>
+                </a:tc>
+              </a:tr>
+              <a:tr h="293827">
+                <a:tc>
+                  <a:txBody>
+                    <a:bodyPr/>
+                    <a:lstStyle/>
+                    <a:p>
+                      <a:r>
+                        <a:rPr sz="1050">
+                          <a:solidFill>
+                            <a:srgbClr val="475569"/>
+                          </a:solidFill>
+                          <a:latin typeface="Segoe UI"/>
+                        </a:rPr>
+                        <a:t>8</a:t>
+                      </a:r>
+                    </a:p>
+                  </a:txBody>
+                  <a:tcPr>
+                    <a:solidFill>
+                      <a:srgbClr val="F8FAFC"/>
+                    </a:solidFill>
+                  </a:tcPr>
+                </a:tc>
+                <a:tc>
+                  <a:txBody>
+                    <a:bodyPr/>
+                    <a:lstStyle/>
+                    <a:p>
+                      <a:r>
+                        <a:rPr sz="1050">
+                          <a:solidFill>
+                            <a:srgbClr val="475569"/>
+                          </a:solidFill>
+                          <a:latin typeface="Segoe UI"/>
+                        </a:rPr>
+                        <a:t>Gap detection and gap log</a:t>
+                      </a:r>
+                    </a:p>
+                  </a:txBody>
+                  <a:tcPr>
+                    <a:solidFill>
+                      <a:srgbClr val="F8FAFC"/>
+                    </a:solidFill>
+                  </a:tcPr>
+                </a:tc>
+                <a:tc>
+                  <a:txBody>
+                    <a:bodyPr/>
+                    <a:lstStyle/>
+                    <a:p>
+                      <a:r>
+                        <a:rPr sz="1050">
+                          <a:solidFill>
+                            <a:srgbClr val="475569"/>
+                          </a:solidFill>
+                          <a:latin typeface="Segoe UI"/>
+                        </a:rPr>
+                        <a:t>done</a:t>
+                      </a:r>
+                    </a:p>
+                  </a:txBody>
+                  <a:tcPr>
+                    <a:solidFill>
+                      <a:srgbClr val="F8FAFC"/>
+                    </a:solidFill>
+                  </a:tcPr>
+                </a:tc>
+              </a:tr>
+              <a:tr h="293827">
+                <a:tc>
+                  <a:txBody>
+                    <a:bodyPr/>
+                    <a:lstStyle/>
+                    <a:p>
+                      <a:r>
+                        <a:rPr sz="1050">
+                          <a:solidFill>
+                            <a:srgbClr val="475569"/>
+                          </a:solidFill>
+                          <a:latin typeface="Segoe UI"/>
+                        </a:rPr>
+                        <a:t>9</a:t>
+                      </a:r>
+                    </a:p>
+                  </a:txBody>
+                  <a:tcPr>
+                    <a:solidFill>
+                      <a:srgbClr val="FFFFFF"/>
+                    </a:solidFill>
+                  </a:tcPr>
+                </a:tc>
+                <a:tc>
+                  <a:txBody>
+                    <a:bodyPr/>
+                    <a:lstStyle/>
+                    <a:p>
+                      <a:r>
+                        <a:rPr sz="1050">
+                          <a:solidFill>
+                            <a:srgbClr val="475569"/>
+                          </a:solidFill>
+                          <a:latin typeface="Segoe UI"/>
+                        </a:rPr>
+                        <a:t>Eval queries written blind</a:t>
+                      </a:r>
+                    </a:p>
+                  </a:txBody>
+                  <a:tcPr>
+                    <a:solidFill>
+                      <a:srgbClr val="FFFFFF"/>
+                    </a:solidFill>
+                  </a:tcPr>
+                </a:tc>
+                <a:tc>
+                  <a:txBody>
+                    <a:bodyPr/>
+                    <a:lstStyle/>
+                    <a:p>
+                      <a:r>
+                        <a:rPr sz="1050">
+                          <a:solidFill>
+                            <a:srgbClr val="475569"/>
+                          </a:solidFill>
+                          <a:latin typeface="Segoe UI"/>
+                        </a:rPr>
+                        <a:t>done — 60, frozen, checksummed</a:t>
+                      </a:r>
+                    </a:p>
+                  </a:txBody>
+                  <a:tcPr>
+                    <a:solidFill>
+                      <a:srgbClr val="FFFFFF"/>
+                    </a:solidFill>
+                  </a:tcPr>
+                </a:tc>
+              </a:tr>
+              <a:tr h="293827">
+                <a:tc>
+                  <a:txBody>
+                    <a:bodyPr/>
+                    <a:lstStyle/>
+                    <a:p>
+                      <a:r>
+                        <a:rPr sz="1050">
+                          <a:solidFill>
+                            <a:srgbClr val="475569"/>
+                          </a:solidFill>
+                          <a:latin typeface="Segoe UI"/>
+                        </a:rPr>
+                        <a:t>10</a:t>
+                      </a:r>
+                    </a:p>
+                  </a:txBody>
+                  <a:tcPr>
+                    <a:solidFill>
+                      <a:srgbClr val="F8FAFC"/>
+                    </a:solidFill>
+                  </a:tcPr>
+                </a:tc>
+                <a:tc>
+                  <a:txBody>
+                    <a:bodyPr/>
+                    <a:lstStyle/>
+                    <a:p>
+                      <a:r>
+                        <a:rPr sz="1050">
+                          <a:solidFill>
+                            <a:srgbClr val="475569"/>
+                          </a:solidFill>
+                          <a:latin typeface="Segoe UI"/>
+                        </a:rPr>
+                        <a:t>Seed 15-20 tools</a:t>
+                      </a:r>
+                    </a:p>
+                  </a:txBody>
+                  <a:tcPr>
+                    <a:solidFill>
+                      <a:srgbClr val="F8FAFC"/>
+                    </a:solidFill>
+                  </a:tcPr>
+                </a:tc>
+                <a:tc>
+                  <a:txBody>
+                    <a:bodyPr/>
+                    <a:lstStyle/>
+                    <a:p>
+                      <a:r>
+                        <a:rPr sz="1050">
+                          <a:solidFill>
+                            <a:srgbClr val="475569"/>
+                          </a:solidFill>
+                          <a:latin typeface="Segoe UI"/>
+                        </a:rPr>
+                        <a:t>done — 19 live, 19/19 verified</a:t>
+                      </a:r>
+                    </a:p>
+                  </a:txBody>
+                  <a:tcPr>
+                    <a:solidFill>
+                      <a:srgbClr val="F8FAFC"/>
+                    </a:solidFill>
+                  </a:tcPr>
+                </a:tc>
+              </a:tr>
+              <a:tr h="293827">
+                <a:tc>
+                  <a:txBody>
+                    <a:bodyPr/>
+                    <a:lstStyle/>
+                    <a:p>
+                      <a:r>
+                        <a:rPr sz="1050">
+                          <a:solidFill>
+                            <a:srgbClr val="475569"/>
+                          </a:solidFill>
+                          <a:latin typeface="Segoe UI"/>
+                        </a:rPr>
+                        <a:t>11</a:t>
+                      </a:r>
+                    </a:p>
+                  </a:txBody>
+                  <a:tcPr>
+                    <a:solidFill>
+                      <a:srgbClr val="FFFFFF"/>
+                    </a:solidFill>
+                  </a:tcPr>
+                </a:tc>
+                <a:tc>
+                  <a:txBody>
+                    <a:bodyPr/>
+                    <a:lstStyle/>
+                    <a:p>
+                      <a:r>
+                        <a:rPr sz="1050">
+                          <a:solidFill>
+                            <a:srgbClr val="475569"/>
+                          </a:solidFill>
+                          <a:latin typeface="Segoe UI"/>
+                        </a:rPr>
+                        <a:t>Label the set, recall@k harness</a:t>
+                      </a:r>
+                    </a:p>
+                  </a:txBody>
+                  <a:tcPr>
+                    <a:solidFill>
+                      <a:srgbClr val="FFFFFF"/>
+                    </a:solidFill>
+                  </a:tcPr>
+                </a:tc>
+                <a:tc>
+                  <a:txBody>
+                    <a:bodyPr/>
+                    <a:lstStyle/>
+                    <a:p>
+                      <a:r>
+                        <a:rPr sz="1050">
+                          <a:solidFill>
+                            <a:srgbClr val="475569"/>
+                          </a:solidFill>
+                          <a:latin typeface="Segoe UI"/>
+                        </a:rPr>
+                        <a:t>next</a:t>
+                      </a:r>
+                    </a:p>
+                  </a:txBody>
+                  <a:tcPr>
+                    <a:solidFill>
+                      <a:srgbClr val="FFFFFF"/>
+                    </a:solidFill>
+                  </a:tcPr>
+                </a:tc>
+              </a:tr>
+              <a:tr h="293827">
+                <a:tc>
+                  <a:txBody>
+                    <a:bodyPr/>
+                    <a:lstStyle/>
+                    <a:p>
+                      <a:r>
+                        <a:rPr sz="1050">
+                          <a:solidFill>
+                            <a:srgbClr val="475569"/>
+                          </a:solidFill>
+                          <a:latin typeface="Segoe UI"/>
+                        </a:rPr>
+                        <a:t>12</a:t>
+                      </a:r>
+                    </a:p>
+                  </a:txBody>
+                  <a:tcPr>
+                    <a:solidFill>
+                      <a:srgbClr val="F8FAFC"/>
+                    </a:solidFill>
+                  </a:tcPr>
+                </a:tc>
+                <a:tc>
+                  <a:txBody>
+                    <a:bodyPr/>
+                    <a:lstStyle/>
+                    <a:p>
+                      <a:r>
+                        <a:rPr sz="1050">
+                          <a:solidFill>
+                            <a:srgbClr val="475569"/>
+                          </a:solidFill>
+                          <a:latin typeface="Segoe UI"/>
+                        </a:rPr>
+                        <a:t>Derive threshold T</a:t>
+                      </a:r>
+                    </a:p>
+                  </a:txBody>
+                  <a:tcPr>
+                    <a:solidFill>
+                      <a:srgbClr val="F8FAFC"/>
+                    </a:solidFill>
+                  </a:tcPr>
+                </a:tc>
+                <a:tc>
+                  <a:txBody>
+                    <a:bodyPr/>
+                    <a:lstStyle/>
+                    <a:p>
+                      <a:r>
+                        <a:rPr sz="1050">
+                          <a:solidFill>
+                            <a:srgbClr val="475569"/>
+                          </a:solidFill>
+                          <a:latin typeface="Segoe UI"/>
+                        </a:rPr>
+                        <a:t>blocked on 11</a:t>
+                      </a:r>
+                    </a:p>
+                  </a:txBody>
+                  <a:tcPr>
+                    <a:solidFill>
+                      <a:srgbClr val="F8FAFC"/>
+                    </a:solidFill>
+                  </a:tcPr>
+                </a:tc>
+              </a:tr>
+              <a:tr h="293827">
+                <a:tc>
+                  <a:txBody>
+                    <a:bodyPr/>
+                    <a:lstStyle/>
+                    <a:p>
+                      <a:r>
+                        <a:rPr sz="1050">
+                          <a:solidFill>
+                            <a:srgbClr val="475569"/>
+                          </a:solidFill>
+                          <a:latin typeface="Segoe UI"/>
+                        </a:rPr>
+                        <a:t>13</a:t>
+                      </a:r>
+                    </a:p>
+                  </a:txBody>
+                  <a:tcPr>
+                    <a:solidFill>
+                      <a:srgbClr val="FFFFFF"/>
+                    </a:solidFill>
+                  </a:tcPr>
+                </a:tc>
+                <a:tc>
+                  <a:txBody>
+                    <a:bodyPr/>
+                    <a:lstStyle/>
+                    <a:p>
+                      <a:r>
+                        <a:rPr sz="1050">
+                          <a:solidFill>
+                            <a:srgbClr val="475569"/>
+                          </a:solidFill>
+                          <a:latin typeface="Segoe UI"/>
+                        </a:rPr>
+                        <a:t>Query and gap CLIs</a:t>
+                      </a:r>
+                    </a:p>
+                  </a:txBody>
+                  <a:tcPr>
+                    <a:solidFill>
+                      <a:srgbClr val="FFFFFF"/>
+                    </a:solidFill>
+                  </a:tcPr>
+                </a:tc>
+                <a:tc>
+                  <a:txBody>
+                    <a:bodyPr/>
+                    <a:lstStyle/>
+                    <a:p>
+                      <a:r>
+                        <a:rPr sz="1050">
+                          <a:solidFill>
+                            <a:srgbClr val="475569"/>
+                          </a:solidFill>
+                          <a:latin typeface="Segoe UI"/>
+                        </a:rPr>
+                        <a:t>not started</a:t>
+                      </a:r>
+                    </a:p>
+                  </a:txBody>
+                  <a:tcPr>
+                    <a:solidFill>
+                      <a:srgbClr val="FFFFFF"/>
+                    </a:solidFill>
+                  </a:tcPr>
+                </a:tc>
+              </a:tr>
+              <a:tr h="293830">
+                <a:tc>
+                  <a:txBody>
+                    <a:bodyPr/>
+                    <a:lstStyle/>
+                    <a:p>
+                      <a:r>
+                        <a:rPr sz="1050">
+                          <a:solidFill>
+                            <a:srgbClr val="475569"/>
+                          </a:solidFill>
+                          <a:latin typeface="Segoe UI"/>
+                        </a:rPr>
+                        <a:t>14</a:t>
+                      </a:r>
+                    </a:p>
+                  </a:txBody>
+                  <a:tcPr>
+                    <a:solidFill>
+                      <a:srgbClr val="F8FAFC"/>
+                    </a:solidFill>
+                  </a:tcPr>
+                </a:tc>
+                <a:tc>
+                  <a:txBody>
+                    <a:bodyPr/>
+                    <a:lstStyle/>
+                    <a:p>
+                      <a:r>
+                        <a:rPr sz="1050">
+                          <a:solidFill>
+                            <a:srgbClr val="475569"/>
+                          </a:solidFill>
+                          <a:latin typeface="Segoe UI"/>
+                        </a:rPr>
+                        <a:t>Findings write-up</a:t>
+                      </a:r>
+                    </a:p>
+                  </a:txBody>
+                  <a:tcPr>
+                    <a:solidFill>
+                      <a:srgbClr val="F8FAFC"/>
+                    </a:solidFill>
+                  </a:tcPr>
+                </a:tc>
+                <a:tc>
+                  <a:txBody>
+                    <a:bodyPr/>
+                    <a:lstStyle/>
+                    <a:p>
+                      <a:r>
+                        <a:rPr sz="1050">
+                          <a:solidFill>
+                            <a:srgbClr val="475569"/>
+                          </a:solidFill>
+                          <a:latin typeface="Segoe UI"/>
+                        </a:rPr>
+                        <a:t>blocked on 11, 12</a:t>
+                      </a:r>
+                    </a:p>
+                  </a:txBody>
+                  <a:tcPr>
+                    <a:solidFill>
+                      <a:srgbClr val="F8FAFC"/>
+                    </a:solidFill>
+                  </a:tcPr>
+                </a:tc>
+              </a:tr>
+            </a:tbl>
+          </a:graphicData>
+        </a:graphic>
+      </p:graphicFrame>
     </p:spTree>
   </p:cSld>
   <p:clrMapOvr>
@@ -23816,7 +27483,7 @@
                 </a:solidFill>
                 <a:latin typeface="Consolas"/>
               </a:rPr>
-              <a:t>    I1[#1 Scaffold] --&gt; I3[#3 CDK] --&gt; I4[#4 Registry]</a:t>
+              <a:t>    I1[#1 Scaffold] --&gt; I3[#3 Terraform] --&gt; I4[#4 Registry]</a:t>
             </a:r>
           </a:p>
           <a:p>

--- a/docs/plans/endless-phase-0-v3.pptx
+++ b/docs/plans/endless-phase-0-v3.pptx
@@ -46,6 +46,14 @@
     <p:sldId id="295" r:id="rId46"/>
     <p:sldId id="296" r:id="rId47"/>
     <p:sldId id="297" r:id="rId48"/>
+    <p:sldId id="298" r:id="rId49"/>
+    <p:sldId id="299" r:id="rId50"/>
+    <p:sldId id="300" r:id="rId51"/>
+    <p:sldId id="301" r:id="rId52"/>
+    <p:sldId id="302" r:id="rId53"/>
+    <p:sldId id="303" r:id="rId54"/>
+    <p:sldId id="304" r:id="rId55"/>
+    <p:sldId id="305" r:id="rId56"/>
     <p:sldId id="287" r:id="rId38"/>
   </p:sldIdLst>
   <p:sldSz cx="12191695" cy="6858000" type="screen4x3"/>
@@ -13018,7 +13026,7 @@
                           </a:solidFill>
                           <a:latin typeface="Segoe UI"/>
                         </a:rPr>
-                        <a:t>A gap row with the full top-k and the value of T</a:t>
+                        <a:t>A gap row with the full top-k and who decided it</a:t>
                       </a:r>
                     </a:p>
                   </a:txBody>
@@ -19866,7 +19874,7 @@
             <a:avLst/>
           </a:prstGeom>
           <a:solidFill>
-            <a:srgbClr val="ED7100"/>
+            <a:srgbClr val="7B42D6"/>
           </a:solidFill>
           <a:ln>
             <a:noFill/>
@@ -19903,7 +19911,7 @@
         </p:nvSpPr>
         <p:spPr>
           <a:xfrm>
-            <a:off x="1005840" y="1280160"/>
+            <a:off x="1005840" y="2468880"/>
             <a:ext cx="10058400" cy="320040"/>
           </a:xfrm>
           <a:prstGeom prst="rect">
@@ -19917,7 +19925,7 @@
           </a:bodyPr>
           <a:lstStyle/>
           <a:p>
-            <a:pPr algn="l">
+            <a:pPr>
               <a:lnSpc>
                 <a:spcPct val="100000"/>
               </a:lnSpc>
@@ -19925,11 +19933,11 @@
             <a:r>
               <a:rPr sz="1300" b="1">
                 <a:solidFill>
-                  <a:srgbClr val="ED7100"/>
-                </a:solidFill>
-                <a:latin typeface="Segoe UI"/>
-              </a:rPr>
-              <a:t>NEXT</a:t>
+                  <a:srgbClr val="7B42D6"/>
+                </a:solidFill>
+                <a:latin typeface="Segoe UI"/>
+              </a:rPr>
+              <a:t>PART FIVE</a:t>
             </a:r>
           </a:p>
         </p:txBody>
@@ -19942,8 +19950,8 @@
         </p:nvSpPr>
         <p:spPr>
           <a:xfrm>
-            <a:off x="1005840" y="1691640"/>
-            <a:ext cx="10241280" cy="731520"/>
+            <a:off x="1005840" y="2880360"/>
+            <a:ext cx="10241280" cy="822960"/>
           </a:xfrm>
           <a:prstGeom prst="rect">
             <a:avLst/>
@@ -19956,86 +19964,33 @@
           </a:bodyPr>
           <a:lstStyle/>
           <a:p>
-            <a:pPr algn="l">
+            <a:pPr>
               <a:lnSpc>
                 <a:spcPct val="100000"/>
               </a:lnSpc>
             </a:pPr>
             <a:r>
-              <a:rPr sz="3800" b="1">
+              <a:rPr sz="4000" b="1">
                 <a:solidFill>
                   <a:srgbClr val="FFFFFF"/>
                 </a:solidFill>
                 <a:latin typeface="Segoe UI"/>
               </a:rPr>
-              <a:t>Where this goes from here</a:t>
-            </a:r>
-          </a:p>
-        </p:txBody>
-      </p:sp>
-      <p:sp>
-        <p:nvSpPr>
-          <p:cNvPr id="5" name="Oval 4"/>
-          <p:cNvSpPr/>
-          <p:nvPr/>
-        </p:nvSpPr>
-        <p:spPr>
-          <a:xfrm>
-            <a:off x="1005840" y="2852928"/>
-            <a:ext cx="329184" cy="329184"/>
-          </a:xfrm>
-          <a:prstGeom prst="ellipse">
-            <a:avLst/>
-          </a:prstGeom>
-          <a:solidFill>
-            <a:srgbClr val="ED7100"/>
-          </a:solidFill>
-          <a:ln>
-            <a:noFill/>
-          </a:ln>
-          <a:effectLst/>
-        </p:spPr>
-        <p:style>
-          <a:lnRef idx="1">
-            <a:schemeClr val="accent1"/>
-          </a:lnRef>
-          <a:fillRef idx="3">
-            <a:schemeClr val="accent1"/>
-          </a:fillRef>
-          <a:effectRef idx="2">
-            <a:schemeClr val="accent1"/>
-          </a:effectRef>
-          <a:fontRef idx="minor">
-            <a:schemeClr val="lt1"/>
-          </a:fontRef>
-        </p:style>
-        <p:txBody>
-          <a:bodyPr rtlCol="0" anchor="ctr"/>
-          <a:lstStyle/>
-          <a:p>
-            <a:pPr algn="ctr"/>
-            <a:r>
-              <a:rPr sz="1200" b="1">
-                <a:solidFill>
-                  <a:srgbClr val="FFFFFF"/>
-                </a:solidFill>
-                <a:latin typeface="Segoe UI"/>
-              </a:rPr>
-              <a:t>1</a:t>
-            </a:r>
-          </a:p>
-        </p:txBody>
-      </p:sp>
-      <p:sp>
-        <p:nvSpPr>
-          <p:cNvPr id="6" name="TextBox 5"/>
+              <a:t>What was actually built</a:t>
+            </a:r>
+          </a:p>
+        </p:txBody>
+      </p:sp>
+      <p:sp>
+        <p:nvSpPr>
+          <p:cNvPr id="5" name="TextBox 4"/>
           <p:cNvSpPr txBox="1"/>
           <p:nvPr/>
         </p:nvSpPr>
         <p:spPr>
           <a:xfrm>
-            <a:off x="1536192" y="2898648"/>
-            <a:ext cx="9509760" cy="365760"/>
+            <a:off x="1005840" y="3931920"/>
+            <a:ext cx="8961120" cy="822960"/>
           </a:xfrm>
           <a:prstGeom prst="rect">
             <a:avLst/>
@@ -20048,426 +20003,19 @@
           </a:bodyPr>
           <a:lstStyle/>
           <a:p>
-            <a:pPr algn="l">
-              <a:lnSpc>
-                <a:spcPct val="100000"/>
+            <a:pPr>
+              <a:lnSpc>
+                <a:spcPct val="120000"/>
               </a:lnSpc>
             </a:pPr>
             <a:r>
               <a:rPr sz="1600" b="0">
                 <a:solidFill>
-                  <a:srgbClr val="FFFFFF"/>
-                </a:solidFill>
-                <a:latin typeface="Segoe UI"/>
-              </a:rPr>
-              <a:t>Confirm or overrule the nine assumptions</a:t>
-            </a:r>
-          </a:p>
-        </p:txBody>
-      </p:sp>
-      <p:sp>
-        <p:nvSpPr>
-          <p:cNvPr id="7" name="Oval 6"/>
-          <p:cNvSpPr/>
-          <p:nvPr/>
-        </p:nvSpPr>
-        <p:spPr>
-          <a:xfrm>
-            <a:off x="1005840" y="3419856"/>
-            <a:ext cx="329184" cy="329184"/>
-          </a:xfrm>
-          <a:prstGeom prst="ellipse">
-            <a:avLst/>
-          </a:prstGeom>
-          <a:solidFill>
-            <a:srgbClr val="ED7100"/>
-          </a:solidFill>
-          <a:ln>
-            <a:noFill/>
-          </a:ln>
-          <a:effectLst/>
-        </p:spPr>
-        <p:style>
-          <a:lnRef idx="1">
-            <a:schemeClr val="accent1"/>
-          </a:lnRef>
-          <a:fillRef idx="3">
-            <a:schemeClr val="accent1"/>
-          </a:fillRef>
-          <a:effectRef idx="2">
-            <a:schemeClr val="accent1"/>
-          </a:effectRef>
-          <a:fontRef idx="minor">
-            <a:schemeClr val="lt1"/>
-          </a:fontRef>
-        </p:style>
-        <p:txBody>
-          <a:bodyPr rtlCol="0" anchor="ctr"/>
-          <a:lstStyle/>
-          <a:p>
-            <a:pPr algn="ctr"/>
-            <a:r>
-              <a:rPr sz="1200" b="1">
-                <a:solidFill>
-                  <a:srgbClr val="FFFFFF"/>
-                </a:solidFill>
-                <a:latin typeface="Segoe UI"/>
-              </a:rPr>
-              <a:t>2</a:t>
-            </a:r>
-          </a:p>
-        </p:txBody>
-      </p:sp>
-      <p:sp>
-        <p:nvSpPr>
-          <p:cNvPr id="8" name="TextBox 7"/>
-          <p:cNvSpPr txBox="1"/>
-          <p:nvPr/>
-        </p:nvSpPr>
-        <p:spPr>
-          <a:xfrm>
-            <a:off x="1536192" y="3465576"/>
-            <a:ext cx="9509760" cy="365760"/>
-          </a:xfrm>
-          <a:prstGeom prst="rect">
-            <a:avLst/>
-          </a:prstGeom>
-          <a:noFill/>
-        </p:spPr>
-        <p:txBody>
-          <a:bodyPr wrap="square" lIns="0" rIns="0" tIns="0" bIns="0">
-            <a:spAutoFit/>
-          </a:bodyPr>
-          <a:lstStyle/>
-          <a:p>
-            <a:pPr algn="l">
-              <a:lnSpc>
-                <a:spcPct val="100000"/>
-              </a:lnSpc>
-            </a:pPr>
-            <a:r>
-              <a:rPr sz="1600" b="0">
-                <a:solidFill>
-                  <a:srgbClr val="FFFFFF"/>
-                </a:solidFill>
-                <a:latin typeface="Segoe UI"/>
-              </a:rPr>
-              <a:t>Confirm the account type, and check the credit expiry in billing</a:t>
-            </a:r>
-          </a:p>
-        </p:txBody>
-      </p:sp>
-      <p:sp>
-        <p:nvSpPr>
-          <p:cNvPr id="9" name="Oval 8"/>
-          <p:cNvSpPr/>
-          <p:nvPr/>
-        </p:nvSpPr>
-        <p:spPr>
-          <a:xfrm>
-            <a:off x="1005840" y="3986783"/>
-            <a:ext cx="329184" cy="329184"/>
-          </a:xfrm>
-          <a:prstGeom prst="ellipse">
-            <a:avLst/>
-          </a:prstGeom>
-          <a:solidFill>
-            <a:srgbClr val="ED7100"/>
-          </a:solidFill>
-          <a:ln>
-            <a:noFill/>
-          </a:ln>
-          <a:effectLst/>
-        </p:spPr>
-        <p:style>
-          <a:lnRef idx="1">
-            <a:schemeClr val="accent1"/>
-          </a:lnRef>
-          <a:fillRef idx="3">
-            <a:schemeClr val="accent1"/>
-          </a:fillRef>
-          <a:effectRef idx="2">
-            <a:schemeClr val="accent1"/>
-          </a:effectRef>
-          <a:fontRef idx="minor">
-            <a:schemeClr val="lt1"/>
-          </a:fontRef>
-        </p:style>
-        <p:txBody>
-          <a:bodyPr rtlCol="0" anchor="ctr"/>
-          <a:lstStyle/>
-          <a:p>
-            <a:pPr algn="ctr"/>
-            <a:r>
-              <a:rPr sz="1200" b="1">
-                <a:solidFill>
-                  <a:srgbClr val="FFFFFF"/>
-                </a:solidFill>
-                <a:latin typeface="Segoe UI"/>
-              </a:rPr>
-              <a:t>3</a:t>
-            </a:r>
-          </a:p>
-        </p:txBody>
-      </p:sp>
-      <p:sp>
-        <p:nvSpPr>
-          <p:cNvPr id="10" name="TextBox 9"/>
-          <p:cNvSpPr txBox="1"/>
-          <p:nvPr/>
-        </p:nvSpPr>
-        <p:spPr>
-          <a:xfrm>
-            <a:off x="1536192" y="4032503"/>
-            <a:ext cx="9509760" cy="365760"/>
-          </a:xfrm>
-          <a:prstGeom prst="rect">
-            <a:avLst/>
-          </a:prstGeom>
-          <a:noFill/>
-        </p:spPr>
-        <p:txBody>
-          <a:bodyPr wrap="square" lIns="0" rIns="0" tIns="0" bIns="0">
-            <a:spAutoFit/>
-          </a:bodyPr>
-          <a:lstStyle/>
-          <a:p>
-            <a:pPr algn="l">
-              <a:lnSpc>
-                <a:spcPct val="100000"/>
-              </a:lnSpc>
-            </a:pPr>
-            <a:r>
-              <a:rPr sz="1600" b="0">
-                <a:solidFill>
-                  <a:srgbClr val="FFFFFF"/>
-                </a:solidFill>
-                <a:latin typeface="Segoe UI"/>
-              </a:rPr>
-              <a:t>Pick the region and enable Bedrock Titan V2 model access there</a:t>
-            </a:r>
-          </a:p>
-        </p:txBody>
-      </p:sp>
-      <p:sp>
-        <p:nvSpPr>
-          <p:cNvPr id="11" name="Oval 10"/>
-          <p:cNvSpPr/>
-          <p:nvPr/>
-        </p:nvSpPr>
-        <p:spPr>
-          <a:xfrm>
-            <a:off x="1005840" y="4553712"/>
-            <a:ext cx="329184" cy="329184"/>
-          </a:xfrm>
-          <a:prstGeom prst="ellipse">
-            <a:avLst/>
-          </a:prstGeom>
-          <a:solidFill>
-            <a:srgbClr val="ED7100"/>
-          </a:solidFill>
-          <a:ln>
-            <a:noFill/>
-          </a:ln>
-          <a:effectLst/>
-        </p:spPr>
-        <p:style>
-          <a:lnRef idx="1">
-            <a:schemeClr val="accent1"/>
-          </a:lnRef>
-          <a:fillRef idx="3">
-            <a:schemeClr val="accent1"/>
-          </a:fillRef>
-          <a:effectRef idx="2">
-            <a:schemeClr val="accent1"/>
-          </a:effectRef>
-          <a:fontRef idx="minor">
-            <a:schemeClr val="lt1"/>
-          </a:fontRef>
-        </p:style>
-        <p:txBody>
-          <a:bodyPr rtlCol="0" anchor="ctr"/>
-          <a:lstStyle/>
-          <a:p>
-            <a:pPr algn="ctr"/>
-            <a:r>
-              <a:rPr sz="1200" b="1">
-                <a:solidFill>
-                  <a:srgbClr val="FFFFFF"/>
-                </a:solidFill>
-                <a:latin typeface="Segoe UI"/>
-              </a:rPr>
-              <a:t>4</a:t>
-            </a:r>
-          </a:p>
-        </p:txBody>
-      </p:sp>
-      <p:sp>
-        <p:nvSpPr>
-          <p:cNvPr id="12" name="TextBox 11"/>
-          <p:cNvSpPr txBox="1"/>
-          <p:nvPr/>
-        </p:nvSpPr>
-        <p:spPr>
-          <a:xfrm>
-            <a:off x="1536192" y="4599431"/>
-            <a:ext cx="9509760" cy="365760"/>
-          </a:xfrm>
-          <a:prstGeom prst="rect">
-            <a:avLst/>
-          </a:prstGeom>
-          <a:noFill/>
-        </p:spPr>
-        <p:txBody>
-          <a:bodyPr wrap="square" lIns="0" rIns="0" tIns="0" bIns="0">
-            <a:spAutoFit/>
-          </a:bodyPr>
-          <a:lstStyle/>
-          <a:p>
-            <a:pPr algn="l">
-              <a:lnSpc>
-                <a:spcPct val="100000"/>
-              </a:lnSpc>
-            </a:pPr>
-            <a:r>
-              <a:rPr sz="1600" b="0">
-                <a:solidFill>
-                  <a:srgbClr val="FFFFFF"/>
-                </a:solidFill>
-                <a:latin typeface="Segoe UI"/>
-              </a:rPr>
-              <a:t>Write the eval queries blind, before seeding anything</a:t>
-            </a:r>
-          </a:p>
-        </p:txBody>
-      </p:sp>
-      <p:sp>
-        <p:nvSpPr>
-          <p:cNvPr id="13" name="Oval 12"/>
-          <p:cNvSpPr/>
-          <p:nvPr/>
-        </p:nvSpPr>
-        <p:spPr>
-          <a:xfrm>
-            <a:off x="1005840" y="5120640"/>
-            <a:ext cx="329184" cy="329184"/>
-          </a:xfrm>
-          <a:prstGeom prst="ellipse">
-            <a:avLst/>
-          </a:prstGeom>
-          <a:solidFill>
-            <a:srgbClr val="ED7100"/>
-          </a:solidFill>
-          <a:ln>
-            <a:noFill/>
-          </a:ln>
-          <a:effectLst/>
-        </p:spPr>
-        <p:style>
-          <a:lnRef idx="1">
-            <a:schemeClr val="accent1"/>
-          </a:lnRef>
-          <a:fillRef idx="3">
-            <a:schemeClr val="accent1"/>
-          </a:fillRef>
-          <a:effectRef idx="2">
-            <a:schemeClr val="accent1"/>
-          </a:effectRef>
-          <a:fontRef idx="minor">
-            <a:schemeClr val="lt1"/>
-          </a:fontRef>
-        </p:style>
-        <p:txBody>
-          <a:bodyPr rtlCol="0" anchor="ctr"/>
-          <a:lstStyle/>
-          <a:p>
-            <a:pPr algn="ctr"/>
-            <a:r>
-              <a:rPr sz="1200" b="1">
-                <a:solidFill>
-                  <a:srgbClr val="FFFFFF"/>
-                </a:solidFill>
-                <a:latin typeface="Segoe UI"/>
-              </a:rPr>
-              <a:t>5</a:t>
-            </a:r>
-          </a:p>
-        </p:txBody>
-      </p:sp>
-      <p:sp>
-        <p:nvSpPr>
-          <p:cNvPr id="14" name="TextBox 13"/>
-          <p:cNvSpPr txBox="1"/>
-          <p:nvPr/>
-        </p:nvSpPr>
-        <p:spPr>
-          <a:xfrm>
-            <a:off x="1536192" y="5166359"/>
-            <a:ext cx="9509760" cy="365760"/>
-          </a:xfrm>
-          <a:prstGeom prst="rect">
-            <a:avLst/>
-          </a:prstGeom>
-          <a:noFill/>
-        </p:spPr>
-        <p:txBody>
-          <a:bodyPr wrap="square" lIns="0" rIns="0" tIns="0" bIns="0">
-            <a:spAutoFit/>
-          </a:bodyPr>
-          <a:lstStyle/>
-          <a:p>
-            <a:pPr algn="l">
-              <a:lnSpc>
-                <a:spcPct val="100000"/>
-              </a:lnSpc>
-            </a:pPr>
-            <a:r>
-              <a:rPr sz="1600" b="0">
-                <a:solidFill>
-                  <a:srgbClr val="FFFFFF"/>
-                </a:solidFill>
-                <a:latin typeface="Segoe UI"/>
-              </a:rPr>
-              <a:t>Create issues #1-#14, then start #1 and #3 in parallel</a:t>
-            </a:r>
-          </a:p>
-        </p:txBody>
-      </p:sp>
-      <p:sp>
-        <p:nvSpPr>
-          <p:cNvPr id="15" name="TextBox 14"/>
-          <p:cNvSpPr txBox="1"/>
-          <p:nvPr/>
-        </p:nvSpPr>
-        <p:spPr>
-          <a:xfrm>
-            <a:off x="1005840" y="5943600"/>
-            <a:ext cx="10515600" cy="274320"/>
-          </a:xfrm>
-          <a:prstGeom prst="rect">
-            <a:avLst/>
-          </a:prstGeom>
-          <a:noFill/>
-        </p:spPr>
-        <p:txBody>
-          <a:bodyPr wrap="square" lIns="0" rIns="0" tIns="0" bIns="0">
-            <a:spAutoFit/>
-          </a:bodyPr>
-          <a:lstStyle/>
-          <a:p>
-            <a:pPr algn="l">
-              <a:lnSpc>
-                <a:spcPct val="100000"/>
-              </a:lnSpc>
-            </a:pPr>
-            <a:r>
-              <a:rPr sz="1100" b="0">
-                <a:solidFill>
-                  <a:srgbClr val="64748B"/>
-                </a:solidFill>
-                <a:latin typeface="Segoe UI"/>
-              </a:rPr>
-              <a:t>Plan: docs/plans/phase-0-plan.md   ·   Board: miro.com/app/board/uXjVHpGFCos=</a:t>
+                  <a:srgbClr val="94A3B8"/>
+                </a:solidFill>
+                <a:latin typeface="Segoe UI"/>
+              </a:rPr>
+              <a:t>This section was added after the build. Where it disagrees with the plan above, the build is what happened.</a:t>
             </a:r>
           </a:p>
         </p:txBody>
@@ -20486,7 +20034,7 @@
     <p:bg>
       <p:bgPr>
         <a:solidFill>
-          <a:srgbClr val="0F172A"/>
+          <a:srgbClr val="FFFFFF"/>
         </a:solidFill>
         <a:effectLst/>
       </p:bgPr>
@@ -20500,20 +20048,98 @@
       <p:grpSpPr/>
       <p:sp>
         <p:nvSpPr>
-          <p:cNvPr id="2" name="Rectangle 1"/>
+          <p:cNvPr id="2" name="TextBox 1"/>
+          <p:cNvSpPr txBox="1"/>
+          <p:nvPr/>
+        </p:nvSpPr>
+        <p:spPr>
+          <a:xfrm>
+            <a:off x="777240" y="502920"/>
+            <a:ext cx="10607040" cy="274320"/>
+          </a:xfrm>
+          <a:prstGeom prst="rect">
+            <a:avLst/>
+          </a:prstGeom>
+          <a:noFill/>
+        </p:spPr>
+        <p:txBody>
+          <a:bodyPr wrap="square" lIns="0" rIns="0" tIns="0" bIns="0">
+            <a:spAutoFit/>
+          </a:bodyPr>
+          <a:lstStyle/>
+          <a:p>
+            <a:pPr>
+              <a:lnSpc>
+                <a:spcPct val="100000"/>
+              </a:lnSpc>
+            </a:pPr>
+            <a:r>
+              <a:rPr sz="1100" b="1">
+                <a:solidFill>
+                  <a:srgbClr val="94A3B8"/>
+                </a:solidFill>
+                <a:latin typeface="Segoe UI"/>
+              </a:rPr>
+              <a:t>BUILT</a:t>
+            </a:r>
+          </a:p>
+        </p:txBody>
+      </p:sp>
+      <p:sp>
+        <p:nvSpPr>
+          <p:cNvPr id="3" name="TextBox 2"/>
+          <p:cNvSpPr txBox="1"/>
+          <p:nvPr/>
+        </p:nvSpPr>
+        <p:spPr>
+          <a:xfrm>
+            <a:off x="777240" y="841248"/>
+            <a:ext cx="10607040" cy="640080"/>
+          </a:xfrm>
+          <a:prstGeom prst="rect">
+            <a:avLst/>
+          </a:prstGeom>
+          <a:noFill/>
+        </p:spPr>
+        <p:txBody>
+          <a:bodyPr wrap="square" lIns="0" rIns="0" tIns="0" bIns="0">
+            <a:spAutoFit/>
+          </a:bodyPr>
+          <a:lstStyle/>
+          <a:p>
+            <a:pPr>
+              <a:lnSpc>
+                <a:spcPct val="100000"/>
+              </a:lnSpc>
+            </a:pPr>
+            <a:r>
+              <a:rPr sz="3100" b="1">
+                <a:solidFill>
+                  <a:srgbClr val="0F172A"/>
+                </a:solidFill>
+                <a:latin typeface="Segoe UI"/>
+              </a:rPr>
+              <a:t>Terraform, not CDK</a:t>
+            </a:r>
+          </a:p>
+        </p:txBody>
+      </p:sp>
+      <p:sp>
+        <p:nvSpPr>
+          <p:cNvPr id="4" name="Rectangle 3"/>
           <p:cNvSpPr/>
           <p:nvPr/>
         </p:nvSpPr>
         <p:spPr>
           <a:xfrm>
-            <a:off x="0" y="0"/>
-            <a:ext cx="256032" cy="6858000"/>
+            <a:off x="777240" y="1572768"/>
+            <a:ext cx="1005840" cy="41148"/>
           </a:xfrm>
           <a:prstGeom prst="rect">
             <a:avLst/>
           </a:prstGeom>
           <a:solidFill>
-            <a:srgbClr val="7B42D6"/>
+            <a:srgbClr val="ED7100"/>
           </a:solidFill>
           <a:ln>
             <a:noFill/>
@@ -20544,14 +20170,14 @@
       </p:sp>
       <p:sp>
         <p:nvSpPr>
-          <p:cNvPr id="3" name="TextBox 2"/>
+          <p:cNvPr id="5" name="TextBox 4"/>
           <p:cNvSpPr txBox="1"/>
           <p:nvPr/>
         </p:nvSpPr>
         <p:spPr>
           <a:xfrm>
-            <a:off x="1005840" y="2468880"/>
-            <a:ext cx="10058400" cy="320040"/>
+            <a:off x="777240" y="1783080"/>
+            <a:ext cx="10424160" cy="457200"/>
           </a:xfrm>
           <a:prstGeom prst="rect">
             <a:avLst/>
@@ -20570,27 +20196,69 @@
               </a:lnSpc>
             </a:pPr>
             <a:r>
-              <a:rPr sz="1300" b="1">
-                <a:solidFill>
-                  <a:srgbClr val="7B42D6"/>
-                </a:solidFill>
-                <a:latin typeface="Segoe UI"/>
-              </a:rPr>
-              <a:t>PART FIVE</a:t>
-            </a:r>
-          </a:p>
-        </p:txBody>
-      </p:sp>
-      <p:sp>
-        <p:nvSpPr>
-          <p:cNvPr id="4" name="TextBox 3"/>
+              <a:rPr sz="1500" b="0">
+                <a:solidFill>
+                  <a:srgbClr val="475569"/>
+                </a:solidFill>
+                <a:latin typeface="Segoe UI"/>
+              </a:rPr>
+              <a:t>Same architecture, different tool. The plan's build section has been updated to match.</a:t>
+            </a:r>
+          </a:p>
+        </p:txBody>
+      </p:sp>
+      <p:sp>
+        <p:nvSpPr>
+          <p:cNvPr id="6" name="Rounded Rectangle 5"/>
+          <p:cNvSpPr/>
+          <p:nvPr/>
+        </p:nvSpPr>
+        <p:spPr>
+          <a:xfrm>
+            <a:off x="777240" y="2350008"/>
+            <a:ext cx="10515600" cy="1924812"/>
+          </a:xfrm>
+          <a:prstGeom prst="roundRect">
+            <a:avLst/>
+          </a:prstGeom>
+          <a:solidFill>
+            <a:srgbClr val="1E293B"/>
+          </a:solidFill>
+          <a:ln>
+            <a:noFill/>
+          </a:ln>
+          <a:effectLst/>
+        </p:spPr>
+        <p:style>
+          <a:lnRef idx="1">
+            <a:schemeClr val="accent1"/>
+          </a:lnRef>
+          <a:fillRef idx="3">
+            <a:schemeClr val="accent1"/>
+          </a:fillRef>
+          <a:effectRef idx="2">
+            <a:schemeClr val="accent1"/>
+          </a:effectRef>
+          <a:fontRef idx="minor">
+            <a:schemeClr val="lt1"/>
+          </a:fontRef>
+        </p:style>
+        <p:txBody>
+          <a:bodyPr rtlCol="0" anchor="ctr"/>
+          <a:lstStyle/>
+          <a:p/>
+        </p:txBody>
+      </p:sp>
+      <p:sp>
+        <p:nvSpPr>
+          <p:cNvPr id="7" name="TextBox 6"/>
           <p:cNvSpPr txBox="1"/>
           <p:nvPr/>
         </p:nvSpPr>
         <p:spPr>
           <a:xfrm>
-            <a:off x="1005840" y="2880360"/>
-            <a:ext cx="10241280" cy="822960"/>
+            <a:off x="978408" y="2487168"/>
+            <a:ext cx="10149840" cy="219456"/>
           </a:xfrm>
           <a:prstGeom prst="rect">
             <a:avLst/>
@@ -20609,27 +20277,27 @@
               </a:lnSpc>
             </a:pPr>
             <a:r>
-              <a:rPr sz="4000" b="1">
-                <a:solidFill>
-                  <a:srgbClr val="FFFFFF"/>
-                </a:solidFill>
-                <a:latin typeface="Segoe UI"/>
-              </a:rPr>
-              <a:t>What was actually built</a:t>
-            </a:r>
-          </a:p>
-        </p:txBody>
-      </p:sp>
-      <p:sp>
-        <p:nvSpPr>
-          <p:cNvPr id="5" name="TextBox 4"/>
+              <a:rPr sz="950" b="1">
+                <a:solidFill>
+                  <a:srgbClr val="94A3B8"/>
+                </a:solidFill>
+                <a:latin typeface="Segoe UI"/>
+              </a:rPr>
+              <a:t>STATE AND LOCKING</a:t>
+            </a:r>
+          </a:p>
+        </p:txBody>
+      </p:sp>
+      <p:sp>
+        <p:nvSpPr>
+          <p:cNvPr id="8" name="TextBox 7"/>
           <p:cNvSpPr txBox="1"/>
           <p:nvPr/>
         </p:nvSpPr>
         <p:spPr>
           <a:xfrm>
-            <a:off x="1005840" y="3931920"/>
-            <a:ext cx="8961120" cy="822960"/>
+            <a:off x="978408" y="2761487"/>
+            <a:ext cx="10149840" cy="1650492"/>
           </a:xfrm>
           <a:prstGeom prst="rect">
             <a:avLst/>
@@ -20644,17 +20312,241 @@
           <a:p>
             <a:pPr>
               <a:lnSpc>
-                <a:spcPct val="120000"/>
-              </a:lnSpc>
-            </a:pPr>
-            <a:r>
-              <a:rPr sz="1600" b="0">
-                <a:solidFill>
-                  <a:srgbClr val="94A3B8"/>
-                </a:solidFill>
-                <a:latin typeface="Segoe UI"/>
-              </a:rPr>
-              <a:t>This section was added after the build. Where it disagrees with the plan above, the build is what happened.</a:t>
+                <a:spcPct val="100000"/>
+              </a:lnSpc>
+              <a:spcAft>
+                <a:spcPts val="200"/>
+              </a:spcAft>
+            </a:pPr>
+            <a:r>
+              <a:rPr sz="1150">
+                <a:solidFill>
+                  <a:srgbClr val="E2E8F0"/>
+                </a:solidFill>
+                <a:latin typeface="Consolas"/>
+              </a:rPr>
+              <a:t>terraform {</a:t>
+            </a:r>
+          </a:p>
+          <a:p>
+            <a:pPr>
+              <a:lnSpc>
+                <a:spcPct val="100000"/>
+              </a:lnSpc>
+              <a:spcAft>
+                <a:spcPts val="200"/>
+              </a:spcAft>
+            </a:pPr>
+            <a:r>
+              <a:rPr sz="1150">
+                <a:solidFill>
+                  <a:srgbClr val="E2E8F0"/>
+                </a:solidFill>
+                <a:latin typeface="Consolas"/>
+              </a:rPr>
+              <a:t>  backend "s3" {</a:t>
+            </a:r>
+          </a:p>
+          <a:p>
+            <a:pPr>
+              <a:lnSpc>
+                <a:spcPct val="100000"/>
+              </a:lnSpc>
+              <a:spcAft>
+                <a:spcPts val="200"/>
+              </a:spcAft>
+            </a:pPr>
+            <a:r>
+              <a:rPr sz="1150">
+                <a:solidFill>
+                  <a:srgbClr val="E2E8F0"/>
+                </a:solidFill>
+                <a:latin typeface="Consolas"/>
+              </a:rPr>
+              <a:t>    bucket       = "local-shop-design-app-tfstate-258506450105"</a:t>
+            </a:r>
+          </a:p>
+          <a:p>
+            <a:pPr>
+              <a:lnSpc>
+                <a:spcPct val="100000"/>
+              </a:lnSpc>
+              <a:spcAft>
+                <a:spcPts val="200"/>
+              </a:spcAft>
+            </a:pPr>
+            <a:r>
+              <a:rPr sz="1150">
+                <a:solidFill>
+                  <a:srgbClr val="E2E8F0"/>
+                </a:solidFill>
+                <a:latin typeface="Consolas"/>
+              </a:rPr>
+              <a:t>    key          = "endless/phase-0/terraform.tfstate"</a:t>
+            </a:r>
+          </a:p>
+          <a:p>
+            <a:pPr>
+              <a:lnSpc>
+                <a:spcPct val="100000"/>
+              </a:lnSpc>
+              <a:spcAft>
+                <a:spcPts val="200"/>
+              </a:spcAft>
+            </a:pPr>
+            <a:r>
+              <a:rPr sz="1150">
+                <a:solidFill>
+                  <a:srgbClr val="E2E8F0"/>
+                </a:solidFill>
+                <a:latin typeface="Consolas"/>
+              </a:rPr>
+              <a:t>    use_lockfile = true      # S3-native locking, no DynamoDB lock table</a:t>
+            </a:r>
+          </a:p>
+          <a:p>
+            <a:pPr>
+              <a:lnSpc>
+                <a:spcPct val="100000"/>
+              </a:lnSpc>
+              <a:spcAft>
+                <a:spcPts val="200"/>
+              </a:spcAft>
+            </a:pPr>
+            <a:r>
+              <a:rPr sz="1150">
+                <a:solidFill>
+                  <a:srgbClr val="E2E8F0"/>
+                </a:solidFill>
+                <a:latin typeface="Consolas"/>
+              </a:rPr>
+              <a:t>  }</a:t>
+            </a:r>
+          </a:p>
+          <a:p>
+            <a:pPr>
+              <a:lnSpc>
+                <a:spcPct val="100000"/>
+              </a:lnSpc>
+              <a:spcAft>
+                <a:spcPts val="200"/>
+              </a:spcAft>
+            </a:pPr>
+            <a:r>
+              <a:rPr sz="1150">
+                <a:solidFill>
+                  <a:srgbClr val="E2E8F0"/>
+                </a:solidFill>
+                <a:latin typeface="Consolas"/>
+              </a:rPr>
+              <a:t>}</a:t>
+            </a:r>
+          </a:p>
+        </p:txBody>
+      </p:sp>
+      <p:sp>
+        <p:nvSpPr>
+          <p:cNvPr id="9" name="TextBox 8"/>
+          <p:cNvSpPr txBox="1"/>
+          <p:nvPr/>
+        </p:nvSpPr>
+        <p:spPr>
+          <a:xfrm>
+            <a:off x="777240" y="4133087"/>
+            <a:ext cx="10515600" cy="2377440"/>
+          </a:xfrm>
+          <a:prstGeom prst="rect">
+            <a:avLst/>
+          </a:prstGeom>
+          <a:noFill/>
+        </p:spPr>
+        <p:txBody>
+          <a:bodyPr wrap="square" lIns="0" rIns="0" tIns="0" bIns="0">
+            <a:spAutoFit/>
+          </a:bodyPr>
+          <a:lstStyle/>
+          <a:p>
+            <a:pPr>
+              <a:lnSpc>
+                <a:spcPct val="115000"/>
+              </a:lnSpc>
+              <a:spcAft>
+                <a:spcPts val="1000"/>
+              </a:spcAft>
+            </a:pPr>
+            <a:r>
+              <a:rPr sz="1400" b="1">
+                <a:solidFill>
+                  <a:srgbClr val="0F172A"/>
+                </a:solidFill>
+                <a:latin typeface="Segoe UI"/>
+              </a:rPr>
+              <a:t>26 resources, applied and verified.</a:t>
+            </a:r>
+            <a:r>
+              <a:rPr sz="1400">
+                <a:solidFill>
+                  <a:srgbClr val="475569"/>
+                </a:solidFill>
+                <a:latin typeface="Segoe UI"/>
+              </a:rPr>
+              <a:t>  Three DynamoDB tables, three Lambdas with Function URLs, per-function IAM roles, log groups, billing alarm.</a:t>
+            </a:r>
+          </a:p>
+          <a:p>
+            <a:pPr>
+              <a:lnSpc>
+                <a:spcPct val="115000"/>
+              </a:lnSpc>
+              <a:spcAft>
+                <a:spcPts val="1000"/>
+              </a:spcAft>
+            </a:pPr>
+            <a:r>
+              <a:rPr sz="1400" b="1">
+                <a:solidFill>
+                  <a:srgbClr val="0F172A"/>
+                </a:solidFill>
+                <a:latin typeface="Segoe UI"/>
+              </a:rPr>
+              <a:t>use_lockfile replaced the DynamoDB lock table.</a:t>
+            </a:r>
+            <a:r>
+              <a:rPr sz="1400">
+                <a:solidFill>
+                  <a:srgbClr val="475569"/>
+                </a:solidFill>
+                <a:latin typeface="Segoe UI"/>
+              </a:rPr>
+              <a:t>  Terraform 1.11 made S3-native locking through conditional writes the default approach. There is no lock table here, and there should not be.</a:t>
+            </a:r>
+          </a:p>
+          <a:p>
+            <a:pPr>
+              <a:lnSpc>
+                <a:spcPct val="115000"/>
+              </a:lnSpc>
+              <a:spcAft>
+                <a:spcPts val="1000"/>
+              </a:spcAft>
+            </a:pPr>
+            <a:r>
+              <a:rPr sz="1400" b="1">
+                <a:solidFill>
+                  <a:srgbClr val="0F172A"/>
+                </a:solidFill>
+                <a:latin typeface="Segoe UI"/>
+              </a:rPr>
+              <a:t>The S3 vector cache was removed.</a:t>
+            </a:r>
+            <a:r>
+              <a:rPr sz="1400">
+                <a:solidFill>
+                  <a:srgbClr val="475569"/>
+                </a:solidFill>
+                <a:latin typeface="Segoe UI"/>
+              </a:rPr>
+              <a:t>  It was provisioned with IAM grants on both sides and a README describing a warm start, and no code ever touched it. The tool row is the only authority for a vector.</a:t>
             </a:r>
           </a:p>
         </p:txBody>
@@ -20758,7 +20650,7 @@
                 </a:solidFill>
                 <a:latin typeface="Segoe UI"/>
               </a:rPr>
-              <a:t>Terraform, not CDK</a:t>
+              <a:t>The CI/CD pipeline</a:t>
             </a:r>
           </a:p>
         </p:txBody>
@@ -20841,53 +20733,399 @@
                 </a:solidFill>
                 <a:latin typeface="Segoe UI"/>
               </a:rPr>
-              <a:t>Same architecture, different tool. The plan's build section has been updated to match.</a:t>
-            </a:r>
-          </a:p>
-        </p:txBody>
-      </p:sp>
-      <p:sp>
-        <p:nvSpPr>
-          <p:cNvPr id="6" name="Rounded Rectangle 5"/>
-          <p:cNvSpPr/>
-          <p:nvPr/>
-        </p:nvSpPr>
-        <p:spPr>
-          <a:xfrm>
-            <a:off x="777240" y="2350008"/>
-            <a:ext cx="10515600" cy="1924812"/>
-          </a:xfrm>
-          <a:prstGeom prst="roundRect">
-            <a:avLst/>
-          </a:prstGeom>
-          <a:solidFill>
-            <a:srgbClr val="1E293B"/>
-          </a:solidFill>
-          <a:ln>
-            <a:noFill/>
-          </a:ln>
-          <a:effectLst/>
-        </p:spPr>
-        <p:style>
-          <a:lnRef idx="1">
-            <a:schemeClr val="accent1"/>
-          </a:lnRef>
-          <a:fillRef idx="3">
-            <a:schemeClr val="accent1"/>
-          </a:fillRef>
-          <a:effectRef idx="2">
-            <a:schemeClr val="accent1"/>
-          </a:effectRef>
-          <a:fontRef idx="minor">
-            <a:schemeClr val="lt1"/>
-          </a:fontRef>
-        </p:style>
-        <p:txBody>
-          <a:bodyPr rtlCol="0" anchor="ctr"/>
-          <a:lstStyle/>
-          <a:p/>
-        </p:txBody>
-      </p:sp>
+              <a:t>GitHub Actions to AWS over OIDC. No stored credentials anywhere.</a:t>
+            </a:r>
+          </a:p>
+        </p:txBody>
+      </p:sp>
+      <p:graphicFrame>
+        <p:nvGraphicFramePr>
+          <p:cNvPr id="6" name="Table 5"/>
+          <p:cNvGraphicFramePr>
+            <a:graphicFrameLocks noGrp="1"/>
+          </p:cNvGraphicFramePr>
+          <p:nvPr/>
+        </p:nvGraphicFramePr>
+        <p:xfrm>
+          <a:off x="777240" y="2350008"/>
+          <a:ext cx="10515600" cy="1188720"/>
+        </p:xfrm>
+        <a:graphic>
+          <a:graphicData uri="http://schemas.openxmlformats.org/drawingml/2006/table">
+            <a:tbl>
+              <a:tblPr firstRow="1" bandRow="1">
+                <a:tableStyleId>{5C22544A-7EE6-4342-B048-85BDC9FD1C3A}</a:tableStyleId>
+              </a:tblPr>
+              <a:tblGrid>
+                <a:gridCol w="2194560"/>
+                <a:gridCol w="2743200"/>
+                <a:gridCol w="2834640"/>
+                <a:gridCol w="2743200"/>
+              </a:tblGrid>
+              <a:tr h="297180">
+                <a:tc>
+                  <a:txBody>
+                    <a:bodyPr/>
+                    <a:lstStyle/>
+                    <a:p>
+                      <a:r>
+                        <a:rPr sz="1100" b="1">
+                          <a:solidFill>
+                            <a:srgbClr val="FFFFFF"/>
+                          </a:solidFill>
+                          <a:latin typeface="Segoe UI"/>
+                        </a:rPr>
+                        <a:t>Workflow</a:t>
+                      </a:r>
+                    </a:p>
+                  </a:txBody>
+                  <a:tcPr>
+                    <a:solidFill>
+                      <a:srgbClr val="0F172A"/>
+                    </a:solidFill>
+                  </a:tcPr>
+                </a:tc>
+                <a:tc>
+                  <a:txBody>
+                    <a:bodyPr/>
+                    <a:lstStyle/>
+                    <a:p>
+                      <a:r>
+                        <a:rPr sz="1100" b="1">
+                          <a:solidFill>
+                            <a:srgbClr val="FFFFFF"/>
+                          </a:solidFill>
+                          <a:latin typeface="Segoe UI"/>
+                        </a:rPr>
+                        <a:t>Trigger</a:t>
+                      </a:r>
+                    </a:p>
+                  </a:txBody>
+                  <a:tcPr>
+                    <a:solidFill>
+                      <a:srgbClr val="0F172A"/>
+                    </a:solidFill>
+                  </a:tcPr>
+                </a:tc>
+                <a:tc>
+                  <a:txBody>
+                    <a:bodyPr/>
+                    <a:lstStyle/>
+                    <a:p>
+                      <a:r>
+                        <a:rPr sz="1100" b="1">
+                          <a:solidFill>
+                            <a:srgbClr val="FFFFFF"/>
+                          </a:solidFill>
+                          <a:latin typeface="Segoe UI"/>
+                        </a:rPr>
+                        <a:t>Role</a:t>
+                      </a:r>
+                    </a:p>
+                  </a:txBody>
+                  <a:tcPr>
+                    <a:solidFill>
+                      <a:srgbClr val="0F172A"/>
+                    </a:solidFill>
+                  </a:tcPr>
+                </a:tc>
+                <a:tc>
+                  <a:txBody>
+                    <a:bodyPr/>
+                    <a:lstStyle/>
+                    <a:p>
+                      <a:r>
+                        <a:rPr sz="1100" b="1">
+                          <a:solidFill>
+                            <a:srgbClr val="FFFFFF"/>
+                          </a:solidFill>
+                          <a:latin typeface="Segoe UI"/>
+                        </a:rPr>
+                        <a:t>Can</a:t>
+                      </a:r>
+                    </a:p>
+                  </a:txBody>
+                  <a:tcPr>
+                    <a:solidFill>
+                      <a:srgbClr val="0F172A"/>
+                    </a:solidFill>
+                  </a:tcPr>
+                </a:tc>
+              </a:tr>
+              <a:tr h="297180">
+                <a:tc>
+                  <a:txBody>
+                    <a:bodyPr/>
+                    <a:lstStyle/>
+                    <a:p>
+                      <a:r>
+                        <a:rPr sz="1100">
+                          <a:solidFill>
+                            <a:srgbClr val="475569"/>
+                          </a:solidFill>
+                          <a:latin typeface="Segoe UI"/>
+                        </a:rPr>
+                        <a:t>terraform plan</a:t>
+                      </a:r>
+                    </a:p>
+                  </a:txBody>
+                  <a:tcPr>
+                    <a:solidFill>
+                      <a:srgbClr val="FFFFFF"/>
+                    </a:solidFill>
+                  </a:tcPr>
+                </a:tc>
+                <a:tc>
+                  <a:txBody>
+                    <a:bodyPr/>
+                    <a:lstStyle/>
+                    <a:p>
+                      <a:r>
+                        <a:rPr sz="1100">
+                          <a:solidFill>
+                            <a:srgbClr val="475569"/>
+                          </a:solidFill>
+                          <a:latin typeface="Segoe UI"/>
+                        </a:rPr>
+                        <a:t>PR, branch push</a:t>
+                      </a:r>
+                    </a:p>
+                  </a:txBody>
+                  <a:tcPr>
+                    <a:solidFill>
+                      <a:srgbClr val="FFFFFF"/>
+                    </a:solidFill>
+                  </a:tcPr>
+                </a:tc>
+                <a:tc>
+                  <a:txBody>
+                    <a:bodyPr/>
+                    <a:lstStyle/>
+                    <a:p>
+                      <a:r>
+                        <a:rPr sz="1100">
+                          <a:solidFill>
+                            <a:srgbClr val="475569"/>
+                          </a:solidFill>
+                          <a:latin typeface="Segoe UI"/>
+                        </a:rPr>
+                        <a:t>endless-gha-plan</a:t>
+                      </a:r>
+                    </a:p>
+                  </a:txBody>
+                  <a:tcPr>
+                    <a:solidFill>
+                      <a:srgbClr val="FFFFFF"/>
+                    </a:solidFill>
+                  </a:tcPr>
+                </a:tc>
+                <a:tc>
+                  <a:txBody>
+                    <a:bodyPr/>
+                    <a:lstStyle/>
+                    <a:p>
+                      <a:r>
+                        <a:rPr sz="1100">
+                          <a:solidFill>
+                            <a:srgbClr val="475569"/>
+                          </a:solidFill>
+                          <a:latin typeface="Segoe UI"/>
+                        </a:rPr>
+                        <a:t>read only, any ref</a:t>
+                      </a:r>
+                    </a:p>
+                  </a:txBody>
+                  <a:tcPr>
+                    <a:solidFill>
+                      <a:srgbClr val="FFFFFF"/>
+                    </a:solidFill>
+                  </a:tcPr>
+                </a:tc>
+              </a:tr>
+              <a:tr h="297180">
+                <a:tc>
+                  <a:txBody>
+                    <a:bodyPr/>
+                    <a:lstStyle/>
+                    <a:p>
+                      <a:r>
+                        <a:rPr sz="1100">
+                          <a:solidFill>
+                            <a:srgbClr val="475569"/>
+                          </a:solidFill>
+                          <a:latin typeface="Segoe UI"/>
+                        </a:rPr>
+                        <a:t>terraform apply</a:t>
+                      </a:r>
+                    </a:p>
+                  </a:txBody>
+                  <a:tcPr>
+                    <a:solidFill>
+                      <a:srgbClr val="F8FAFC"/>
+                    </a:solidFill>
+                  </a:tcPr>
+                </a:tc>
+                <a:tc>
+                  <a:txBody>
+                    <a:bodyPr/>
+                    <a:lstStyle/>
+                    <a:p>
+                      <a:r>
+                        <a:rPr sz="1100">
+                          <a:solidFill>
+                            <a:srgbClr val="475569"/>
+                          </a:solidFill>
+                          <a:latin typeface="Segoe UI"/>
+                        </a:rPr>
+                        <a:t>manual dispatch</a:t>
+                      </a:r>
+                    </a:p>
+                  </a:txBody>
+                  <a:tcPr>
+                    <a:solidFill>
+                      <a:srgbClr val="F8FAFC"/>
+                    </a:solidFill>
+                  </a:tcPr>
+                </a:tc>
+                <a:tc>
+                  <a:txBody>
+                    <a:bodyPr/>
+                    <a:lstStyle/>
+                    <a:p>
+                      <a:r>
+                        <a:rPr sz="1100">
+                          <a:solidFill>
+                            <a:srgbClr val="475569"/>
+                          </a:solidFill>
+                          <a:latin typeface="Segoe UI"/>
+                        </a:rPr>
+                        <a:t>endless-gha-apply</a:t>
+                      </a:r>
+                    </a:p>
+                  </a:txBody>
+                  <a:tcPr>
+                    <a:solidFill>
+                      <a:srgbClr val="F8FAFC"/>
+                    </a:solidFill>
+                  </a:tcPr>
+                </a:tc>
+                <a:tc>
+                  <a:txBody>
+                    <a:bodyPr/>
+                    <a:lstStyle/>
+                    <a:p>
+                      <a:r>
+                        <a:rPr sz="1100">
+                          <a:solidFill>
+                            <a:srgbClr val="475569"/>
+                          </a:solidFill>
+                          <a:latin typeface="Segoe UI"/>
+                        </a:rPr>
+                        <a:t>write, main only</a:t>
+                      </a:r>
+                    </a:p>
+                  </a:txBody>
+                  <a:tcPr>
+                    <a:solidFill>
+                      <a:srgbClr val="F8FAFC"/>
+                    </a:solidFill>
+                  </a:tcPr>
+                </a:tc>
+              </a:tr>
+              <a:tr h="297180">
+                <a:tc>
+                  <a:txBody>
+                    <a:bodyPr/>
+                    <a:lstStyle/>
+                    <a:p>
+                      <a:r>
+                        <a:rPr sz="1100">
+                          <a:solidFill>
+                            <a:srgbClr val="475569"/>
+                          </a:solidFill>
+                          <a:latin typeface="Segoe UI"/>
+                        </a:rPr>
+                        <a:t>lambda ci</a:t>
+                      </a:r>
+                    </a:p>
+                  </a:txBody>
+                  <a:tcPr>
+                    <a:solidFill>
+                      <a:srgbClr val="FFFFFF"/>
+                    </a:solidFill>
+                  </a:tcPr>
+                </a:tc>
+                <a:tc>
+                  <a:txBody>
+                    <a:bodyPr/>
+                    <a:lstStyle/>
+                    <a:p>
+                      <a:r>
+                        <a:rPr sz="1100">
+                          <a:solidFill>
+                            <a:srgbClr val="475569"/>
+                          </a:solidFill>
+                          <a:latin typeface="Segoe UI"/>
+                        </a:rPr>
+                        <a:t>lambda/ or tests/ change</a:t>
+                      </a:r>
+                    </a:p>
+                  </a:txBody>
+                  <a:tcPr>
+                    <a:solidFill>
+                      <a:srgbClr val="FFFFFF"/>
+                    </a:solidFill>
+                  </a:tcPr>
+                </a:tc>
+                <a:tc>
+                  <a:txBody>
+                    <a:bodyPr/>
+                    <a:lstStyle/>
+                    <a:p>
+                      <a:r>
+                        <a:rPr sz="1100">
+                          <a:solidFill>
+                            <a:srgbClr val="475569"/>
+                          </a:solidFill>
+                          <a:latin typeface="Segoe UI"/>
+                        </a:rPr>
+                        <a:t>none</a:t>
+                      </a:r>
+                    </a:p>
+                  </a:txBody>
+                  <a:tcPr>
+                    <a:solidFill>
+                      <a:srgbClr val="FFFFFF"/>
+                    </a:solidFill>
+                  </a:tcPr>
+                </a:tc>
+                <a:tc>
+                  <a:txBody>
+                    <a:bodyPr/>
+                    <a:lstStyle/>
+                    <a:p>
+                      <a:r>
+                        <a:rPr sz="1100">
+                          <a:solidFill>
+                            <a:srgbClr val="475569"/>
+                          </a:solidFill>
+                          <a:latin typeface="Segoe UI"/>
+                        </a:rPr>
+                        <a:t>no AWS access at all</a:t>
+                      </a:r>
+                    </a:p>
+                  </a:txBody>
+                  <a:tcPr>
+                    <a:solidFill>
+                      <a:srgbClr val="FFFFFF"/>
+                    </a:solidFill>
+                  </a:tcPr>
+                </a:tc>
+              </a:tr>
+            </a:tbl>
+          </a:graphicData>
+        </a:graphic>
+      </p:graphicFrame>
       <p:sp>
         <p:nvSpPr>
           <p:cNvPr id="7" name="TextBox 6"/>
@@ -20896,8 +21134,8 @@
         </p:nvSpPr>
         <p:spPr>
           <a:xfrm>
-            <a:off x="978408" y="2487168"/>
-            <a:ext cx="10149840" cy="219456"/>
+            <a:off x="777240" y="3721608"/>
+            <a:ext cx="10515600" cy="2743200"/>
           </a:xfrm>
           <a:prstGeom prst="rect">
             <a:avLst/>
@@ -20912,201 +21150,6 @@
           <a:p>
             <a:pPr>
               <a:lnSpc>
-                <a:spcPct val="100000"/>
-              </a:lnSpc>
-            </a:pPr>
-            <a:r>
-              <a:rPr sz="950" b="1">
-                <a:solidFill>
-                  <a:srgbClr val="94A3B8"/>
-                </a:solidFill>
-                <a:latin typeface="Segoe UI"/>
-              </a:rPr>
-              <a:t>STATE AND LOCKING</a:t>
-            </a:r>
-          </a:p>
-        </p:txBody>
-      </p:sp>
-      <p:sp>
-        <p:nvSpPr>
-          <p:cNvPr id="8" name="TextBox 7"/>
-          <p:cNvSpPr txBox="1"/>
-          <p:nvPr/>
-        </p:nvSpPr>
-        <p:spPr>
-          <a:xfrm>
-            <a:off x="978408" y="2761487"/>
-            <a:ext cx="10149840" cy="1650492"/>
-          </a:xfrm>
-          <a:prstGeom prst="rect">
-            <a:avLst/>
-          </a:prstGeom>
-          <a:noFill/>
-        </p:spPr>
-        <p:txBody>
-          <a:bodyPr wrap="square" lIns="0" rIns="0" tIns="0" bIns="0">
-            <a:spAutoFit/>
-          </a:bodyPr>
-          <a:lstStyle/>
-          <a:p>
-            <a:pPr>
-              <a:lnSpc>
-                <a:spcPct val="100000"/>
-              </a:lnSpc>
-              <a:spcAft>
-                <a:spcPts val="200"/>
-              </a:spcAft>
-            </a:pPr>
-            <a:r>
-              <a:rPr sz="1150">
-                <a:solidFill>
-                  <a:srgbClr val="E2E8F0"/>
-                </a:solidFill>
-                <a:latin typeface="Consolas"/>
-              </a:rPr>
-              <a:t>terraform {</a:t>
-            </a:r>
-          </a:p>
-          <a:p>
-            <a:pPr>
-              <a:lnSpc>
-                <a:spcPct val="100000"/>
-              </a:lnSpc>
-              <a:spcAft>
-                <a:spcPts val="200"/>
-              </a:spcAft>
-            </a:pPr>
-            <a:r>
-              <a:rPr sz="1150">
-                <a:solidFill>
-                  <a:srgbClr val="E2E8F0"/>
-                </a:solidFill>
-                <a:latin typeface="Consolas"/>
-              </a:rPr>
-              <a:t>  backend "s3" {</a:t>
-            </a:r>
-          </a:p>
-          <a:p>
-            <a:pPr>
-              <a:lnSpc>
-                <a:spcPct val="100000"/>
-              </a:lnSpc>
-              <a:spcAft>
-                <a:spcPts val="200"/>
-              </a:spcAft>
-            </a:pPr>
-            <a:r>
-              <a:rPr sz="1150">
-                <a:solidFill>
-                  <a:srgbClr val="E2E8F0"/>
-                </a:solidFill>
-                <a:latin typeface="Consolas"/>
-              </a:rPr>
-              <a:t>    bucket       = "local-shop-design-app-tfstate-258506450105"</a:t>
-            </a:r>
-          </a:p>
-          <a:p>
-            <a:pPr>
-              <a:lnSpc>
-                <a:spcPct val="100000"/>
-              </a:lnSpc>
-              <a:spcAft>
-                <a:spcPts val="200"/>
-              </a:spcAft>
-            </a:pPr>
-            <a:r>
-              <a:rPr sz="1150">
-                <a:solidFill>
-                  <a:srgbClr val="E2E8F0"/>
-                </a:solidFill>
-                <a:latin typeface="Consolas"/>
-              </a:rPr>
-              <a:t>    key          = "endless/phase-0/terraform.tfstate"</a:t>
-            </a:r>
-          </a:p>
-          <a:p>
-            <a:pPr>
-              <a:lnSpc>
-                <a:spcPct val="100000"/>
-              </a:lnSpc>
-              <a:spcAft>
-                <a:spcPts val="200"/>
-              </a:spcAft>
-            </a:pPr>
-            <a:r>
-              <a:rPr sz="1150">
-                <a:solidFill>
-                  <a:srgbClr val="E2E8F0"/>
-                </a:solidFill>
-                <a:latin typeface="Consolas"/>
-              </a:rPr>
-              <a:t>    use_lockfile = true      # S3-native locking, no DynamoDB lock table</a:t>
-            </a:r>
-          </a:p>
-          <a:p>
-            <a:pPr>
-              <a:lnSpc>
-                <a:spcPct val="100000"/>
-              </a:lnSpc>
-              <a:spcAft>
-                <a:spcPts val="200"/>
-              </a:spcAft>
-            </a:pPr>
-            <a:r>
-              <a:rPr sz="1150">
-                <a:solidFill>
-                  <a:srgbClr val="E2E8F0"/>
-                </a:solidFill>
-                <a:latin typeface="Consolas"/>
-              </a:rPr>
-              <a:t>  }</a:t>
-            </a:r>
-          </a:p>
-          <a:p>
-            <a:pPr>
-              <a:lnSpc>
-                <a:spcPct val="100000"/>
-              </a:lnSpc>
-              <a:spcAft>
-                <a:spcPts val="200"/>
-              </a:spcAft>
-            </a:pPr>
-            <a:r>
-              <a:rPr sz="1150">
-                <a:solidFill>
-                  <a:srgbClr val="E2E8F0"/>
-                </a:solidFill>
-                <a:latin typeface="Consolas"/>
-              </a:rPr>
-              <a:t>}</a:t>
-            </a:r>
-          </a:p>
-        </p:txBody>
-      </p:sp>
-      <p:sp>
-        <p:nvSpPr>
-          <p:cNvPr id="9" name="TextBox 8"/>
-          <p:cNvSpPr txBox="1"/>
-          <p:nvPr/>
-        </p:nvSpPr>
-        <p:spPr>
-          <a:xfrm>
-            <a:off x="777240" y="4133087"/>
-            <a:ext cx="10515600" cy="2377440"/>
-          </a:xfrm>
-          <a:prstGeom prst="rect">
-            <a:avLst/>
-          </a:prstGeom>
-          <a:noFill/>
-        </p:spPr>
-        <p:txBody>
-          <a:bodyPr wrap="square" lIns="0" rIns="0" tIns="0" bIns="0">
-            <a:spAutoFit/>
-          </a:bodyPr>
-          <a:lstStyle/>
-          <a:p>
-            <a:pPr>
-              <a:lnSpc>
                 <a:spcPct val="115000"/>
               </a:lnSpc>
               <a:spcAft>
@@ -21120,7 +21163,7 @@
                 </a:solidFill>
                 <a:latin typeface="Segoe UI"/>
               </a:rPr>
-              <a:t>26 resources, applied and verified.</a:t>
+              <a:t>A role ARN is not a secret.</a:t>
             </a:r>
             <a:r>
               <a:rPr sz="1400">
@@ -21129,7 +21172,7 @@
                 </a:solidFill>
                 <a:latin typeface="Segoe UI"/>
               </a:rPr>
-              <a:t>  Three DynamoDB tables, three Lambdas with Function URLs, per-function IAM roles, log groups, billing alarm.</a:t>
+              <a:t>  It sits in plain text in the workflow files and is useless to anyone whose OIDC token does not satisfy the trust policy.</a:t>
             </a:r>
           </a:p>
           <a:p>
@@ -21148,7 +21191,7 @@
                 </a:solidFill>
                 <a:latin typeface="Segoe UI"/>
               </a:rPr>
-              <a:t>use_lockfile replaced the DynamoDB lock table.</a:t>
+              <a:t>The branch restriction lives in the trust policy, not the workflow.</a:t>
             </a:r>
             <a:r>
               <a:rPr sz="1400">
@@ -21157,7 +21200,7 @@
                 </a:solidFill>
                 <a:latin typeface="Segoe UI"/>
               </a:rPr>
-              <a:t>  Terraform 1.11 made S3-native locking through conditional writes the default approach. There is no lock table here, and there should not be.</a:t>
+              <a:t>  Editing a workflow file on a branch cannot grant apply rights, because AWS checks the branch claim in the token itself.</a:t>
             </a:r>
           </a:p>
           <a:p>
@@ -21176,7 +21219,7 @@
                 </a:solidFill>
                 <a:latin typeface="Segoe UI"/>
               </a:rPr>
-              <a:t>The S3 vector cache was removed.</a:t>
+              <a:t>Bootstrap is a separate state, applied by hand.</a:t>
             </a:r>
             <a:r>
               <a:rPr sz="1400">
@@ -21185,7 +21228,35 @@
                 </a:solidFill>
                 <a:latin typeface="Segoe UI"/>
               </a:rPr>
-              <a:t>  It was provisioned with IAM grants on both sides and a README describing a warm start, and no code ever touched it. The tool row is the only authority for a vector.</a:t>
+              <a:t>  So a bad apply in CI cannot delete the role CI authenticates with.</a:t>
+            </a:r>
+          </a:p>
+          <a:p>
+            <a:pPr>
+              <a:lnSpc>
+                <a:spcPct val="115000"/>
+              </a:lnSpc>
+              <a:spcAft>
+                <a:spcPts val="1000"/>
+              </a:spcAft>
+            </a:pPr>
+            <a:r>
+              <a:rPr sz="1400" b="1">
+                <a:solidFill>
+                  <a:srgbClr val="0F172A"/>
+                </a:solidFill>
+                <a:latin typeface="Segoe UI"/>
+              </a:rPr>
+              <a:t>Apply is gated by a typed confirmation, not a reviewer.</a:t>
+            </a:r>
+            <a:r>
+              <a:rPr sz="1400">
+                <a:solidFill>
+                  <a:srgbClr val="475569"/>
+                </a:solidFill>
+                <a:latin typeface="Segoe UI"/>
+              </a:rPr>
+              <a:t>  GitHub Environments need repo admin, which this account does not have. Replace it with environment: production the moment admin is granted.</a:t>
             </a:r>
           </a:p>
         </p:txBody>
@@ -21289,7 +21360,7 @@
                 </a:solidFill>
                 <a:latin typeface="Segoe UI"/>
               </a:rPr>
-              <a:t>The CI/CD pipeline</a:t>
+              <a:t>Three failures only the pipeline could find</a:t>
             </a:r>
           </a:p>
         </p:txBody>
@@ -21372,409 +21443,21 @@
                 </a:solidFill>
                 <a:latin typeface="Segoe UI"/>
               </a:rPr>
-              <a:t>GitHub Actions to AWS over OIDC. No stored credentials anywhere.</a:t>
-            </a:r>
-          </a:p>
-        </p:txBody>
-      </p:sp>
-      <p:graphicFrame>
-        <p:nvGraphicFramePr>
-          <p:cNvPr id="6" name="Table 5"/>
-          <p:cNvGraphicFramePr>
-            <a:graphicFrameLocks noGrp="1"/>
-          </p:cNvGraphicFramePr>
-          <p:nvPr/>
-        </p:nvGraphicFramePr>
-        <p:xfrm>
-          <a:off x="777240" y="2350008"/>
-          <a:ext cx="10515600" cy="1188720"/>
-        </p:xfrm>
-        <a:graphic>
-          <a:graphicData uri="http://schemas.openxmlformats.org/drawingml/2006/table">
-            <a:tbl>
-              <a:tblPr firstRow="1" bandRow="1">
-                <a:tableStyleId>{5C22544A-7EE6-4342-B048-85BDC9FD1C3A}</a:tableStyleId>
-              </a:tblPr>
-              <a:tblGrid>
-                <a:gridCol w="2194560"/>
-                <a:gridCol w="2743200"/>
-                <a:gridCol w="2834640"/>
-                <a:gridCol w="2743200"/>
-              </a:tblGrid>
-              <a:tr h="297180">
-                <a:tc>
-                  <a:txBody>
-                    <a:bodyPr/>
-                    <a:lstStyle/>
-                    <a:p>
-                      <a:r>
-                        <a:rPr sz="1100" b="1">
-                          <a:solidFill>
-                            <a:srgbClr val="FFFFFF"/>
-                          </a:solidFill>
-                          <a:latin typeface="Segoe UI"/>
-                        </a:rPr>
-                        <a:t>Workflow</a:t>
-                      </a:r>
-                    </a:p>
-                  </a:txBody>
-                  <a:tcPr>
-                    <a:solidFill>
-                      <a:srgbClr val="0F172A"/>
-                    </a:solidFill>
-                  </a:tcPr>
-                </a:tc>
-                <a:tc>
-                  <a:txBody>
-                    <a:bodyPr/>
-                    <a:lstStyle/>
-                    <a:p>
-                      <a:r>
-                        <a:rPr sz="1100" b="1">
-                          <a:solidFill>
-                            <a:srgbClr val="FFFFFF"/>
-                          </a:solidFill>
-                          <a:latin typeface="Segoe UI"/>
-                        </a:rPr>
-                        <a:t>Trigger</a:t>
-                      </a:r>
-                    </a:p>
-                  </a:txBody>
-                  <a:tcPr>
-                    <a:solidFill>
-                      <a:srgbClr val="0F172A"/>
-                    </a:solidFill>
-                  </a:tcPr>
-                </a:tc>
-                <a:tc>
-                  <a:txBody>
-                    <a:bodyPr/>
-                    <a:lstStyle/>
-                    <a:p>
-                      <a:r>
-                        <a:rPr sz="1100" b="1">
-                          <a:solidFill>
-                            <a:srgbClr val="FFFFFF"/>
-                          </a:solidFill>
-                          <a:latin typeface="Segoe UI"/>
-                        </a:rPr>
-                        <a:t>Role</a:t>
-                      </a:r>
-                    </a:p>
-                  </a:txBody>
-                  <a:tcPr>
-                    <a:solidFill>
-                      <a:srgbClr val="0F172A"/>
-                    </a:solidFill>
-                  </a:tcPr>
-                </a:tc>
-                <a:tc>
-                  <a:txBody>
-                    <a:bodyPr/>
-                    <a:lstStyle/>
-                    <a:p>
-                      <a:r>
-                        <a:rPr sz="1100" b="1">
-                          <a:solidFill>
-                            <a:srgbClr val="FFFFFF"/>
-                          </a:solidFill>
-                          <a:latin typeface="Segoe UI"/>
-                        </a:rPr>
-                        <a:t>Can</a:t>
-                      </a:r>
-                    </a:p>
-                  </a:txBody>
-                  <a:tcPr>
-                    <a:solidFill>
-                      <a:srgbClr val="0F172A"/>
-                    </a:solidFill>
-                  </a:tcPr>
-                </a:tc>
-              </a:tr>
-              <a:tr h="297180">
-                <a:tc>
-                  <a:txBody>
-                    <a:bodyPr/>
-                    <a:lstStyle/>
-                    <a:p>
-                      <a:r>
-                        <a:rPr sz="1100">
-                          <a:solidFill>
-                            <a:srgbClr val="475569"/>
-                          </a:solidFill>
-                          <a:latin typeface="Segoe UI"/>
-                        </a:rPr>
-                        <a:t>terraform plan</a:t>
-                      </a:r>
-                    </a:p>
-                  </a:txBody>
-                  <a:tcPr>
-                    <a:solidFill>
-                      <a:srgbClr val="FFFFFF"/>
-                    </a:solidFill>
-                  </a:tcPr>
-                </a:tc>
-                <a:tc>
-                  <a:txBody>
-                    <a:bodyPr/>
-                    <a:lstStyle/>
-                    <a:p>
-                      <a:r>
-                        <a:rPr sz="1100">
-                          <a:solidFill>
-                            <a:srgbClr val="475569"/>
-                          </a:solidFill>
-                          <a:latin typeface="Segoe UI"/>
-                        </a:rPr>
-                        <a:t>PR, branch push</a:t>
-                      </a:r>
-                    </a:p>
-                  </a:txBody>
-                  <a:tcPr>
-                    <a:solidFill>
-                      <a:srgbClr val="FFFFFF"/>
-                    </a:solidFill>
-                  </a:tcPr>
-                </a:tc>
-                <a:tc>
-                  <a:txBody>
-                    <a:bodyPr/>
-                    <a:lstStyle/>
-                    <a:p>
-                      <a:r>
-                        <a:rPr sz="1100">
-                          <a:solidFill>
-                            <a:srgbClr val="475569"/>
-                          </a:solidFill>
-                          <a:latin typeface="Segoe UI"/>
-                        </a:rPr>
-                        <a:t>endless-gha-plan</a:t>
-                      </a:r>
-                    </a:p>
-                  </a:txBody>
-                  <a:tcPr>
-                    <a:solidFill>
-                      <a:srgbClr val="FFFFFF"/>
-                    </a:solidFill>
-                  </a:tcPr>
-                </a:tc>
-                <a:tc>
-                  <a:txBody>
-                    <a:bodyPr/>
-                    <a:lstStyle/>
-                    <a:p>
-                      <a:r>
-                        <a:rPr sz="1100">
-                          <a:solidFill>
-                            <a:srgbClr val="475569"/>
-                          </a:solidFill>
-                          <a:latin typeface="Segoe UI"/>
-                        </a:rPr>
-                        <a:t>read only, any ref</a:t>
-                      </a:r>
-                    </a:p>
-                  </a:txBody>
-                  <a:tcPr>
-                    <a:solidFill>
-                      <a:srgbClr val="FFFFFF"/>
-                    </a:solidFill>
-                  </a:tcPr>
-                </a:tc>
-              </a:tr>
-              <a:tr h="297180">
-                <a:tc>
-                  <a:txBody>
-                    <a:bodyPr/>
-                    <a:lstStyle/>
-                    <a:p>
-                      <a:r>
-                        <a:rPr sz="1100">
-                          <a:solidFill>
-                            <a:srgbClr val="475569"/>
-                          </a:solidFill>
-                          <a:latin typeface="Segoe UI"/>
-                        </a:rPr>
-                        <a:t>terraform apply</a:t>
-                      </a:r>
-                    </a:p>
-                  </a:txBody>
-                  <a:tcPr>
-                    <a:solidFill>
-                      <a:srgbClr val="F8FAFC"/>
-                    </a:solidFill>
-                  </a:tcPr>
-                </a:tc>
-                <a:tc>
-                  <a:txBody>
-                    <a:bodyPr/>
-                    <a:lstStyle/>
-                    <a:p>
-                      <a:r>
-                        <a:rPr sz="1100">
-                          <a:solidFill>
-                            <a:srgbClr val="475569"/>
-                          </a:solidFill>
-                          <a:latin typeface="Segoe UI"/>
-                        </a:rPr>
-                        <a:t>manual dispatch</a:t>
-                      </a:r>
-                    </a:p>
-                  </a:txBody>
-                  <a:tcPr>
-                    <a:solidFill>
-                      <a:srgbClr val="F8FAFC"/>
-                    </a:solidFill>
-                  </a:tcPr>
-                </a:tc>
-                <a:tc>
-                  <a:txBody>
-                    <a:bodyPr/>
-                    <a:lstStyle/>
-                    <a:p>
-                      <a:r>
-                        <a:rPr sz="1100">
-                          <a:solidFill>
-                            <a:srgbClr val="475569"/>
-                          </a:solidFill>
-                          <a:latin typeface="Segoe UI"/>
-                        </a:rPr>
-                        <a:t>endless-gha-apply</a:t>
-                      </a:r>
-                    </a:p>
-                  </a:txBody>
-                  <a:tcPr>
-                    <a:solidFill>
-                      <a:srgbClr val="F8FAFC"/>
-                    </a:solidFill>
-                  </a:tcPr>
-                </a:tc>
-                <a:tc>
-                  <a:txBody>
-                    <a:bodyPr/>
-                    <a:lstStyle/>
-                    <a:p>
-                      <a:r>
-                        <a:rPr sz="1100">
-                          <a:solidFill>
-                            <a:srgbClr val="475569"/>
-                          </a:solidFill>
-                          <a:latin typeface="Segoe UI"/>
-                        </a:rPr>
-                        <a:t>write, main only</a:t>
-                      </a:r>
-                    </a:p>
-                  </a:txBody>
-                  <a:tcPr>
-                    <a:solidFill>
-                      <a:srgbClr val="F8FAFC"/>
-                    </a:solidFill>
-                  </a:tcPr>
-                </a:tc>
-              </a:tr>
-              <a:tr h="297180">
-                <a:tc>
-                  <a:txBody>
-                    <a:bodyPr/>
-                    <a:lstStyle/>
-                    <a:p>
-                      <a:r>
-                        <a:rPr sz="1100">
-                          <a:solidFill>
-                            <a:srgbClr val="475569"/>
-                          </a:solidFill>
-                          <a:latin typeface="Segoe UI"/>
-                        </a:rPr>
-                        <a:t>lambda ci</a:t>
-                      </a:r>
-                    </a:p>
-                  </a:txBody>
-                  <a:tcPr>
-                    <a:solidFill>
-                      <a:srgbClr val="FFFFFF"/>
-                    </a:solidFill>
-                  </a:tcPr>
-                </a:tc>
-                <a:tc>
-                  <a:txBody>
-                    <a:bodyPr/>
-                    <a:lstStyle/>
-                    <a:p>
-                      <a:r>
-                        <a:rPr sz="1100">
-                          <a:solidFill>
-                            <a:srgbClr val="475569"/>
-                          </a:solidFill>
-                          <a:latin typeface="Segoe UI"/>
-                        </a:rPr>
-                        <a:t>lambda/ or tests/ change</a:t>
-                      </a:r>
-                    </a:p>
-                  </a:txBody>
-                  <a:tcPr>
-                    <a:solidFill>
-                      <a:srgbClr val="FFFFFF"/>
-                    </a:solidFill>
-                  </a:tcPr>
-                </a:tc>
-                <a:tc>
-                  <a:txBody>
-                    <a:bodyPr/>
-                    <a:lstStyle/>
-                    <a:p>
-                      <a:r>
-                        <a:rPr sz="1100">
-                          <a:solidFill>
-                            <a:srgbClr val="475569"/>
-                          </a:solidFill>
-                          <a:latin typeface="Segoe UI"/>
-                        </a:rPr>
-                        <a:t>none</a:t>
-                      </a:r>
-                    </a:p>
-                  </a:txBody>
-                  <a:tcPr>
-                    <a:solidFill>
-                      <a:srgbClr val="FFFFFF"/>
-                    </a:solidFill>
-                  </a:tcPr>
-                </a:tc>
-                <a:tc>
-                  <a:txBody>
-                    <a:bodyPr/>
-                    <a:lstStyle/>
-                    <a:p>
-                      <a:r>
-                        <a:rPr sz="1100">
-                          <a:solidFill>
-                            <a:srgbClr val="475569"/>
-                          </a:solidFill>
-                          <a:latin typeface="Segoe UI"/>
-                        </a:rPr>
-                        <a:t>no AWS access at all</a:t>
-                      </a:r>
-                    </a:p>
-                  </a:txBody>
-                  <a:tcPr>
-                    <a:solidFill>
-                      <a:srgbClr val="FFFFFF"/>
-                    </a:solidFill>
-                  </a:tcPr>
-                </a:tc>
-              </a:tr>
-            </a:tbl>
-          </a:graphicData>
-        </a:graphic>
-      </p:graphicFrame>
-      <p:sp>
-        <p:nvSpPr>
-          <p:cNvPr id="7" name="TextBox 6"/>
+              <a:t>Each looked correct, validated clean, and was wrong.</a:t>
+            </a:r>
+          </a:p>
+        </p:txBody>
+      </p:sp>
+      <p:sp>
+        <p:nvSpPr>
+          <p:cNvPr id="6" name="TextBox 5"/>
           <p:cNvSpPr txBox="1"/>
           <p:nvPr/>
         </p:nvSpPr>
         <p:spPr>
           <a:xfrm>
-            <a:off x="777240" y="3721608"/>
-            <a:ext cx="10515600" cy="2743200"/>
+            <a:off x="777240" y="2350008"/>
+            <a:ext cx="10515600" cy="3840480"/>
           </a:xfrm>
           <a:prstGeom prst="rect">
             <a:avLst/>
@@ -21792,26 +21475,26 @@
                 <a:spcPct val="115000"/>
               </a:lnSpc>
               <a:spcAft>
-                <a:spcPts val="1000"/>
+                <a:spcPts val="1200"/>
               </a:spcAft>
             </a:pPr>
             <a:r>
-              <a:rPr sz="1400" b="1">
+              <a:rPr sz="1350" b="1">
                 <a:solidFill>
                   <a:srgbClr val="0F172A"/>
                 </a:solidFill>
                 <a:latin typeface="Segoe UI"/>
               </a:rPr>
-              <a:t>A role ARN is not a secret.</a:t>
-            </a:r>
-            <a:r>
-              <a:rPr sz="1400">
+              <a:t>1. Immutable subject claims.</a:t>
+            </a:r>
+            <a:r>
+              <a:rPr sz="1350">
                 <a:solidFill>
                   <a:srgbClr val="475569"/>
                 </a:solidFill>
                 <a:latin typeface="Segoe UI"/>
               </a:rPr>
-              <a:t>  It sits in plain text in the workflow files and is useless to anyone whose OIDC token does not satisfy the trust policy.</a:t>
+              <a:t>  OIDC failed with "Not authorized to perform sts:AssumeRoleWithWebIdentity" against a trust policy whose provider, audience and repo casing were all correct. This repository mints repo:owner@326342684/name@1360952247, not repo:owner/name. Pinning to the numeric ids is better anyway — they survive a rename or transfer.</a:t>
             </a:r>
           </a:p>
           <a:p>
@@ -21820,26 +21503,26 @@
                 <a:spcPct val="115000"/>
               </a:lnSpc>
               <a:spcAft>
-                <a:spcPts val="1000"/>
+                <a:spcPts val="1200"/>
               </a:spcAft>
             </a:pPr>
             <a:r>
-              <a:rPr sz="1400" b="1">
+              <a:rPr sz="1350" b="1">
                 <a:solidFill>
                   <a:srgbClr val="0F172A"/>
                 </a:solidFill>
                 <a:latin typeface="Segoe UI"/>
               </a:rPr>
-              <a:t>The branch restriction lives in the trust policy, not the workflow.</a:t>
-            </a:r>
-            <a:r>
-              <a:rPr sz="1400">
+              <a:t>2. logs:DescribeLogGroups cannot be resource-scoped.</a:t>
+            </a:r>
+            <a:r>
+              <a:rPr sz="1350">
                 <a:solidFill>
                   <a:srgbClr val="475569"/>
                 </a:solidFill>
                 <a:latin typeface="Segoe UI"/>
               </a:rPr>
-              <a:t>  Editing a workflow file on a branch cannot grant apply rights, because AWS checks the branch claim in the token itself.</a:t>
+              <a:t>  AWS evaluates it against an empty log-group ARN, so a prefix-scoped grant never matches and every apply died reading its own log groups. It needs "*". The plan role was unaffected because its read statement already used it — which is why plan passed while apply failed.</a:t>
             </a:r>
           </a:p>
           <a:p>
@@ -21848,54 +21531,109 @@
                 <a:spcPct val="115000"/>
               </a:lnSpc>
               <a:spcAft>
-                <a:spcPts val="1000"/>
+                <a:spcPts val="1200"/>
               </a:spcAft>
             </a:pPr>
             <a:r>
-              <a:rPr sz="1400" b="1">
+              <a:rPr sz="1350" b="1">
                 <a:solidFill>
                   <a:srgbClr val="0F172A"/>
                 </a:solidFill>
                 <a:latin typeface="Segoe UI"/>
               </a:rPr>
-              <a:t>Bootstrap is a separate state, applied by hand.</a:t>
-            </a:r>
-            <a:r>
-              <a:rPr sz="1400">
+              <a:t>3. Lambda packaging was not deterministic.</a:t>
+            </a:r>
+            <a:r>
+              <a:rPr sz="1350">
                 <a:solidFill>
                   <a:srgbClr val="475569"/>
                 </a:solidFill>
                 <a:latin typeface="Segoe UI"/>
               </a:rPr>
-              <a:t>  So a bad apply in CI cannot delete the role CI authenticates with.</a:t>
-            </a:r>
-          </a:p>
+              <a:t>  The same three functions showed as changing forever: local plans saw drift after a CI apply and vice versa, with identical source. Cause was file modes stamped into the zip, plus CRLF against LF. Fixed with output_file_mode and .gitattributes.</a:t>
+            </a:r>
+          </a:p>
+        </p:txBody>
+      </p:sp>
+      <p:sp>
+        <p:nvSpPr>
+          <p:cNvPr id="7" name="Rounded Rectangle 6"/>
+          <p:cNvSpPr/>
+          <p:nvPr/>
+        </p:nvSpPr>
+        <p:spPr>
+          <a:xfrm>
+            <a:off x="777240" y="5715000"/>
+            <a:ext cx="10515600" cy="777240"/>
+          </a:xfrm>
+          <a:prstGeom prst="roundRect">
+            <a:avLst/>
+          </a:prstGeom>
+          <a:solidFill>
+            <a:srgbClr val="FFF7ED"/>
+          </a:solidFill>
+          <a:ln w="15875">
+            <a:solidFill>
+              <a:srgbClr val="ED7100"/>
+            </a:solidFill>
+          </a:ln>
+          <a:effectLst/>
+        </p:spPr>
+        <p:style>
+          <a:lnRef idx="1">
+            <a:schemeClr val="accent1"/>
+          </a:lnRef>
+          <a:fillRef idx="3">
+            <a:schemeClr val="accent1"/>
+          </a:fillRef>
+          <a:effectRef idx="2">
+            <a:schemeClr val="accent1"/>
+          </a:effectRef>
+          <a:fontRef idx="minor">
+            <a:schemeClr val="lt1"/>
+          </a:fontRef>
+        </p:style>
+        <p:txBody>
+          <a:bodyPr rtlCol="0" anchor="ctr"/>
+          <a:lstStyle/>
+          <a:p/>
+        </p:txBody>
+      </p:sp>
+      <p:sp>
+        <p:nvSpPr>
+          <p:cNvPr id="8" name="TextBox 7"/>
+          <p:cNvSpPr txBox="1"/>
+          <p:nvPr/>
+        </p:nvSpPr>
+        <p:spPr>
+          <a:xfrm>
+            <a:off x="1051560" y="5897880"/>
+            <a:ext cx="9966960" cy="502920"/>
+          </a:xfrm>
+          <a:prstGeom prst="rect">
+            <a:avLst/>
+          </a:prstGeom>
+          <a:noFill/>
+        </p:spPr>
+        <p:txBody>
+          <a:bodyPr wrap="square" lIns="0" rIns="0" tIns="0" bIns="0">
+            <a:spAutoFit/>
+          </a:bodyPr>
+          <a:lstStyle/>
           <a:p>
             <a:pPr>
               <a:lnSpc>
                 <a:spcPct val="115000"/>
               </a:lnSpc>
-              <a:spcAft>
-                <a:spcPts val="1000"/>
-              </a:spcAft>
-            </a:pPr>
-            <a:r>
-              <a:rPr sz="1400" b="1">
-                <a:solidFill>
-                  <a:srgbClr val="0F172A"/>
-                </a:solidFill>
-                <a:latin typeface="Segoe UI"/>
-              </a:rPr>
-              <a:t>Apply is gated by a typed confirmation, not a reviewer.</a:t>
-            </a:r>
-            <a:r>
-              <a:rPr sz="1400">
-                <a:solidFill>
-                  <a:srgbClr val="475569"/>
-                </a:solidFill>
-                <a:latin typeface="Segoe UI"/>
-              </a:rPr>
-              <a:t>  GitHub Environments need repo admin, which this account does not have. Replace it with environment: production the moment admin is granted.</a:t>
+            </a:pPr>
+            <a:r>
+              <a:rPr sz="1300" b="1">
+                <a:solidFill>
+                  <a:srgbClr val="7C2D12"/>
+                </a:solidFill>
+                <a:latin typeface="Segoe UI"/>
+              </a:rPr>
+              <a:t>The third matters most. A plan that always shows changes is a plan people stop reading, and the pipeline's whole value is that "No changes" means something.</a:t>
             </a:r>
           </a:p>
         </p:txBody>
@@ -22495,7 +22233,7 @@
                 </a:solidFill>
                 <a:latin typeface="Segoe UI"/>
               </a:rPr>
-              <a:t>BUILT</a:t>
+              <a:t>MEASURED</a:t>
             </a:r>
           </a:p>
         </p:txBody>
@@ -22534,7 +22272,7 @@
                 </a:solidFill>
                 <a:latin typeface="Segoe UI"/>
               </a:rPr>
-              <a:t>Three failures only the pipeline could find</a:t>
+              <a:t>Titan's cosine scale sits near zero</a:t>
             </a:r>
           </a:p>
         </p:txBody>
@@ -22617,21 +22355,388 @@
                 </a:solidFill>
                 <a:latin typeface="Segoe UI"/>
               </a:rPr>
-              <a:t>Each looked correct, validated clean, and was wrong.</a:t>
-            </a:r>
-          </a:p>
-        </p:txBody>
-      </p:sp>
-      <p:sp>
-        <p:nvSpPr>
-          <p:cNvPr id="6" name="TextBox 5"/>
+              <a:t>Measured 2026-09-14 against amazon.titan-embed-text-v2:0, 1024 dims, normalize=true.</a:t>
+            </a:r>
+          </a:p>
+        </p:txBody>
+      </p:sp>
+      <p:graphicFrame>
+        <p:nvGraphicFramePr>
+          <p:cNvPr id="6" name="Table 5"/>
+          <p:cNvGraphicFramePr>
+            <a:graphicFrameLocks noGrp="1"/>
+          </p:cNvGraphicFramePr>
+          <p:nvPr/>
+        </p:nvGraphicFramePr>
+        <p:xfrm>
+          <a:off x="777240" y="2350008"/>
+          <a:ext cx="10515600" cy="1481328"/>
+        </p:xfrm>
+        <a:graphic>
+          <a:graphicData uri="http://schemas.openxmlformats.org/drawingml/2006/table">
+            <a:tbl>
+              <a:tblPr firstRow="1" bandRow="1">
+                <a:tableStyleId>{5C22544A-7EE6-4342-B048-85BDC9FD1C3A}</a:tableStyleId>
+              </a:tblPr>
+              <a:tblGrid>
+                <a:gridCol w="4572000"/>
+                <a:gridCol w="4023360"/>
+                <a:gridCol w="1920240"/>
+              </a:tblGrid>
+              <a:tr h="296265">
+                <a:tc>
+                  <a:txBody>
+                    <a:bodyPr/>
+                    <a:lstStyle/>
+                    <a:p>
+                      <a:r>
+                        <a:rPr sz="1150" b="1">
+                          <a:solidFill>
+                            <a:srgbClr val="FFFFFF"/>
+                          </a:solidFill>
+                          <a:latin typeface="Segoe UI"/>
+                        </a:rPr>
+                        <a:t>Query</a:t>
+                      </a:r>
+                    </a:p>
+                  </a:txBody>
+                  <a:tcPr>
+                    <a:solidFill>
+                      <a:srgbClr val="0F172A"/>
+                    </a:solidFill>
+                  </a:tcPr>
+                </a:tc>
+                <a:tc>
+                  <a:txBody>
+                    <a:bodyPr/>
+                    <a:lstStyle/>
+                    <a:p>
+                      <a:r>
+                        <a:rPr sz="1150" b="1">
+                          <a:solidFill>
+                            <a:srgbClr val="FFFFFF"/>
+                          </a:solidFill>
+                          <a:latin typeface="Segoe UI"/>
+                        </a:rPr>
+                        <a:t>Top result</a:t>
+                      </a:r>
+                    </a:p>
+                  </a:txBody>
+                  <a:tcPr>
+                    <a:solidFill>
+                      <a:srgbClr val="0F172A"/>
+                    </a:solidFill>
+                  </a:tcPr>
+                </a:tc>
+                <a:tc>
+                  <a:txBody>
+                    <a:bodyPr/>
+                    <a:lstStyle/>
+                    <a:p>
+                      <a:r>
+                        <a:rPr sz="1150" b="1">
+                          <a:solidFill>
+                            <a:srgbClr val="FFFFFF"/>
+                          </a:solidFill>
+                          <a:latin typeface="Segoe UI"/>
+                        </a:rPr>
+                        <a:t>Score</a:t>
+                      </a:r>
+                    </a:p>
+                  </a:txBody>
+                  <a:tcPr>
+                    <a:solidFill>
+                      <a:srgbClr val="0F172A"/>
+                    </a:solidFill>
+                  </a:tcPr>
+                </a:tc>
+              </a:tr>
+              <a:tr h="296265">
+                <a:tc>
+                  <a:txBody>
+                    <a:bodyPr/>
+                    <a:lstStyle/>
+                    <a:p>
+                      <a:r>
+                        <a:rPr sz="1150">
+                          <a:solidFill>
+                            <a:srgbClr val="475569"/>
+                          </a:solidFill>
+                          <a:latin typeface="Segoe UI"/>
+                        </a:rPr>
+                        <a:t>peer reviewed papers on RAG</a:t>
+                      </a:r>
+                    </a:p>
+                  </a:txBody>
+                  <a:tcPr>
+                    <a:solidFill>
+                      <a:srgbClr val="FFFFFF"/>
+                    </a:solidFill>
+                  </a:tcPr>
+                </a:tc>
+                <a:tc>
+                  <a:txBody>
+                    <a:bodyPr/>
+                    <a:lstStyle/>
+                    <a:p>
+                      <a:r>
+                        <a:rPr sz="1150">
+                          <a:solidFill>
+                            <a:srgbClr val="475569"/>
+                          </a:solidFill>
+                          <a:latin typeface="Segoe UI"/>
+                        </a:rPr>
+                        <a:t>crossref-paper-search</a:t>
+                      </a:r>
+                    </a:p>
+                  </a:txBody>
+                  <a:tcPr>
+                    <a:solidFill>
+                      <a:srgbClr val="FFFFFF"/>
+                    </a:solidFill>
+                  </a:tcPr>
+                </a:tc>
+                <a:tc>
+                  <a:txBody>
+                    <a:bodyPr/>
+                    <a:lstStyle/>
+                    <a:p>
+                      <a:r>
+                        <a:rPr sz="1150">
+                          <a:solidFill>
+                            <a:srgbClr val="475569"/>
+                          </a:solidFill>
+                          <a:latin typeface="Segoe UI"/>
+                        </a:rPr>
+                        <a:t>0.2647</a:t>
+                      </a:r>
+                    </a:p>
+                  </a:txBody>
+                  <a:tcPr>
+                    <a:solidFill>
+                      <a:srgbClr val="FFFFFF"/>
+                    </a:solidFill>
+                  </a:tcPr>
+                </a:tc>
+              </a:tr>
+              <a:tr h="296265">
+                <a:tc>
+                  <a:txBody>
+                    <a:bodyPr/>
+                    <a:lstStyle/>
+                    <a:p>
+                      <a:r>
+                        <a:rPr sz="1150">
+                          <a:solidFill>
+                            <a:srgbClr val="475569"/>
+                          </a:solidFill>
+                          <a:latin typeface="Segoe UI"/>
+                        </a:rPr>
+                        <a:t>licence of this open source package</a:t>
+                      </a:r>
+                    </a:p>
+                  </a:txBody>
+                  <a:tcPr>
+                    <a:solidFill>
+                      <a:srgbClr val="F8FAFC"/>
+                    </a:solidFill>
+                  </a:tcPr>
+                </a:tc>
+                <a:tc>
+                  <a:txBody>
+                    <a:bodyPr/>
+                    <a:lstStyle/>
+                    <a:p>
+                      <a:r>
+                        <a:rPr sz="1150">
+                          <a:solidFill>
+                            <a:srgbClr val="475569"/>
+                          </a:solidFill>
+                          <a:latin typeface="Segoe UI"/>
+                        </a:rPr>
+                        <a:t>github-repo-info</a:t>
+                      </a:r>
+                    </a:p>
+                  </a:txBody>
+                  <a:tcPr>
+                    <a:solidFill>
+                      <a:srgbClr val="F8FAFC"/>
+                    </a:solidFill>
+                  </a:tcPr>
+                </a:tc>
+                <a:tc>
+                  <a:txBody>
+                    <a:bodyPr/>
+                    <a:lstStyle/>
+                    <a:p>
+                      <a:r>
+                        <a:rPr sz="1150">
+                          <a:solidFill>
+                            <a:srgbClr val="475569"/>
+                          </a:solidFill>
+                          <a:latin typeface="Segoe UI"/>
+                        </a:rPr>
+                        <a:t>0.2656</a:t>
+                      </a:r>
+                    </a:p>
+                  </a:txBody>
+                  <a:tcPr>
+                    <a:solidFill>
+                      <a:srgbClr val="F8FAFC"/>
+                    </a:solidFill>
+                  </a:tcPr>
+                </a:tc>
+              </a:tr>
+              <a:tr h="296265">
+                <a:tc>
+                  <a:txBody>
+                    <a:bodyPr/>
+                    <a:lstStyle/>
+                    <a:p>
+                      <a:r>
+                        <a:rPr sz="1150">
+                          <a:solidFill>
+                            <a:srgbClr val="475569"/>
+                          </a:solidFill>
+                          <a:latin typeface="Segoe UI"/>
+                        </a:rPr>
+                        <a:t>temperature tomorrow afternoon</a:t>
+                      </a:r>
+                    </a:p>
+                  </a:txBody>
+                  <a:tcPr>
+                    <a:solidFill>
+                      <a:srgbClr val="FFFFFF"/>
+                    </a:solidFill>
+                  </a:tcPr>
+                </a:tc>
+                <a:tc>
+                  <a:txBody>
+                    <a:bodyPr/>
+                    <a:lstStyle/>
+                    <a:p>
+                      <a:r>
+                        <a:rPr sz="1150">
+                          <a:solidFill>
+                            <a:srgbClr val="475569"/>
+                          </a:solidFill>
+                          <a:latin typeface="Segoe UI"/>
+                        </a:rPr>
+                        <a:t>weather-forecast</a:t>
+                      </a:r>
+                    </a:p>
+                  </a:txBody>
+                  <a:tcPr>
+                    <a:solidFill>
+                      <a:srgbClr val="FFFFFF"/>
+                    </a:solidFill>
+                  </a:tcPr>
+                </a:tc>
+                <a:tc>
+                  <a:txBody>
+                    <a:bodyPr/>
+                    <a:lstStyle/>
+                    <a:p>
+                      <a:r>
+                        <a:rPr sz="1150">
+                          <a:solidFill>
+                            <a:srgbClr val="475569"/>
+                          </a:solidFill>
+                          <a:latin typeface="Segoe UI"/>
+                        </a:rPr>
+                        <a:t>0.0871</a:t>
+                      </a:r>
+                    </a:p>
+                  </a:txBody>
+                  <a:tcPr>
+                    <a:solidFill>
+                      <a:srgbClr val="FFFFFF"/>
+                    </a:solidFill>
+                  </a:tcPr>
+                </a:tc>
+              </a:tr>
+              <a:tr h="296268">
+                <a:tc>
+                  <a:txBody>
+                    <a:bodyPr/>
+                    <a:lstStyle/>
+                    <a:p>
+                      <a:r>
+                        <a:rPr sz="1150">
+                          <a:solidFill>
+                            <a:srgbClr val="475569"/>
+                          </a:solidFill>
+                          <a:latin typeface="Segoe UI"/>
+                        </a:rPr>
+                        <a:t>book me a haircut</a:t>
+                      </a:r>
+                    </a:p>
+                  </a:txBody>
+                  <a:tcPr>
+                    <a:solidFill>
+                      <a:srgbClr val="F8FAFC"/>
+                    </a:solidFill>
+                  </a:tcPr>
+                </a:tc>
+                <a:tc>
+                  <a:txBody>
+                    <a:bodyPr/>
+                    <a:lstStyle/>
+                    <a:p>
+                      <a:r>
+                        <a:rPr sz="1150">
+                          <a:solidFill>
+                            <a:srgbClr val="475569"/>
+                          </a:solidFill>
+                          <a:latin typeface="Segoe UI"/>
+                        </a:rPr>
+                        <a:t>current-time-in-zone  (nonsense)</a:t>
+                      </a:r>
+                    </a:p>
+                  </a:txBody>
+                  <a:tcPr>
+                    <a:solidFill>
+                      <a:srgbClr val="F8FAFC"/>
+                    </a:solidFill>
+                  </a:tcPr>
+                </a:tc>
+                <a:tc>
+                  <a:txBody>
+                    <a:bodyPr/>
+                    <a:lstStyle/>
+                    <a:p>
+                      <a:r>
+                        <a:rPr sz="1150">
+                          <a:solidFill>
+                            <a:srgbClr val="475569"/>
+                          </a:solidFill>
+                          <a:latin typeface="Segoe UI"/>
+                        </a:rPr>
+                        <a:t>0.0665</a:t>
+                      </a:r>
+                    </a:p>
+                  </a:txBody>
+                  <a:tcPr>
+                    <a:solidFill>
+                      <a:srgbClr val="F8FAFC"/>
+                    </a:solidFill>
+                  </a:tcPr>
+                </a:tc>
+              </a:tr>
+            </a:tbl>
+          </a:graphicData>
+        </a:graphic>
+      </p:graphicFrame>
+      <p:sp>
+        <p:nvSpPr>
+          <p:cNvPr id="7" name="TextBox 6"/>
           <p:cNvSpPr txBox="1"/>
           <p:nvPr/>
         </p:nvSpPr>
         <p:spPr>
           <a:xfrm>
-            <a:off x="777240" y="2350008"/>
-            <a:ext cx="10515600" cy="3840480"/>
+            <a:off x="777240" y="4087368"/>
+            <a:ext cx="10515600" cy="2377440"/>
           </a:xfrm>
           <a:prstGeom prst="rect">
             <a:avLst/>
@@ -22649,26 +22754,26 @@
                 <a:spcPct val="115000"/>
               </a:lnSpc>
               <a:spcAft>
-                <a:spcPts val="1200"/>
+                <a:spcPts val="1000"/>
               </a:spcAft>
             </a:pPr>
             <a:r>
-              <a:rPr sz="1350" b="1">
+              <a:rPr sz="1400" b="1">
                 <a:solidFill>
                   <a:srgbClr val="0F172A"/>
                 </a:solidFill>
                 <a:latin typeface="Segoe UI"/>
               </a:rPr>
-              <a:t>1. Immutable subject claims.</a:t>
-            </a:r>
-            <a:r>
-              <a:rPr sz="1350">
+              <a:t>Not the 0.4-0.8 other embedding models produce.</a:t>
+            </a:r>
+            <a:r>
+              <a:rPr sz="1400">
                 <a:solidFill>
                   <a:srgbClr val="475569"/>
                 </a:solidFill>
                 <a:latin typeface="Segoe UI"/>
               </a:rPr>
-              <a:t>  OIDC failed with "Not authorized to perform sts:AssumeRoleWithWebIdentity" against a trust policy whose provider, audience and repo casing were all correct. This repository mints repo:owner@326342684/name@1360952247, not repo:owner/name. Pinning to the numeric ids is better anyway — they survive a rename or transfer.</a:t>
+              <a:t>  Verified against a direct Bedrock call, so this is the model's real scale and not a pipeline bug.</a:t>
             </a:r>
           </a:p>
           <a:p>
@@ -22677,26 +22782,26 @@
                 <a:spcPct val="115000"/>
               </a:lnSpc>
               <a:spcAft>
-                <a:spcPts val="1200"/>
+                <a:spcPts val="1000"/>
               </a:spcAft>
             </a:pPr>
             <a:r>
-              <a:rPr sz="1350" b="1">
+              <a:rPr sz="1400" b="1">
                 <a:solidFill>
                   <a:srgbClr val="0F172A"/>
                 </a:solidFill>
                 <a:latin typeface="Segoe UI"/>
               </a:rPr>
-              <a:t>2. logs:DescribeLogGroups cannot be resource-scoped.</a:t>
-            </a:r>
-            <a:r>
-              <a:rPr sz="1350">
+              <a:t>T = 0.5 logged a gap on every search, including correct hits.</a:t>
+            </a:r>
+            <a:r>
+              <a:rPr sz="1400">
                 <a:solidFill>
                   <a:srgbClr val="475569"/>
                 </a:solidFill>
                 <a:latin typeface="Segoe UI"/>
               </a:rPr>
-              <a:t>  AWS evaluates it against an empty log-group ARN, so a prefix-scoped grant never matches and every apply died reading its own log groups. It needs "*". The plan role was unaffected because its read statement already used it — which is why plan passed while apply failed.</a:t>
+              <a:t>  It is now a labelled placeholder at 0.05 — an order-of-magnitude correction, not a derived value.</a:t>
             </a:r>
           </a:p>
           <a:p>
@@ -22705,109 +22810,26 @@
                 <a:spcPct val="115000"/>
               </a:lnSpc>
               <a:spcAft>
-                <a:spcPts val="1200"/>
+                <a:spcPts val="1000"/>
               </a:spcAft>
             </a:pPr>
             <a:r>
-              <a:rPr sz="1350" b="1">
+              <a:rPr sz="1400" b="1">
                 <a:solidFill>
                   <a:srgbClr val="0F172A"/>
                 </a:solidFill>
                 <a:latin typeface="Segoe UI"/>
               </a:rPr>
-              <a:t>3. Lambda packaging was not deterministic.</a:t>
-            </a:r>
-            <a:r>
-              <a:rPr sz="1350">
+              <a:t>Correct hits span 0.087 to 0.266.</a:t>
+            </a:r>
+            <a:r>
+              <a:rPr sz="1400">
                 <a:solidFill>
                   <a:srgbClr val="475569"/>
                 </a:solidFill>
                 <a:latin typeface="Segoe UI"/>
               </a:rPr>
-              <a:t>  The same three functions showed as changing forever: local plans saw drift after a CI apply and vice versa, with identical source. Cause was file modes stamped into the zip, plus CRLF against LF. Fixed with output_file_mode and .gitattributes.</a:t>
-            </a:r>
-          </a:p>
-        </p:txBody>
-      </p:sp>
-      <p:sp>
-        <p:nvSpPr>
-          <p:cNvPr id="7" name="Rounded Rectangle 6"/>
-          <p:cNvSpPr/>
-          <p:nvPr/>
-        </p:nvSpPr>
-        <p:spPr>
-          <a:xfrm>
-            <a:off x="777240" y="5715000"/>
-            <a:ext cx="10515600" cy="777240"/>
-          </a:xfrm>
-          <a:prstGeom prst="roundRect">
-            <a:avLst/>
-          </a:prstGeom>
-          <a:solidFill>
-            <a:srgbClr val="FFF7ED"/>
-          </a:solidFill>
-          <a:ln w="15875">
-            <a:solidFill>
-              <a:srgbClr val="ED7100"/>
-            </a:solidFill>
-          </a:ln>
-          <a:effectLst/>
-        </p:spPr>
-        <p:style>
-          <a:lnRef idx="1">
-            <a:schemeClr val="accent1"/>
-          </a:lnRef>
-          <a:fillRef idx="3">
-            <a:schemeClr val="accent1"/>
-          </a:fillRef>
-          <a:effectRef idx="2">
-            <a:schemeClr val="accent1"/>
-          </a:effectRef>
-          <a:fontRef idx="minor">
-            <a:schemeClr val="lt1"/>
-          </a:fontRef>
-        </p:style>
-        <p:txBody>
-          <a:bodyPr rtlCol="0" anchor="ctr"/>
-          <a:lstStyle/>
-          <a:p/>
-        </p:txBody>
-      </p:sp>
-      <p:sp>
-        <p:nvSpPr>
-          <p:cNvPr id="8" name="TextBox 7"/>
-          <p:cNvSpPr txBox="1"/>
-          <p:nvPr/>
-        </p:nvSpPr>
-        <p:spPr>
-          <a:xfrm>
-            <a:off x="1051560" y="5897880"/>
-            <a:ext cx="9966960" cy="502920"/>
-          </a:xfrm>
-          <a:prstGeom prst="rect">
-            <a:avLst/>
-          </a:prstGeom>
-          <a:noFill/>
-        </p:spPr>
-        <p:txBody>
-          <a:bodyPr wrap="square" lIns="0" rIns="0" tIns="0" bIns="0">
-            <a:spAutoFit/>
-          </a:bodyPr>
-          <a:lstStyle/>
-          <a:p>
-            <a:pPr>
-              <a:lnSpc>
-                <a:spcPct val="115000"/>
-              </a:lnSpc>
-            </a:pPr>
-            <a:r>
-              <a:rPr sz="1300" b="1">
-                <a:solidFill>
-                  <a:srgbClr val="7C2D12"/>
-                </a:solidFill>
-                <a:latin typeface="Segoe UI"/>
-              </a:rPr>
-              <a:t>The third matters most. A plan that always shows changes is a plan people stop reading, and the pipeline's whole value is that "No changes" means something.</a:t>
+              <a:t>  One global threshold is doing very different work across that band, and the weakest correct hit sits close to the strongest spurious one. That overlap is what #12 has to resolve.</a:t>
             </a:r>
           </a:p>
         </p:txBody>
@@ -22872,7 +22894,7 @@
                 </a:solidFill>
                 <a:latin typeface="Segoe UI"/>
               </a:rPr>
-              <a:t>MEASURED</a:t>
+              <a:t>STATUS</a:t>
             </a:r>
           </a:p>
         </p:txBody>
@@ -22911,7 +22933,7 @@
                 </a:solidFill>
                 <a:latin typeface="Segoe UI"/>
               </a:rPr>
-              <a:t>Titan's cosine scale sits near zero</a:t>
+              <a:t>Where Phase 0 actually is</a:t>
             </a:r>
           </a:p>
         </p:txBody>
@@ -22960,56 +22982,17 @@
           </a:p>
         </p:txBody>
       </p:sp>
-      <p:sp>
-        <p:nvSpPr>
-          <p:cNvPr id="5" name="TextBox 4"/>
-          <p:cNvSpPr txBox="1"/>
-          <p:nvPr/>
-        </p:nvSpPr>
-        <p:spPr>
-          <a:xfrm>
-            <a:off x="777240" y="1783080"/>
-            <a:ext cx="10424160" cy="457200"/>
-          </a:xfrm>
-          <a:prstGeom prst="rect">
-            <a:avLst/>
-          </a:prstGeom>
-          <a:noFill/>
-        </p:spPr>
-        <p:txBody>
-          <a:bodyPr wrap="square" lIns="0" rIns="0" tIns="0" bIns="0">
-            <a:spAutoFit/>
-          </a:bodyPr>
-          <a:lstStyle/>
-          <a:p>
-            <a:pPr>
-              <a:lnSpc>
-                <a:spcPct val="100000"/>
-              </a:lnSpc>
-            </a:pPr>
-            <a:r>
-              <a:rPr sz="1500" b="0">
-                <a:solidFill>
-                  <a:srgbClr val="475569"/>
-                </a:solidFill>
-                <a:latin typeface="Segoe UI"/>
-              </a:rPr>
-              <a:t>Measured 2026-09-14 against amazon.titan-embed-text-v2:0, 1024 dims, normalize=true.</a:t>
-            </a:r>
-          </a:p>
-        </p:txBody>
-      </p:sp>
       <p:graphicFrame>
         <p:nvGraphicFramePr>
-          <p:cNvPr id="6" name="Table 5"/>
+          <p:cNvPr id="5" name="Table 4"/>
           <p:cNvGraphicFramePr>
             <a:graphicFrameLocks noGrp="1"/>
           </p:cNvGraphicFramePr>
           <p:nvPr/>
         </p:nvGraphicFramePr>
         <p:xfrm>
-          <a:off x="777240" y="2350008"/>
-          <a:ext cx="10515600" cy="1481328"/>
+          <a:off x="777240" y="1737360"/>
+          <a:ext cx="10515600" cy="4407408"/>
         </p:xfrm>
         <a:graphic>
           <a:graphicData uri="http://schemas.openxmlformats.org/drawingml/2006/table">
@@ -23018,24 +23001,24 @@
                 <a:tableStyleId>{5C22544A-7EE6-4342-B048-85BDC9FD1C3A}</a:tableStyleId>
               </a:tblPr>
               <a:tblGrid>
-                <a:gridCol w="4572000"/>
-                <a:gridCol w="4023360"/>
-                <a:gridCol w="1920240"/>
+                <a:gridCol w="548640"/>
+                <a:gridCol w="6675120"/>
+                <a:gridCol w="3291840"/>
               </a:tblGrid>
-              <a:tr h="296265">
-                <a:tc>
-                  <a:txBody>
-                    <a:bodyPr/>
-                    <a:lstStyle/>
-                    <a:p>
-                      <a:r>
-                        <a:rPr sz="1150" b="1">
+              <a:tr h="293827">
+                <a:tc>
+                  <a:txBody>
+                    <a:bodyPr/>
+                    <a:lstStyle/>
+                    <a:p>
+                      <a:r>
+                        <a:rPr sz="1050" b="1">
                           <a:solidFill>
                             <a:srgbClr val="FFFFFF"/>
                           </a:solidFill>
                           <a:latin typeface="Segoe UI"/>
                         </a:rPr>
-                        <a:t>Query</a:t>
+                        <a:t>#</a:t>
                       </a:r>
                     </a:p>
                   </a:txBody>
@@ -23051,13 +23034,13 @@
                     <a:lstStyle/>
                     <a:p>
                       <a:r>
-                        <a:rPr sz="1150" b="1">
+                        <a:rPr sz="1050" b="1">
                           <a:solidFill>
                             <a:srgbClr val="FFFFFF"/>
                           </a:solidFill>
                           <a:latin typeface="Segoe UI"/>
                         </a:rPr>
-                        <a:t>Top result</a:t>
+                        <a:t>Issue</a:t>
                       </a:r>
                     </a:p>
                   </a:txBody>
@@ -23073,13 +23056,13 @@
                     <a:lstStyle/>
                     <a:p>
                       <a:r>
-                        <a:rPr sz="1150" b="1">
+                        <a:rPr sz="1050" b="1">
                           <a:solidFill>
                             <a:srgbClr val="FFFFFF"/>
                           </a:solidFill>
                           <a:latin typeface="Segoe UI"/>
                         </a:rPr>
-                        <a:t>Score</a:t>
+                        <a:t>State</a:t>
                       </a:r>
                     </a:p>
                   </a:txBody>
@@ -23090,20 +23073,20 @@
                   </a:tcPr>
                 </a:tc>
               </a:tr>
-              <a:tr h="296265">
-                <a:tc>
-                  <a:txBody>
-                    <a:bodyPr/>
-                    <a:lstStyle/>
-                    <a:p>
-                      <a:r>
-                        <a:rPr sz="1150">
+              <a:tr h="293827">
+                <a:tc>
+                  <a:txBody>
+                    <a:bodyPr/>
+                    <a:lstStyle/>
+                    <a:p>
+                      <a:r>
+                        <a:rPr sz="1050">
                           <a:solidFill>
                             <a:srgbClr val="475569"/>
                           </a:solidFill>
                           <a:latin typeface="Segoe UI"/>
                         </a:rPr>
-                        <a:t>peer reviewed papers on RAG</a:t>
+                        <a:t>1</a:t>
                       </a:r>
                     </a:p>
                   </a:txBody>
@@ -23119,13 +23102,13 @@
                     <a:lstStyle/>
                     <a:p>
                       <a:r>
-                        <a:rPr sz="1150">
+                        <a:rPr sz="1050">
                           <a:solidFill>
                             <a:srgbClr val="475569"/>
                           </a:solidFill>
                           <a:latin typeface="Segoe UI"/>
                         </a:rPr>
-                        <a:t>crossref-paper-search</a:t>
+                        <a:t>Scaffold repo, infrastructure, CI/CD</a:t>
                       </a:r>
                     </a:p>
                   </a:txBody>
@@ -23141,13 +23124,105 @@
                     <a:lstStyle/>
                     <a:p>
                       <a:r>
-                        <a:rPr sz="1150">
+                        <a:rPr sz="1050">
+                          <a:solidFill>
+                            <a:srgbClr val="16A34A"/>
+                          </a:solidFill>
+                          <a:latin typeface="Segoe UI"/>
+                        </a:rPr>
+                        <a:t>done</a:t>
+                      </a:r>
+                    </a:p>
+                  </a:txBody>
+                  <a:tcPr>
+                    <a:solidFill>
+                      <a:srgbClr val="FFFFFF"/>
+                    </a:solidFill>
+                  </a:tcPr>
+                </a:tc>
+              </a:tr>
+              <a:tr h="293827">
+                <a:tc>
+                  <a:txBody>
+                    <a:bodyPr/>
+                    <a:lstStyle/>
+                    <a:p>
+                      <a:r>
+                        <a:rPr sz="1050">
                           <a:solidFill>
                             <a:srgbClr val="475569"/>
                           </a:solidFill>
                           <a:latin typeface="Segoe UI"/>
                         </a:rPr>
-                        <a:t>0.2647</a:t>
+                        <a:t>2</a:t>
+                      </a:r>
+                    </a:p>
+                  </a:txBody>
+                  <a:tcPr>
+                    <a:solidFill>
+                      <a:srgbClr val="F8FAFC"/>
+                    </a:solidFill>
+                  </a:tcPr>
+                </a:tc>
+                <a:tc>
+                  <a:txBody>
+                    <a:bodyPr/>
+                    <a:lstStyle/>
+                    <a:p>
+                      <a:r>
+                        <a:rPr sz="1050">
+                          <a:solidFill>
+                            <a:srgbClr val="475569"/>
+                          </a:solidFill>
+                          <a:latin typeface="Segoe UI"/>
+                        </a:rPr>
+                        <a:t>Shared schemas: tool, event, gap</a:t>
+                      </a:r>
+                    </a:p>
+                  </a:txBody>
+                  <a:tcPr>
+                    <a:solidFill>
+                      <a:srgbClr val="F8FAFC"/>
+                    </a:solidFill>
+                  </a:tcPr>
+                </a:tc>
+                <a:tc>
+                  <a:txBody>
+                    <a:bodyPr/>
+                    <a:lstStyle/>
+                    <a:p>
+                      <a:r>
+                        <a:rPr sz="1050">
+                          <a:solidFill>
+                            <a:srgbClr val="16A34A"/>
+                          </a:solidFill>
+                          <a:latin typeface="Segoe UI"/>
+                        </a:rPr>
+                        <a:t>done</a:t>
+                      </a:r>
+                    </a:p>
+                  </a:txBody>
+                  <a:tcPr>
+                    <a:solidFill>
+                      <a:srgbClr val="F8FAFC"/>
+                    </a:solidFill>
+                  </a:tcPr>
+                </a:tc>
+              </a:tr>
+              <a:tr h="293827">
+                <a:tc>
+                  <a:txBody>
+                    <a:bodyPr/>
+                    <a:lstStyle/>
+                    <a:p>
+                      <a:r>
+                        <a:rPr sz="1050">
+                          <a:solidFill>
+                            <a:srgbClr val="475569"/>
+                          </a:solidFill>
+                          <a:latin typeface="Segoe UI"/>
+                        </a:rPr>
+                        <a:t>3</a:t>
                       </a:r>
                     </a:p>
                   </a:txBody>
@@ -23157,21 +23232,65 @@
                     </a:solidFill>
                   </a:tcPr>
                 </a:tc>
+                <a:tc>
+                  <a:txBody>
+                    <a:bodyPr/>
+                    <a:lstStyle/>
+                    <a:p>
+                      <a:r>
+                        <a:rPr sz="1050">
+                          <a:solidFill>
+                            <a:srgbClr val="475569"/>
+                          </a:solidFill>
+                          <a:latin typeface="Segoe UI"/>
+                        </a:rPr>
+                        <a:t>Terraform stack: tables, IAM, alarm</a:t>
+                      </a:r>
+                    </a:p>
+                  </a:txBody>
+                  <a:tcPr>
+                    <a:solidFill>
+                      <a:srgbClr val="FFFFFF"/>
+                    </a:solidFill>
+                  </a:tcPr>
+                </a:tc>
+                <a:tc>
+                  <a:txBody>
+                    <a:bodyPr/>
+                    <a:lstStyle/>
+                    <a:p>
+                      <a:r>
+                        <a:rPr sz="1050">
+                          <a:solidFill>
+                            <a:srgbClr val="16A34A"/>
+                          </a:solidFill>
+                          <a:latin typeface="Segoe UI"/>
+                        </a:rPr>
+                        <a:t>done</a:t>
+                      </a:r>
+                    </a:p>
+                  </a:txBody>
+                  <a:tcPr>
+                    <a:solidFill>
+                      <a:srgbClr val="FFFFFF"/>
+                    </a:solidFill>
+                  </a:tcPr>
+                </a:tc>
               </a:tr>
-              <a:tr h="296265">
-                <a:tc>
-                  <a:txBody>
-                    <a:bodyPr/>
-                    <a:lstStyle/>
-                    <a:p>
-                      <a:r>
-                        <a:rPr sz="1150">
+              <a:tr h="293827">
+                <a:tc>
+                  <a:txBody>
+                    <a:bodyPr/>
+                    <a:lstStyle/>
+                    <a:p>
+                      <a:r>
+                        <a:rPr sz="1050">
                           <a:solidFill>
                             <a:srgbClr val="475569"/>
                           </a:solidFill>
                           <a:latin typeface="Segoe UI"/>
                         </a:rPr>
-                        <a:t>licence of this open source package</a:t>
+                        <a:t>4</a:t>
                       </a:r>
                     </a:p>
                   </a:txBody>
@@ -23187,13 +23306,13 @@
                     <a:lstStyle/>
                     <a:p>
                       <a:r>
-                        <a:rPr sz="1150">
+                        <a:rPr sz="1050">
                           <a:solidFill>
                             <a:srgbClr val="475569"/>
                           </a:solidFill>
                           <a:latin typeface="Segoe UI"/>
                         </a:rPr>
-                        <a:t>github-repo-info</a:t>
+                        <a:t>Registry with immutable versioning</a:t>
                       </a:r>
                     </a:p>
                   </a:txBody>
@@ -23209,13 +23328,105 @@
                     <a:lstStyle/>
                     <a:p>
                       <a:r>
-                        <a:rPr sz="1150">
+                        <a:rPr sz="1050">
+                          <a:solidFill>
+                            <a:srgbClr val="16A34A"/>
+                          </a:solidFill>
+                          <a:latin typeface="Segoe UI"/>
+                        </a:rPr>
+                        <a:t>done, proven by test</a:t>
+                      </a:r>
+                    </a:p>
+                  </a:txBody>
+                  <a:tcPr>
+                    <a:solidFill>
+                      <a:srgbClr val="F8FAFC"/>
+                    </a:solidFill>
+                  </a:tcPr>
+                </a:tc>
+              </a:tr>
+              <a:tr h="293827">
+                <a:tc>
+                  <a:txBody>
+                    <a:bodyPr/>
+                    <a:lstStyle/>
+                    <a:p>
+                      <a:r>
+                        <a:rPr sz="1050">
                           <a:solidFill>
                             <a:srgbClr val="475569"/>
                           </a:solidFill>
                           <a:latin typeface="Segoe UI"/>
                         </a:rPr>
-                        <a:t>0.2656</a:t>
+                        <a:t>5</a:t>
+                      </a:r>
+                    </a:p>
+                  </a:txBody>
+                  <a:tcPr>
+                    <a:solidFill>
+                      <a:srgbClr val="FFFFFF"/>
+                    </a:solidFill>
+                  </a:tcPr>
+                </a:tc>
+                <a:tc>
+                  <a:txBody>
+                    <a:bodyPr/>
+                    <a:lstStyle/>
+                    <a:p>
+                      <a:r>
+                        <a:rPr sz="1050">
+                          <a:solidFill>
+                            <a:srgbClr val="475569"/>
+                          </a:solidFill>
+                          <a:latin typeface="Segoe UI"/>
+                        </a:rPr>
+                        <a:t>Embedding call behind one interface</a:t>
+                      </a:r>
+                    </a:p>
+                  </a:txBody>
+                  <a:tcPr>
+                    <a:solidFill>
+                      <a:srgbClr val="FFFFFF"/>
+                    </a:solidFill>
+                  </a:tcPr>
+                </a:tc>
+                <a:tc>
+                  <a:txBody>
+                    <a:bodyPr/>
+                    <a:lstStyle/>
+                    <a:p>
+                      <a:r>
+                        <a:rPr sz="1050">
+                          <a:solidFill>
+                            <a:srgbClr val="16A34A"/>
+                          </a:solidFill>
+                          <a:latin typeface="Segoe UI"/>
+                        </a:rPr>
+                        <a:t>done</a:t>
+                      </a:r>
+                    </a:p>
+                  </a:txBody>
+                  <a:tcPr>
+                    <a:solidFill>
+                      <a:srgbClr val="FFFFFF"/>
+                    </a:solidFill>
+                  </a:tcPr>
+                </a:tc>
+              </a:tr>
+              <a:tr h="293827">
+                <a:tc>
+                  <a:txBody>
+                    <a:bodyPr/>
+                    <a:lstStyle/>
+                    <a:p>
+                      <a:r>
+                        <a:rPr sz="1050">
+                          <a:solidFill>
+                            <a:srgbClr val="475569"/>
+                          </a:solidFill>
+                          <a:latin typeface="Segoe UI"/>
+                        </a:rPr>
+                        <a:t>6</a:t>
                       </a:r>
                     </a:p>
                   </a:txBody>
@@ -23225,21 +23436,65 @@
                     </a:solidFill>
                   </a:tcPr>
                 </a:tc>
+                <a:tc>
+                  <a:txBody>
+                    <a:bodyPr/>
+                    <a:lstStyle/>
+                    <a:p>
+                      <a:r>
+                        <a:rPr sz="1050">
+                          <a:solidFill>
+                            <a:srgbClr val="475569"/>
+                          </a:solidFill>
+                          <a:latin typeface="Segoe UI"/>
+                        </a:rPr>
+                        <a:t>Semantic search endpoint</a:t>
+                      </a:r>
+                    </a:p>
+                  </a:txBody>
+                  <a:tcPr>
+                    <a:solidFill>
+                      <a:srgbClr val="F8FAFC"/>
+                    </a:solidFill>
+                  </a:tcPr>
+                </a:tc>
+                <a:tc>
+                  <a:txBody>
+                    <a:bodyPr/>
+                    <a:lstStyle/>
+                    <a:p>
+                      <a:r>
+                        <a:rPr sz="1050">
+                          <a:solidFill>
+                            <a:srgbClr val="16A34A"/>
+                          </a:solidFill>
+                          <a:latin typeface="Segoe UI"/>
+                        </a:rPr>
+                        <a:t>done — now hybrid</a:t>
+                      </a:r>
+                    </a:p>
+                  </a:txBody>
+                  <a:tcPr>
+                    <a:solidFill>
+                      <a:srgbClr val="F8FAFC"/>
+                    </a:solidFill>
+                  </a:tcPr>
+                </a:tc>
               </a:tr>
-              <a:tr h="296265">
-                <a:tc>
-                  <a:txBody>
-                    <a:bodyPr/>
-                    <a:lstStyle/>
-                    <a:p>
-                      <a:r>
-                        <a:rPr sz="1150">
+              <a:tr h="293827">
+                <a:tc>
+                  <a:txBody>
+                    <a:bodyPr/>
+                    <a:lstStyle/>
+                    <a:p>
+                      <a:r>
+                        <a:rPr sz="1050">
                           <a:solidFill>
                             <a:srgbClr val="475569"/>
                           </a:solidFill>
                           <a:latin typeface="Segoe UI"/>
                         </a:rPr>
-                        <a:t>temperature tomorrow afternoon</a:t>
+                        <a:t>7</a:t>
                       </a:r>
                     </a:p>
                   </a:txBody>
@@ -23255,13 +23510,13 @@
                     <a:lstStyle/>
                     <a:p>
                       <a:r>
-                        <a:rPr sz="1150">
+                        <a:rPr sz="1050">
                           <a:solidFill>
                             <a:srgbClr val="475569"/>
                           </a:solidFill>
                           <a:latin typeface="Segoe UI"/>
                         </a:rPr>
-                        <a:t>weather-forecast</a:t>
+                        <a:t>Append-only event log</a:t>
                       </a:r>
                     </a:p>
                   </a:txBody>
@@ -23277,13 +23532,105 @@
                     <a:lstStyle/>
                     <a:p>
                       <a:r>
-                        <a:rPr sz="1150">
+                        <a:rPr sz="1050">
+                          <a:solidFill>
+                            <a:srgbClr val="16A34A"/>
+                          </a:solidFill>
+                          <a:latin typeface="Segoe UI"/>
+                        </a:rPr>
+                        <a:t>done, IAM-enforced</a:t>
+                      </a:r>
+                    </a:p>
+                  </a:txBody>
+                  <a:tcPr>
+                    <a:solidFill>
+                      <a:srgbClr val="FFFFFF"/>
+                    </a:solidFill>
+                  </a:tcPr>
+                </a:tc>
+              </a:tr>
+              <a:tr h="293827">
+                <a:tc>
+                  <a:txBody>
+                    <a:bodyPr/>
+                    <a:lstStyle/>
+                    <a:p>
+                      <a:r>
+                        <a:rPr sz="1050">
                           <a:solidFill>
                             <a:srgbClr val="475569"/>
                           </a:solidFill>
                           <a:latin typeface="Segoe UI"/>
                         </a:rPr>
-                        <a:t>0.0871</a:t>
+                        <a:t>8</a:t>
+                      </a:r>
+                    </a:p>
+                  </a:txBody>
+                  <a:tcPr>
+                    <a:solidFill>
+                      <a:srgbClr val="F8FAFC"/>
+                    </a:solidFill>
+                  </a:tcPr>
+                </a:tc>
+                <a:tc>
+                  <a:txBody>
+                    <a:bodyPr/>
+                    <a:lstStyle/>
+                    <a:p>
+                      <a:r>
+                        <a:rPr sz="1050">
+                          <a:solidFill>
+                            <a:srgbClr val="475569"/>
+                          </a:solidFill>
+                          <a:latin typeface="Segoe UI"/>
+                        </a:rPr>
+                        <a:t>Gap detection and gap log</a:t>
+                      </a:r>
+                    </a:p>
+                  </a:txBody>
+                  <a:tcPr>
+                    <a:solidFill>
+                      <a:srgbClr val="F8FAFC"/>
+                    </a:solidFill>
+                  </a:tcPr>
+                </a:tc>
+                <a:tc>
+                  <a:txBody>
+                    <a:bodyPr/>
+                    <a:lstStyle/>
+                    <a:p>
+                      <a:r>
+                        <a:rPr sz="1050">
+                          <a:solidFill>
+                            <a:srgbClr val="16A34A"/>
+                          </a:solidFill>
+                          <a:latin typeface="Segoe UI"/>
+                        </a:rPr>
+                        <a:t>done — judge decides</a:t>
+                      </a:r>
+                    </a:p>
+                  </a:txBody>
+                  <a:tcPr>
+                    <a:solidFill>
+                      <a:srgbClr val="F8FAFC"/>
+                    </a:solidFill>
+                  </a:tcPr>
+                </a:tc>
+              </a:tr>
+              <a:tr h="293827">
+                <a:tc>
+                  <a:txBody>
+                    <a:bodyPr/>
+                    <a:lstStyle/>
+                    <a:p>
+                      <a:r>
+                        <a:rPr sz="1050">
+                          <a:solidFill>
+                            <a:srgbClr val="475569"/>
+                          </a:solidFill>
+                          <a:latin typeface="Segoe UI"/>
+                        </a:rPr>
+                        <a:t>9</a:t>
                       </a:r>
                     </a:p>
                   </a:txBody>
@@ -23293,21 +23640,65 @@
                     </a:solidFill>
                   </a:tcPr>
                 </a:tc>
+                <a:tc>
+                  <a:txBody>
+                    <a:bodyPr/>
+                    <a:lstStyle/>
+                    <a:p>
+                      <a:r>
+                        <a:rPr sz="1050">
+                          <a:solidFill>
+                            <a:srgbClr val="475569"/>
+                          </a:solidFill>
+                          <a:latin typeface="Segoe UI"/>
+                        </a:rPr>
+                        <a:t>Eval queries written blind</a:t>
+                      </a:r>
+                    </a:p>
+                  </a:txBody>
+                  <a:tcPr>
+                    <a:solidFill>
+                      <a:srgbClr val="FFFFFF"/>
+                    </a:solidFill>
+                  </a:tcPr>
+                </a:tc>
+                <a:tc>
+                  <a:txBody>
+                    <a:bodyPr/>
+                    <a:lstStyle/>
+                    <a:p>
+                      <a:r>
+                        <a:rPr sz="1050">
+                          <a:solidFill>
+                            <a:srgbClr val="16A34A"/>
+                          </a:solidFill>
+                          <a:latin typeface="Segoe UI"/>
+                        </a:rPr>
+                        <a:t>done — 60 frozen</a:t>
+                      </a:r>
+                    </a:p>
+                  </a:txBody>
+                  <a:tcPr>
+                    <a:solidFill>
+                      <a:srgbClr val="FFFFFF"/>
+                    </a:solidFill>
+                  </a:tcPr>
+                </a:tc>
               </a:tr>
-              <a:tr h="296268">
-                <a:tc>
-                  <a:txBody>
-                    <a:bodyPr/>
-                    <a:lstStyle/>
-                    <a:p>
-                      <a:r>
-                        <a:rPr sz="1150">
+              <a:tr h="293827">
+                <a:tc>
+                  <a:txBody>
+                    <a:bodyPr/>
+                    <a:lstStyle/>
+                    <a:p>
+                      <a:r>
+                        <a:rPr sz="1050">
                           <a:solidFill>
                             <a:srgbClr val="475569"/>
                           </a:solidFill>
                           <a:latin typeface="Segoe UI"/>
                         </a:rPr>
-                        <a:t>book me a haircut</a:t>
+                        <a:t>10</a:t>
                       </a:r>
                     </a:p>
                   </a:txBody>
@@ -23323,13 +23714,13 @@
                     <a:lstStyle/>
                     <a:p>
                       <a:r>
-                        <a:rPr sz="1150">
+                        <a:rPr sz="1050">
                           <a:solidFill>
                             <a:srgbClr val="475569"/>
                           </a:solidFill>
                           <a:latin typeface="Segoe UI"/>
                         </a:rPr>
-                        <a:t>current-time-in-zone  (nonsense)</a:t>
+                        <a:t>Seed 15-20 tools</a:t>
                       </a:r>
                     </a:p>
                   </a:txBody>
@@ -23345,13 +23736,285 @@
                     <a:lstStyle/>
                     <a:p>
                       <a:r>
-                        <a:rPr sz="1150">
+                        <a:rPr sz="1050">
+                          <a:solidFill>
+                            <a:srgbClr val="16A34A"/>
+                          </a:solidFill>
+                          <a:latin typeface="Segoe UI"/>
+                        </a:rPr>
+                        <a:t>done — 19 live</a:t>
+                      </a:r>
+                    </a:p>
+                  </a:txBody>
+                  <a:tcPr>
+                    <a:solidFill>
+                      <a:srgbClr val="F8FAFC"/>
+                    </a:solidFill>
+                  </a:tcPr>
+                </a:tc>
+              </a:tr>
+              <a:tr h="293827">
+                <a:tc>
+                  <a:txBody>
+                    <a:bodyPr/>
+                    <a:lstStyle/>
+                    <a:p>
+                      <a:r>
+                        <a:rPr sz="1050">
                           <a:solidFill>
                             <a:srgbClr val="475569"/>
                           </a:solidFill>
                           <a:latin typeface="Segoe UI"/>
                         </a:rPr>
-                        <a:t>0.0665</a:t>
+                        <a:t>11</a:t>
+                      </a:r>
+                    </a:p>
+                  </a:txBody>
+                  <a:tcPr>
+                    <a:solidFill>
+                      <a:srgbClr val="FFFFFF"/>
+                    </a:solidFill>
+                  </a:tcPr>
+                </a:tc>
+                <a:tc>
+                  <a:txBody>
+                    <a:bodyPr/>
+                    <a:lstStyle/>
+                    <a:p>
+                      <a:r>
+                        <a:rPr sz="1050">
+                          <a:solidFill>
+                            <a:srgbClr val="475569"/>
+                          </a:solidFill>
+                          <a:latin typeface="Segoe UI"/>
+                        </a:rPr>
+                        <a:t>Label the set, recall@k harness</a:t>
+                      </a:r>
+                    </a:p>
+                  </a:txBody>
+                  <a:tcPr>
+                    <a:solidFill>
+                      <a:srgbClr val="FFFFFF"/>
+                    </a:solidFill>
+                  </a:tcPr>
+                </a:tc>
+                <a:tc>
+                  <a:txBody>
+                    <a:bodyPr/>
+                    <a:lstStyle/>
+                    <a:p>
+                      <a:r>
+                        <a:rPr sz="1050">
+                          <a:solidFill>
+                            <a:srgbClr val="16A34A"/>
+                          </a:solidFill>
+                          <a:latin typeface="Segoe UI"/>
+                        </a:rPr>
+                        <a:t>done — harness + labels</a:t>
+                      </a:r>
+                    </a:p>
+                  </a:txBody>
+                  <a:tcPr>
+                    <a:solidFill>
+                      <a:srgbClr val="FFFFFF"/>
+                    </a:solidFill>
+                  </a:tcPr>
+                </a:tc>
+              </a:tr>
+              <a:tr h="293827">
+                <a:tc>
+                  <a:txBody>
+                    <a:bodyPr/>
+                    <a:lstStyle/>
+                    <a:p>
+                      <a:r>
+                        <a:rPr sz="1050">
+                          <a:solidFill>
+                            <a:srgbClr val="475569"/>
+                          </a:solidFill>
+                          <a:latin typeface="Segoe UI"/>
+                        </a:rPr>
+                        <a:t>12</a:t>
+                      </a:r>
+                    </a:p>
+                  </a:txBody>
+                  <a:tcPr>
+                    <a:solidFill>
+                      <a:srgbClr val="F8FAFC"/>
+                    </a:solidFill>
+                  </a:tcPr>
+                </a:tc>
+                <a:tc>
+                  <a:txBody>
+                    <a:bodyPr/>
+                    <a:lstStyle/>
+                    <a:p>
+                      <a:r>
+                        <a:rPr sz="1050">
+                          <a:solidFill>
+                            <a:srgbClr val="475569"/>
+                          </a:solidFill>
+                          <a:latin typeface="Segoe UI"/>
+                        </a:rPr>
+                        <a:t>Derive threshold T</a:t>
+                      </a:r>
+                    </a:p>
+                  </a:txBody>
+                  <a:tcPr>
+                    <a:solidFill>
+                      <a:srgbClr val="F8FAFC"/>
+                    </a:solidFill>
+                  </a:tcPr>
+                </a:tc>
+                <a:tc>
+                  <a:txBody>
+                    <a:bodyPr/>
+                    <a:lstStyle/>
+                    <a:p>
+                      <a:r>
+                        <a:rPr sz="1050">
+                          <a:solidFill>
+                            <a:srgbClr val="16A34A"/>
+                          </a:solidFill>
+                          <a:latin typeface="Segoe UI"/>
+                        </a:rPr>
+                        <a:t>done — then superseded</a:t>
+                      </a:r>
+                    </a:p>
+                  </a:txBody>
+                  <a:tcPr>
+                    <a:solidFill>
+                      <a:srgbClr val="F8FAFC"/>
+                    </a:solidFill>
+                  </a:tcPr>
+                </a:tc>
+              </a:tr>
+              <a:tr h="293827">
+                <a:tc>
+                  <a:txBody>
+                    <a:bodyPr/>
+                    <a:lstStyle/>
+                    <a:p>
+                      <a:r>
+                        <a:rPr sz="1050">
+                          <a:solidFill>
+                            <a:srgbClr val="475569"/>
+                          </a:solidFill>
+                          <a:latin typeface="Segoe UI"/>
+                        </a:rPr>
+                        <a:t>13</a:t>
+                      </a:r>
+                    </a:p>
+                  </a:txBody>
+                  <a:tcPr>
+                    <a:solidFill>
+                      <a:srgbClr val="FFFFFF"/>
+                    </a:solidFill>
+                  </a:tcPr>
+                </a:tc>
+                <a:tc>
+                  <a:txBody>
+                    <a:bodyPr/>
+                    <a:lstStyle/>
+                    <a:p>
+                      <a:r>
+                        <a:rPr sz="1050">
+                          <a:solidFill>
+                            <a:srgbClr val="475569"/>
+                          </a:solidFill>
+                          <a:latin typeface="Segoe UI"/>
+                        </a:rPr>
+                        <a:t>Query and gap CLIs</a:t>
+                      </a:r>
+                    </a:p>
+                  </a:txBody>
+                  <a:tcPr>
+                    <a:solidFill>
+                      <a:srgbClr val="FFFFFF"/>
+                    </a:solidFill>
+                  </a:tcPr>
+                </a:tc>
+                <a:tc>
+                  <a:txBody>
+                    <a:bodyPr/>
+                    <a:lstStyle/>
+                    <a:p>
+                      <a:r>
+                        <a:rPr sz="1050">
+                          <a:solidFill>
+                            <a:srgbClr val="16A34A"/>
+                          </a:solidFill>
+                          <a:latin typeface="Segoe UI"/>
+                        </a:rPr>
+                        <a:t>done — endless CLI</a:t>
+                      </a:r>
+                    </a:p>
+                  </a:txBody>
+                  <a:tcPr>
+                    <a:solidFill>
+                      <a:srgbClr val="FFFFFF"/>
+                    </a:solidFill>
+                  </a:tcPr>
+                </a:tc>
+              </a:tr>
+              <a:tr h="293830">
+                <a:tc>
+                  <a:txBody>
+                    <a:bodyPr/>
+                    <a:lstStyle/>
+                    <a:p>
+                      <a:r>
+                        <a:rPr sz="1050">
+                          <a:solidFill>
+                            <a:srgbClr val="475569"/>
+                          </a:solidFill>
+                          <a:latin typeface="Segoe UI"/>
+                        </a:rPr>
+                        <a:t>14</a:t>
+                      </a:r>
+                    </a:p>
+                  </a:txBody>
+                  <a:tcPr>
+                    <a:solidFill>
+                      <a:srgbClr val="F8FAFC"/>
+                    </a:solidFill>
+                  </a:tcPr>
+                </a:tc>
+                <a:tc>
+                  <a:txBody>
+                    <a:bodyPr/>
+                    <a:lstStyle/>
+                    <a:p>
+                      <a:r>
+                        <a:rPr sz="1050">
+                          <a:solidFill>
+                            <a:srgbClr val="475569"/>
+                          </a:solidFill>
+                          <a:latin typeface="Segoe UI"/>
+                        </a:rPr>
+                        <a:t>Findings write-up</a:t>
+                      </a:r>
+                    </a:p>
+                  </a:txBody>
+                  <a:tcPr>
+                    <a:solidFill>
+                      <a:srgbClr val="F8FAFC"/>
+                    </a:solidFill>
+                  </a:tcPr>
+                </a:tc>
+                <a:tc>
+                  <a:txBody>
+                    <a:bodyPr/>
+                    <a:lstStyle/>
+                    <a:p>
+                      <a:r>
+                        <a:rPr sz="1050">
+                          <a:solidFill>
+                            <a:srgbClr val="ED7100"/>
+                          </a:solidFill>
+                          <a:latin typeface="Segoe UI"/>
+                        </a:rPr>
+                        <a:t>next</a:t>
                       </a:r>
                     </a:p>
                   </a:txBody>
@@ -23366,113 +24029,6 @@
           </a:graphicData>
         </a:graphic>
       </p:graphicFrame>
-      <p:sp>
-        <p:nvSpPr>
-          <p:cNvPr id="7" name="TextBox 6"/>
-          <p:cNvSpPr txBox="1"/>
-          <p:nvPr/>
-        </p:nvSpPr>
-        <p:spPr>
-          <a:xfrm>
-            <a:off x="777240" y="4087368"/>
-            <a:ext cx="10515600" cy="2377440"/>
-          </a:xfrm>
-          <a:prstGeom prst="rect">
-            <a:avLst/>
-          </a:prstGeom>
-          <a:noFill/>
-        </p:spPr>
-        <p:txBody>
-          <a:bodyPr wrap="square" lIns="0" rIns="0" tIns="0" bIns="0">
-            <a:spAutoFit/>
-          </a:bodyPr>
-          <a:lstStyle/>
-          <a:p>
-            <a:pPr>
-              <a:lnSpc>
-                <a:spcPct val="115000"/>
-              </a:lnSpc>
-              <a:spcAft>
-                <a:spcPts val="1000"/>
-              </a:spcAft>
-            </a:pPr>
-            <a:r>
-              <a:rPr sz="1400" b="1">
-                <a:solidFill>
-                  <a:srgbClr val="0F172A"/>
-                </a:solidFill>
-                <a:latin typeface="Segoe UI"/>
-              </a:rPr>
-              <a:t>Not the 0.4-0.8 other embedding models produce.</a:t>
-            </a:r>
-            <a:r>
-              <a:rPr sz="1400">
-                <a:solidFill>
-                  <a:srgbClr val="475569"/>
-                </a:solidFill>
-                <a:latin typeface="Segoe UI"/>
-              </a:rPr>
-              <a:t>  Verified against a direct Bedrock call, so this is the model's real scale and not a pipeline bug.</a:t>
-            </a:r>
-          </a:p>
-          <a:p>
-            <a:pPr>
-              <a:lnSpc>
-                <a:spcPct val="115000"/>
-              </a:lnSpc>
-              <a:spcAft>
-                <a:spcPts val="1000"/>
-              </a:spcAft>
-            </a:pPr>
-            <a:r>
-              <a:rPr sz="1400" b="1">
-                <a:solidFill>
-                  <a:srgbClr val="0F172A"/>
-                </a:solidFill>
-                <a:latin typeface="Segoe UI"/>
-              </a:rPr>
-              <a:t>T = 0.5 logged a gap on every search, including correct hits.</a:t>
-            </a:r>
-            <a:r>
-              <a:rPr sz="1400">
-                <a:solidFill>
-                  <a:srgbClr val="475569"/>
-                </a:solidFill>
-                <a:latin typeface="Segoe UI"/>
-              </a:rPr>
-              <a:t>  It is now a labelled placeholder at 0.05 — an order-of-magnitude correction, not a derived value.</a:t>
-            </a:r>
-          </a:p>
-          <a:p>
-            <a:pPr>
-              <a:lnSpc>
-                <a:spcPct val="115000"/>
-              </a:lnSpc>
-              <a:spcAft>
-                <a:spcPts val="1000"/>
-              </a:spcAft>
-            </a:pPr>
-            <a:r>
-              <a:rPr sz="1400" b="1">
-                <a:solidFill>
-                  <a:srgbClr val="0F172A"/>
-                </a:solidFill>
-                <a:latin typeface="Segoe UI"/>
-              </a:rPr>
-              <a:t>Correct hits span 0.087 to 0.266.</a:t>
-            </a:r>
-            <a:r>
-              <a:rPr sz="1400">
-                <a:solidFill>
-                  <a:srgbClr val="475569"/>
-                </a:solidFill>
-                <a:latin typeface="Segoe UI"/>
-              </a:rPr>
-              <a:t>  One global threshold is doing very different work across that band, and the weakest correct hit sits close to the strongest spurious one. That overlap is what #12 has to resolve.</a:t>
-            </a:r>
-          </a:p>
-        </p:txBody>
-      </p:sp>
     </p:spTree>
   </p:cSld>
   <p:clrMapOvr>
@@ -23482,6 +24038,193 @@
 </file>
 
 <file path=ppt/slides/slide42.xml><?xml version="1.0" encoding="utf-8"?>
+<p:sld xmlns:a="http://schemas.openxmlformats.org/drawingml/2006/main" xmlns:p="http://schemas.openxmlformats.org/presentationml/2006/main" xmlns:r="http://schemas.openxmlformats.org/officeDocument/2006/relationships">
+  <p:cSld>
+    <p:bg>
+      <p:bgPr>
+        <a:solidFill>
+          <a:srgbClr val="0F172A"/>
+        </a:solidFill>
+        <a:effectLst/>
+      </p:bgPr>
+    </p:bg>
+    <p:spTree>
+      <p:nvGrpSpPr>
+        <p:cNvPr id="1" name=""/>
+        <p:cNvGrpSpPr/>
+        <p:nvPr/>
+      </p:nvGrpSpPr>
+      <p:grpSpPr/>
+      <p:sp>
+        <p:nvSpPr>
+          <p:cNvPr id="2" name="Rectangle 1"/>
+          <p:cNvSpPr/>
+          <p:nvPr/>
+        </p:nvSpPr>
+        <p:spPr>
+          <a:xfrm>
+            <a:off x="0" y="0"/>
+            <a:ext cx="256032" cy="6858000"/>
+          </a:xfrm>
+          <a:prstGeom prst="rect">
+            <a:avLst/>
+          </a:prstGeom>
+          <a:solidFill>
+            <a:srgbClr val="01A88D"/>
+          </a:solidFill>
+          <a:ln>
+            <a:noFill/>
+          </a:ln>
+          <a:effectLst/>
+        </p:spPr>
+        <p:style>
+          <a:lnRef idx="1">
+            <a:schemeClr val="accent1"/>
+          </a:lnRef>
+          <a:fillRef idx="3">
+            <a:schemeClr val="accent1"/>
+          </a:fillRef>
+          <a:effectRef idx="2">
+            <a:schemeClr val="accent1"/>
+          </a:effectRef>
+          <a:fontRef idx="minor">
+            <a:schemeClr val="lt1"/>
+          </a:fontRef>
+        </p:style>
+        <p:txBody>
+          <a:bodyPr rtlCol="0" anchor="ctr"/>
+          <a:lstStyle/>
+          <a:p>
+            <a:pPr algn="ctr"/>
+          </a:p>
+        </p:txBody>
+      </p:sp>
+      <p:sp>
+        <p:nvSpPr>
+          <p:cNvPr id="3" name="TextBox 2"/>
+          <p:cNvSpPr txBox="1"/>
+          <p:nvPr/>
+        </p:nvSpPr>
+        <p:spPr>
+          <a:xfrm>
+            <a:off x="1005840" y="2468880"/>
+            <a:ext cx="10058400" cy="320040"/>
+          </a:xfrm>
+          <a:prstGeom prst="rect">
+            <a:avLst/>
+          </a:prstGeom>
+          <a:noFill/>
+        </p:spPr>
+        <p:txBody>
+          <a:bodyPr wrap="square" lIns="0" rIns="0" tIns="0" bIns="0">
+            <a:spAutoFit/>
+          </a:bodyPr>
+          <a:lstStyle/>
+          <a:p>
+            <a:pPr>
+              <a:lnSpc>
+                <a:spcPct val="100000"/>
+              </a:lnSpc>
+            </a:pPr>
+            <a:r>
+              <a:rPr sz="1300" b="1">
+                <a:solidFill>
+                  <a:srgbClr val="01A88D"/>
+                </a:solidFill>
+                <a:latin typeface="Segoe UI"/>
+              </a:rPr>
+              <a:t>PART SIX</a:t>
+            </a:r>
+          </a:p>
+        </p:txBody>
+      </p:sp>
+      <p:sp>
+        <p:nvSpPr>
+          <p:cNvPr id="4" name="TextBox 3"/>
+          <p:cNvSpPr txBox="1"/>
+          <p:nvPr/>
+        </p:nvSpPr>
+        <p:spPr>
+          <a:xfrm>
+            <a:off x="1005840" y="2880360"/>
+            <a:ext cx="10241280" cy="822960"/>
+          </a:xfrm>
+          <a:prstGeom prst="rect">
+            <a:avLst/>
+          </a:prstGeom>
+          <a:noFill/>
+        </p:spPr>
+        <p:txBody>
+          <a:bodyPr wrap="square" lIns="0" rIns="0" tIns="0" bIns="0">
+            <a:spAutoFit/>
+          </a:bodyPr>
+          <a:lstStyle/>
+          <a:p>
+            <a:pPr>
+              <a:lnSpc>
+                <a:spcPct val="100000"/>
+              </a:lnSpc>
+            </a:pPr>
+            <a:r>
+              <a:rPr sz="4000" b="1">
+                <a:solidFill>
+                  <a:srgbClr val="FFFFFF"/>
+                </a:solidFill>
+                <a:latin typeface="Segoe UI"/>
+              </a:rPr>
+              <a:t>What Phase 0 found</a:t>
+            </a:r>
+          </a:p>
+        </p:txBody>
+      </p:sp>
+      <p:sp>
+        <p:nvSpPr>
+          <p:cNvPr id="5" name="TextBox 4"/>
+          <p:cNvSpPr txBox="1"/>
+          <p:nvPr/>
+        </p:nvSpPr>
+        <p:spPr>
+          <a:xfrm>
+            <a:off x="1005840" y="3931920"/>
+            <a:ext cx="8961120" cy="822960"/>
+          </a:xfrm>
+          <a:prstGeom prst="rect">
+            <a:avLst/>
+          </a:prstGeom>
+          <a:noFill/>
+        </p:spPr>
+        <p:txBody>
+          <a:bodyPr wrap="square" lIns="0" rIns="0" tIns="0" bIns="0">
+            <a:spAutoFit/>
+          </a:bodyPr>
+          <a:lstStyle/>
+          <a:p>
+            <a:pPr>
+              <a:lnSpc>
+                <a:spcPct val="120000"/>
+              </a:lnSpc>
+            </a:pPr>
+            <a:r>
+              <a:rPr sz="1600" b="0">
+                <a:solidFill>
+                  <a:srgbClr val="94A3B8"/>
+                </a:solidFill>
+                <a:latin typeface="Segoe UI"/>
+              </a:rPr>
+              <a:t>The experiment ran. This is what it returned, including the two places the plan above turned out to be wrong.</a:t>
+            </a:r>
+          </a:p>
+        </p:txBody>
+      </p:sp>
+    </p:spTree>
+  </p:cSld>
+  <p:clrMapOvr>
+    <a:masterClrMapping/>
+  </p:clrMapOvr>
+</p:sld>
+</file>
+
+<file path=ppt/slides/slide43.xml><?xml version="1.0" encoding="utf-8"?>
 <p:sld xmlns:a="http://schemas.openxmlformats.org/drawingml/2006/main" xmlns:p="http://schemas.openxmlformats.org/presentationml/2006/main" xmlns:r="http://schemas.openxmlformats.org/officeDocument/2006/relationships">
   <p:cSld>
     <p:bg>
@@ -23533,7 +24276,7 @@
                 </a:solidFill>
                 <a:latin typeface="Segoe UI"/>
               </a:rPr>
-              <a:t>STATUS</a:t>
+              <a:t>THE EXPERIMENT</a:t>
             </a:r>
           </a:p>
         </p:txBody>
@@ -23572,7 +24315,7 @@
                 </a:solidFill>
                 <a:latin typeface="Segoe UI"/>
               </a:rPr>
-              <a:t>Where Phase 0 actually is</a:t>
+              <a:t>How it was measured</a:t>
             </a:r>
           </a:p>
         </p:txBody>
@@ -23621,17 +24364,378 @@
           </a:p>
         </p:txBody>
       </p:sp>
+      <p:sp>
+        <p:nvSpPr>
+          <p:cNvPr id="5" name="TextBox 4"/>
+          <p:cNvSpPr txBox="1"/>
+          <p:nvPr/>
+        </p:nvSpPr>
+        <p:spPr>
+          <a:xfrm>
+            <a:off x="777240" y="1783080"/>
+            <a:ext cx="10424160" cy="457200"/>
+          </a:xfrm>
+          <a:prstGeom prst="rect">
+            <a:avLst/>
+          </a:prstGeom>
+          <a:noFill/>
+        </p:spPr>
+        <p:txBody>
+          <a:bodyPr wrap="square" lIns="0" rIns="0" tIns="0" bIns="0">
+            <a:spAutoFit/>
+          </a:bodyPr>
+          <a:lstStyle/>
+          <a:p>
+            <a:pPr>
+              <a:lnSpc>
+                <a:spcPct val="100000"/>
+              </a:lnSpc>
+            </a:pPr>
+            <a:r>
+              <a:rPr sz="1500" b="0">
+                <a:solidFill>
+                  <a:srgbClr val="475569"/>
+                </a:solidFill>
+                <a:latin typeface="Segoe UI"/>
+              </a:rPr>
+              <a:t>Sixty questions written before any tool existed, then nineteen tools chosen without reading them.</a:t>
+            </a:r>
+          </a:p>
+        </p:txBody>
+      </p:sp>
+      <p:sp>
+        <p:nvSpPr>
+          <p:cNvPr id="6" name="TextBox 5"/>
+          <p:cNvSpPr txBox="1"/>
+          <p:nvPr/>
+        </p:nvSpPr>
+        <p:spPr>
+          <a:xfrm>
+            <a:off x="777240" y="2350008"/>
+            <a:ext cx="10515600" cy="3108960"/>
+          </a:xfrm>
+          <a:prstGeom prst="rect">
+            <a:avLst/>
+          </a:prstGeom>
+          <a:noFill/>
+        </p:spPr>
+        <p:txBody>
+          <a:bodyPr wrap="square" lIns="0" rIns="0" tIns="0" bIns="0">
+            <a:spAutoFit/>
+          </a:bodyPr>
+          <a:lstStyle/>
+          <a:p>
+            <a:pPr>
+              <a:lnSpc>
+                <a:spcPct val="115000"/>
+              </a:lnSpc>
+              <a:spcAft>
+                <a:spcPts val="1000"/>
+              </a:spcAft>
+            </a:pPr>
+            <a:r>
+              <a:rPr sz="1400" b="1">
+                <a:solidFill>
+                  <a:srgbClr val="0F172A"/>
+                </a:solidFill>
+                <a:latin typeface="Segoe UI"/>
+              </a:rPr>
+              <a:t>Queries first, frozen, checksummed.</a:t>
+            </a:r>
+            <a:r>
+              <a:rPr sz="1400">
+                <a:solidFill>
+                  <a:srgbClr val="475569"/>
+                </a:solidFill>
+                <a:latin typeface="Segoe UI"/>
+              </a:rPr>
+              <a:t>  Written from the task side with no catalogue in view, then locked. A query is never edited after it fails — that turns a harness into a mirror.</a:t>
+            </a:r>
+          </a:p>
+          <a:p>
+            <a:pPr>
+              <a:lnSpc>
+                <a:spcPct val="115000"/>
+              </a:lnSpc>
+              <a:spcAft>
+                <a:spcPts val="1000"/>
+              </a:spcAft>
+            </a:pPr>
+            <a:r>
+              <a:rPr sz="1400" b="1">
+                <a:solidFill>
+                  <a:srgbClr val="0F172A"/>
+                </a:solidFill>
+                <a:latin typeface="Segoe UI"/>
+              </a:rPr>
+              <a:t>Tools chosen independently.</a:t>
+            </a:r>
+            <a:r>
+              <a:rPr sz="1400">
+                <a:solidFill>
+                  <a:srgbClr val="475569"/>
+                </a:solidFill>
+                <a:latin typeface="Segoe UI"/>
+              </a:rPr>
+              <a:t>  Nineteen free public APIs across eleven domains, picked as what an agent toolkit would plausibly wrap, not by reading the questions.</a:t>
+            </a:r>
+          </a:p>
+          <a:p>
+            <a:pPr>
+              <a:lnSpc>
+                <a:spcPct val="115000"/>
+              </a:lnSpc>
+              <a:spcAft>
+                <a:spcPts val="1000"/>
+              </a:spcAft>
+            </a:pPr>
+            <a:r>
+              <a:rPr sz="1400" b="1">
+                <a:solidFill>
+                  <a:srgbClr val="0F172A"/>
+                </a:solidFill>
+                <a:latin typeface="Segoe UI"/>
+              </a:rPr>
+              <a:t>So the answerable split was an outcome.</a:t>
+            </a:r>
+            <a:r>
+              <a:rPr sz="1400">
+                <a:solidFill>
+                  <a:srgbClr val="475569"/>
+                </a:solidFill>
+                <a:latin typeface="Segoe UI"/>
+              </a:rPr>
+              <a:t>  Eleven of sixty had an answer in the corpus; forty-nine did not. Nobody designed that ratio.</a:t>
+            </a:r>
+          </a:p>
+          <a:p>
+            <a:pPr>
+              <a:lnSpc>
+                <a:spcPct val="115000"/>
+              </a:lnSpc>
+              <a:spcAft>
+                <a:spcPts val="1000"/>
+              </a:spcAft>
+            </a:pPr>
+            <a:r>
+              <a:rPr sz="1400" b="1">
+                <a:solidFill>
+                  <a:srgbClr val="0F172A"/>
+                </a:solidFill>
+                <a:latin typeface="Segoe UI"/>
+              </a:rPr>
+              <a:t>Then a second set of sixty, written later.</a:t>
+            </a:r>
+            <a:r>
+              <a:rPr sz="1400">
+                <a:solidFill>
+                  <a:srgbClr val="475569"/>
+                </a:solidFill>
+                <a:latin typeface="Segoe UI"/>
+              </a:rPr>
+              <a:t>  Scored once with every parameter frozen. That set is what caught the mistake.</a:t>
+            </a:r>
+          </a:p>
+        </p:txBody>
+      </p:sp>
+    </p:spTree>
+  </p:cSld>
+  <p:clrMapOvr>
+    <a:masterClrMapping/>
+  </p:clrMapOvr>
+</p:sld>
+</file>
+
+<file path=ppt/slides/slide44.xml><?xml version="1.0" encoding="utf-8"?>
+<p:sld xmlns:a="http://schemas.openxmlformats.org/drawingml/2006/main" xmlns:p="http://schemas.openxmlformats.org/presentationml/2006/main" xmlns:r="http://schemas.openxmlformats.org/officeDocument/2006/relationships">
+  <p:cSld>
+    <p:bg>
+      <p:bgPr>
+        <a:solidFill>
+          <a:srgbClr val="FFFFFF"/>
+        </a:solidFill>
+        <a:effectLst/>
+      </p:bgPr>
+    </p:bg>
+    <p:spTree>
+      <p:nvGrpSpPr>
+        <p:cNvPr id="1" name=""/>
+        <p:cNvGrpSpPr/>
+        <p:nvPr/>
+      </p:nvGrpSpPr>
+      <p:grpSpPr/>
+      <p:sp>
+        <p:nvSpPr>
+          <p:cNvPr id="2" name="TextBox 1"/>
+          <p:cNvSpPr txBox="1"/>
+          <p:nvPr/>
+        </p:nvSpPr>
+        <p:spPr>
+          <a:xfrm>
+            <a:off x="777240" y="502920"/>
+            <a:ext cx="10607040" cy="274320"/>
+          </a:xfrm>
+          <a:prstGeom prst="rect">
+            <a:avLst/>
+          </a:prstGeom>
+          <a:noFill/>
+        </p:spPr>
+        <p:txBody>
+          <a:bodyPr wrap="square" lIns="0" rIns="0" tIns="0" bIns="0">
+            <a:spAutoFit/>
+          </a:bodyPr>
+          <a:lstStyle/>
+          <a:p>
+            <a:pPr>
+              <a:lnSpc>
+                <a:spcPct val="100000"/>
+              </a:lnSpc>
+            </a:pPr>
+            <a:r>
+              <a:rPr sz="1100" b="1">
+                <a:solidFill>
+                  <a:srgbClr val="94A3B8"/>
+                </a:solidFill>
+                <a:latin typeface="Segoe UI"/>
+              </a:rPr>
+              <a:t>FINDING ONE</a:t>
+            </a:r>
+          </a:p>
+        </p:txBody>
+      </p:sp>
+      <p:sp>
+        <p:nvSpPr>
+          <p:cNvPr id="3" name="TextBox 2"/>
+          <p:cNvSpPr txBox="1"/>
+          <p:nvPr/>
+        </p:nvSpPr>
+        <p:spPr>
+          <a:xfrm>
+            <a:off x="777240" y="841248"/>
+            <a:ext cx="10607040" cy="640080"/>
+          </a:xfrm>
+          <a:prstGeom prst="rect">
+            <a:avLst/>
+          </a:prstGeom>
+          <a:noFill/>
+        </p:spPr>
+        <p:txBody>
+          <a:bodyPr wrap="square" lIns="0" rIns="0" tIns="0" bIns="0">
+            <a:spAutoFit/>
+          </a:bodyPr>
+          <a:lstStyle/>
+          <a:p>
+            <a:pPr>
+              <a:lnSpc>
+                <a:spcPct val="100000"/>
+              </a:lnSpc>
+            </a:pPr>
+            <a:r>
+              <a:rPr sz="3100" b="1">
+                <a:solidFill>
+                  <a:srgbClr val="0F172A"/>
+                </a:solidFill>
+                <a:latin typeface="Segoe UI"/>
+              </a:rPr>
+              <a:t>Writing what a tool is NOT makes it worse</a:t>
+            </a:r>
+          </a:p>
+        </p:txBody>
+      </p:sp>
+      <p:sp>
+        <p:nvSpPr>
+          <p:cNvPr id="4" name="Rectangle 3"/>
+          <p:cNvSpPr/>
+          <p:nvPr/>
+        </p:nvSpPr>
+        <p:spPr>
+          <a:xfrm>
+            <a:off x="777240" y="1572768"/>
+            <a:ext cx="1005840" cy="41148"/>
+          </a:xfrm>
+          <a:prstGeom prst="rect">
+            <a:avLst/>
+          </a:prstGeom>
+          <a:solidFill>
+            <a:srgbClr val="ED7100"/>
+          </a:solidFill>
+          <a:ln>
+            <a:noFill/>
+          </a:ln>
+          <a:effectLst/>
+        </p:spPr>
+        <p:style>
+          <a:lnRef idx="1">
+            <a:schemeClr val="accent1"/>
+          </a:lnRef>
+          <a:fillRef idx="3">
+            <a:schemeClr val="accent1"/>
+          </a:fillRef>
+          <a:effectRef idx="2">
+            <a:schemeClr val="accent1"/>
+          </a:effectRef>
+          <a:fontRef idx="minor">
+            <a:schemeClr val="lt1"/>
+          </a:fontRef>
+        </p:style>
+        <p:txBody>
+          <a:bodyPr rtlCol="0" anchor="ctr"/>
+          <a:lstStyle/>
+          <a:p>
+            <a:pPr algn="ctr"/>
+          </a:p>
+        </p:txBody>
+      </p:sp>
+      <p:sp>
+        <p:nvSpPr>
+          <p:cNvPr id="5" name="TextBox 4"/>
+          <p:cNvSpPr txBox="1"/>
+          <p:nvPr/>
+        </p:nvSpPr>
+        <p:spPr>
+          <a:xfrm>
+            <a:off x="777240" y="1783080"/>
+            <a:ext cx="10424160" cy="457200"/>
+          </a:xfrm>
+          <a:prstGeom prst="rect">
+            <a:avLst/>
+          </a:prstGeom>
+          <a:noFill/>
+        </p:spPr>
+        <p:txBody>
+          <a:bodyPr wrap="square" lIns="0" rIns="0" tIns="0" bIns="0">
+            <a:spAutoFit/>
+          </a:bodyPr>
+          <a:lstStyle/>
+          <a:p>
+            <a:pPr>
+              <a:lnSpc>
+                <a:spcPct val="100000"/>
+              </a:lnSpc>
+            </a:pPr>
+            <a:r>
+              <a:rPr sz="1500" b="0">
+                <a:solidFill>
+                  <a:srgbClr val="475569"/>
+                </a:solidFill>
+                <a:latin typeface="Segoe UI"/>
+              </a:rPr>
+              <a:t>Three versions of the same nineteen descriptions, measured each time.</a:t>
+            </a:r>
+          </a:p>
+        </p:txBody>
+      </p:sp>
       <p:graphicFrame>
         <p:nvGraphicFramePr>
-          <p:cNvPr id="5" name="Table 4"/>
+          <p:cNvPr id="6" name="Table 5"/>
           <p:cNvGraphicFramePr>
             <a:graphicFrameLocks noGrp="1"/>
           </p:cNvGraphicFramePr>
           <p:nvPr/>
         </p:nvGraphicFramePr>
         <p:xfrm>
-          <a:off x="777240" y="1737360"/>
-          <a:ext cx="10515600" cy="4407408"/>
+          <a:off x="777240" y="2350008"/>
+          <a:ext cx="10515600" cy="1188720"/>
         </p:xfrm>
         <a:graphic>
           <a:graphicData uri="http://schemas.openxmlformats.org/drawingml/2006/table">
@@ -23640,24 +24744,25 @@
                 <a:tableStyleId>{5C22544A-7EE6-4342-B048-85BDC9FD1C3A}</a:tableStyleId>
               </a:tblPr>
               <a:tblGrid>
-                <a:gridCol w="548640"/>
-                <a:gridCol w="6675120"/>
-                <a:gridCol w="3291840"/>
+                <a:gridCol w="4480560"/>
+                <a:gridCol w="2011680"/>
+                <a:gridCol w="2011680"/>
+                <a:gridCol w="2011680"/>
               </a:tblGrid>
-              <a:tr h="293827">
-                <a:tc>
-                  <a:txBody>
-                    <a:bodyPr/>
-                    <a:lstStyle/>
-                    <a:p>
-                      <a:r>
-                        <a:rPr sz="1050" b="1">
+              <a:tr h="297180">
+                <a:tc>
+                  <a:txBody>
+                    <a:bodyPr/>
+                    <a:lstStyle/>
+                    <a:p>
+                      <a:r>
+                        <a:rPr sz="1200" b="1">
                           <a:solidFill>
                             <a:srgbClr val="FFFFFF"/>
                           </a:solidFill>
                           <a:latin typeface="Segoe UI"/>
                         </a:rPr>
-                        <a:t>#</a:t>
+                        <a:t>Descriptions</a:t>
                       </a:r>
                     </a:p>
                   </a:txBody>
@@ -23673,13 +24778,13 @@
                     <a:lstStyle/>
                     <a:p>
                       <a:r>
-                        <a:rPr sz="1050" b="1">
+                        <a:rPr sz="1200" b="1">
                           <a:solidFill>
                             <a:srgbClr val="FFFFFF"/>
                           </a:solidFill>
                           <a:latin typeface="Segoe UI"/>
                         </a:rPr>
-                        <a:t>Issue</a:t>
+                        <a:t>recall@1</a:t>
                       </a:r>
                     </a:p>
                   </a:txBody>
@@ -23695,13 +24800,13 @@
                     <a:lstStyle/>
                     <a:p>
                       <a:r>
-                        <a:rPr sz="1050" b="1">
+                        <a:rPr sz="1200" b="1">
                           <a:solidFill>
                             <a:srgbClr val="FFFFFF"/>
                           </a:solidFill>
                           <a:latin typeface="Segoe UI"/>
                         </a:rPr>
-                        <a:t>State</a:t>
+                        <a:t>recall@3</a:t>
                       </a:r>
                     </a:p>
                   </a:txBody>
@@ -23711,21 +24816,43 @@
                     </a:solidFill>
                   </a:tcPr>
                 </a:tc>
+                <a:tc>
+                  <a:txBody>
+                    <a:bodyPr/>
+                    <a:lstStyle/>
+                    <a:p>
+                      <a:r>
+                        <a:rPr sz="1200" b="1">
+                          <a:solidFill>
+                            <a:srgbClr val="FFFFFF"/>
+                          </a:solidFill>
+                          <a:latin typeface="Segoe UI"/>
+                        </a:rPr>
+                        <a:t>no-answer max</a:t>
+                      </a:r>
+                    </a:p>
+                  </a:txBody>
+                  <a:tcPr>
+                    <a:solidFill>
+                      <a:srgbClr val="0F172A"/>
+                    </a:solidFill>
+                  </a:tcPr>
+                </a:tc>
               </a:tr>
-              <a:tr h="293827">
-                <a:tc>
-                  <a:txBody>
-                    <a:bodyPr/>
-                    <a:lstStyle/>
-                    <a:p>
-                      <a:r>
-                        <a:rPr sz="1050">
+              <a:tr h="297180">
+                <a:tc>
+                  <a:txBody>
+                    <a:bodyPr/>
+                    <a:lstStyle/>
+                    <a:p>
+                      <a:r>
+                        <a:rPr sz="1200">
                           <a:solidFill>
                             <a:srgbClr val="475569"/>
                           </a:solidFill>
                           <a:latin typeface="Segoe UI"/>
                         </a:rPr>
-                        <a:t>1</a:t>
+                        <a:t>v1  as first written</a:t>
                       </a:r>
                     </a:p>
                   </a:txBody>
@@ -23741,13 +24868,13 @@
                     <a:lstStyle/>
                     <a:p>
                       <a:r>
-                        <a:rPr sz="1050">
+                        <a:rPr sz="1200">
                           <a:solidFill>
                             <a:srgbClr val="475569"/>
                           </a:solidFill>
-                          <a:latin typeface="Segoe UI"/>
-                        </a:rPr>
-                        <a:t>Scaffold repo, infrastructure, CI/CD</a:t>
+                          <a:latin typeface="Consolas"/>
+                        </a:rPr>
+                        <a:t>90.9%</a:t>
                       </a:r>
                     </a:p>
                   </a:txBody>
@@ -23763,13 +24890,13 @@
                     <a:lstStyle/>
                     <a:p>
                       <a:r>
-                        <a:rPr sz="1050">
+                        <a:rPr sz="1200">
                           <a:solidFill>
                             <a:srgbClr val="475569"/>
                           </a:solidFill>
-                          <a:latin typeface="Segoe UI"/>
-                        </a:rPr>
-                        <a:t>done</a:t>
+                          <a:latin typeface="Consolas"/>
+                        </a:rPr>
+                        <a:t>100.0%</a:t>
                       </a:r>
                     </a:p>
                   </a:txBody>
@@ -23779,89 +24906,133 @@
                     </a:solidFill>
                   </a:tcPr>
                 </a:tc>
+                <a:tc>
+                  <a:txBody>
+                    <a:bodyPr/>
+                    <a:lstStyle/>
+                    <a:p>
+                      <a:r>
+                        <a:rPr sz="1200">
+                          <a:solidFill>
+                            <a:srgbClr val="475569"/>
+                          </a:solidFill>
+                          <a:latin typeface="Consolas"/>
+                        </a:rPr>
+                        <a:t>0.2721</a:t>
+                      </a:r>
+                    </a:p>
+                  </a:txBody>
+                  <a:tcPr>
+                    <a:solidFill>
+                      <a:srgbClr val="FFFFFF"/>
+                    </a:solidFill>
+                  </a:tcPr>
+                </a:tc>
               </a:tr>
-              <a:tr h="293827">
-                <a:tc>
-                  <a:txBody>
-                    <a:bodyPr/>
-                    <a:lstStyle/>
-                    <a:p>
-                      <a:r>
-                        <a:rPr sz="1050">
+              <a:tr h="297180">
+                <a:tc>
+                  <a:txBody>
+                    <a:bodyPr/>
+                    <a:lstStyle/>
+                    <a:p>
+                      <a:r>
+                        <a:rPr sz="1200">
                           <a:solidFill>
                             <a:srgbClr val="475569"/>
                           </a:solidFill>
                           <a:latin typeface="Segoe UI"/>
                         </a:rPr>
-                        <a:t>2</a:t>
-                      </a:r>
-                    </a:p>
-                  </a:txBody>
-                  <a:tcPr>
-                    <a:solidFill>
-                      <a:srgbClr val="F8FAFC"/>
-                    </a:solidFill>
-                  </a:tcPr>
-                </a:tc>
-                <a:tc>
-                  <a:txBody>
-                    <a:bodyPr/>
-                    <a:lstStyle/>
-                    <a:p>
-                      <a:r>
-                        <a:rPr sz="1050">
+                        <a:t>v2  with "not X" boundary clauses</a:t>
+                      </a:r>
+                    </a:p>
+                  </a:txBody>
+                  <a:tcPr>
+                    <a:solidFill>
+                      <a:srgbClr val="FFF7ED"/>
+                    </a:solidFill>
+                  </a:tcPr>
+                </a:tc>
+                <a:tc>
+                  <a:txBody>
+                    <a:bodyPr/>
+                    <a:lstStyle/>
+                    <a:p>
+                      <a:r>
+                        <a:rPr sz="1200">
                           <a:solidFill>
                             <a:srgbClr val="475569"/>
                           </a:solidFill>
-                          <a:latin typeface="Segoe UI"/>
-                        </a:rPr>
-                        <a:t>Shared schemas: tool, event, gap</a:t>
-                      </a:r>
-                    </a:p>
-                  </a:txBody>
-                  <a:tcPr>
-                    <a:solidFill>
-                      <a:srgbClr val="F8FAFC"/>
-                    </a:solidFill>
-                  </a:tcPr>
-                </a:tc>
-                <a:tc>
-                  <a:txBody>
-                    <a:bodyPr/>
-                    <a:lstStyle/>
-                    <a:p>
-                      <a:r>
-                        <a:rPr sz="1050">
+                          <a:latin typeface="Consolas"/>
+                        </a:rPr>
+                        <a:t>81.8%</a:t>
+                      </a:r>
+                    </a:p>
+                  </a:txBody>
+                  <a:tcPr>
+                    <a:solidFill>
+                      <a:srgbClr val="FFF7ED"/>
+                    </a:solidFill>
+                  </a:tcPr>
+                </a:tc>
+                <a:tc>
+                  <a:txBody>
+                    <a:bodyPr/>
+                    <a:lstStyle/>
+                    <a:p>
+                      <a:r>
+                        <a:rPr sz="1200">
                           <a:solidFill>
                             <a:srgbClr val="475569"/>
                           </a:solidFill>
-                          <a:latin typeface="Segoe UI"/>
-                        </a:rPr>
-                        <a:t>done, in the handlers</a:t>
-                      </a:r>
-                    </a:p>
-                  </a:txBody>
-                  <a:tcPr>
-                    <a:solidFill>
-                      <a:srgbClr val="F8FAFC"/>
+                          <a:latin typeface="Consolas"/>
+                        </a:rPr>
+                        <a:t>90.9%</a:t>
+                      </a:r>
+                    </a:p>
+                  </a:txBody>
+                  <a:tcPr>
+                    <a:solidFill>
+                      <a:srgbClr val="FFF7ED"/>
+                    </a:solidFill>
+                  </a:tcPr>
+                </a:tc>
+                <a:tc>
+                  <a:txBody>
+                    <a:bodyPr/>
+                    <a:lstStyle/>
+                    <a:p>
+                      <a:r>
+                        <a:rPr sz="1200">
+                          <a:solidFill>
+                            <a:srgbClr val="475569"/>
+                          </a:solidFill>
+                          <a:latin typeface="Consolas"/>
+                        </a:rPr>
+                        <a:t>0.3632</a:t>
+                      </a:r>
+                    </a:p>
+                  </a:txBody>
+                  <a:tcPr>
+                    <a:solidFill>
+                      <a:srgbClr val="FFF7ED"/>
                     </a:solidFill>
                   </a:tcPr>
                 </a:tc>
               </a:tr>
-              <a:tr h="293827">
-                <a:tc>
-                  <a:txBody>
-                    <a:bodyPr/>
-                    <a:lstStyle/>
-                    <a:p>
-                      <a:r>
-                        <a:rPr sz="1050">
+              <a:tr h="297180">
+                <a:tc>
+                  <a:txBody>
+                    <a:bodyPr/>
+                    <a:lstStyle/>
+                    <a:p>
+                      <a:r>
+                        <a:rPr sz="1200">
                           <a:solidFill>
                             <a:srgbClr val="475569"/>
                           </a:solidFill>
                           <a:latin typeface="Segoe UI"/>
                         </a:rPr>
-                        <a:t>3</a:t>
+                        <a:t>v3  positive and concrete only</a:t>
                       </a:r>
                     </a:p>
                   </a:txBody>
@@ -23877,13 +25048,13 @@
                     <a:lstStyle/>
                     <a:p>
                       <a:r>
-                        <a:rPr sz="1050">
+                        <a:rPr sz="1200">
                           <a:solidFill>
                             <a:srgbClr val="475569"/>
                           </a:solidFill>
-                          <a:latin typeface="Segoe UI"/>
-                        </a:rPr>
-                        <a:t>Terraform stack: tables, IAM, alarm</a:t>
+                          <a:latin typeface="Consolas"/>
+                        </a:rPr>
+                        <a:t>100.0%</a:t>
                       </a:r>
                     </a:p>
                   </a:txBody>
@@ -23899,13 +25070,13 @@
                     <a:lstStyle/>
                     <a:p>
                       <a:r>
-                        <a:rPr sz="1050">
+                        <a:rPr sz="1200">
                           <a:solidFill>
                             <a:srgbClr val="475569"/>
                           </a:solidFill>
-                          <a:latin typeface="Segoe UI"/>
-                        </a:rPr>
-                        <a:t>done, applied via CI</a:t>
+                          <a:latin typeface="Consolas"/>
+                        </a:rPr>
+                        <a:t>100.0%</a:t>
                       </a:r>
                     </a:p>
                   </a:txBody>
@@ -23915,751 +25086,25 @@
                     </a:solidFill>
                   </a:tcPr>
                 </a:tc>
-              </a:tr>
-              <a:tr h="293827">
-                <a:tc>
-                  <a:txBody>
-                    <a:bodyPr/>
-                    <a:lstStyle/>
-                    <a:p>
-                      <a:r>
-                        <a:rPr sz="1050">
+                <a:tc>
+                  <a:txBody>
+                    <a:bodyPr/>
+                    <a:lstStyle/>
+                    <a:p>
+                      <a:r>
+                        <a:rPr sz="1200">
                           <a:solidFill>
                             <a:srgbClr val="475569"/>
                           </a:solidFill>
-                          <a:latin typeface="Segoe UI"/>
-                        </a:rPr>
-                        <a:t>4</a:t>
-                      </a:r>
-                    </a:p>
-                  </a:txBody>
-                  <a:tcPr>
-                    <a:solidFill>
-                      <a:srgbClr val="F8FAFC"/>
-                    </a:solidFill>
-                  </a:tcPr>
-                </a:tc>
-                <a:tc>
-                  <a:txBody>
-                    <a:bodyPr/>
-                    <a:lstStyle/>
-                    <a:p>
-                      <a:r>
-                        <a:rPr sz="1050">
-                          <a:solidFill>
-                            <a:srgbClr val="475569"/>
-                          </a:solidFill>
-                          <a:latin typeface="Segoe UI"/>
-                        </a:rPr>
-                        <a:t>Registry with immutable versioning</a:t>
-                      </a:r>
-                    </a:p>
-                  </a:txBody>
-                  <a:tcPr>
-                    <a:solidFill>
-                      <a:srgbClr val="F8FAFC"/>
-                    </a:solidFill>
-                  </a:tcPr>
-                </a:tc>
-                <a:tc>
-                  <a:txBody>
-                    <a:bodyPr/>
-                    <a:lstStyle/>
-                    <a:p>
-                      <a:r>
-                        <a:rPr sz="1050">
-                          <a:solidFill>
-                            <a:srgbClr val="475569"/>
-                          </a:solidFill>
-                          <a:latin typeface="Segoe UI"/>
-                        </a:rPr>
-                        <a:t>done, proven by test</a:t>
-                      </a:r>
-                    </a:p>
-                  </a:txBody>
-                  <a:tcPr>
-                    <a:solidFill>
-                      <a:srgbClr val="F8FAFC"/>
-                    </a:solidFill>
-                  </a:tcPr>
-                </a:tc>
-              </a:tr>
-              <a:tr h="293827">
-                <a:tc>
-                  <a:txBody>
-                    <a:bodyPr/>
-                    <a:lstStyle/>
-                    <a:p>
-                      <a:r>
-                        <a:rPr sz="1050">
-                          <a:solidFill>
-                            <a:srgbClr val="475569"/>
-                          </a:solidFill>
-                          <a:latin typeface="Segoe UI"/>
-                        </a:rPr>
-                        <a:t>5</a:t>
+                          <a:latin typeface="Consolas"/>
+                        </a:rPr>
+                        <a:t>0.3362</a:t>
                       </a:r>
                     </a:p>
                   </a:txBody>
                   <a:tcPr>
                     <a:solidFill>
                       <a:srgbClr val="FFFFFF"/>
-                    </a:solidFill>
-                  </a:tcPr>
-                </a:tc>
-                <a:tc>
-                  <a:txBody>
-                    <a:bodyPr/>
-                    <a:lstStyle/>
-                    <a:p>
-                      <a:r>
-                        <a:rPr sz="1050">
-                          <a:solidFill>
-                            <a:srgbClr val="475569"/>
-                          </a:solidFill>
-                          <a:latin typeface="Segoe UI"/>
-                        </a:rPr>
-                        <a:t>Embedding call behind one interface</a:t>
-                      </a:r>
-                    </a:p>
-                  </a:txBody>
-                  <a:tcPr>
-                    <a:solidFill>
-                      <a:srgbClr val="FFFFFF"/>
-                    </a:solidFill>
-                  </a:tcPr>
-                </a:tc>
-                <a:tc>
-                  <a:txBody>
-                    <a:bodyPr/>
-                    <a:lstStyle/>
-                    <a:p>
-                      <a:r>
-                        <a:rPr sz="1050">
-                          <a:solidFill>
-                            <a:srgbClr val="475569"/>
-                          </a:solidFill>
-                          <a:latin typeface="Segoe UI"/>
-                        </a:rPr>
-                        <a:t>done</a:t>
-                      </a:r>
-                    </a:p>
-                  </a:txBody>
-                  <a:tcPr>
-                    <a:solidFill>
-                      <a:srgbClr val="FFFFFF"/>
-                    </a:solidFill>
-                  </a:tcPr>
-                </a:tc>
-              </a:tr>
-              <a:tr h="293827">
-                <a:tc>
-                  <a:txBody>
-                    <a:bodyPr/>
-                    <a:lstStyle/>
-                    <a:p>
-                      <a:r>
-                        <a:rPr sz="1050">
-                          <a:solidFill>
-                            <a:srgbClr val="475569"/>
-                          </a:solidFill>
-                          <a:latin typeface="Segoe UI"/>
-                        </a:rPr>
-                        <a:t>6</a:t>
-                      </a:r>
-                    </a:p>
-                  </a:txBody>
-                  <a:tcPr>
-                    <a:solidFill>
-                      <a:srgbClr val="F8FAFC"/>
-                    </a:solidFill>
-                  </a:tcPr>
-                </a:tc>
-                <a:tc>
-                  <a:txBody>
-                    <a:bodyPr/>
-                    <a:lstStyle/>
-                    <a:p>
-                      <a:r>
-                        <a:rPr sz="1050">
-                          <a:solidFill>
-                            <a:srgbClr val="475569"/>
-                          </a:solidFill>
-                          <a:latin typeface="Segoe UI"/>
-                        </a:rPr>
-                        <a:t>Semantic search endpoint</a:t>
-                      </a:r>
-                    </a:p>
-                  </a:txBody>
-                  <a:tcPr>
-                    <a:solidFill>
-                      <a:srgbClr val="F8FAFC"/>
-                    </a:solidFill>
-                  </a:tcPr>
-                </a:tc>
-                <a:tc>
-                  <a:txBody>
-                    <a:bodyPr/>
-                    <a:lstStyle/>
-                    <a:p>
-                      <a:r>
-                        <a:rPr sz="1050">
-                          <a:solidFill>
-                            <a:srgbClr val="475569"/>
-                          </a:solidFill>
-                          <a:latin typeface="Segoe UI"/>
-                        </a:rPr>
-                        <a:t>done</a:t>
-                      </a:r>
-                    </a:p>
-                  </a:txBody>
-                  <a:tcPr>
-                    <a:solidFill>
-                      <a:srgbClr val="F8FAFC"/>
-                    </a:solidFill>
-                  </a:tcPr>
-                </a:tc>
-              </a:tr>
-              <a:tr h="293827">
-                <a:tc>
-                  <a:txBody>
-                    <a:bodyPr/>
-                    <a:lstStyle/>
-                    <a:p>
-                      <a:r>
-                        <a:rPr sz="1050">
-                          <a:solidFill>
-                            <a:srgbClr val="475569"/>
-                          </a:solidFill>
-                          <a:latin typeface="Segoe UI"/>
-                        </a:rPr>
-                        <a:t>7</a:t>
-                      </a:r>
-                    </a:p>
-                  </a:txBody>
-                  <a:tcPr>
-                    <a:solidFill>
-                      <a:srgbClr val="FFFFFF"/>
-                    </a:solidFill>
-                  </a:tcPr>
-                </a:tc>
-                <a:tc>
-                  <a:txBody>
-                    <a:bodyPr/>
-                    <a:lstStyle/>
-                    <a:p>
-                      <a:r>
-                        <a:rPr sz="1050">
-                          <a:solidFill>
-                            <a:srgbClr val="475569"/>
-                          </a:solidFill>
-                          <a:latin typeface="Segoe UI"/>
-                        </a:rPr>
-                        <a:t>Append-only event log</a:t>
-                      </a:r>
-                    </a:p>
-                  </a:txBody>
-                  <a:tcPr>
-                    <a:solidFill>
-                      <a:srgbClr val="FFFFFF"/>
-                    </a:solidFill>
-                  </a:tcPr>
-                </a:tc>
-                <a:tc>
-                  <a:txBody>
-                    <a:bodyPr/>
-                    <a:lstStyle/>
-                    <a:p>
-                      <a:r>
-                        <a:rPr sz="1050">
-                          <a:solidFill>
-                            <a:srgbClr val="475569"/>
-                          </a:solidFill>
-                          <a:latin typeface="Segoe UI"/>
-                        </a:rPr>
-                        <a:t>done, IAM-enforced</a:t>
-                      </a:r>
-                    </a:p>
-                  </a:txBody>
-                  <a:tcPr>
-                    <a:solidFill>
-                      <a:srgbClr val="FFFFFF"/>
-                    </a:solidFill>
-                  </a:tcPr>
-                </a:tc>
-              </a:tr>
-              <a:tr h="293827">
-                <a:tc>
-                  <a:txBody>
-                    <a:bodyPr/>
-                    <a:lstStyle/>
-                    <a:p>
-                      <a:r>
-                        <a:rPr sz="1050">
-                          <a:solidFill>
-                            <a:srgbClr val="475569"/>
-                          </a:solidFill>
-                          <a:latin typeface="Segoe UI"/>
-                        </a:rPr>
-                        <a:t>8</a:t>
-                      </a:r>
-                    </a:p>
-                  </a:txBody>
-                  <a:tcPr>
-                    <a:solidFill>
-                      <a:srgbClr val="F8FAFC"/>
-                    </a:solidFill>
-                  </a:tcPr>
-                </a:tc>
-                <a:tc>
-                  <a:txBody>
-                    <a:bodyPr/>
-                    <a:lstStyle/>
-                    <a:p>
-                      <a:r>
-                        <a:rPr sz="1050">
-                          <a:solidFill>
-                            <a:srgbClr val="475569"/>
-                          </a:solidFill>
-                          <a:latin typeface="Segoe UI"/>
-                        </a:rPr>
-                        <a:t>Gap detection and gap log</a:t>
-                      </a:r>
-                    </a:p>
-                  </a:txBody>
-                  <a:tcPr>
-                    <a:solidFill>
-                      <a:srgbClr val="F8FAFC"/>
-                    </a:solidFill>
-                  </a:tcPr>
-                </a:tc>
-                <a:tc>
-                  <a:txBody>
-                    <a:bodyPr/>
-                    <a:lstStyle/>
-                    <a:p>
-                      <a:r>
-                        <a:rPr sz="1050">
-                          <a:solidFill>
-                            <a:srgbClr val="475569"/>
-                          </a:solidFill>
-                          <a:latin typeface="Segoe UI"/>
-                        </a:rPr>
-                        <a:t>done</a:t>
-                      </a:r>
-                    </a:p>
-                  </a:txBody>
-                  <a:tcPr>
-                    <a:solidFill>
-                      <a:srgbClr val="F8FAFC"/>
-                    </a:solidFill>
-                  </a:tcPr>
-                </a:tc>
-              </a:tr>
-              <a:tr h="293827">
-                <a:tc>
-                  <a:txBody>
-                    <a:bodyPr/>
-                    <a:lstStyle/>
-                    <a:p>
-                      <a:r>
-                        <a:rPr sz="1050">
-                          <a:solidFill>
-                            <a:srgbClr val="475569"/>
-                          </a:solidFill>
-                          <a:latin typeface="Segoe UI"/>
-                        </a:rPr>
-                        <a:t>9</a:t>
-                      </a:r>
-                    </a:p>
-                  </a:txBody>
-                  <a:tcPr>
-                    <a:solidFill>
-                      <a:srgbClr val="FFFFFF"/>
-                    </a:solidFill>
-                  </a:tcPr>
-                </a:tc>
-                <a:tc>
-                  <a:txBody>
-                    <a:bodyPr/>
-                    <a:lstStyle/>
-                    <a:p>
-                      <a:r>
-                        <a:rPr sz="1050">
-                          <a:solidFill>
-                            <a:srgbClr val="475569"/>
-                          </a:solidFill>
-                          <a:latin typeface="Segoe UI"/>
-                        </a:rPr>
-                        <a:t>Eval queries written blind</a:t>
-                      </a:r>
-                    </a:p>
-                  </a:txBody>
-                  <a:tcPr>
-                    <a:solidFill>
-                      <a:srgbClr val="FFFFFF"/>
-                    </a:solidFill>
-                  </a:tcPr>
-                </a:tc>
-                <a:tc>
-                  <a:txBody>
-                    <a:bodyPr/>
-                    <a:lstStyle/>
-                    <a:p>
-                      <a:r>
-                        <a:rPr sz="1050">
-                          <a:solidFill>
-                            <a:srgbClr val="475569"/>
-                          </a:solidFill>
-                          <a:latin typeface="Segoe UI"/>
-                        </a:rPr>
-                        <a:t>done — 60, frozen, checksummed</a:t>
-                      </a:r>
-                    </a:p>
-                  </a:txBody>
-                  <a:tcPr>
-                    <a:solidFill>
-                      <a:srgbClr val="FFFFFF"/>
-                    </a:solidFill>
-                  </a:tcPr>
-                </a:tc>
-              </a:tr>
-              <a:tr h="293827">
-                <a:tc>
-                  <a:txBody>
-                    <a:bodyPr/>
-                    <a:lstStyle/>
-                    <a:p>
-                      <a:r>
-                        <a:rPr sz="1050">
-                          <a:solidFill>
-                            <a:srgbClr val="475569"/>
-                          </a:solidFill>
-                          <a:latin typeface="Segoe UI"/>
-                        </a:rPr>
-                        <a:t>10</a:t>
-                      </a:r>
-                    </a:p>
-                  </a:txBody>
-                  <a:tcPr>
-                    <a:solidFill>
-                      <a:srgbClr val="F8FAFC"/>
-                    </a:solidFill>
-                  </a:tcPr>
-                </a:tc>
-                <a:tc>
-                  <a:txBody>
-                    <a:bodyPr/>
-                    <a:lstStyle/>
-                    <a:p>
-                      <a:r>
-                        <a:rPr sz="1050">
-                          <a:solidFill>
-                            <a:srgbClr val="475569"/>
-                          </a:solidFill>
-                          <a:latin typeface="Segoe UI"/>
-                        </a:rPr>
-                        <a:t>Seed 15-20 tools</a:t>
-                      </a:r>
-                    </a:p>
-                  </a:txBody>
-                  <a:tcPr>
-                    <a:solidFill>
-                      <a:srgbClr val="F8FAFC"/>
-                    </a:solidFill>
-                  </a:tcPr>
-                </a:tc>
-                <a:tc>
-                  <a:txBody>
-                    <a:bodyPr/>
-                    <a:lstStyle/>
-                    <a:p>
-                      <a:r>
-                        <a:rPr sz="1050">
-                          <a:solidFill>
-                            <a:srgbClr val="475569"/>
-                          </a:solidFill>
-                          <a:latin typeface="Segoe UI"/>
-                        </a:rPr>
-                        <a:t>done — 19 live, 19/19 verified</a:t>
-                      </a:r>
-                    </a:p>
-                  </a:txBody>
-                  <a:tcPr>
-                    <a:solidFill>
-                      <a:srgbClr val="F8FAFC"/>
-                    </a:solidFill>
-                  </a:tcPr>
-                </a:tc>
-              </a:tr>
-              <a:tr h="293827">
-                <a:tc>
-                  <a:txBody>
-                    <a:bodyPr/>
-                    <a:lstStyle/>
-                    <a:p>
-                      <a:r>
-                        <a:rPr sz="1050">
-                          <a:solidFill>
-                            <a:srgbClr val="475569"/>
-                          </a:solidFill>
-                          <a:latin typeface="Segoe UI"/>
-                        </a:rPr>
-                        <a:t>11</a:t>
-                      </a:r>
-                    </a:p>
-                  </a:txBody>
-                  <a:tcPr>
-                    <a:solidFill>
-                      <a:srgbClr val="FFFFFF"/>
-                    </a:solidFill>
-                  </a:tcPr>
-                </a:tc>
-                <a:tc>
-                  <a:txBody>
-                    <a:bodyPr/>
-                    <a:lstStyle/>
-                    <a:p>
-                      <a:r>
-                        <a:rPr sz="1050">
-                          <a:solidFill>
-                            <a:srgbClr val="475569"/>
-                          </a:solidFill>
-                          <a:latin typeface="Segoe UI"/>
-                        </a:rPr>
-                        <a:t>Label the set, recall@k harness</a:t>
-                      </a:r>
-                    </a:p>
-                  </a:txBody>
-                  <a:tcPr>
-                    <a:solidFill>
-                      <a:srgbClr val="FFFFFF"/>
-                    </a:solidFill>
-                  </a:tcPr>
-                </a:tc>
-                <a:tc>
-                  <a:txBody>
-                    <a:bodyPr/>
-                    <a:lstStyle/>
-                    <a:p>
-                      <a:r>
-                        <a:rPr sz="1050">
-                          <a:solidFill>
-                            <a:srgbClr val="475569"/>
-                          </a:solidFill>
-                          <a:latin typeface="Segoe UI"/>
-                        </a:rPr>
-                        <a:t>next</a:t>
-                      </a:r>
-                    </a:p>
-                  </a:txBody>
-                  <a:tcPr>
-                    <a:solidFill>
-                      <a:srgbClr val="FFFFFF"/>
-                    </a:solidFill>
-                  </a:tcPr>
-                </a:tc>
-              </a:tr>
-              <a:tr h="293827">
-                <a:tc>
-                  <a:txBody>
-                    <a:bodyPr/>
-                    <a:lstStyle/>
-                    <a:p>
-                      <a:r>
-                        <a:rPr sz="1050">
-                          <a:solidFill>
-                            <a:srgbClr val="475569"/>
-                          </a:solidFill>
-                          <a:latin typeface="Segoe UI"/>
-                        </a:rPr>
-                        <a:t>12</a:t>
-                      </a:r>
-                    </a:p>
-                  </a:txBody>
-                  <a:tcPr>
-                    <a:solidFill>
-                      <a:srgbClr val="F8FAFC"/>
-                    </a:solidFill>
-                  </a:tcPr>
-                </a:tc>
-                <a:tc>
-                  <a:txBody>
-                    <a:bodyPr/>
-                    <a:lstStyle/>
-                    <a:p>
-                      <a:r>
-                        <a:rPr sz="1050">
-                          <a:solidFill>
-                            <a:srgbClr val="475569"/>
-                          </a:solidFill>
-                          <a:latin typeface="Segoe UI"/>
-                        </a:rPr>
-                        <a:t>Derive threshold T</a:t>
-                      </a:r>
-                    </a:p>
-                  </a:txBody>
-                  <a:tcPr>
-                    <a:solidFill>
-                      <a:srgbClr val="F8FAFC"/>
-                    </a:solidFill>
-                  </a:tcPr>
-                </a:tc>
-                <a:tc>
-                  <a:txBody>
-                    <a:bodyPr/>
-                    <a:lstStyle/>
-                    <a:p>
-                      <a:r>
-                        <a:rPr sz="1050">
-                          <a:solidFill>
-                            <a:srgbClr val="475569"/>
-                          </a:solidFill>
-                          <a:latin typeface="Segoe UI"/>
-                        </a:rPr>
-                        <a:t>blocked on 11</a:t>
-                      </a:r>
-                    </a:p>
-                  </a:txBody>
-                  <a:tcPr>
-                    <a:solidFill>
-                      <a:srgbClr val="F8FAFC"/>
-                    </a:solidFill>
-                  </a:tcPr>
-                </a:tc>
-              </a:tr>
-              <a:tr h="293827">
-                <a:tc>
-                  <a:txBody>
-                    <a:bodyPr/>
-                    <a:lstStyle/>
-                    <a:p>
-                      <a:r>
-                        <a:rPr sz="1050">
-                          <a:solidFill>
-                            <a:srgbClr val="475569"/>
-                          </a:solidFill>
-                          <a:latin typeface="Segoe UI"/>
-                        </a:rPr>
-                        <a:t>13</a:t>
-                      </a:r>
-                    </a:p>
-                  </a:txBody>
-                  <a:tcPr>
-                    <a:solidFill>
-                      <a:srgbClr val="FFFFFF"/>
-                    </a:solidFill>
-                  </a:tcPr>
-                </a:tc>
-                <a:tc>
-                  <a:txBody>
-                    <a:bodyPr/>
-                    <a:lstStyle/>
-                    <a:p>
-                      <a:r>
-                        <a:rPr sz="1050">
-                          <a:solidFill>
-                            <a:srgbClr val="475569"/>
-                          </a:solidFill>
-                          <a:latin typeface="Segoe UI"/>
-                        </a:rPr>
-                        <a:t>Query and gap CLIs</a:t>
-                      </a:r>
-                    </a:p>
-                  </a:txBody>
-                  <a:tcPr>
-                    <a:solidFill>
-                      <a:srgbClr val="FFFFFF"/>
-                    </a:solidFill>
-                  </a:tcPr>
-                </a:tc>
-                <a:tc>
-                  <a:txBody>
-                    <a:bodyPr/>
-                    <a:lstStyle/>
-                    <a:p>
-                      <a:r>
-                        <a:rPr sz="1050">
-                          <a:solidFill>
-                            <a:srgbClr val="475569"/>
-                          </a:solidFill>
-                          <a:latin typeface="Segoe UI"/>
-                        </a:rPr>
-                        <a:t>not started</a:t>
-                      </a:r>
-                    </a:p>
-                  </a:txBody>
-                  <a:tcPr>
-                    <a:solidFill>
-                      <a:srgbClr val="FFFFFF"/>
-                    </a:solidFill>
-                  </a:tcPr>
-                </a:tc>
-              </a:tr>
-              <a:tr h="293830">
-                <a:tc>
-                  <a:txBody>
-                    <a:bodyPr/>
-                    <a:lstStyle/>
-                    <a:p>
-                      <a:r>
-                        <a:rPr sz="1050">
-                          <a:solidFill>
-                            <a:srgbClr val="475569"/>
-                          </a:solidFill>
-                          <a:latin typeface="Segoe UI"/>
-                        </a:rPr>
-                        <a:t>14</a:t>
-                      </a:r>
-                    </a:p>
-                  </a:txBody>
-                  <a:tcPr>
-                    <a:solidFill>
-                      <a:srgbClr val="F8FAFC"/>
-                    </a:solidFill>
-                  </a:tcPr>
-                </a:tc>
-                <a:tc>
-                  <a:txBody>
-                    <a:bodyPr/>
-                    <a:lstStyle/>
-                    <a:p>
-                      <a:r>
-                        <a:rPr sz="1050">
-                          <a:solidFill>
-                            <a:srgbClr val="475569"/>
-                          </a:solidFill>
-                          <a:latin typeface="Segoe UI"/>
-                        </a:rPr>
-                        <a:t>Findings write-up</a:t>
-                      </a:r>
-                    </a:p>
-                  </a:txBody>
-                  <a:tcPr>
-                    <a:solidFill>
-                      <a:srgbClr val="F8FAFC"/>
-                    </a:solidFill>
-                  </a:tcPr>
-                </a:tc>
-                <a:tc>
-                  <a:txBody>
-                    <a:bodyPr/>
-                    <a:lstStyle/>
-                    <a:p>
-                      <a:r>
-                        <a:rPr sz="1050">
-                          <a:solidFill>
-                            <a:srgbClr val="475569"/>
-                          </a:solidFill>
-                          <a:latin typeface="Segoe UI"/>
-                        </a:rPr>
-                        <a:t>blocked on 11, 12</a:t>
-                      </a:r>
-                    </a:p>
-                  </a:txBody>
-                  <a:tcPr>
-                    <a:solidFill>
-                      <a:srgbClr val="F8FAFC"/>
                     </a:solidFill>
                   </a:tcPr>
                 </a:tc>
@@ -24668,6 +25113,2335 @@
           </a:graphicData>
         </a:graphic>
       </p:graphicFrame>
+      <p:sp>
+        <p:nvSpPr>
+          <p:cNvPr id="7" name="TextBox 6"/>
+          <p:cNvSpPr txBox="1"/>
+          <p:nvPr/>
+        </p:nvSpPr>
+        <p:spPr>
+          <a:xfrm>
+            <a:off x="777240" y="3721608"/>
+            <a:ext cx="10515600" cy="2743200"/>
+          </a:xfrm>
+          <a:prstGeom prst="rect">
+            <a:avLst/>
+          </a:prstGeom>
+          <a:noFill/>
+        </p:spPr>
+        <p:txBody>
+          <a:bodyPr wrap="square" lIns="0" rIns="0" tIns="0" bIns="0">
+            <a:spAutoFit/>
+          </a:bodyPr>
+          <a:lstStyle/>
+          <a:p>
+            <a:pPr>
+              <a:lnSpc>
+                <a:spcPct val="115000"/>
+              </a:lnSpc>
+              <a:spcAft>
+                <a:spcPts val="1000"/>
+              </a:spcAft>
+            </a:pPr>
+            <a:r>
+              <a:rPr sz="1400" b="1">
+                <a:solidFill>
+                  <a:srgbClr val="0F172A"/>
+                </a:solidFill>
+                <a:latin typeface="Segoe UI"/>
+              </a:rPr>
+              <a:t>Embeddings have no idea what "not" means.</a:t>
+            </a:r>
+            <a:r>
+              <a:rPr sz="1400">
+                <a:solidFill>
+                  <a:srgbClr val="475569"/>
+                </a:solidFill>
+                <a:latin typeface="Segoe UI"/>
+              </a:rPr>
+              <a:t>  Writing that a tool "does not look up the owner or country of another address" raised its score on exactly that question by 0.1331. The words pull it closer; the negation is invisible.</a:t>
+            </a:r>
+          </a:p>
+          <a:p>
+            <a:pPr>
+              <a:lnSpc>
+                <a:spcPct val="115000"/>
+              </a:lnSpc>
+              <a:spcAft>
+                <a:spcPts val="1000"/>
+              </a:spcAft>
+            </a:pPr>
+            <a:r>
+              <a:rPr sz="1400" b="1">
+                <a:solidFill>
+                  <a:srgbClr val="0F172A"/>
+                </a:solidFill>
+                <a:latin typeface="Segoe UI"/>
+              </a:rPr>
+              <a:t>Qualifiers also dilute.</a:t>
+            </a:r>
+            <a:r>
+              <a:rPr sz="1400">
+                <a:solidFill>
+                  <a:srgbClr val="475569"/>
+                </a:solidFill>
+                <a:latin typeface="Segoe UI"/>
+              </a:rPr>
+              <a:t>  The encyclopedia tool on a history question fell from 0.2994 to 0.0890 and lost to a holidays tool.</a:t>
+            </a:r>
+          </a:p>
+          <a:p>
+            <a:pPr>
+              <a:lnSpc>
+                <a:spcPct val="115000"/>
+              </a:lnSpc>
+              <a:spcAft>
+                <a:spcPts val="1000"/>
+              </a:spcAft>
+            </a:pPr>
+            <a:r>
+              <a:rPr sz="1400" b="1">
+                <a:solidFill>
+                  <a:srgbClr val="0F172A"/>
+                </a:solidFill>
+                <a:latin typeface="Segoe UI"/>
+              </a:rPr>
+              <a:t>So describe what a tool does, concretely.</a:t>
+            </a:r>
+            <a:r>
+              <a:rPr sz="1400">
+                <a:solidFill>
+                  <a:srgbClr val="475569"/>
+                </a:solidFill>
+                <a:latin typeface="Segoe UI"/>
+              </a:rPr>
+              <a:t>  Never name the neighbouring capability you are distinguishing it from. That took recall to 100%.</a:t>
+            </a:r>
+          </a:p>
+        </p:txBody>
+      </p:sp>
+    </p:spTree>
+  </p:cSld>
+  <p:clrMapOvr>
+    <a:masterClrMapping/>
+  </p:clrMapOvr>
+</p:sld>
+</file>
+
+<file path=ppt/slides/slide45.xml><?xml version="1.0" encoding="utf-8"?>
+<p:sld xmlns:a="http://schemas.openxmlformats.org/drawingml/2006/main" xmlns:p="http://schemas.openxmlformats.org/presentationml/2006/main" xmlns:r="http://schemas.openxmlformats.org/officeDocument/2006/relationships">
+  <p:cSld>
+    <p:bg>
+      <p:bgPr>
+        <a:solidFill>
+          <a:srgbClr val="FFFFFF"/>
+        </a:solidFill>
+        <a:effectLst/>
+      </p:bgPr>
+    </p:bg>
+    <p:spTree>
+      <p:nvGrpSpPr>
+        <p:cNvPr id="1" name=""/>
+        <p:cNvGrpSpPr/>
+        <p:nvPr/>
+      </p:nvGrpSpPr>
+      <p:grpSpPr/>
+      <p:sp>
+        <p:nvSpPr>
+          <p:cNvPr id="2" name="TextBox 1"/>
+          <p:cNvSpPr txBox="1"/>
+          <p:nvPr/>
+        </p:nvSpPr>
+        <p:spPr>
+          <a:xfrm>
+            <a:off x="777240" y="502920"/>
+            <a:ext cx="10607040" cy="274320"/>
+          </a:xfrm>
+          <a:prstGeom prst="rect">
+            <a:avLst/>
+          </a:prstGeom>
+          <a:noFill/>
+        </p:spPr>
+        <p:txBody>
+          <a:bodyPr wrap="square" lIns="0" rIns="0" tIns="0" bIns="0">
+            <a:spAutoFit/>
+          </a:bodyPr>
+          <a:lstStyle/>
+          <a:p>
+            <a:pPr>
+              <a:lnSpc>
+                <a:spcPct val="100000"/>
+              </a:lnSpc>
+            </a:pPr>
+            <a:r>
+              <a:rPr sz="1100" b="1">
+                <a:solidFill>
+                  <a:srgbClr val="94A3B8"/>
+                </a:solidFill>
+                <a:latin typeface="Segoe UI"/>
+              </a:rPr>
+              <a:t>FINDING TWO</a:t>
+            </a:r>
+          </a:p>
+        </p:txBody>
+      </p:sp>
+      <p:sp>
+        <p:nvSpPr>
+          <p:cNvPr id="3" name="TextBox 2"/>
+          <p:cNvSpPr txBox="1"/>
+          <p:nvPr/>
+        </p:nvSpPr>
+        <p:spPr>
+          <a:xfrm>
+            <a:off x="777240" y="841248"/>
+            <a:ext cx="10607040" cy="640080"/>
+          </a:xfrm>
+          <a:prstGeom prst="rect">
+            <a:avLst/>
+          </a:prstGeom>
+          <a:noFill/>
+        </p:spPr>
+        <p:txBody>
+          <a:bodyPr wrap="square" lIns="0" rIns="0" tIns="0" bIns="0">
+            <a:spAutoFit/>
+          </a:bodyPr>
+          <a:lstStyle/>
+          <a:p>
+            <a:pPr>
+              <a:lnSpc>
+                <a:spcPct val="100000"/>
+              </a:lnSpc>
+            </a:pPr>
+            <a:r>
+              <a:rPr sz="3100" b="1">
+                <a:solidFill>
+                  <a:srgbClr val="0F172A"/>
+                </a:solidFill>
+                <a:latin typeface="Segoe UI"/>
+              </a:rPr>
+              <a:t>Good ranking is not a good gap decision</a:t>
+            </a:r>
+          </a:p>
+        </p:txBody>
+      </p:sp>
+      <p:sp>
+        <p:nvSpPr>
+          <p:cNvPr id="4" name="Rectangle 3"/>
+          <p:cNvSpPr/>
+          <p:nvPr/>
+        </p:nvSpPr>
+        <p:spPr>
+          <a:xfrm>
+            <a:off x="777240" y="1572768"/>
+            <a:ext cx="1005840" cy="41148"/>
+          </a:xfrm>
+          <a:prstGeom prst="rect">
+            <a:avLst/>
+          </a:prstGeom>
+          <a:solidFill>
+            <a:srgbClr val="ED7100"/>
+          </a:solidFill>
+          <a:ln>
+            <a:noFill/>
+          </a:ln>
+          <a:effectLst/>
+        </p:spPr>
+        <p:style>
+          <a:lnRef idx="1">
+            <a:schemeClr val="accent1"/>
+          </a:lnRef>
+          <a:fillRef idx="3">
+            <a:schemeClr val="accent1"/>
+          </a:fillRef>
+          <a:effectRef idx="2">
+            <a:schemeClr val="accent1"/>
+          </a:effectRef>
+          <a:fontRef idx="minor">
+            <a:schemeClr val="lt1"/>
+          </a:fontRef>
+        </p:style>
+        <p:txBody>
+          <a:bodyPr rtlCol="0" anchor="ctr"/>
+          <a:lstStyle/>
+          <a:p>
+            <a:pPr algn="ctr"/>
+          </a:p>
+        </p:txBody>
+      </p:sp>
+      <p:sp>
+        <p:nvSpPr>
+          <p:cNvPr id="5" name="TextBox 4"/>
+          <p:cNvSpPr txBox="1"/>
+          <p:nvPr/>
+        </p:nvSpPr>
+        <p:spPr>
+          <a:xfrm>
+            <a:off x="777240" y="1783080"/>
+            <a:ext cx="10424160" cy="457200"/>
+          </a:xfrm>
+          <a:prstGeom prst="rect">
+            <a:avLst/>
+          </a:prstGeom>
+          <a:noFill/>
+        </p:spPr>
+        <p:txBody>
+          <a:bodyPr wrap="square" lIns="0" rIns="0" tIns="0" bIns="0">
+            <a:spAutoFit/>
+          </a:bodyPr>
+          <a:lstStyle/>
+          <a:p>
+            <a:pPr>
+              <a:lnSpc>
+                <a:spcPct val="100000"/>
+              </a:lnSpc>
+            </a:pPr>
+            <a:r>
+              <a:rPr sz="1500" b="0">
+                <a:solidFill>
+                  <a:srgbClr val="475569"/>
+                </a:solidFill>
+                <a:latin typeface="Segoe UI"/>
+              </a:rPr>
+              <a:t>Retrieval was never the problem.</a:t>
+            </a:r>
+          </a:p>
+        </p:txBody>
+      </p:sp>
+      <p:graphicFrame>
+        <p:nvGraphicFramePr>
+          <p:cNvPr id="6" name="Table 5"/>
+          <p:cNvGraphicFramePr>
+            <a:graphicFrameLocks noGrp="1"/>
+          </p:cNvGraphicFramePr>
+          <p:nvPr/>
+        </p:nvGraphicFramePr>
+        <p:xfrm>
+          <a:off x="777240" y="2350008"/>
+          <a:ext cx="10515600" cy="1188720"/>
+        </p:xfrm>
+        <a:graphic>
+          <a:graphicData uri="http://schemas.openxmlformats.org/drawingml/2006/table">
+            <a:tbl>
+              <a:tblPr firstRow="1" bandRow="1">
+                <a:tableStyleId>{5C22544A-7EE6-4342-B048-85BDC9FD1C3A}</a:tableStyleId>
+              </a:tblPr>
+              <a:tblGrid>
+                <a:gridCol w="3840480"/>
+                <a:gridCol w="3291840"/>
+                <a:gridCol w="3383280"/>
+              </a:tblGrid>
+              <a:tr h="297180">
+                <a:tc>
+                  <a:txBody>
+                    <a:bodyPr/>
+                    <a:lstStyle/>
+                    <a:p>
+                      <a:r>
+                        <a:rPr sz="1200" b="1">
+                          <a:solidFill>
+                            <a:srgbClr val="FFFFFF"/>
+                          </a:solidFill>
+                          <a:latin typeface="Segoe UI"/>
+                        </a:rPr>
+                        <a:t> </a:t>
+                      </a:r>
+                    </a:p>
+                  </a:txBody>
+                  <a:tcPr>
+                    <a:solidFill>
+                      <a:srgbClr val="0F172A"/>
+                    </a:solidFill>
+                  </a:tcPr>
+                </a:tc>
+                <a:tc>
+                  <a:txBody>
+                    <a:bodyPr/>
+                    <a:lstStyle/>
+                    <a:p>
+                      <a:r>
+                        <a:rPr sz="1200" b="1">
+                          <a:solidFill>
+                            <a:srgbClr val="FFFFFF"/>
+                          </a:solidFill>
+                          <a:latin typeface="Segoe UI"/>
+                        </a:rPr>
+                        <a:t>first set</a:t>
+                      </a:r>
+                    </a:p>
+                  </a:txBody>
+                  <a:tcPr>
+                    <a:solidFill>
+                      <a:srgbClr val="0F172A"/>
+                    </a:solidFill>
+                  </a:tcPr>
+                </a:tc>
+                <a:tc>
+                  <a:txBody>
+                    <a:bodyPr/>
+                    <a:lstStyle/>
+                    <a:p>
+                      <a:r>
+                        <a:rPr sz="1200" b="1">
+                          <a:solidFill>
+                            <a:srgbClr val="FFFFFF"/>
+                          </a:solidFill>
+                          <a:latin typeface="Segoe UI"/>
+                        </a:rPr>
+                        <a:t>held-out set</a:t>
+                      </a:r>
+                    </a:p>
+                  </a:txBody>
+                  <a:tcPr>
+                    <a:solidFill>
+                      <a:srgbClr val="0F172A"/>
+                    </a:solidFill>
+                  </a:tcPr>
+                </a:tc>
+              </a:tr>
+              <a:tr h="297180">
+                <a:tc>
+                  <a:txBody>
+                    <a:bodyPr/>
+                    <a:lstStyle/>
+                    <a:p>
+                      <a:r>
+                        <a:rPr sz="1200">
+                          <a:solidFill>
+                            <a:srgbClr val="475569"/>
+                          </a:solidFill>
+                          <a:latin typeface="Segoe UI"/>
+                        </a:rPr>
+                        <a:t>recall@3</a:t>
+                      </a:r>
+                    </a:p>
+                  </a:txBody>
+                  <a:tcPr>
+                    <a:solidFill>
+                      <a:srgbClr val="FFFFFF"/>
+                    </a:solidFill>
+                  </a:tcPr>
+                </a:tc>
+                <a:tc>
+                  <a:txBody>
+                    <a:bodyPr/>
+                    <a:lstStyle/>
+                    <a:p>
+                      <a:r>
+                        <a:rPr sz="1200">
+                          <a:solidFill>
+                            <a:srgbClr val="475569"/>
+                          </a:solidFill>
+                          <a:latin typeface="Consolas"/>
+                        </a:rPr>
+                        <a:t>100.0%</a:t>
+                      </a:r>
+                    </a:p>
+                  </a:txBody>
+                  <a:tcPr>
+                    <a:solidFill>
+                      <a:srgbClr val="FFFFFF"/>
+                    </a:solidFill>
+                  </a:tcPr>
+                </a:tc>
+                <a:tc>
+                  <a:txBody>
+                    <a:bodyPr/>
+                    <a:lstStyle/>
+                    <a:p>
+                      <a:r>
+                        <a:rPr sz="1200">
+                          <a:solidFill>
+                            <a:srgbClr val="475569"/>
+                          </a:solidFill>
+                          <a:latin typeface="Consolas"/>
+                        </a:rPr>
+                        <a:t>100.0%</a:t>
+                      </a:r>
+                    </a:p>
+                  </a:txBody>
+                  <a:tcPr>
+                    <a:solidFill>
+                      <a:srgbClr val="FFFFFF"/>
+                    </a:solidFill>
+                  </a:tcPr>
+                </a:tc>
+              </a:tr>
+              <a:tr h="297180">
+                <a:tc>
+                  <a:txBody>
+                    <a:bodyPr/>
+                    <a:lstStyle/>
+                    <a:p>
+                      <a:r>
+                        <a:rPr sz="1200">
+                          <a:solidFill>
+                            <a:srgbClr val="475569"/>
+                          </a:solidFill>
+                          <a:latin typeface="Segoe UI"/>
+                        </a:rPr>
+                        <a:t>gap detection</a:t>
+                      </a:r>
+                    </a:p>
+                  </a:txBody>
+                  <a:tcPr>
+                    <a:solidFill>
+                      <a:srgbClr val="F8FAFC"/>
+                    </a:solidFill>
+                  </a:tcPr>
+                </a:tc>
+                <a:tc>
+                  <a:txBody>
+                    <a:bodyPr/>
+                    <a:lstStyle/>
+                    <a:p>
+                      <a:r>
+                        <a:rPr sz="1200">
+                          <a:solidFill>
+                            <a:srgbClr val="475569"/>
+                          </a:solidFill>
+                          <a:latin typeface="Consolas"/>
+                        </a:rPr>
+                        <a:t>87.8%</a:t>
+                      </a:r>
+                    </a:p>
+                  </a:txBody>
+                  <a:tcPr>
+                    <a:solidFill>
+                      <a:srgbClr val="F8FAFC"/>
+                    </a:solidFill>
+                  </a:tcPr>
+                </a:tc>
+                <a:tc>
+                  <a:txBody>
+                    <a:bodyPr/>
+                    <a:lstStyle/>
+                    <a:p>
+                      <a:r>
+                        <a:rPr sz="1200">
+                          <a:solidFill>
+                            <a:srgbClr val="475569"/>
+                          </a:solidFill>
+                          <a:latin typeface="Consolas"/>
+                        </a:rPr>
+                        <a:t>97.6%</a:t>
+                      </a:r>
+                    </a:p>
+                  </a:txBody>
+                  <a:tcPr>
+                    <a:solidFill>
+                      <a:srgbClr val="F8FAFC"/>
+                    </a:solidFill>
+                  </a:tcPr>
+                </a:tc>
+              </a:tr>
+              <a:tr h="297180">
+                <a:tc>
+                  <a:txBody>
+                    <a:bodyPr/>
+                    <a:lstStyle/>
+                    <a:p>
+                      <a:r>
+                        <a:rPr sz="1200">
+                          <a:solidFill>
+                            <a:srgbClr val="475569"/>
+                          </a:solidFill>
+                          <a:latin typeface="Segoe UI"/>
+                        </a:rPr>
+                        <a:t>false-gap rate</a:t>
+                      </a:r>
+                    </a:p>
+                  </a:txBody>
+                  <a:tcPr>
+                    <a:solidFill>
+                      <a:srgbClr val="FFF7ED"/>
+                    </a:solidFill>
+                  </a:tcPr>
+                </a:tc>
+                <a:tc>
+                  <a:txBody>
+                    <a:bodyPr/>
+                    <a:lstStyle/>
+                    <a:p>
+                      <a:r>
+                        <a:rPr sz="1200">
+                          <a:solidFill>
+                            <a:srgbClr val="475569"/>
+                          </a:solidFill>
+                          <a:latin typeface="Consolas"/>
+                        </a:rPr>
+                        <a:t>0.0%</a:t>
+                      </a:r>
+                    </a:p>
+                  </a:txBody>
+                  <a:tcPr>
+                    <a:solidFill>
+                      <a:srgbClr val="FFF7ED"/>
+                    </a:solidFill>
+                  </a:tcPr>
+                </a:tc>
+                <a:tc>
+                  <a:txBody>
+                    <a:bodyPr/>
+                    <a:lstStyle/>
+                    <a:p>
+                      <a:r>
+                        <a:rPr sz="1200">
+                          <a:solidFill>
+                            <a:srgbClr val="475569"/>
+                          </a:solidFill>
+                          <a:latin typeface="Consolas"/>
+                        </a:rPr>
+                        <a:t>31.6%</a:t>
+                      </a:r>
+                    </a:p>
+                  </a:txBody>
+                  <a:tcPr>
+                    <a:solidFill>
+                      <a:srgbClr val="FFF7ED"/>
+                    </a:solidFill>
+                  </a:tcPr>
+                </a:tc>
+              </a:tr>
+            </a:tbl>
+          </a:graphicData>
+        </a:graphic>
+      </p:graphicFrame>
+      <p:sp>
+        <p:nvSpPr>
+          <p:cNvPr id="7" name="TextBox 6"/>
+          <p:cNvSpPr txBox="1"/>
+          <p:nvPr/>
+        </p:nvSpPr>
+        <p:spPr>
+          <a:xfrm>
+            <a:off x="777240" y="3630168"/>
+            <a:ext cx="10515600" cy="2926080"/>
+          </a:xfrm>
+          <a:prstGeom prst="rect">
+            <a:avLst/>
+          </a:prstGeom>
+          <a:noFill/>
+        </p:spPr>
+        <p:txBody>
+          <a:bodyPr wrap="square" lIns="0" rIns="0" tIns="0" bIns="0">
+            <a:spAutoFit/>
+          </a:bodyPr>
+          <a:lstStyle/>
+          <a:p>
+            <a:pPr>
+              <a:lnSpc>
+                <a:spcPct val="115000"/>
+              </a:lnSpc>
+              <a:spcAft>
+                <a:spcPts val="1000"/>
+              </a:spcAft>
+            </a:pPr>
+            <a:r>
+              <a:rPr sz="1400" b="1">
+                <a:solidFill>
+                  <a:srgbClr val="0F172A"/>
+                </a:solidFill>
+                <a:latin typeface="Segoe UI"/>
+              </a:rPr>
+              <a:t>The threshold looked perfect where it was fitted.</a:t>
+            </a:r>
+            <a:r>
+              <a:rPr sz="1400">
+                <a:solidFill>
+                  <a:srgbClr val="475569"/>
+                </a:solidFill>
+                <a:latin typeface="Segoe UI"/>
+              </a:rPr>
+              <a:t>  Zero false gaps on the set used to choose it. On sixty new questions, it wrongly logged a third of the answerable ones as gaps.</a:t>
+            </a:r>
+          </a:p>
+          <a:p>
+            <a:pPr>
+              <a:lnSpc>
+                <a:spcPct val="115000"/>
+              </a:lnSpc>
+              <a:spcAft>
+                <a:spcPts val="1000"/>
+              </a:spcAft>
+            </a:pPr>
+            <a:r>
+              <a:rPr sz="1400" b="1">
+                <a:solidFill>
+                  <a:srgbClr val="0F172A"/>
+                </a:solidFill>
+                <a:latin typeface="Segoe UI"/>
+              </a:rPr>
+              <a:t>Including the obvious ones.</a:t>
+            </a:r>
+            <a:r>
+              <a:rPr sz="1400">
+                <a:solidFill>
+                  <a:srgbClr val="475569"/>
+                </a:solidFill>
+                <a:latin typeface="Segoe UI"/>
+              </a:rPr>
+              <a:t>  "Will it rain in Lagos on Friday" scored 0.1507 and was recorded as no tool existing. There is a weather tool.</a:t>
+            </a:r>
+          </a:p>
+          <a:p>
+            <a:pPr>
+              <a:lnSpc>
+                <a:spcPct val="115000"/>
+              </a:lnSpc>
+              <a:spcAft>
+                <a:spcPts val="1000"/>
+              </a:spcAft>
+            </a:pPr>
+            <a:r>
+              <a:rPr sz="1400" b="1">
+                <a:solidFill>
+                  <a:srgbClr val="0F172A"/>
+                </a:solidFill>
+                <a:latin typeface="Segoe UI"/>
+              </a:rPr>
+              <a:t>Because the scale moves.</a:t>
+            </a:r>
+            <a:r>
+              <a:rPr sz="1400">
+                <a:solidFill>
+                  <a:srgbClr val="475569"/>
+                </a:solidFill>
+                <a:latin typeface="Segoe UI"/>
+              </a:rPr>
+              <a:t>  Correct answers scored 0.21 and up on one set and as low as 0.12 on the next. A fixed cutoff cannot survive that, and tuning it harder only fits it to whichever set chose it.</a:t>
+            </a:r>
+          </a:p>
+          <a:p>
+            <a:pPr>
+              <a:lnSpc>
+                <a:spcPct val="115000"/>
+              </a:lnSpc>
+              <a:spcAft>
+                <a:spcPts val="1000"/>
+              </a:spcAft>
+            </a:pPr>
+            <a:r>
+              <a:rPr sz="1400" b="1">
+                <a:solidFill>
+                  <a:srgbClr val="0F172A"/>
+                </a:solidFill>
+                <a:latin typeface="Segoe UI"/>
+              </a:rPr>
+              <a:t>In every false gap the right tool was already in the top three.</a:t>
+            </a:r>
+            <a:r>
+              <a:rPr sz="1400">
+                <a:solidFill>
+                  <a:srgbClr val="475569"/>
+                </a:solidFill>
+                <a:latin typeface="Segoe UI"/>
+              </a:rPr>
+              <a:t>  Four of six ranked first. The retriever found it; the cutoff threw it away.</a:t>
+            </a:r>
+          </a:p>
+        </p:txBody>
+      </p:sp>
+    </p:spTree>
+  </p:cSld>
+  <p:clrMapOvr>
+    <a:masterClrMapping/>
+  </p:clrMapOvr>
+</p:sld>
+</file>
+
+<file path=ppt/slides/slide46.xml><?xml version="1.0" encoding="utf-8"?>
+<p:sld xmlns:a="http://schemas.openxmlformats.org/drawingml/2006/main" xmlns:p="http://schemas.openxmlformats.org/presentationml/2006/main" xmlns:r="http://schemas.openxmlformats.org/officeDocument/2006/relationships">
+  <p:cSld>
+    <p:bg>
+      <p:bgPr>
+        <a:solidFill>
+          <a:srgbClr val="FFFFFF"/>
+        </a:solidFill>
+        <a:effectLst/>
+      </p:bgPr>
+    </p:bg>
+    <p:spTree>
+      <p:nvGrpSpPr>
+        <p:cNvPr id="1" name=""/>
+        <p:cNvGrpSpPr/>
+        <p:nvPr/>
+      </p:nvGrpSpPr>
+      <p:grpSpPr/>
+      <p:sp>
+        <p:nvSpPr>
+          <p:cNvPr id="2" name="TextBox 1"/>
+          <p:cNvSpPr txBox="1"/>
+          <p:nvPr/>
+        </p:nvSpPr>
+        <p:spPr>
+          <a:xfrm>
+            <a:off x="777240" y="502920"/>
+            <a:ext cx="10607040" cy="274320"/>
+          </a:xfrm>
+          <a:prstGeom prst="rect">
+            <a:avLst/>
+          </a:prstGeom>
+          <a:noFill/>
+        </p:spPr>
+        <p:txBody>
+          <a:bodyPr wrap="square" lIns="0" rIns="0" tIns="0" bIns="0">
+            <a:spAutoFit/>
+          </a:bodyPr>
+          <a:lstStyle/>
+          <a:p>
+            <a:pPr>
+              <a:lnSpc>
+                <a:spcPct val="100000"/>
+              </a:lnSpc>
+            </a:pPr>
+            <a:r>
+              <a:rPr sz="1100" b="1">
+                <a:solidFill>
+                  <a:srgbClr val="94A3B8"/>
+                </a:solidFill>
+                <a:latin typeface="Segoe UI"/>
+              </a:rPr>
+              <a:t>FINDING THREE</a:t>
+            </a:r>
+          </a:p>
+        </p:txBody>
+      </p:sp>
+      <p:sp>
+        <p:nvSpPr>
+          <p:cNvPr id="3" name="TextBox 2"/>
+          <p:cNvSpPr txBox="1"/>
+          <p:nvPr/>
+        </p:nvSpPr>
+        <p:spPr>
+          <a:xfrm>
+            <a:off x="777240" y="841248"/>
+            <a:ext cx="10607040" cy="640080"/>
+          </a:xfrm>
+          <a:prstGeom prst="rect">
+            <a:avLst/>
+          </a:prstGeom>
+          <a:noFill/>
+        </p:spPr>
+        <p:txBody>
+          <a:bodyPr wrap="square" lIns="0" rIns="0" tIns="0" bIns="0">
+            <a:spAutoFit/>
+          </a:bodyPr>
+          <a:lstStyle/>
+          <a:p>
+            <a:pPr>
+              <a:lnSpc>
+                <a:spcPct val="100000"/>
+              </a:lnSpc>
+            </a:pPr>
+            <a:r>
+              <a:rPr sz="3100" b="1">
+                <a:solidFill>
+                  <a:srgbClr val="0F172A"/>
+                </a:solidFill>
+                <a:latin typeface="Segoe UI"/>
+              </a:rPr>
+              <a:t>The success test itself was wrong</a:t>
+            </a:r>
+          </a:p>
+        </p:txBody>
+      </p:sp>
+      <p:sp>
+        <p:nvSpPr>
+          <p:cNvPr id="4" name="Rectangle 3"/>
+          <p:cNvSpPr/>
+          <p:nvPr/>
+        </p:nvSpPr>
+        <p:spPr>
+          <a:xfrm>
+            <a:off x="777240" y="1572768"/>
+            <a:ext cx="1005840" cy="41148"/>
+          </a:xfrm>
+          <a:prstGeom prst="rect">
+            <a:avLst/>
+          </a:prstGeom>
+          <a:solidFill>
+            <a:srgbClr val="ED7100"/>
+          </a:solidFill>
+          <a:ln>
+            <a:noFill/>
+          </a:ln>
+          <a:effectLst/>
+        </p:spPr>
+        <p:style>
+          <a:lnRef idx="1">
+            <a:schemeClr val="accent1"/>
+          </a:lnRef>
+          <a:fillRef idx="3">
+            <a:schemeClr val="accent1"/>
+          </a:fillRef>
+          <a:effectRef idx="2">
+            <a:schemeClr val="accent1"/>
+          </a:effectRef>
+          <a:fontRef idx="minor">
+            <a:schemeClr val="lt1"/>
+          </a:fontRef>
+        </p:style>
+        <p:txBody>
+          <a:bodyPr rtlCol="0" anchor="ctr"/>
+          <a:lstStyle/>
+          <a:p>
+            <a:pPr algn="ctr"/>
+          </a:p>
+        </p:txBody>
+      </p:sp>
+      <p:sp>
+        <p:nvSpPr>
+          <p:cNvPr id="5" name="Rounded Rectangle 4"/>
+          <p:cNvSpPr/>
+          <p:nvPr/>
+        </p:nvSpPr>
+        <p:spPr>
+          <a:xfrm>
+            <a:off x="777240" y="1783080"/>
+            <a:ext cx="10515600" cy="1051560"/>
+          </a:xfrm>
+          <a:prstGeom prst="roundRect">
+            <a:avLst/>
+          </a:prstGeom>
+          <a:solidFill>
+            <a:srgbClr val="FEF2F2"/>
+          </a:solidFill>
+          <a:ln w="15875">
+            <a:solidFill>
+              <a:srgbClr val="DD344C"/>
+            </a:solidFill>
+          </a:ln>
+          <a:effectLst/>
+        </p:spPr>
+        <p:style>
+          <a:lnRef idx="1">
+            <a:schemeClr val="accent1"/>
+          </a:lnRef>
+          <a:fillRef idx="3">
+            <a:schemeClr val="accent1"/>
+          </a:fillRef>
+          <a:effectRef idx="2">
+            <a:schemeClr val="accent1"/>
+          </a:effectRef>
+          <a:fontRef idx="minor">
+            <a:schemeClr val="lt1"/>
+          </a:fontRef>
+        </p:style>
+        <p:txBody>
+          <a:bodyPr rtlCol="0" anchor="ctr"/>
+          <a:lstStyle/>
+          <a:p/>
+        </p:txBody>
+      </p:sp>
+      <p:sp>
+        <p:nvSpPr>
+          <p:cNvPr id="6" name="TextBox 5"/>
+          <p:cNvSpPr txBox="1"/>
+          <p:nvPr/>
+        </p:nvSpPr>
+        <p:spPr>
+          <a:xfrm>
+            <a:off x="1051560" y="1965960"/>
+            <a:ext cx="9966960" cy="777239"/>
+          </a:xfrm>
+          <a:prstGeom prst="rect">
+            <a:avLst/>
+          </a:prstGeom>
+          <a:noFill/>
+        </p:spPr>
+        <p:txBody>
+          <a:bodyPr wrap="square" lIns="0" rIns="0" tIns="0" bIns="0">
+            <a:spAutoFit/>
+          </a:bodyPr>
+          <a:lstStyle/>
+          <a:p>
+            <a:pPr>
+              <a:lnSpc>
+                <a:spcPct val="115000"/>
+              </a:lnSpc>
+            </a:pPr>
+            <a:r>
+              <a:rPr sz="1350" b="1">
+                <a:solidFill>
+                  <a:srgbClr val="991B1B"/>
+                </a:solidFill>
+                <a:latin typeface="Segoe UI"/>
+              </a:rPr>
+              <a:t>Both floors PASSED on the held-out run — recall@3 100%, gap detection 97.6% — while a third of answerable questions were being written into the gap log as unmet needs.</a:t>
+            </a:r>
+          </a:p>
+        </p:txBody>
+      </p:sp>
+      <p:sp>
+        <p:nvSpPr>
+          <p:cNvPr id="7" name="TextBox 6"/>
+          <p:cNvSpPr txBox="1"/>
+          <p:nvPr/>
+        </p:nvSpPr>
+        <p:spPr>
+          <a:xfrm>
+            <a:off x="777240" y="3063239"/>
+            <a:ext cx="10515600" cy="2743200"/>
+          </a:xfrm>
+          <a:prstGeom prst="rect">
+            <a:avLst/>
+          </a:prstGeom>
+          <a:noFill/>
+        </p:spPr>
+        <p:txBody>
+          <a:bodyPr wrap="square" lIns="0" rIns="0" tIns="0" bIns="0">
+            <a:spAutoFit/>
+          </a:bodyPr>
+          <a:lstStyle/>
+          <a:p>
+            <a:pPr>
+              <a:lnSpc>
+                <a:spcPct val="115000"/>
+              </a:lnSpc>
+              <a:spcAft>
+                <a:spcPts val="1000"/>
+              </a:spcAft>
+            </a:pPr>
+            <a:r>
+              <a:rPr sz="1400" b="1">
+                <a:solidFill>
+                  <a:srgbClr val="0F172A"/>
+                </a:solidFill>
+                <a:latin typeface="Segoe UI"/>
+              </a:rPr>
+              <a:t>The gate asked two questions.</a:t>
+            </a:r>
+            <a:r>
+              <a:rPr sz="1400">
+                <a:solidFill>
+                  <a:srgbClr val="475569"/>
+                </a:solidFill>
+                <a:latin typeface="Segoe UI"/>
+              </a:rPr>
+              <a:t>  Did we find the right tool, and did we catch the real gaps. It never asked whether we wrongly called something a gap.</a:t>
+            </a:r>
+          </a:p>
+          <a:p>
+            <a:pPr>
+              <a:lnSpc>
+                <a:spcPct val="115000"/>
+              </a:lnSpc>
+              <a:spcAft>
+                <a:spcPts val="1000"/>
+              </a:spcAft>
+            </a:pPr>
+            <a:r>
+              <a:rPr sz="1400" b="1">
+                <a:solidFill>
+                  <a:srgbClr val="0F172A"/>
+                </a:solidFill>
+                <a:latin typeface="Segoe UI"/>
+              </a:rPr>
+              <a:t>You can ace both by flagging everything.</a:t>
+            </a:r>
+            <a:r>
+              <a:rPr sz="1400">
+                <a:solidFill>
+                  <a:srgbClr val="475569"/>
+                </a:solidFill>
+                <a:latin typeface="Segoe UI"/>
+              </a:rPr>
+              <a:t>  A system that logs every query as a gap scores 100% on gap detection. The test had a hole the exact size of the product's core claim.</a:t>
+            </a:r>
+          </a:p>
+          <a:p>
+            <a:pPr>
+              <a:lnSpc>
+                <a:spcPct val="115000"/>
+              </a:lnSpc>
+              <a:spcAft>
+                <a:spcPts val="1000"/>
+              </a:spcAft>
+            </a:pPr>
+            <a:r>
+              <a:rPr sz="1400" b="1">
+                <a:solidFill>
+                  <a:srgbClr val="0F172A"/>
+                </a:solidFill>
+                <a:latin typeface="Segoe UI"/>
+              </a:rPr>
+              <a:t>A false-gap ceiling has to be a floor, not a footnote.</a:t>
+            </a:r>
+            <a:r>
+              <a:rPr sz="1400">
+                <a:solidFill>
+                  <a:srgbClr val="475569"/>
+                </a:solidFill>
+                <a:latin typeface="Segoe UI"/>
+              </a:rPr>
+              <a:t>  This only surfaced because the held-out set was scored once, with the parameters frozen, and nothing was re-tuned afterwards.</a:t>
+            </a:r>
+          </a:p>
+        </p:txBody>
+      </p:sp>
+    </p:spTree>
+  </p:cSld>
+  <p:clrMapOvr>
+    <a:masterClrMapping/>
+  </p:clrMapOvr>
+</p:sld>
+</file>
+
+<file path=ppt/slides/slide47.xml><?xml version="1.0" encoding="utf-8"?>
+<p:sld xmlns:a="http://schemas.openxmlformats.org/drawingml/2006/main" xmlns:p="http://schemas.openxmlformats.org/presentationml/2006/main" xmlns:r="http://schemas.openxmlformats.org/officeDocument/2006/relationships">
+  <p:cSld>
+    <p:bg>
+      <p:bgPr>
+        <a:solidFill>
+          <a:srgbClr val="FFFFFF"/>
+        </a:solidFill>
+        <a:effectLst/>
+      </p:bgPr>
+    </p:bg>
+    <p:spTree>
+      <p:nvGrpSpPr>
+        <p:cNvPr id="1" name=""/>
+        <p:cNvGrpSpPr/>
+        <p:nvPr/>
+      </p:nvGrpSpPr>
+      <p:grpSpPr/>
+      <p:sp>
+        <p:nvSpPr>
+          <p:cNvPr id="2" name="TextBox 1"/>
+          <p:cNvSpPr txBox="1"/>
+          <p:nvPr/>
+        </p:nvSpPr>
+        <p:spPr>
+          <a:xfrm>
+            <a:off x="777240" y="502920"/>
+            <a:ext cx="10607040" cy="274320"/>
+          </a:xfrm>
+          <a:prstGeom prst="rect">
+            <a:avLst/>
+          </a:prstGeom>
+          <a:noFill/>
+        </p:spPr>
+        <p:txBody>
+          <a:bodyPr wrap="square" lIns="0" rIns="0" tIns="0" bIns="0">
+            <a:spAutoFit/>
+          </a:bodyPr>
+          <a:lstStyle/>
+          <a:p>
+            <a:pPr>
+              <a:lnSpc>
+                <a:spcPct val="100000"/>
+              </a:lnSpc>
+            </a:pPr>
+            <a:r>
+              <a:rPr sz="1100" b="1">
+                <a:solidFill>
+                  <a:srgbClr val="94A3B8"/>
+                </a:solidFill>
+                <a:latin typeface="Segoe UI"/>
+              </a:rPr>
+              <a:t>THE FIX</a:t>
+            </a:r>
+          </a:p>
+        </p:txBody>
+      </p:sp>
+      <p:sp>
+        <p:nvSpPr>
+          <p:cNvPr id="3" name="TextBox 2"/>
+          <p:cNvSpPr txBox="1"/>
+          <p:nvPr/>
+        </p:nvSpPr>
+        <p:spPr>
+          <a:xfrm>
+            <a:off x="777240" y="841248"/>
+            <a:ext cx="10607040" cy="640080"/>
+          </a:xfrm>
+          <a:prstGeom prst="rect">
+            <a:avLst/>
+          </a:prstGeom>
+          <a:noFill/>
+        </p:spPr>
+        <p:txBody>
+          <a:bodyPr wrap="square" lIns="0" rIns="0" tIns="0" bIns="0">
+            <a:spAutoFit/>
+          </a:bodyPr>
+          <a:lstStyle/>
+          <a:p>
+            <a:pPr>
+              <a:lnSpc>
+                <a:spcPct val="100000"/>
+              </a:lnSpc>
+            </a:pPr>
+            <a:r>
+              <a:rPr sz="3100" b="1">
+                <a:solidFill>
+                  <a:srgbClr val="0F172A"/>
+                </a:solidFill>
+                <a:latin typeface="Segoe UI"/>
+              </a:rPr>
+              <a:t>A small model decides, not a number</a:t>
+            </a:r>
+          </a:p>
+        </p:txBody>
+      </p:sp>
+      <p:sp>
+        <p:nvSpPr>
+          <p:cNvPr id="4" name="Rectangle 3"/>
+          <p:cNvSpPr/>
+          <p:nvPr/>
+        </p:nvSpPr>
+        <p:spPr>
+          <a:xfrm>
+            <a:off x="777240" y="1572768"/>
+            <a:ext cx="1005840" cy="41148"/>
+          </a:xfrm>
+          <a:prstGeom prst="rect">
+            <a:avLst/>
+          </a:prstGeom>
+          <a:solidFill>
+            <a:srgbClr val="ED7100"/>
+          </a:solidFill>
+          <a:ln>
+            <a:noFill/>
+          </a:ln>
+          <a:effectLst/>
+        </p:spPr>
+        <p:style>
+          <a:lnRef idx="1">
+            <a:schemeClr val="accent1"/>
+          </a:lnRef>
+          <a:fillRef idx="3">
+            <a:schemeClr val="accent1"/>
+          </a:fillRef>
+          <a:effectRef idx="2">
+            <a:schemeClr val="accent1"/>
+          </a:effectRef>
+          <a:fontRef idx="minor">
+            <a:schemeClr val="lt1"/>
+          </a:fontRef>
+        </p:style>
+        <p:txBody>
+          <a:bodyPr rtlCol="0" anchor="ctr"/>
+          <a:lstStyle/>
+          <a:p>
+            <a:pPr algn="ctr"/>
+          </a:p>
+        </p:txBody>
+      </p:sp>
+      <p:sp>
+        <p:nvSpPr>
+          <p:cNvPr id="5" name="TextBox 4"/>
+          <p:cNvSpPr txBox="1"/>
+          <p:nvPr/>
+        </p:nvSpPr>
+        <p:spPr>
+          <a:xfrm>
+            <a:off x="777240" y="1783080"/>
+            <a:ext cx="10424160" cy="457200"/>
+          </a:xfrm>
+          <a:prstGeom prst="rect">
+            <a:avLst/>
+          </a:prstGeom>
+          <a:noFill/>
+        </p:spPr>
+        <p:txBody>
+          <a:bodyPr wrap="square" lIns="0" rIns="0" tIns="0" bIns="0">
+            <a:spAutoFit/>
+          </a:bodyPr>
+          <a:lstStyle/>
+          <a:p>
+            <a:pPr>
+              <a:lnSpc>
+                <a:spcPct val="100000"/>
+              </a:lnSpc>
+            </a:pPr>
+            <a:r>
+              <a:rPr sz="1500" b="0">
+                <a:solidFill>
+                  <a:srgbClr val="475569"/>
+                </a:solidFill>
+                <a:latin typeface="Segoe UI"/>
+              </a:rPr>
+              <a:t>The ranking is untouched. Only the yes/no changed.</a:t>
+            </a:r>
+          </a:p>
+        </p:txBody>
+      </p:sp>
+      <p:graphicFrame>
+        <p:nvGraphicFramePr>
+          <p:cNvPr id="6" name="Table 5"/>
+          <p:cNvGraphicFramePr>
+            <a:graphicFrameLocks noGrp="1"/>
+          </p:cNvGraphicFramePr>
+          <p:nvPr/>
+        </p:nvGraphicFramePr>
+        <p:xfrm>
+          <a:off x="777240" y="2350008"/>
+          <a:ext cx="10515600" cy="896112"/>
+        </p:xfrm>
+        <a:graphic>
+          <a:graphicData uri="http://schemas.openxmlformats.org/drawingml/2006/table">
+            <a:tbl>
+              <a:tblPr firstRow="1" bandRow="1">
+                <a:tableStyleId>{5C22544A-7EE6-4342-B048-85BDC9FD1C3A}</a:tableStyleId>
+              </a:tblPr>
+              <a:tblGrid>
+                <a:gridCol w="4846320"/>
+                <a:gridCol w="1828800"/>
+                <a:gridCol w="1920240"/>
+                <a:gridCol w="1920240"/>
+              </a:tblGrid>
+              <a:tr h="298704">
+                <a:tc>
+                  <a:txBody>
+                    <a:bodyPr/>
+                    <a:lstStyle/>
+                    <a:p>
+                      <a:r>
+                        <a:rPr sz="1200" b="1">
+                          <a:solidFill>
+                            <a:srgbClr val="FFFFFF"/>
+                          </a:solidFill>
+                          <a:latin typeface="Segoe UI"/>
+                        </a:rPr>
+                        <a:t> </a:t>
+                      </a:r>
+                    </a:p>
+                  </a:txBody>
+                  <a:tcPr>
+                    <a:solidFill>
+                      <a:srgbClr val="0F172A"/>
+                    </a:solidFill>
+                  </a:tcPr>
+                </a:tc>
+                <a:tc>
+                  <a:txBody>
+                    <a:bodyPr/>
+                    <a:lstStyle/>
+                    <a:p>
+                      <a:r>
+                        <a:rPr sz="1200" b="1">
+                          <a:solidFill>
+                            <a:srgbClr val="FFFFFF"/>
+                          </a:solidFill>
+                          <a:latin typeface="Segoe UI"/>
+                        </a:rPr>
+                        <a:t>recall@3</a:t>
+                      </a:r>
+                    </a:p>
+                  </a:txBody>
+                  <a:tcPr>
+                    <a:solidFill>
+                      <a:srgbClr val="0F172A"/>
+                    </a:solidFill>
+                  </a:tcPr>
+                </a:tc>
+                <a:tc>
+                  <a:txBody>
+                    <a:bodyPr/>
+                    <a:lstStyle/>
+                    <a:p>
+                      <a:r>
+                        <a:rPr sz="1200" b="1">
+                          <a:solidFill>
+                            <a:srgbClr val="FFFFFF"/>
+                          </a:solidFill>
+                          <a:latin typeface="Segoe UI"/>
+                        </a:rPr>
+                        <a:t>false-gap</a:t>
+                      </a:r>
+                    </a:p>
+                  </a:txBody>
+                  <a:tcPr>
+                    <a:solidFill>
+                      <a:srgbClr val="0F172A"/>
+                    </a:solidFill>
+                  </a:tcPr>
+                </a:tc>
+                <a:tc>
+                  <a:txBody>
+                    <a:bodyPr/>
+                    <a:lstStyle/>
+                    <a:p>
+                      <a:r>
+                        <a:rPr sz="1200" b="1">
+                          <a:solidFill>
+                            <a:srgbClr val="FFFFFF"/>
+                          </a:solidFill>
+                          <a:latin typeface="Segoe UI"/>
+                        </a:rPr>
+                        <a:t>gap detection</a:t>
+                      </a:r>
+                    </a:p>
+                  </a:txBody>
+                  <a:tcPr>
+                    <a:solidFill>
+                      <a:srgbClr val="0F172A"/>
+                    </a:solidFill>
+                  </a:tcPr>
+                </a:tc>
+              </a:tr>
+              <a:tr h="298704">
+                <a:tc>
+                  <a:txBody>
+                    <a:bodyPr/>
+                    <a:lstStyle/>
+                    <a:p>
+                      <a:r>
+                        <a:rPr sz="1200">
+                          <a:solidFill>
+                            <a:srgbClr val="475569"/>
+                          </a:solidFill>
+                          <a:latin typeface="Segoe UI"/>
+                        </a:rPr>
+                        <a:t>threshold — both sets combined</a:t>
+                      </a:r>
+                    </a:p>
+                  </a:txBody>
+                  <a:tcPr>
+                    <a:solidFill>
+                      <a:srgbClr val="FFFFFF"/>
+                    </a:solidFill>
+                  </a:tcPr>
+                </a:tc>
+                <a:tc>
+                  <a:txBody>
+                    <a:bodyPr/>
+                    <a:lstStyle/>
+                    <a:p>
+                      <a:r>
+                        <a:rPr sz="1200">
+                          <a:solidFill>
+                            <a:srgbClr val="475569"/>
+                          </a:solidFill>
+                          <a:latin typeface="Consolas"/>
+                        </a:rPr>
+                        <a:t>100.0%</a:t>
+                      </a:r>
+                    </a:p>
+                  </a:txBody>
+                  <a:tcPr>
+                    <a:solidFill>
+                      <a:srgbClr val="FFFFFF"/>
+                    </a:solidFill>
+                  </a:tcPr>
+                </a:tc>
+                <a:tc>
+                  <a:txBody>
+                    <a:bodyPr/>
+                    <a:lstStyle/>
+                    <a:p>
+                      <a:r>
+                        <a:rPr sz="1200">
+                          <a:solidFill>
+                            <a:srgbClr val="475569"/>
+                          </a:solidFill>
+                          <a:latin typeface="Consolas"/>
+                        </a:rPr>
+                        <a:t>20.0%</a:t>
+                      </a:r>
+                    </a:p>
+                  </a:txBody>
+                  <a:tcPr>
+                    <a:solidFill>
+                      <a:srgbClr val="FFFFFF"/>
+                    </a:solidFill>
+                  </a:tcPr>
+                </a:tc>
+                <a:tc>
+                  <a:txBody>
+                    <a:bodyPr/>
+                    <a:lstStyle/>
+                    <a:p>
+                      <a:r>
+                        <a:rPr sz="1200">
+                          <a:solidFill>
+                            <a:srgbClr val="475569"/>
+                          </a:solidFill>
+                          <a:latin typeface="Consolas"/>
+                        </a:rPr>
+                        <a:t>92.2%</a:t>
+                      </a:r>
+                    </a:p>
+                  </a:txBody>
+                  <a:tcPr>
+                    <a:solidFill>
+                      <a:srgbClr val="FFFFFF"/>
+                    </a:solidFill>
+                  </a:tcPr>
+                </a:tc>
+              </a:tr>
+              <a:tr h="298704">
+                <a:tc>
+                  <a:txBody>
+                    <a:bodyPr/>
+                    <a:lstStyle/>
+                    <a:p>
+                      <a:r>
+                        <a:rPr sz="1200">
+                          <a:solidFill>
+                            <a:srgbClr val="475569"/>
+                          </a:solidFill>
+                          <a:latin typeface="Segoe UI"/>
+                        </a:rPr>
+                        <a:t>mini-LLM judge — both sets combined</a:t>
+                      </a:r>
+                    </a:p>
+                  </a:txBody>
+                  <a:tcPr>
+                    <a:solidFill>
+                      <a:srgbClr val="FFF7ED"/>
+                    </a:solidFill>
+                  </a:tcPr>
+                </a:tc>
+                <a:tc>
+                  <a:txBody>
+                    <a:bodyPr/>
+                    <a:lstStyle/>
+                    <a:p>
+                      <a:r>
+                        <a:rPr sz="1200">
+                          <a:solidFill>
+                            <a:srgbClr val="475569"/>
+                          </a:solidFill>
+                          <a:latin typeface="Consolas"/>
+                        </a:rPr>
+                        <a:t>100.0%</a:t>
+                      </a:r>
+                    </a:p>
+                  </a:txBody>
+                  <a:tcPr>
+                    <a:solidFill>
+                      <a:srgbClr val="FFF7ED"/>
+                    </a:solidFill>
+                  </a:tcPr>
+                </a:tc>
+                <a:tc>
+                  <a:txBody>
+                    <a:bodyPr/>
+                    <a:lstStyle/>
+                    <a:p>
+                      <a:r>
+                        <a:rPr sz="1200">
+                          <a:solidFill>
+                            <a:srgbClr val="475569"/>
+                          </a:solidFill>
+                          <a:latin typeface="Consolas"/>
+                        </a:rPr>
+                        <a:t>6.7%</a:t>
+                      </a:r>
+                    </a:p>
+                  </a:txBody>
+                  <a:tcPr>
+                    <a:solidFill>
+                      <a:srgbClr val="FFF7ED"/>
+                    </a:solidFill>
+                  </a:tcPr>
+                </a:tc>
+                <a:tc>
+                  <a:txBody>
+                    <a:bodyPr/>
+                    <a:lstStyle/>
+                    <a:p>
+                      <a:r>
+                        <a:rPr sz="1200">
+                          <a:solidFill>
+                            <a:srgbClr val="475569"/>
+                          </a:solidFill>
+                          <a:latin typeface="Consolas"/>
+                        </a:rPr>
+                        <a:t>96.7%</a:t>
+                      </a:r>
+                    </a:p>
+                  </a:txBody>
+                  <a:tcPr>
+                    <a:solidFill>
+                      <a:srgbClr val="FFF7ED"/>
+                    </a:solidFill>
+                  </a:tcPr>
+                </a:tc>
+              </a:tr>
+            </a:tbl>
+          </a:graphicData>
+        </a:graphic>
+      </p:graphicFrame>
+      <p:sp>
+        <p:nvSpPr>
+          <p:cNvPr id="7" name="TextBox 6"/>
+          <p:cNvSpPr txBox="1"/>
+          <p:nvPr/>
+        </p:nvSpPr>
+        <p:spPr>
+          <a:xfrm>
+            <a:off x="777240" y="3493008"/>
+            <a:ext cx="10515600" cy="2926080"/>
+          </a:xfrm>
+          <a:prstGeom prst="rect">
+            <a:avLst/>
+          </a:prstGeom>
+          <a:noFill/>
+        </p:spPr>
+        <p:txBody>
+          <a:bodyPr wrap="square" lIns="0" rIns="0" tIns="0" bIns="0">
+            <a:spAutoFit/>
+          </a:bodyPr>
+          <a:lstStyle/>
+          <a:p>
+            <a:pPr>
+              <a:lnSpc>
+                <a:spcPct val="115000"/>
+              </a:lnSpc>
+              <a:spcAft>
+                <a:spcPts val="1000"/>
+              </a:spcAft>
+            </a:pPr>
+            <a:r>
+              <a:rPr sz="1400" b="1">
+                <a:solidFill>
+                  <a:srgbClr val="0F172A"/>
+                </a:solidFill>
+                <a:latin typeface="Segoe UI"/>
+              </a:rPr>
+              <a:t>Show it the top three and ask if any of them does the job.</a:t>
+            </a:r>
+            <a:r>
+              <a:rPr sz="1400">
+                <a:solidFill>
+                  <a:srgbClr val="475569"/>
+                </a:solidFill>
+                <a:latin typeface="Segoe UI"/>
+              </a:rPr>
+              <a:t>  A classification over three candidates, not a threshold on a scale that keeps moving. Recall@3 is 100%, so the right answer is always in that shortlist when one exists.</a:t>
+            </a:r>
+          </a:p>
+          <a:p>
+            <a:pPr>
+              <a:lnSpc>
+                <a:spcPct val="115000"/>
+              </a:lnSpc>
+              <a:spcAft>
+                <a:spcPts val="1000"/>
+              </a:spcAft>
+            </a:pPr>
+            <a:r>
+              <a:rPr sz="1400" b="1">
+                <a:solidFill>
+                  <a:srgbClr val="0F172A"/>
+                </a:solidFill>
+                <a:latin typeface="Segoe UI"/>
+              </a:rPr>
+              <a:t>Consistency is the point, not the headline number.</a:t>
+            </a:r>
+            <a:r>
+              <a:rPr sz="1400">
+                <a:solidFill>
+                  <a:srgbClr val="475569"/>
+                </a:solidFill>
+                <a:latin typeface="Segoe UI"/>
+              </a:rPr>
+              <a:t>  The threshold swings from 0% to 31.6% false gaps depending on which set it meets. The judge sits at 9.1% and 5.3%. Production is always the other set.</a:t>
+            </a:r>
+          </a:p>
+          <a:p>
+            <a:pPr>
+              <a:lnSpc>
+                <a:spcPct val="115000"/>
+              </a:lnSpc>
+              <a:spcAft>
+                <a:spcPts val="1000"/>
+              </a:spcAft>
+            </a:pPr>
+            <a:r>
+              <a:rPr sz="1400" b="1">
+                <a:solidFill>
+                  <a:srgbClr val="0F172A"/>
+                </a:solidFill>
+                <a:latin typeface="Segoe UI"/>
+              </a:rPr>
+              <a:t>It fails open.</a:t>
+            </a:r>
+            <a:r>
+              <a:rPr sz="1400">
+                <a:solidFill>
+                  <a:srgbClr val="475569"/>
+                </a:solidFill>
+                <a:latin typeface="Segoe UI"/>
+              </a:rPr>
+              <a:t>  If the model errors or returns nonsense, it falls back to the threshold — a Bedrock outage degrades gap quality rather than breaking search. Hallucinated tool ids are rejected, never trusted.</a:t>
+            </a:r>
+          </a:p>
+        </p:txBody>
+      </p:sp>
+    </p:spTree>
+  </p:cSld>
+  <p:clrMapOvr>
+    <a:masterClrMapping/>
+  </p:clrMapOvr>
+</p:sld>
+</file>
+
+<file path=ppt/slides/slide48.xml><?xml version="1.0" encoding="utf-8"?>
+<p:sld xmlns:a="http://schemas.openxmlformats.org/drawingml/2006/main" xmlns:p="http://schemas.openxmlformats.org/presentationml/2006/main" xmlns:r="http://schemas.openxmlformats.org/officeDocument/2006/relationships">
+  <p:cSld>
+    <p:bg>
+      <p:bgPr>
+        <a:solidFill>
+          <a:srgbClr val="FFFFFF"/>
+        </a:solidFill>
+        <a:effectLst/>
+      </p:bgPr>
+    </p:bg>
+    <p:spTree>
+      <p:nvGrpSpPr>
+        <p:cNvPr id="1" name=""/>
+        <p:cNvGrpSpPr/>
+        <p:nvPr/>
+      </p:nvGrpSpPr>
+      <p:grpSpPr/>
+      <p:sp>
+        <p:nvSpPr>
+          <p:cNvPr id="2" name="TextBox 1"/>
+          <p:cNvSpPr txBox="1"/>
+          <p:nvPr/>
+        </p:nvSpPr>
+        <p:spPr>
+          <a:xfrm>
+            <a:off x="777240" y="502920"/>
+            <a:ext cx="10607040" cy="274320"/>
+          </a:xfrm>
+          <a:prstGeom prst="rect">
+            <a:avLst/>
+          </a:prstGeom>
+          <a:noFill/>
+        </p:spPr>
+        <p:txBody>
+          <a:bodyPr wrap="square" lIns="0" rIns="0" tIns="0" bIns="0">
+            <a:spAutoFit/>
+          </a:bodyPr>
+          <a:lstStyle/>
+          <a:p>
+            <a:pPr>
+              <a:lnSpc>
+                <a:spcPct val="100000"/>
+              </a:lnSpc>
+            </a:pPr>
+            <a:r>
+              <a:rPr sz="1100" b="1">
+                <a:solidFill>
+                  <a:srgbClr val="94A3B8"/>
+                </a:solidFill>
+                <a:latin typeface="Segoe UI"/>
+              </a:rPr>
+              <a:t>THE COST</a:t>
+            </a:r>
+          </a:p>
+        </p:txBody>
+      </p:sp>
+      <p:sp>
+        <p:nvSpPr>
+          <p:cNvPr id="3" name="TextBox 2"/>
+          <p:cNvSpPr txBox="1"/>
+          <p:nvPr/>
+        </p:nvSpPr>
+        <p:spPr>
+          <a:xfrm>
+            <a:off x="777240" y="841248"/>
+            <a:ext cx="10607040" cy="640080"/>
+          </a:xfrm>
+          <a:prstGeom prst="rect">
+            <a:avLst/>
+          </a:prstGeom>
+          <a:noFill/>
+        </p:spPr>
+        <p:txBody>
+          <a:bodyPr wrap="square" lIns="0" rIns="0" tIns="0" bIns="0">
+            <a:spAutoFit/>
+          </a:bodyPr>
+          <a:lstStyle/>
+          <a:p>
+            <a:pPr>
+              <a:lnSpc>
+                <a:spcPct val="100000"/>
+              </a:lnSpc>
+            </a:pPr>
+            <a:r>
+              <a:rPr sz="3100" b="1">
+                <a:solidFill>
+                  <a:srgbClr val="0F172A"/>
+                </a:solidFill>
+                <a:latin typeface="Segoe UI"/>
+              </a:rPr>
+              <a:t>This moves an LLM from Phase 3 to Phase 0</a:t>
+            </a:r>
+          </a:p>
+        </p:txBody>
+      </p:sp>
+      <p:sp>
+        <p:nvSpPr>
+          <p:cNvPr id="4" name="Rectangle 3"/>
+          <p:cNvSpPr/>
+          <p:nvPr/>
+        </p:nvSpPr>
+        <p:spPr>
+          <a:xfrm>
+            <a:off x="777240" y="1572768"/>
+            <a:ext cx="1005840" cy="41148"/>
+          </a:xfrm>
+          <a:prstGeom prst="rect">
+            <a:avLst/>
+          </a:prstGeom>
+          <a:solidFill>
+            <a:srgbClr val="ED7100"/>
+          </a:solidFill>
+          <a:ln>
+            <a:noFill/>
+          </a:ln>
+          <a:effectLst/>
+        </p:spPr>
+        <p:style>
+          <a:lnRef idx="1">
+            <a:schemeClr val="accent1"/>
+          </a:lnRef>
+          <a:fillRef idx="3">
+            <a:schemeClr val="accent1"/>
+          </a:fillRef>
+          <a:effectRef idx="2">
+            <a:schemeClr val="accent1"/>
+          </a:effectRef>
+          <a:fontRef idx="minor">
+            <a:schemeClr val="lt1"/>
+          </a:fontRef>
+        </p:style>
+        <p:txBody>
+          <a:bodyPr rtlCol="0" anchor="ctr"/>
+          <a:lstStyle/>
+          <a:p>
+            <a:pPr algn="ctr"/>
+          </a:p>
+        </p:txBody>
+      </p:sp>
+      <p:sp>
+        <p:nvSpPr>
+          <p:cNvPr id="5" name="TextBox 4"/>
+          <p:cNvSpPr txBox="1"/>
+          <p:nvPr/>
+        </p:nvSpPr>
+        <p:spPr>
+          <a:xfrm>
+            <a:off x="777240" y="1783080"/>
+            <a:ext cx="10424160" cy="457200"/>
+          </a:xfrm>
+          <a:prstGeom prst="rect">
+            <a:avLst/>
+          </a:prstGeom>
+          <a:noFill/>
+        </p:spPr>
+        <p:txBody>
+          <a:bodyPr wrap="square" lIns="0" rIns="0" tIns="0" bIns="0">
+            <a:spAutoFit/>
+          </a:bodyPr>
+          <a:lstStyle/>
+          <a:p>
+            <a:pPr>
+              <a:lnSpc>
+                <a:spcPct val="100000"/>
+              </a:lnSpc>
+            </a:pPr>
+            <a:r>
+              <a:rPr sz="1500" b="0">
+                <a:solidFill>
+                  <a:srgbClr val="475569"/>
+                </a:solidFill>
+                <a:latin typeface="Segoe UI"/>
+              </a:rPr>
+              <a:t>Not an architecture change. A phasing one.</a:t>
+            </a:r>
+          </a:p>
+        </p:txBody>
+      </p:sp>
+      <p:sp>
+        <p:nvSpPr>
+          <p:cNvPr id="6" name="TextBox 5"/>
+          <p:cNvSpPr txBox="1"/>
+          <p:nvPr/>
+        </p:nvSpPr>
+        <p:spPr>
+          <a:xfrm>
+            <a:off x="777240" y="2350008"/>
+            <a:ext cx="10515600" cy="2926080"/>
+          </a:xfrm>
+          <a:prstGeom prst="rect">
+            <a:avLst/>
+          </a:prstGeom>
+          <a:noFill/>
+        </p:spPr>
+        <p:txBody>
+          <a:bodyPr wrap="square" lIns="0" rIns="0" tIns="0" bIns="0">
+            <a:spAutoFit/>
+          </a:bodyPr>
+          <a:lstStyle/>
+          <a:p>
+            <a:pPr>
+              <a:lnSpc>
+                <a:spcPct val="115000"/>
+              </a:lnSpc>
+              <a:spcAft>
+                <a:spcPts val="1000"/>
+              </a:spcAft>
+            </a:pPr>
+            <a:r>
+              <a:rPr sz="1400" b="1">
+                <a:solidFill>
+                  <a:srgbClr val="0F172A"/>
+                </a:solidFill>
+                <a:latin typeface="Segoe UI"/>
+              </a:rPr>
+              <a:t>PROJECT.md already put mini-LLMs at the edges.</a:t>
+            </a:r>
+            <a:r>
+              <a:rPr sz="1400">
+                <a:solidFill>
+                  <a:srgbClr val="475569"/>
+                </a:solidFill>
+                <a:latin typeface="Segoe UI"/>
+              </a:rPr>
+              <a:t>  Deciding whether anything nearby fits and escalating when nothing does is exactly this component. The design was right.</a:t>
+            </a:r>
+          </a:p>
+          <a:p>
+            <a:pPr>
+              <a:lnSpc>
+                <a:spcPct val="115000"/>
+              </a:lnSpc>
+              <a:spcAft>
+                <a:spcPts val="1000"/>
+              </a:spcAft>
+            </a:pPr>
+            <a:r>
+              <a:rPr sz="1400" b="1">
+                <a:solidFill>
+                  <a:srgbClr val="0F172A"/>
+                </a:solidFill>
+                <a:latin typeface="Segoe UI"/>
+              </a:rPr>
+              <a:t>What was wrong was the sequencing.</a:t>
+            </a:r>
+            <a:r>
+              <a:rPr sz="1400">
+                <a:solidFill>
+                  <a:srgbClr val="475569"/>
+                </a:solidFill>
+                <a:latin typeface="Segoe UI"/>
+              </a:rPr>
+              <a:t>  The roadmap says Phases 0-2 need no LLM routing. They do. Without a judge the gap log is 20% false positives.</a:t>
+            </a:r>
+          </a:p>
+          <a:p>
+            <a:pPr>
+              <a:lnSpc>
+                <a:spcPct val="115000"/>
+              </a:lnSpc>
+              <a:spcAft>
+                <a:spcPts val="1000"/>
+              </a:spcAft>
+            </a:pPr>
+            <a:r>
+              <a:rPr sz="1400" b="1">
+                <a:solidFill>
+                  <a:srgbClr val="0F172A"/>
+                </a:solidFill>
+                <a:latin typeface="Segoe UI"/>
+              </a:rPr>
+              <a:t>Three costs.</a:t>
+            </a:r>
+            <a:r>
+              <a:rPr sz="1400">
+                <a:solidFill>
+                  <a:srgbClr val="475569"/>
+                </a:solidFill>
+                <a:latin typeface="Segoe UI"/>
+              </a:rPr>
+              <a:t>  Search went from about 0.2s to about 2s. Every search now costs a fraction of a penny rather than nothing. And gap quality now depends on a third party being up.</a:t>
+            </a:r>
+          </a:p>
+          <a:p>
+            <a:pPr>
+              <a:lnSpc>
+                <a:spcPct val="115000"/>
+              </a:lnSpc>
+              <a:spcAft>
+                <a:spcPts val="1000"/>
+              </a:spcAft>
+            </a:pPr>
+            <a:r>
+              <a:rPr sz="1400" b="1">
+                <a:solidFill>
+                  <a:srgbClr val="0F172A"/>
+                </a:solidFill>
+                <a:latin typeface="Segoe UI"/>
+              </a:rPr>
+              <a:t>The local alternative was tested and is not ready.</a:t>
+            </a:r>
+            <a:r>
+              <a:rPr sz="1400">
+                <a:solidFill>
+                  <a:srgbClr val="475569"/>
+                </a:solidFill>
+                <a:latin typeface="Segoe UI"/>
+              </a:rPr>
+              <a:t>  Ollama runs here, but llama3 8B is CPU-only on 2 GB integrated graphics: 25 to 58 seconds per decision against the Lambda's 30-second timeout, and 2 of 3 on the same cases the hosted model got 3 of 3. A 1-3B model or a real GPU would change that.</a:t>
+            </a:r>
+          </a:p>
+        </p:txBody>
+      </p:sp>
+    </p:spTree>
+  </p:cSld>
+  <p:clrMapOvr>
+    <a:masterClrMapping/>
+  </p:clrMapOvr>
+</p:sld>
+</file>
+
+<file path=ppt/slides/slide49.xml><?xml version="1.0" encoding="utf-8"?>
+<p:sld xmlns:a="http://schemas.openxmlformats.org/drawingml/2006/main" xmlns:p="http://schemas.openxmlformats.org/presentationml/2006/main" xmlns:r="http://schemas.openxmlformats.org/officeDocument/2006/relationships">
+  <p:cSld>
+    <p:bg>
+      <p:bgPr>
+        <a:solidFill>
+          <a:srgbClr val="FFFFFF"/>
+        </a:solidFill>
+        <a:effectLst/>
+      </p:bgPr>
+    </p:bg>
+    <p:spTree>
+      <p:nvGrpSpPr>
+        <p:cNvPr id="1" name=""/>
+        <p:cNvGrpSpPr/>
+        <p:nvPr/>
+      </p:nvGrpSpPr>
+      <p:grpSpPr/>
+      <p:sp>
+        <p:nvSpPr>
+          <p:cNvPr id="2" name="TextBox 1"/>
+          <p:cNvSpPr txBox="1"/>
+          <p:nvPr/>
+        </p:nvSpPr>
+        <p:spPr>
+          <a:xfrm>
+            <a:off x="777240" y="502920"/>
+            <a:ext cx="10607040" cy="274320"/>
+          </a:xfrm>
+          <a:prstGeom prst="rect">
+            <a:avLst/>
+          </a:prstGeom>
+          <a:noFill/>
+        </p:spPr>
+        <p:txBody>
+          <a:bodyPr wrap="square" lIns="0" rIns="0" tIns="0" bIns="0">
+            <a:spAutoFit/>
+          </a:bodyPr>
+          <a:lstStyle/>
+          <a:p>
+            <a:pPr>
+              <a:lnSpc>
+                <a:spcPct val="100000"/>
+              </a:lnSpc>
+            </a:pPr>
+            <a:r>
+              <a:rPr sz="1100" b="1">
+                <a:solidFill>
+                  <a:srgbClr val="94A3B8"/>
+                </a:solidFill>
+                <a:latin typeface="Segoe UI"/>
+              </a:rPr>
+              <a:t>THE VERDICT</a:t>
+            </a:r>
+          </a:p>
+        </p:txBody>
+      </p:sp>
+      <p:sp>
+        <p:nvSpPr>
+          <p:cNvPr id="3" name="TextBox 2"/>
+          <p:cNvSpPr txBox="1"/>
+          <p:nvPr/>
+        </p:nvSpPr>
+        <p:spPr>
+          <a:xfrm>
+            <a:off x="777240" y="841248"/>
+            <a:ext cx="10607040" cy="640080"/>
+          </a:xfrm>
+          <a:prstGeom prst="rect">
+            <a:avLst/>
+          </a:prstGeom>
+          <a:noFill/>
+        </p:spPr>
+        <p:txBody>
+          <a:bodyPr wrap="square" lIns="0" rIns="0" tIns="0" bIns="0">
+            <a:spAutoFit/>
+          </a:bodyPr>
+          <a:lstStyle/>
+          <a:p>
+            <a:pPr>
+              <a:lnSpc>
+                <a:spcPct val="100000"/>
+              </a:lnSpc>
+            </a:pPr>
+            <a:r>
+              <a:rPr sz="3100" b="1">
+                <a:solidFill>
+                  <a:srgbClr val="0F172A"/>
+                </a:solidFill>
+                <a:latin typeface="Segoe UI"/>
+              </a:rPr>
+              <a:t>Two claims, and only one is proven</a:t>
+            </a:r>
+          </a:p>
+        </p:txBody>
+      </p:sp>
+      <p:sp>
+        <p:nvSpPr>
+          <p:cNvPr id="4" name="Rectangle 3"/>
+          <p:cNvSpPr/>
+          <p:nvPr/>
+        </p:nvSpPr>
+        <p:spPr>
+          <a:xfrm>
+            <a:off x="777240" y="1572768"/>
+            <a:ext cx="1005840" cy="41148"/>
+          </a:xfrm>
+          <a:prstGeom prst="rect">
+            <a:avLst/>
+          </a:prstGeom>
+          <a:solidFill>
+            <a:srgbClr val="ED7100"/>
+          </a:solidFill>
+          <a:ln>
+            <a:noFill/>
+          </a:ln>
+          <a:effectLst/>
+        </p:spPr>
+        <p:style>
+          <a:lnRef idx="1">
+            <a:schemeClr val="accent1"/>
+          </a:lnRef>
+          <a:fillRef idx="3">
+            <a:schemeClr val="accent1"/>
+          </a:fillRef>
+          <a:effectRef idx="2">
+            <a:schemeClr val="accent1"/>
+          </a:effectRef>
+          <a:fontRef idx="minor">
+            <a:schemeClr val="lt1"/>
+          </a:fontRef>
+        </p:style>
+        <p:txBody>
+          <a:bodyPr rtlCol="0" anchor="ctr"/>
+          <a:lstStyle/>
+          <a:p>
+            <a:pPr algn="ctr"/>
+          </a:p>
+        </p:txBody>
+      </p:sp>
+      <p:sp>
+        <p:nvSpPr>
+          <p:cNvPr id="5" name="TextBox 4"/>
+          <p:cNvSpPr txBox="1"/>
+          <p:nvPr/>
+        </p:nvSpPr>
+        <p:spPr>
+          <a:xfrm>
+            <a:off x="777240" y="1783080"/>
+            <a:ext cx="10515600" cy="2194560"/>
+          </a:xfrm>
+          <a:prstGeom prst="rect">
+            <a:avLst/>
+          </a:prstGeom>
+          <a:noFill/>
+        </p:spPr>
+        <p:txBody>
+          <a:bodyPr wrap="square" lIns="0" rIns="0" tIns="0" bIns="0">
+            <a:spAutoFit/>
+          </a:bodyPr>
+          <a:lstStyle/>
+          <a:p>
+            <a:pPr>
+              <a:lnSpc>
+                <a:spcPct val="115000"/>
+              </a:lnSpc>
+              <a:spcAft>
+                <a:spcPts val="1000"/>
+              </a:spcAft>
+            </a:pPr>
+            <a:r>
+              <a:rPr sz="1500" b="1">
+                <a:solidFill>
+                  <a:srgbClr val="0F172A"/>
+                </a:solidFill>
+                <a:latin typeface="Segoe UI"/>
+              </a:rPr>
+              <a:t>PROVEN — the mechanism works.</a:t>
+            </a:r>
+            <a:r>
+              <a:rPr sz="1500">
+                <a:solidFill>
+                  <a:srgbClr val="475569"/>
+                </a:solidFill>
+                <a:latin typeface="Segoe UI"/>
+              </a:rPr>
+              <a:t>  The system can tell "we have a tool for this" from "we do not", at 96.7% with 6.7% false positives, holding across two independently written question sets.</a:t>
+            </a:r>
+          </a:p>
+          <a:p>
+            <a:pPr>
+              <a:lnSpc>
+                <a:spcPct val="115000"/>
+              </a:lnSpc>
+              <a:spcAft>
+                <a:spcPts val="1000"/>
+              </a:spcAft>
+            </a:pPr>
+            <a:r>
+              <a:rPr sz="1500" b="1">
+                <a:solidFill>
+                  <a:srgbClr val="0F172A"/>
+                </a:solidFill>
+                <a:latin typeface="Segoe UI"/>
+              </a:rPr>
+              <a:t>NOT PROVEN — that anyone wants the missing tools.</a:t>
+            </a:r>
+            <a:r>
+              <a:rPr sz="1500">
+                <a:solidFill>
+                  <a:srgbClr val="475569"/>
+                </a:solidFill>
+                <a:latin typeface="Segoe UI"/>
+              </a:rPr>
+              <a:t>  The gap table holds 180 rows and every one came from the evaluation harness. Real usage is zero. Nobody but us has touched it.</a:t>
+            </a:r>
+          </a:p>
+        </p:txBody>
+      </p:sp>
+      <p:sp>
+        <p:nvSpPr>
+          <p:cNvPr id="6" name="Rounded Rectangle 5"/>
+          <p:cNvSpPr/>
+          <p:nvPr/>
+        </p:nvSpPr>
+        <p:spPr>
+          <a:xfrm>
+            <a:off x="777240" y="4069080"/>
+            <a:ext cx="10515600" cy="1371600"/>
+          </a:xfrm>
+          <a:prstGeom prst="roundRect">
+            <a:avLst/>
+          </a:prstGeom>
+          <a:solidFill>
+            <a:srgbClr val="FFF7ED"/>
+          </a:solidFill>
+          <a:ln w="15875">
+            <a:solidFill>
+              <a:srgbClr val="ED7100"/>
+            </a:solidFill>
+          </a:ln>
+          <a:effectLst/>
+        </p:spPr>
+        <p:style>
+          <a:lnRef idx="1">
+            <a:schemeClr val="accent1"/>
+          </a:lnRef>
+          <a:fillRef idx="3">
+            <a:schemeClr val="accent1"/>
+          </a:fillRef>
+          <a:effectRef idx="2">
+            <a:schemeClr val="accent1"/>
+          </a:effectRef>
+          <a:fontRef idx="minor">
+            <a:schemeClr val="lt1"/>
+          </a:fontRef>
+        </p:style>
+        <p:txBody>
+          <a:bodyPr rtlCol="0" anchor="ctr"/>
+          <a:lstStyle/>
+          <a:p/>
+        </p:txBody>
+      </p:sp>
+      <p:sp>
+        <p:nvSpPr>
+          <p:cNvPr id="7" name="TextBox 6"/>
+          <p:cNvSpPr txBox="1"/>
+          <p:nvPr/>
+        </p:nvSpPr>
+        <p:spPr>
+          <a:xfrm>
+            <a:off x="1051560" y="4251960"/>
+            <a:ext cx="9966960" cy="1097280"/>
+          </a:xfrm>
+          <a:prstGeom prst="rect">
+            <a:avLst/>
+          </a:prstGeom>
+          <a:noFill/>
+        </p:spPr>
+        <p:txBody>
+          <a:bodyPr wrap="square" lIns="0" rIns="0" tIns="0" bIns="0">
+            <a:spAutoFit/>
+          </a:bodyPr>
+          <a:lstStyle/>
+          <a:p>
+            <a:pPr>
+              <a:lnSpc>
+                <a:spcPct val="115000"/>
+              </a:lnSpc>
+            </a:pPr>
+            <a:r>
+              <a:rPr sz="1400" b="1">
+                <a:solidFill>
+                  <a:srgbClr val="7C2D12"/>
+                </a:solidFill>
+                <a:latin typeface="Segoe UI"/>
+              </a:rPr>
+              <a:t>Pointing at "find the original source of this quotation" as market demand would be circular — that question was invented to test the software. The cold-start problem PROJECT.md names as the largest risk is entirely untouched, and Phase 0 was never going to touch it.</a:t>
+            </a:r>
+          </a:p>
+        </p:txBody>
+      </p:sp>
+      <p:sp>
+        <p:nvSpPr>
+          <p:cNvPr id="8" name="TextBox 7"/>
+          <p:cNvSpPr txBox="1"/>
+          <p:nvPr/>
+        </p:nvSpPr>
+        <p:spPr>
+          <a:xfrm>
+            <a:off x="777240" y="5577840"/>
+            <a:ext cx="10515600" cy="548640"/>
+          </a:xfrm>
+          <a:prstGeom prst="rect">
+            <a:avLst/>
+          </a:prstGeom>
+          <a:noFill/>
+        </p:spPr>
+        <p:txBody>
+          <a:bodyPr wrap="square" lIns="0" rIns="0" tIns="0" bIns="0">
+            <a:spAutoFit/>
+          </a:bodyPr>
+          <a:lstStyle/>
+          <a:p>
+            <a:pPr>
+              <a:lnSpc>
+                <a:spcPct val="100000"/>
+              </a:lnSpc>
+            </a:pPr>
+            <a:r>
+              <a:rPr sz="1500" b="1">
+                <a:solidFill>
+                  <a:srgbClr val="0F172A"/>
+                </a:solidFill>
+                <a:latin typeface="Segoe UI"/>
+              </a:rPr>
+              <a:t>The loop works. The traffic does not exist yet. Those are separate problems, and only the first one was in scope.</a:t>
+            </a:r>
+          </a:p>
+        </p:txBody>
+      </p:sp>
     </p:spTree>
   </p:cSld>
   <p:clrMapOvr>
@@ -24851,6 +27625,653 @@
                 <a:latin typeface="Segoe UI"/>
               </a:rPr>
               <a:t>One canvas, three regions: the architecture, the schedule and the dependency graph. How to read and edit each.</a:t>
+            </a:r>
+          </a:p>
+        </p:txBody>
+      </p:sp>
+    </p:spTree>
+  </p:cSld>
+  <p:clrMapOvr>
+    <a:masterClrMapping/>
+  </p:clrMapOvr>
+</p:sld>
+</file>
+
+<file path=ppt/slides/slide50.xml><?xml version="1.0" encoding="utf-8"?>
+<p:sld xmlns:a="http://schemas.openxmlformats.org/drawingml/2006/main" xmlns:p="http://schemas.openxmlformats.org/presentationml/2006/main" xmlns:r="http://schemas.openxmlformats.org/officeDocument/2006/relationships">
+  <p:cSld>
+    <p:bg>
+      <p:bgPr>
+        <a:solidFill>
+          <a:srgbClr val="0F172A"/>
+        </a:solidFill>
+        <a:effectLst/>
+      </p:bgPr>
+    </p:bg>
+    <p:spTree>
+      <p:nvGrpSpPr>
+        <p:cNvPr id="1" name=""/>
+        <p:cNvGrpSpPr/>
+        <p:nvPr/>
+      </p:nvGrpSpPr>
+      <p:grpSpPr/>
+      <p:sp>
+        <p:nvSpPr>
+          <p:cNvPr id="2" name="Rectangle 1"/>
+          <p:cNvSpPr/>
+          <p:nvPr/>
+        </p:nvSpPr>
+        <p:spPr>
+          <a:xfrm>
+            <a:off x="0" y="0"/>
+            <a:ext cx="256032" cy="6858000"/>
+          </a:xfrm>
+          <a:prstGeom prst="rect">
+            <a:avLst/>
+          </a:prstGeom>
+          <a:solidFill>
+            <a:srgbClr val="ED7100"/>
+          </a:solidFill>
+          <a:ln>
+            <a:noFill/>
+          </a:ln>
+          <a:effectLst/>
+        </p:spPr>
+        <p:style>
+          <a:lnRef idx="1">
+            <a:schemeClr val="accent1"/>
+          </a:lnRef>
+          <a:fillRef idx="3">
+            <a:schemeClr val="accent1"/>
+          </a:fillRef>
+          <a:effectRef idx="2">
+            <a:schemeClr val="accent1"/>
+          </a:effectRef>
+          <a:fontRef idx="minor">
+            <a:schemeClr val="lt1"/>
+          </a:fontRef>
+        </p:style>
+        <p:txBody>
+          <a:bodyPr rtlCol="0" anchor="ctr"/>
+          <a:lstStyle/>
+          <a:p>
+            <a:pPr algn="ctr"/>
+          </a:p>
+        </p:txBody>
+      </p:sp>
+      <p:sp>
+        <p:nvSpPr>
+          <p:cNvPr id="3" name="TextBox 2"/>
+          <p:cNvSpPr txBox="1"/>
+          <p:nvPr/>
+        </p:nvSpPr>
+        <p:spPr>
+          <a:xfrm>
+            <a:off x="1005840" y="1280160"/>
+            <a:ext cx="10058400" cy="320040"/>
+          </a:xfrm>
+          <a:prstGeom prst="rect">
+            <a:avLst/>
+          </a:prstGeom>
+          <a:noFill/>
+        </p:spPr>
+        <p:txBody>
+          <a:bodyPr wrap="square" lIns="0" rIns="0" tIns="0" bIns="0">
+            <a:spAutoFit/>
+          </a:bodyPr>
+          <a:lstStyle/>
+          <a:p>
+            <a:pPr algn="l">
+              <a:lnSpc>
+                <a:spcPct val="100000"/>
+              </a:lnSpc>
+            </a:pPr>
+            <a:r>
+              <a:rPr sz="1300" b="1">
+                <a:solidFill>
+                  <a:srgbClr val="ED7100"/>
+                </a:solidFill>
+                <a:latin typeface="Segoe UI"/>
+              </a:rPr>
+              <a:t>NEXT</a:t>
+            </a:r>
+          </a:p>
+        </p:txBody>
+      </p:sp>
+      <p:sp>
+        <p:nvSpPr>
+          <p:cNvPr id="4" name="TextBox 3"/>
+          <p:cNvSpPr txBox="1"/>
+          <p:nvPr/>
+        </p:nvSpPr>
+        <p:spPr>
+          <a:xfrm>
+            <a:off x="1005840" y="1691640"/>
+            <a:ext cx="10241280" cy="731520"/>
+          </a:xfrm>
+          <a:prstGeom prst="rect">
+            <a:avLst/>
+          </a:prstGeom>
+          <a:noFill/>
+        </p:spPr>
+        <p:txBody>
+          <a:bodyPr wrap="square" lIns="0" rIns="0" tIns="0" bIns="0">
+            <a:spAutoFit/>
+          </a:bodyPr>
+          <a:lstStyle/>
+          <a:p>
+            <a:pPr algn="l">
+              <a:lnSpc>
+                <a:spcPct val="100000"/>
+              </a:lnSpc>
+            </a:pPr>
+            <a:r>
+              <a:rPr sz="3800" b="1">
+                <a:solidFill>
+                  <a:srgbClr val="FFFFFF"/>
+                </a:solidFill>
+                <a:latin typeface="Segoe UI"/>
+              </a:rPr>
+              <a:t>Where this goes from here</a:t>
+            </a:r>
+          </a:p>
+        </p:txBody>
+      </p:sp>
+      <p:sp>
+        <p:nvSpPr>
+          <p:cNvPr id="5" name="Oval 4"/>
+          <p:cNvSpPr/>
+          <p:nvPr/>
+        </p:nvSpPr>
+        <p:spPr>
+          <a:xfrm>
+            <a:off x="1005840" y="2852928"/>
+            <a:ext cx="329184" cy="329184"/>
+          </a:xfrm>
+          <a:prstGeom prst="ellipse">
+            <a:avLst/>
+          </a:prstGeom>
+          <a:solidFill>
+            <a:srgbClr val="ED7100"/>
+          </a:solidFill>
+          <a:ln>
+            <a:noFill/>
+          </a:ln>
+          <a:effectLst/>
+        </p:spPr>
+        <p:style>
+          <a:lnRef idx="1">
+            <a:schemeClr val="accent1"/>
+          </a:lnRef>
+          <a:fillRef idx="3">
+            <a:schemeClr val="accent1"/>
+          </a:fillRef>
+          <a:effectRef idx="2">
+            <a:schemeClr val="accent1"/>
+          </a:effectRef>
+          <a:fontRef idx="minor">
+            <a:schemeClr val="lt1"/>
+          </a:fontRef>
+        </p:style>
+        <p:txBody>
+          <a:bodyPr rtlCol="0" anchor="ctr"/>
+          <a:lstStyle/>
+          <a:p>
+            <a:pPr algn="ctr"/>
+            <a:r>
+              <a:rPr sz="1200" b="1">
+                <a:solidFill>
+                  <a:srgbClr val="FFFFFF"/>
+                </a:solidFill>
+                <a:latin typeface="Segoe UI"/>
+              </a:rPr>
+              <a:t>1</a:t>
+            </a:r>
+          </a:p>
+        </p:txBody>
+      </p:sp>
+      <p:sp>
+        <p:nvSpPr>
+          <p:cNvPr id="6" name="TextBox 5"/>
+          <p:cNvSpPr txBox="1"/>
+          <p:nvPr/>
+        </p:nvSpPr>
+        <p:spPr>
+          <a:xfrm>
+            <a:off x="1536192" y="2898648"/>
+            <a:ext cx="9509760" cy="365760"/>
+          </a:xfrm>
+          <a:prstGeom prst="rect">
+            <a:avLst/>
+          </a:prstGeom>
+          <a:noFill/>
+        </p:spPr>
+        <p:txBody>
+          <a:bodyPr wrap="square" lIns="0" rIns="0" tIns="0" bIns="0">
+            <a:spAutoFit/>
+          </a:bodyPr>
+          <a:lstStyle/>
+          <a:p>
+            <a:pPr algn="l">
+              <a:lnSpc>
+                <a:spcPct val="100000"/>
+              </a:lnSpc>
+            </a:pPr>
+            <a:r>
+              <a:rPr sz="1600" b="0">
+                <a:solidFill>
+                  <a:srgbClr val="FFFFFF"/>
+                </a:solidFill>
+                <a:latin typeface="Segoe UI"/>
+              </a:rPr>
+              <a:t>Confirm or overrule the nine assumptions</a:t>
+            </a:r>
+          </a:p>
+        </p:txBody>
+      </p:sp>
+      <p:sp>
+        <p:nvSpPr>
+          <p:cNvPr id="7" name="Oval 6"/>
+          <p:cNvSpPr/>
+          <p:nvPr/>
+        </p:nvSpPr>
+        <p:spPr>
+          <a:xfrm>
+            <a:off x="1005840" y="3419856"/>
+            <a:ext cx="329184" cy="329184"/>
+          </a:xfrm>
+          <a:prstGeom prst="ellipse">
+            <a:avLst/>
+          </a:prstGeom>
+          <a:solidFill>
+            <a:srgbClr val="ED7100"/>
+          </a:solidFill>
+          <a:ln>
+            <a:noFill/>
+          </a:ln>
+          <a:effectLst/>
+        </p:spPr>
+        <p:style>
+          <a:lnRef idx="1">
+            <a:schemeClr val="accent1"/>
+          </a:lnRef>
+          <a:fillRef idx="3">
+            <a:schemeClr val="accent1"/>
+          </a:fillRef>
+          <a:effectRef idx="2">
+            <a:schemeClr val="accent1"/>
+          </a:effectRef>
+          <a:fontRef idx="minor">
+            <a:schemeClr val="lt1"/>
+          </a:fontRef>
+        </p:style>
+        <p:txBody>
+          <a:bodyPr rtlCol="0" anchor="ctr"/>
+          <a:lstStyle/>
+          <a:p>
+            <a:pPr algn="ctr"/>
+            <a:r>
+              <a:rPr sz="1200" b="1">
+                <a:solidFill>
+                  <a:srgbClr val="FFFFFF"/>
+                </a:solidFill>
+                <a:latin typeface="Segoe UI"/>
+              </a:rPr>
+              <a:t>2</a:t>
+            </a:r>
+          </a:p>
+        </p:txBody>
+      </p:sp>
+      <p:sp>
+        <p:nvSpPr>
+          <p:cNvPr id="8" name="TextBox 7"/>
+          <p:cNvSpPr txBox="1"/>
+          <p:nvPr/>
+        </p:nvSpPr>
+        <p:spPr>
+          <a:xfrm>
+            <a:off x="1536192" y="3465576"/>
+            <a:ext cx="9509760" cy="365760"/>
+          </a:xfrm>
+          <a:prstGeom prst="rect">
+            <a:avLst/>
+          </a:prstGeom>
+          <a:noFill/>
+        </p:spPr>
+        <p:txBody>
+          <a:bodyPr wrap="square" lIns="0" rIns="0" tIns="0" bIns="0">
+            <a:spAutoFit/>
+          </a:bodyPr>
+          <a:lstStyle/>
+          <a:p>
+            <a:pPr algn="l">
+              <a:lnSpc>
+                <a:spcPct val="100000"/>
+              </a:lnSpc>
+            </a:pPr>
+            <a:r>
+              <a:rPr sz="1600" b="0">
+                <a:solidFill>
+                  <a:srgbClr val="FFFFFF"/>
+                </a:solidFill>
+                <a:latin typeface="Segoe UI"/>
+              </a:rPr>
+              <a:t>Confirm the account type, and check the credit expiry in billing</a:t>
+            </a:r>
+          </a:p>
+        </p:txBody>
+      </p:sp>
+      <p:sp>
+        <p:nvSpPr>
+          <p:cNvPr id="9" name="Oval 8"/>
+          <p:cNvSpPr/>
+          <p:nvPr/>
+        </p:nvSpPr>
+        <p:spPr>
+          <a:xfrm>
+            <a:off x="1005840" y="3986783"/>
+            <a:ext cx="329184" cy="329184"/>
+          </a:xfrm>
+          <a:prstGeom prst="ellipse">
+            <a:avLst/>
+          </a:prstGeom>
+          <a:solidFill>
+            <a:srgbClr val="ED7100"/>
+          </a:solidFill>
+          <a:ln>
+            <a:noFill/>
+          </a:ln>
+          <a:effectLst/>
+        </p:spPr>
+        <p:style>
+          <a:lnRef idx="1">
+            <a:schemeClr val="accent1"/>
+          </a:lnRef>
+          <a:fillRef idx="3">
+            <a:schemeClr val="accent1"/>
+          </a:fillRef>
+          <a:effectRef idx="2">
+            <a:schemeClr val="accent1"/>
+          </a:effectRef>
+          <a:fontRef idx="minor">
+            <a:schemeClr val="lt1"/>
+          </a:fontRef>
+        </p:style>
+        <p:txBody>
+          <a:bodyPr rtlCol="0" anchor="ctr"/>
+          <a:lstStyle/>
+          <a:p>
+            <a:pPr algn="ctr"/>
+            <a:r>
+              <a:rPr sz="1200" b="1">
+                <a:solidFill>
+                  <a:srgbClr val="FFFFFF"/>
+                </a:solidFill>
+                <a:latin typeface="Segoe UI"/>
+              </a:rPr>
+              <a:t>3</a:t>
+            </a:r>
+          </a:p>
+        </p:txBody>
+      </p:sp>
+      <p:sp>
+        <p:nvSpPr>
+          <p:cNvPr id="10" name="TextBox 9"/>
+          <p:cNvSpPr txBox="1"/>
+          <p:nvPr/>
+        </p:nvSpPr>
+        <p:spPr>
+          <a:xfrm>
+            <a:off x="1536192" y="4032503"/>
+            <a:ext cx="9509760" cy="365760"/>
+          </a:xfrm>
+          <a:prstGeom prst="rect">
+            <a:avLst/>
+          </a:prstGeom>
+          <a:noFill/>
+        </p:spPr>
+        <p:txBody>
+          <a:bodyPr wrap="square" lIns="0" rIns="0" tIns="0" bIns="0">
+            <a:spAutoFit/>
+          </a:bodyPr>
+          <a:lstStyle/>
+          <a:p>
+            <a:pPr algn="l">
+              <a:lnSpc>
+                <a:spcPct val="100000"/>
+              </a:lnSpc>
+            </a:pPr>
+            <a:r>
+              <a:rPr sz="1600" b="0">
+                <a:solidFill>
+                  <a:srgbClr val="FFFFFF"/>
+                </a:solidFill>
+                <a:latin typeface="Segoe UI"/>
+              </a:rPr>
+              <a:t>Pick the region and enable Bedrock Titan V2 model access there</a:t>
+            </a:r>
+          </a:p>
+        </p:txBody>
+      </p:sp>
+      <p:sp>
+        <p:nvSpPr>
+          <p:cNvPr id="11" name="Oval 10"/>
+          <p:cNvSpPr/>
+          <p:nvPr/>
+        </p:nvSpPr>
+        <p:spPr>
+          <a:xfrm>
+            <a:off x="1005840" y="4553712"/>
+            <a:ext cx="329184" cy="329184"/>
+          </a:xfrm>
+          <a:prstGeom prst="ellipse">
+            <a:avLst/>
+          </a:prstGeom>
+          <a:solidFill>
+            <a:srgbClr val="ED7100"/>
+          </a:solidFill>
+          <a:ln>
+            <a:noFill/>
+          </a:ln>
+          <a:effectLst/>
+        </p:spPr>
+        <p:style>
+          <a:lnRef idx="1">
+            <a:schemeClr val="accent1"/>
+          </a:lnRef>
+          <a:fillRef idx="3">
+            <a:schemeClr val="accent1"/>
+          </a:fillRef>
+          <a:effectRef idx="2">
+            <a:schemeClr val="accent1"/>
+          </a:effectRef>
+          <a:fontRef idx="minor">
+            <a:schemeClr val="lt1"/>
+          </a:fontRef>
+        </p:style>
+        <p:txBody>
+          <a:bodyPr rtlCol="0" anchor="ctr"/>
+          <a:lstStyle/>
+          <a:p>
+            <a:pPr algn="ctr"/>
+            <a:r>
+              <a:rPr sz="1200" b="1">
+                <a:solidFill>
+                  <a:srgbClr val="FFFFFF"/>
+                </a:solidFill>
+                <a:latin typeface="Segoe UI"/>
+              </a:rPr>
+              <a:t>4</a:t>
+            </a:r>
+          </a:p>
+        </p:txBody>
+      </p:sp>
+      <p:sp>
+        <p:nvSpPr>
+          <p:cNvPr id="12" name="TextBox 11"/>
+          <p:cNvSpPr txBox="1"/>
+          <p:nvPr/>
+        </p:nvSpPr>
+        <p:spPr>
+          <a:xfrm>
+            <a:off x="1536192" y="4599431"/>
+            <a:ext cx="9509760" cy="365760"/>
+          </a:xfrm>
+          <a:prstGeom prst="rect">
+            <a:avLst/>
+          </a:prstGeom>
+          <a:noFill/>
+        </p:spPr>
+        <p:txBody>
+          <a:bodyPr wrap="square" lIns="0" rIns="0" tIns="0" bIns="0">
+            <a:spAutoFit/>
+          </a:bodyPr>
+          <a:lstStyle/>
+          <a:p>
+            <a:pPr algn="l">
+              <a:lnSpc>
+                <a:spcPct val="100000"/>
+              </a:lnSpc>
+            </a:pPr>
+            <a:r>
+              <a:rPr sz="1600" b="0">
+                <a:solidFill>
+                  <a:srgbClr val="FFFFFF"/>
+                </a:solidFill>
+                <a:latin typeface="Segoe UI"/>
+              </a:rPr>
+              <a:t>Write the eval queries blind, before seeding anything</a:t>
+            </a:r>
+          </a:p>
+        </p:txBody>
+      </p:sp>
+      <p:sp>
+        <p:nvSpPr>
+          <p:cNvPr id="13" name="Oval 12"/>
+          <p:cNvSpPr/>
+          <p:nvPr/>
+        </p:nvSpPr>
+        <p:spPr>
+          <a:xfrm>
+            <a:off x="1005840" y="5120640"/>
+            <a:ext cx="329184" cy="329184"/>
+          </a:xfrm>
+          <a:prstGeom prst="ellipse">
+            <a:avLst/>
+          </a:prstGeom>
+          <a:solidFill>
+            <a:srgbClr val="ED7100"/>
+          </a:solidFill>
+          <a:ln>
+            <a:noFill/>
+          </a:ln>
+          <a:effectLst/>
+        </p:spPr>
+        <p:style>
+          <a:lnRef idx="1">
+            <a:schemeClr val="accent1"/>
+          </a:lnRef>
+          <a:fillRef idx="3">
+            <a:schemeClr val="accent1"/>
+          </a:fillRef>
+          <a:effectRef idx="2">
+            <a:schemeClr val="accent1"/>
+          </a:effectRef>
+          <a:fontRef idx="minor">
+            <a:schemeClr val="lt1"/>
+          </a:fontRef>
+        </p:style>
+        <p:txBody>
+          <a:bodyPr rtlCol="0" anchor="ctr"/>
+          <a:lstStyle/>
+          <a:p>
+            <a:pPr algn="ctr"/>
+            <a:r>
+              <a:rPr sz="1200" b="1">
+                <a:solidFill>
+                  <a:srgbClr val="FFFFFF"/>
+                </a:solidFill>
+                <a:latin typeface="Segoe UI"/>
+              </a:rPr>
+              <a:t>5</a:t>
+            </a:r>
+          </a:p>
+        </p:txBody>
+      </p:sp>
+      <p:sp>
+        <p:nvSpPr>
+          <p:cNvPr id="14" name="TextBox 13"/>
+          <p:cNvSpPr txBox="1"/>
+          <p:nvPr/>
+        </p:nvSpPr>
+        <p:spPr>
+          <a:xfrm>
+            <a:off x="1536192" y="5166359"/>
+            <a:ext cx="9509760" cy="365760"/>
+          </a:xfrm>
+          <a:prstGeom prst="rect">
+            <a:avLst/>
+          </a:prstGeom>
+          <a:noFill/>
+        </p:spPr>
+        <p:txBody>
+          <a:bodyPr wrap="square" lIns="0" rIns="0" tIns="0" bIns="0">
+            <a:spAutoFit/>
+          </a:bodyPr>
+          <a:lstStyle/>
+          <a:p>
+            <a:pPr algn="l">
+              <a:lnSpc>
+                <a:spcPct val="100000"/>
+              </a:lnSpc>
+            </a:pPr>
+            <a:r>
+              <a:rPr sz="1600" b="0">
+                <a:solidFill>
+                  <a:srgbClr val="FFFFFF"/>
+                </a:solidFill>
+                <a:latin typeface="Segoe UI"/>
+              </a:rPr>
+              <a:t>Create issues #1-#14, then start #1 and #3 in parallel</a:t>
+            </a:r>
+          </a:p>
+        </p:txBody>
+      </p:sp>
+      <p:sp>
+        <p:nvSpPr>
+          <p:cNvPr id="15" name="TextBox 14"/>
+          <p:cNvSpPr txBox="1"/>
+          <p:nvPr/>
+        </p:nvSpPr>
+        <p:spPr>
+          <a:xfrm>
+            <a:off x="1005840" y="5943600"/>
+            <a:ext cx="10515600" cy="274320"/>
+          </a:xfrm>
+          <a:prstGeom prst="rect">
+            <a:avLst/>
+          </a:prstGeom>
+          <a:noFill/>
+        </p:spPr>
+        <p:txBody>
+          <a:bodyPr wrap="square" lIns="0" rIns="0" tIns="0" bIns="0">
+            <a:spAutoFit/>
+          </a:bodyPr>
+          <a:lstStyle/>
+          <a:p>
+            <a:pPr algn="l">
+              <a:lnSpc>
+                <a:spcPct val="100000"/>
+              </a:lnSpc>
+            </a:pPr>
+            <a:r>
+              <a:rPr sz="1100" b="0">
+                <a:solidFill>
+                  <a:srgbClr val="64748B"/>
+                </a:solidFill>
+                <a:latin typeface="Segoe UI"/>
+              </a:rPr>
+              <a:t>Plan: docs/plans/phase-0-plan.md   ·   Board: miro.com/app/board/uXjVHpGFCos=</a:t>
             </a:r>
           </a:p>
         </p:txBody>
